--- a/docs/documentation/iics-cli-presentation.pptx
+++ b/docs/documentation/iics-cli-presentation.pptx
@@ -5,24 +5,23 @@
     <p:sldMasterId id="2147483648" r:id="rId1"/>
   </p:sldMasterIdLst>
   <p:sldIdLst>
-    <p:sldId id="256" r:id="rId7"/>
-    <p:sldId id="257" r:id="rId8"/>
-    <p:sldId id="258" r:id="rId9"/>
-    <p:sldId id="259" r:id="rId10"/>
-    <p:sldId id="260" r:id="rId11"/>
-    <p:sldId id="261" r:id="rId12"/>
-    <p:sldId id="262" r:id="rId13"/>
-    <p:sldId id="263" r:id="rId14"/>
-    <p:sldId id="264" r:id="rId15"/>
-    <p:sldId id="265" r:id="rId16"/>
-    <p:sldId id="266" r:id="rId17"/>
-    <p:sldId id="267" r:id="rId18"/>
-    <p:sldId id="268" r:id="rId19"/>
-    <p:sldId id="269" r:id="rId20"/>
-    <p:sldId id="270" r:id="rId21"/>
-    <p:sldId id="271" r:id="rId22"/>
+    <p:sldId id="256" r:id="rId2"/>
+    <p:sldId id="257" r:id="rId3"/>
+    <p:sldId id="258" r:id="rId4"/>
+    <p:sldId id="259" r:id="rId5"/>
+    <p:sldId id="260" r:id="rId6"/>
+    <p:sldId id="261" r:id="rId7"/>
+    <p:sldId id="262" r:id="rId8"/>
+    <p:sldId id="263" r:id="rId9"/>
+    <p:sldId id="264" r:id="rId10"/>
+    <p:sldId id="265" r:id="rId11"/>
+    <p:sldId id="267" r:id="rId12"/>
+    <p:sldId id="268" r:id="rId13"/>
+    <p:sldId id="269" r:id="rId14"/>
+    <p:sldId id="270" r:id="rId15"/>
+    <p:sldId id="271" r:id="rId16"/>
   </p:sldIdLst>
-  <p:sldSz cx="12188952" cy="6858000" type="screen4x3"/>
+  <p:sldSz cx="12188825" cy="6858000"/>
   <p:notesSz cx="6858000" cy="9144000"/>
   <p:defaultTextStyle>
     <a:defPPr>
@@ -119,6 +118,22 @@
       </a:defRPr>
     </a:lvl9pPr>
   </p:defaultTextStyle>
+  <p:extLst>
+    <p:ext uri="{EFAFB233-063F-42B5-8137-9DF3F51BA10A}">
+      <p15:sldGuideLst xmlns:p15="http://schemas.microsoft.com/office/powerpoint/2012/main">
+        <p15:guide id="1" orient="horz" pos="2160">
+          <p15:clr>
+            <a:srgbClr val="A4A3A4"/>
+          </p15:clr>
+        </p15:guide>
+        <p15:guide id="2" pos="2880">
+          <p15:clr>
+            <a:srgbClr val="A4A3A4"/>
+          </p15:clr>
+        </p15:guide>
+      </p15:sldGuideLst>
+    </p:ext>
+  </p:extLst>
 </p:presentation>
 </file>
 
@@ -160,10 +175,9 @@
           <a:lstStyle/>
           <a:p>
             <a:r>
-              <a:rPr lang="en-US" smtClean="0"/>
+              <a:rPr lang="en-US"/>
               <a:t>Click to edit Master title style</a:t>
             </a:r>
-            <a:endParaRPr lang="en-US"/>
           </a:p>
         </p:txBody>
       </p:sp>
@@ -279,10 +293,9 @@
           </a:lstStyle>
           <a:p>
             <a:r>
-              <a:rPr lang="en-US" smtClean="0"/>
+              <a:rPr lang="en-US"/>
               <a:t>Click to edit Master subtitle style</a:t>
             </a:r>
-            <a:endParaRPr lang="en-US"/>
           </a:p>
         </p:txBody>
       </p:sp>
@@ -303,7 +316,7 @@
           <a:p>
             <a:fld id="{5BCAD085-E8A6-8845-BD4E-CB4CCA059FC4}" type="datetimeFigureOut">
               <a:rPr lang="en-US" smtClean="0"/>
-              <a:t>1/27/13</a:t>
+              <a:t>3/11/2026</a:t>
             </a:fld>
             <a:endParaRPr lang="en-US"/>
           </a:p>
@@ -397,10 +410,9 @@
           <a:lstStyle/>
           <a:p>
             <a:r>
-              <a:rPr lang="en-US" smtClean="0"/>
+              <a:rPr lang="en-US"/>
               <a:t>Click to edit Master title style</a:t>
             </a:r>
-            <a:endParaRPr lang="en-US"/>
           </a:p>
         </p:txBody>
       </p:sp>
@@ -421,38 +433,37 @@
           <a:p>
             <a:pPr lvl="0"/>
             <a:r>
-              <a:rPr lang="en-US" smtClean="0"/>
+              <a:rPr lang="en-US"/>
               <a:t>Click to edit Master text styles</a:t>
             </a:r>
           </a:p>
           <a:p>
             <a:pPr lvl="1"/>
             <a:r>
-              <a:rPr lang="en-US" smtClean="0"/>
+              <a:rPr lang="en-US"/>
               <a:t>Second level</a:t>
             </a:r>
           </a:p>
           <a:p>
             <a:pPr lvl="2"/>
             <a:r>
-              <a:rPr lang="en-US" smtClean="0"/>
+              <a:rPr lang="en-US"/>
               <a:t>Third level</a:t>
             </a:r>
           </a:p>
           <a:p>
             <a:pPr lvl="3"/>
             <a:r>
-              <a:rPr lang="en-US" smtClean="0"/>
+              <a:rPr lang="en-US"/>
               <a:t>Fourth level</a:t>
             </a:r>
           </a:p>
           <a:p>
             <a:pPr lvl="4"/>
             <a:r>
-              <a:rPr lang="en-US" smtClean="0"/>
+              <a:rPr lang="en-US"/>
               <a:t>Fifth level</a:t>
             </a:r>
-            <a:endParaRPr lang="en-US"/>
           </a:p>
         </p:txBody>
       </p:sp>
@@ -473,7 +484,7 @@
           <a:p>
             <a:fld id="{5BCAD085-E8A6-8845-BD4E-CB4CCA059FC4}" type="datetimeFigureOut">
               <a:rPr lang="en-US" smtClean="0"/>
-              <a:t>1/27/13</a:t>
+              <a:t>3/11/2026</a:t>
             </a:fld>
             <a:endParaRPr lang="en-US"/>
           </a:p>
@@ -572,10 +583,9 @@
           <a:lstStyle/>
           <a:p>
             <a:r>
-              <a:rPr lang="en-US" smtClean="0"/>
+              <a:rPr lang="en-US"/>
               <a:t>Click to edit Master title style</a:t>
             </a:r>
-            <a:endParaRPr lang="en-US"/>
           </a:p>
         </p:txBody>
       </p:sp>
@@ -601,38 +611,37 @@
           <a:p>
             <a:pPr lvl="0"/>
             <a:r>
-              <a:rPr lang="en-US" smtClean="0"/>
+              <a:rPr lang="en-US"/>
               <a:t>Click to edit Master text styles</a:t>
             </a:r>
           </a:p>
           <a:p>
             <a:pPr lvl="1"/>
             <a:r>
-              <a:rPr lang="en-US" smtClean="0"/>
+              <a:rPr lang="en-US"/>
               <a:t>Second level</a:t>
             </a:r>
           </a:p>
           <a:p>
             <a:pPr lvl="2"/>
             <a:r>
-              <a:rPr lang="en-US" smtClean="0"/>
+              <a:rPr lang="en-US"/>
               <a:t>Third level</a:t>
             </a:r>
           </a:p>
           <a:p>
             <a:pPr lvl="3"/>
             <a:r>
-              <a:rPr lang="en-US" smtClean="0"/>
+              <a:rPr lang="en-US"/>
               <a:t>Fourth level</a:t>
             </a:r>
           </a:p>
           <a:p>
             <a:pPr lvl="4"/>
             <a:r>
-              <a:rPr lang="en-US" smtClean="0"/>
+              <a:rPr lang="en-US"/>
               <a:t>Fifth level</a:t>
             </a:r>
-            <a:endParaRPr lang="en-US"/>
           </a:p>
         </p:txBody>
       </p:sp>
@@ -653,7 +662,7 @@
           <a:p>
             <a:fld id="{5BCAD085-E8A6-8845-BD4E-CB4CCA059FC4}" type="datetimeFigureOut">
               <a:rPr lang="en-US" smtClean="0"/>
-              <a:t>1/27/13</a:t>
+              <a:t>3/11/2026</a:t>
             </a:fld>
             <a:endParaRPr lang="en-US"/>
           </a:p>
@@ -747,10 +756,9 @@
           <a:lstStyle/>
           <a:p>
             <a:r>
-              <a:rPr lang="en-US" smtClean="0"/>
+              <a:rPr lang="en-US"/>
               <a:t>Click to edit Master title style</a:t>
             </a:r>
-            <a:endParaRPr lang="en-US"/>
           </a:p>
         </p:txBody>
       </p:sp>
@@ -771,38 +779,37 @@
           <a:p>
             <a:pPr lvl="0"/>
             <a:r>
-              <a:rPr lang="en-US" smtClean="0"/>
+              <a:rPr lang="en-US"/>
               <a:t>Click to edit Master text styles</a:t>
             </a:r>
           </a:p>
           <a:p>
             <a:pPr lvl="1"/>
             <a:r>
-              <a:rPr lang="en-US" smtClean="0"/>
+              <a:rPr lang="en-US"/>
               <a:t>Second level</a:t>
             </a:r>
           </a:p>
           <a:p>
             <a:pPr lvl="2"/>
             <a:r>
-              <a:rPr lang="en-US" smtClean="0"/>
+              <a:rPr lang="en-US"/>
               <a:t>Third level</a:t>
             </a:r>
           </a:p>
           <a:p>
             <a:pPr lvl="3"/>
             <a:r>
-              <a:rPr lang="en-US" smtClean="0"/>
+              <a:rPr lang="en-US"/>
               <a:t>Fourth level</a:t>
             </a:r>
           </a:p>
           <a:p>
             <a:pPr lvl="4"/>
             <a:r>
-              <a:rPr lang="en-US" smtClean="0"/>
+              <a:rPr lang="en-US"/>
               <a:t>Fifth level</a:t>
             </a:r>
-            <a:endParaRPr lang="en-US"/>
           </a:p>
         </p:txBody>
       </p:sp>
@@ -823,7 +830,7 @@
           <a:p>
             <a:fld id="{5BCAD085-E8A6-8845-BD4E-CB4CCA059FC4}" type="datetimeFigureOut">
               <a:rPr lang="en-US" smtClean="0"/>
-              <a:t>1/27/13</a:t>
+              <a:t>3/11/2026</a:t>
             </a:fld>
             <a:endParaRPr lang="en-US"/>
           </a:p>
@@ -926,10 +933,9 @@
           </a:lstStyle>
           <a:p>
             <a:r>
-              <a:rPr lang="en-US" smtClean="0"/>
+              <a:rPr lang="en-US"/>
               <a:t>Click to edit Master title style</a:t>
             </a:r>
-            <a:endParaRPr lang="en-US"/>
           </a:p>
         </p:txBody>
       </p:sp>
@@ -1046,7 +1052,7 @@
           <a:p>
             <a:pPr lvl="0"/>
             <a:r>
-              <a:rPr lang="en-US" smtClean="0"/>
+              <a:rPr lang="en-US"/>
               <a:t>Click to edit Master text styles</a:t>
             </a:r>
           </a:p>
@@ -1069,7 +1075,7 @@
           <a:p>
             <a:fld id="{5BCAD085-E8A6-8845-BD4E-CB4CCA059FC4}" type="datetimeFigureOut">
               <a:rPr lang="en-US" smtClean="0"/>
-              <a:t>1/27/13</a:t>
+              <a:t>3/11/2026</a:t>
             </a:fld>
             <a:endParaRPr lang="en-US"/>
           </a:p>
@@ -1163,10 +1169,9 @@
           <a:lstStyle/>
           <a:p>
             <a:r>
-              <a:rPr lang="en-US" smtClean="0"/>
+              <a:rPr lang="en-US"/>
               <a:t>Click to edit Master title style</a:t>
             </a:r>
-            <a:endParaRPr lang="en-US"/>
           </a:p>
         </p:txBody>
       </p:sp>
@@ -1220,38 +1225,37 @@
           <a:p>
             <a:pPr lvl="0"/>
             <a:r>
-              <a:rPr lang="en-US" smtClean="0"/>
+              <a:rPr lang="en-US"/>
               <a:t>Click to edit Master text styles</a:t>
             </a:r>
           </a:p>
           <a:p>
             <a:pPr lvl="1"/>
             <a:r>
-              <a:rPr lang="en-US" smtClean="0"/>
+              <a:rPr lang="en-US"/>
               <a:t>Second level</a:t>
             </a:r>
           </a:p>
           <a:p>
             <a:pPr lvl="2"/>
             <a:r>
-              <a:rPr lang="en-US" smtClean="0"/>
+              <a:rPr lang="en-US"/>
               <a:t>Third level</a:t>
             </a:r>
           </a:p>
           <a:p>
             <a:pPr lvl="3"/>
             <a:r>
-              <a:rPr lang="en-US" smtClean="0"/>
+              <a:rPr lang="en-US"/>
               <a:t>Fourth level</a:t>
             </a:r>
           </a:p>
           <a:p>
             <a:pPr lvl="4"/>
             <a:r>
-              <a:rPr lang="en-US" smtClean="0"/>
+              <a:rPr lang="en-US"/>
               <a:t>Fifth level</a:t>
             </a:r>
-            <a:endParaRPr lang="en-US"/>
           </a:p>
         </p:txBody>
       </p:sp>
@@ -1305,38 +1309,37 @@
           <a:p>
             <a:pPr lvl="0"/>
             <a:r>
-              <a:rPr lang="en-US" smtClean="0"/>
+              <a:rPr lang="en-US"/>
               <a:t>Click to edit Master text styles</a:t>
             </a:r>
           </a:p>
           <a:p>
             <a:pPr lvl="1"/>
             <a:r>
-              <a:rPr lang="en-US" smtClean="0"/>
+              <a:rPr lang="en-US"/>
               <a:t>Second level</a:t>
             </a:r>
           </a:p>
           <a:p>
             <a:pPr lvl="2"/>
             <a:r>
-              <a:rPr lang="en-US" smtClean="0"/>
+              <a:rPr lang="en-US"/>
               <a:t>Third level</a:t>
             </a:r>
           </a:p>
           <a:p>
             <a:pPr lvl="3"/>
             <a:r>
-              <a:rPr lang="en-US" smtClean="0"/>
+              <a:rPr lang="en-US"/>
               <a:t>Fourth level</a:t>
             </a:r>
           </a:p>
           <a:p>
             <a:pPr lvl="4"/>
             <a:r>
-              <a:rPr lang="en-US" smtClean="0"/>
+              <a:rPr lang="en-US"/>
               <a:t>Fifth level</a:t>
             </a:r>
-            <a:endParaRPr lang="en-US"/>
           </a:p>
         </p:txBody>
       </p:sp>
@@ -1357,7 +1360,7 @@
           <a:p>
             <a:fld id="{5BCAD085-E8A6-8845-BD4E-CB4CCA059FC4}" type="datetimeFigureOut">
               <a:rPr lang="en-US" smtClean="0"/>
-              <a:t>1/27/13</a:t>
+              <a:t>3/11/2026</a:t>
             </a:fld>
             <a:endParaRPr lang="en-US"/>
           </a:p>
@@ -1455,10 +1458,9 @@
           </a:lstStyle>
           <a:p>
             <a:r>
-              <a:rPr lang="en-US" smtClean="0"/>
+              <a:rPr lang="en-US"/>
               <a:t>Click to edit Master title style</a:t>
             </a:r>
-            <a:endParaRPr lang="en-US"/>
           </a:p>
         </p:txBody>
       </p:sp>
@@ -1521,7 +1523,7 @@
           <a:p>
             <a:pPr lvl="0"/>
             <a:r>
-              <a:rPr lang="en-US" smtClean="0"/>
+              <a:rPr lang="en-US"/>
               <a:t>Click to edit Master text styles</a:t>
             </a:r>
           </a:p>
@@ -1577,38 +1579,37 @@
           <a:p>
             <a:pPr lvl="0"/>
             <a:r>
-              <a:rPr lang="en-US" smtClean="0"/>
+              <a:rPr lang="en-US"/>
               <a:t>Click to edit Master text styles</a:t>
             </a:r>
           </a:p>
           <a:p>
             <a:pPr lvl="1"/>
             <a:r>
-              <a:rPr lang="en-US" smtClean="0"/>
+              <a:rPr lang="en-US"/>
               <a:t>Second level</a:t>
             </a:r>
           </a:p>
           <a:p>
             <a:pPr lvl="2"/>
             <a:r>
-              <a:rPr lang="en-US" smtClean="0"/>
+              <a:rPr lang="en-US"/>
               <a:t>Third level</a:t>
             </a:r>
           </a:p>
           <a:p>
             <a:pPr lvl="3"/>
             <a:r>
-              <a:rPr lang="en-US" smtClean="0"/>
+              <a:rPr lang="en-US"/>
               <a:t>Fourth level</a:t>
             </a:r>
           </a:p>
           <a:p>
             <a:pPr lvl="4"/>
             <a:r>
-              <a:rPr lang="en-US" smtClean="0"/>
+              <a:rPr lang="en-US"/>
               <a:t>Fifth level</a:t>
             </a:r>
-            <a:endParaRPr lang="en-US"/>
           </a:p>
         </p:txBody>
       </p:sp>
@@ -1671,7 +1672,7 @@
           <a:p>
             <a:pPr lvl="0"/>
             <a:r>
-              <a:rPr lang="en-US" smtClean="0"/>
+              <a:rPr lang="en-US"/>
               <a:t>Click to edit Master text styles</a:t>
             </a:r>
           </a:p>
@@ -1727,38 +1728,37 @@
           <a:p>
             <a:pPr lvl="0"/>
             <a:r>
-              <a:rPr lang="en-US" smtClean="0"/>
+              <a:rPr lang="en-US"/>
               <a:t>Click to edit Master text styles</a:t>
             </a:r>
           </a:p>
           <a:p>
             <a:pPr lvl="1"/>
             <a:r>
-              <a:rPr lang="en-US" smtClean="0"/>
+              <a:rPr lang="en-US"/>
               <a:t>Second level</a:t>
             </a:r>
           </a:p>
           <a:p>
             <a:pPr lvl="2"/>
             <a:r>
-              <a:rPr lang="en-US" smtClean="0"/>
+              <a:rPr lang="en-US"/>
               <a:t>Third level</a:t>
             </a:r>
           </a:p>
           <a:p>
             <a:pPr lvl="3"/>
             <a:r>
-              <a:rPr lang="en-US" smtClean="0"/>
+              <a:rPr lang="en-US"/>
               <a:t>Fourth level</a:t>
             </a:r>
           </a:p>
           <a:p>
             <a:pPr lvl="4"/>
             <a:r>
-              <a:rPr lang="en-US" smtClean="0"/>
+              <a:rPr lang="en-US"/>
               <a:t>Fifth level</a:t>
             </a:r>
-            <a:endParaRPr lang="en-US"/>
           </a:p>
         </p:txBody>
       </p:sp>
@@ -1779,7 +1779,7 @@
           <a:p>
             <a:fld id="{5BCAD085-E8A6-8845-BD4E-CB4CCA059FC4}" type="datetimeFigureOut">
               <a:rPr lang="en-US" smtClean="0"/>
-              <a:t>1/27/13</a:t>
+              <a:t>3/11/2026</a:t>
             </a:fld>
             <a:endParaRPr lang="en-US"/>
           </a:p>
@@ -1873,10 +1873,9 @@
           <a:lstStyle/>
           <a:p>
             <a:r>
-              <a:rPr lang="en-US" smtClean="0"/>
+              <a:rPr lang="en-US"/>
               <a:t>Click to edit Master title style</a:t>
             </a:r>
-            <a:endParaRPr lang="en-US"/>
           </a:p>
         </p:txBody>
       </p:sp>
@@ -1897,7 +1896,7 @@
           <a:p>
             <a:fld id="{5BCAD085-E8A6-8845-BD4E-CB4CCA059FC4}" type="datetimeFigureOut">
               <a:rPr lang="en-US" smtClean="0"/>
-              <a:t>1/27/13</a:t>
+              <a:t>3/11/2026</a:t>
             </a:fld>
             <a:endParaRPr lang="en-US"/>
           </a:p>
@@ -1992,7 +1991,7 @@
           <a:p>
             <a:fld id="{5BCAD085-E8A6-8845-BD4E-CB4CCA059FC4}" type="datetimeFigureOut">
               <a:rPr lang="en-US" smtClean="0"/>
-              <a:t>1/27/13</a:t>
+              <a:t>3/11/2026</a:t>
             </a:fld>
             <a:endParaRPr lang="en-US"/>
           </a:p>
@@ -2095,10 +2094,9 @@
           </a:lstStyle>
           <a:p>
             <a:r>
-              <a:rPr lang="en-US" smtClean="0"/>
+              <a:rPr lang="en-US"/>
               <a:t>Click to edit Master title style</a:t>
             </a:r>
-            <a:endParaRPr lang="en-US"/>
           </a:p>
         </p:txBody>
       </p:sp>
@@ -2152,38 +2150,37 @@
           <a:p>
             <a:pPr lvl="0"/>
             <a:r>
-              <a:rPr lang="en-US" smtClean="0"/>
+              <a:rPr lang="en-US"/>
               <a:t>Click to edit Master text styles</a:t>
             </a:r>
           </a:p>
           <a:p>
             <a:pPr lvl="1"/>
             <a:r>
-              <a:rPr lang="en-US" smtClean="0"/>
+              <a:rPr lang="en-US"/>
               <a:t>Second level</a:t>
             </a:r>
           </a:p>
           <a:p>
             <a:pPr lvl="2"/>
             <a:r>
-              <a:rPr lang="en-US" smtClean="0"/>
+              <a:rPr lang="en-US"/>
               <a:t>Third level</a:t>
             </a:r>
           </a:p>
           <a:p>
             <a:pPr lvl="3"/>
             <a:r>
-              <a:rPr lang="en-US" smtClean="0"/>
+              <a:rPr lang="en-US"/>
               <a:t>Fourth level</a:t>
             </a:r>
           </a:p>
           <a:p>
             <a:pPr lvl="4"/>
             <a:r>
-              <a:rPr lang="en-US" smtClean="0"/>
+              <a:rPr lang="en-US"/>
               <a:t>Fifth level</a:t>
             </a:r>
-            <a:endParaRPr lang="en-US"/>
           </a:p>
         </p:txBody>
       </p:sp>
@@ -2246,7 +2243,7 @@
           <a:p>
             <a:pPr lvl="0"/>
             <a:r>
-              <a:rPr lang="en-US" smtClean="0"/>
+              <a:rPr lang="en-US"/>
               <a:t>Click to edit Master text styles</a:t>
             </a:r>
           </a:p>
@@ -2269,7 +2266,7 @@
           <a:p>
             <a:fld id="{5BCAD085-E8A6-8845-BD4E-CB4CCA059FC4}" type="datetimeFigureOut">
               <a:rPr lang="en-US" smtClean="0"/>
-              <a:t>1/27/13</a:t>
+              <a:t>3/11/2026</a:t>
             </a:fld>
             <a:endParaRPr lang="en-US"/>
           </a:p>
@@ -2372,10 +2369,9 @@
           </a:lstStyle>
           <a:p>
             <a:r>
-              <a:rPr lang="en-US" smtClean="0"/>
+              <a:rPr lang="en-US"/>
               <a:t>Click to edit Master title style</a:t>
             </a:r>
-            <a:endParaRPr lang="en-US"/>
           </a:p>
         </p:txBody>
       </p:sp>
@@ -2499,7 +2495,7 @@
           <a:p>
             <a:pPr lvl="0"/>
             <a:r>
-              <a:rPr lang="en-US" smtClean="0"/>
+              <a:rPr lang="en-US"/>
               <a:t>Click to edit Master text styles</a:t>
             </a:r>
           </a:p>
@@ -2522,7 +2518,7 @@
           <a:p>
             <a:fld id="{5BCAD085-E8A6-8845-BD4E-CB4CCA059FC4}" type="datetimeFigureOut">
               <a:rPr lang="en-US" smtClean="0"/>
-              <a:t>1/27/13</a:t>
+              <a:t>3/11/2026</a:t>
             </a:fld>
             <a:endParaRPr lang="en-US"/>
           </a:p>
@@ -2631,10 +2627,9 @@
           <a:lstStyle/>
           <a:p>
             <a:r>
-              <a:rPr lang="en-US" smtClean="0"/>
+              <a:rPr lang="en-US"/>
               <a:t>Click to edit Master title style</a:t>
             </a:r>
-            <a:endParaRPr lang="en-US"/>
           </a:p>
         </p:txBody>
       </p:sp>
@@ -2665,38 +2660,37 @@
           <a:p>
             <a:pPr lvl="0"/>
             <a:r>
-              <a:rPr lang="en-US" smtClean="0"/>
+              <a:rPr lang="en-US"/>
               <a:t>Click to edit Master text styles</a:t>
             </a:r>
           </a:p>
           <a:p>
             <a:pPr lvl="1"/>
             <a:r>
-              <a:rPr lang="en-US" smtClean="0"/>
+              <a:rPr lang="en-US"/>
               <a:t>Second level</a:t>
             </a:r>
           </a:p>
           <a:p>
             <a:pPr lvl="2"/>
             <a:r>
-              <a:rPr lang="en-US" smtClean="0"/>
+              <a:rPr lang="en-US"/>
               <a:t>Third level</a:t>
             </a:r>
           </a:p>
           <a:p>
             <a:pPr lvl="3"/>
             <a:r>
-              <a:rPr lang="en-US" smtClean="0"/>
+              <a:rPr lang="en-US"/>
               <a:t>Fourth level</a:t>
             </a:r>
           </a:p>
           <a:p>
             <a:pPr lvl="4"/>
             <a:r>
-              <a:rPr lang="en-US" smtClean="0"/>
+              <a:rPr lang="en-US"/>
               <a:t>Fifth level</a:t>
             </a:r>
-            <a:endParaRPr lang="en-US"/>
           </a:p>
         </p:txBody>
       </p:sp>
@@ -2735,7 +2729,7 @@
           <a:p>
             <a:fld id="{5BCAD085-E8A6-8845-BD4E-CB4CCA059FC4}" type="datetimeFigureOut">
               <a:rPr lang="en-US" smtClean="0"/>
-              <a:t>1/27/13</a:t>
+              <a:t>3/11/2026</a:t>
             </a:fld>
             <a:endParaRPr lang="en-US"/>
           </a:p>
@@ -2816,6 +2810,54 @@
               <a:t>‹#›</a:t>
             </a:fld>
             <a:endParaRPr lang="en-US"/>
+          </a:p>
+        </p:txBody>
+      </p:sp>
+      <p:sp>
+        <p:nvSpPr>
+          <p:cNvPr id="8" name="TextBox 7">
+            <a:extLst>
+              <a:ext uri="{FF2B5EF4-FFF2-40B4-BE49-F238E27FC236}">
+                <a16:creationId xmlns:a16="http://schemas.microsoft.com/office/drawing/2014/main" id="{48AD5A96-BEE0-3EA2-A659-AC9DCB1732DD}"/>
+              </a:ext>
+            </a:extLst>
+          </p:cNvPr>
+          <p:cNvSpPr txBox="1"/>
+          <p:nvPr userDrawn="1">
+            <p:extLst>
+              <p:ext uri="{1162E1C5-73C7-4A58-AE30-91384D911F3F}">
+                <p184:classification xmlns:p184="http://schemas.microsoft.com/office/powerpoint/2018/4/main" val="ftr"/>
+              </p:ext>
+            </p:extLst>
+          </p:nvPr>
+        </p:nvSpPr>
+        <p:spPr>
+          <a:xfrm>
+            <a:off x="5556250" y="6642100"/>
+            <a:ext cx="1101725" cy="152400"/>
+          </a:xfrm>
+          <a:prstGeom prst="rect">
+            <a:avLst/>
+          </a:prstGeom>
+        </p:spPr>
+        <p:txBody>
+          <a:bodyPr horzOverflow="overflow" lIns="0" tIns="0" rIns="0" bIns="0">
+            <a:spAutoFit/>
+          </a:bodyPr>
+          <a:lstStyle/>
+          <a:p>
+            <a:pPr algn="l"/>
+            <a:r>
+              <a:rPr lang="en-US" sz="1000">
+                <a:solidFill>
+                  <a:srgbClr val="000000">
+                    <a:alpha val="50000"/>
+                  </a:srgbClr>
+                </a:solidFill>
+                <a:latin typeface="Aptos" panose="020B0004020202020204" pitchFamily="34" charset="0"/>
+              </a:rPr>
+              <a:t>Classified as Public</a:t>
+            </a:r>
           </a:p>
         </p:txBody>
       </p:sp>
@@ -3094,7 +3136,7 @@
 </file>
 
 <file path=ppt/slides/slide1.xml><?xml version="1.0" encoding="utf-8"?>
-<p:sld xmlns:a="http://schemas.openxmlformats.org/drawingml/2006/main" xmlns:p="http://schemas.openxmlformats.org/presentationml/2006/main" xmlns:r="http://schemas.openxmlformats.org/officeDocument/2006/relationships">
+<p:sld xmlns:a="http://schemas.openxmlformats.org/drawingml/2006/main" xmlns:r="http://schemas.openxmlformats.org/officeDocument/2006/relationships" xmlns:p="http://schemas.openxmlformats.org/presentationml/2006/main">
   <p:cSld>
     <p:spTree>
       <p:nvGrpSpPr>
@@ -3102,7 +3144,14 @@
         <p:cNvGrpSpPr/>
         <p:nvPr/>
       </p:nvGrpSpPr>
-      <p:grpSpPr/>
+      <p:grpSpPr>
+        <a:xfrm>
+          <a:off x="0" y="0"/>
+          <a:ext cx="0" cy="0"/>
+          <a:chOff x="0" y="0"/>
+          <a:chExt cx="0" cy="0"/>
+        </a:xfrm>
+      </p:grpSpPr>
       <p:sp>
         <p:nvSpPr>
           <p:cNvPr id="2" name="Rectangle 1"/>
@@ -3143,6 +3192,7 @@
           <a:lstStyle/>
           <a:p>
             <a:pPr algn="ctr"/>
+            <a:endParaRPr/>
           </a:p>
         </p:txBody>
       </p:sp>
@@ -3186,6 +3236,7 @@
           <a:lstStyle/>
           <a:p>
             <a:pPr algn="ctr"/>
+            <a:endParaRPr/>
           </a:p>
         </p:txBody>
       </p:sp>
@@ -3338,7 +3389,7 @@
 </file>
 
 <file path=ppt/slides/slide10.xml><?xml version="1.0" encoding="utf-8"?>
-<p:sld xmlns:a="http://schemas.openxmlformats.org/drawingml/2006/main" xmlns:p="http://schemas.openxmlformats.org/presentationml/2006/main" xmlns:r="http://schemas.openxmlformats.org/officeDocument/2006/relationships">
+<p:sld xmlns:a="http://schemas.openxmlformats.org/drawingml/2006/main" xmlns:r="http://schemas.openxmlformats.org/officeDocument/2006/relationships" xmlns:p="http://schemas.openxmlformats.org/presentationml/2006/main">
   <p:cSld>
     <p:spTree>
       <p:nvGrpSpPr>
@@ -3346,7 +3397,14 @@
         <p:cNvGrpSpPr/>
         <p:nvPr/>
       </p:nvGrpSpPr>
-      <p:grpSpPr/>
+      <p:grpSpPr>
+        <a:xfrm>
+          <a:off x="0" y="0"/>
+          <a:ext cx="0" cy="0"/>
+          <a:chOff x="0" y="0"/>
+          <a:chExt cx="0" cy="0"/>
+        </a:xfrm>
+      </p:grpSpPr>
       <p:sp>
         <p:nvSpPr>
           <p:cNvPr id="2" name="Rectangle 1"/>
@@ -3387,6 +3445,7 @@
           <a:lstStyle/>
           <a:p>
             <a:pPr algn="ctr"/>
+            <a:endParaRPr/>
           </a:p>
         </p:txBody>
       </p:sp>
@@ -3500,6 +3559,7 @@
           <a:lstStyle/>
           <a:p>
             <a:pPr algn="ctr"/>
+            <a:endParaRPr/>
           </a:p>
         </p:txBody>
       </p:sp>
@@ -3683,8 +3743,20 @@
                 <a:tableStyleId>{5C22544A-7EE6-4342-B048-85BDC9FD1C3A}</a:tableStyleId>
               </a:tblPr>
               <a:tblGrid>
-                <a:gridCol w="3566160"/>
-                <a:gridCol w="3566160"/>
+                <a:gridCol w="3566160">
+                  <a:extLst>
+                    <a:ext uri="{9D8B030D-6E8A-4147-A177-3AD203B41FA5}">
+                      <a16:colId xmlns:a16="http://schemas.microsoft.com/office/drawing/2014/main" val="20000"/>
+                    </a:ext>
+                  </a:extLst>
+                </a:gridCol>
+                <a:gridCol w="3566160">
+                  <a:extLst>
+                    <a:ext uri="{9D8B030D-6E8A-4147-A177-3AD203B41FA5}">
+                      <a16:colId xmlns:a16="http://schemas.microsoft.com/office/drawing/2014/main" val="20001"/>
+                    </a:ext>
+                  </a:extLst>
+                </a:gridCol>
               </a:tblGrid>
               <a:tr h="365760">
                 <a:tc>
@@ -3694,7 +3766,7 @@
                     <a:p>
                       <a:pPr algn="ctr"/>
                       <a:r>
-                        <a:rPr b="1" sz="1300">
+                        <a:rPr sz="1300" b="1">
                           <a:solidFill>
                             <a:srgbClr val="FFFFFF"/>
                           </a:solidFill>
@@ -3717,7 +3789,7 @@
                     <a:p>
                       <a:pPr algn="ctr"/>
                       <a:r>
-                        <a:rPr b="1" sz="1300">
+                        <a:rPr sz="1300" b="1">
                           <a:solidFill>
                             <a:srgbClr val="FFFFFF"/>
                           </a:solidFill>
@@ -3733,6 +3805,11 @@
                     </a:solidFill>
                   </a:tcPr>
                 </a:tc>
+                <a:extLst>
+                  <a:ext uri="{0D108BD9-81ED-4DB2-BD59-A6C34878D82A}">
+                    <a16:rowId xmlns:a16="http://schemas.microsoft.com/office/drawing/2014/main" val="10000"/>
+                  </a:ext>
+                </a:extLst>
               </a:tr>
               <a:tr h="365760">
                 <a:tc>
@@ -3781,6 +3858,11 @@
                     </a:solidFill>
                   </a:tcPr>
                 </a:tc>
+                <a:extLst>
+                  <a:ext uri="{0D108BD9-81ED-4DB2-BD59-A6C34878D82A}">
+                    <a16:rowId xmlns:a16="http://schemas.microsoft.com/office/drawing/2014/main" val="10001"/>
+                  </a:ext>
+                </a:extLst>
               </a:tr>
               <a:tr h="365760">
                 <a:tc>
@@ -3829,6 +3911,11 @@
                     </a:solidFill>
                   </a:tcPr>
                 </a:tc>
+                <a:extLst>
+                  <a:ext uri="{0D108BD9-81ED-4DB2-BD59-A6C34878D82A}">
+                    <a16:rowId xmlns:a16="http://schemas.microsoft.com/office/drawing/2014/main" val="10002"/>
+                  </a:ext>
+                </a:extLst>
               </a:tr>
               <a:tr h="365760">
                 <a:tc>
@@ -3877,6 +3964,11 @@
                     </a:solidFill>
                   </a:tcPr>
                 </a:tc>
+                <a:extLst>
+                  <a:ext uri="{0D108BD9-81ED-4DB2-BD59-A6C34878D82A}">
+                    <a16:rowId xmlns:a16="http://schemas.microsoft.com/office/drawing/2014/main" val="10003"/>
+                  </a:ext>
+                </a:extLst>
               </a:tr>
               <a:tr h="365760">
                 <a:tc>
@@ -3925,6 +4017,11 @@
                     </a:solidFill>
                   </a:tcPr>
                 </a:tc>
+                <a:extLst>
+                  <a:ext uri="{0D108BD9-81ED-4DB2-BD59-A6C34878D82A}">
+                    <a16:rowId xmlns:a16="http://schemas.microsoft.com/office/drawing/2014/main" val="10004"/>
+                  </a:ext>
+                </a:extLst>
               </a:tr>
               <a:tr h="365760">
                 <a:tc>
@@ -3973,6 +4070,11 @@
                     </a:solidFill>
                   </a:tcPr>
                 </a:tc>
+                <a:extLst>
+                  <a:ext uri="{0D108BD9-81ED-4DB2-BD59-A6C34878D82A}">
+                    <a16:rowId xmlns:a16="http://schemas.microsoft.com/office/drawing/2014/main" val="10005"/>
+                  </a:ext>
+                </a:extLst>
               </a:tr>
               <a:tr h="365760">
                 <a:tc>
@@ -4021,6 +4123,11 @@
                     </a:solidFill>
                   </a:tcPr>
                 </a:tc>
+                <a:extLst>
+                  <a:ext uri="{0D108BD9-81ED-4DB2-BD59-A6C34878D82A}">
+                    <a16:rowId xmlns:a16="http://schemas.microsoft.com/office/drawing/2014/main" val="10006"/>
+                  </a:ext>
+                </a:extLst>
               </a:tr>
             </a:tbl>
           </a:graphicData>
@@ -4101,6 +4208,7 @@
           <a:lstStyle/>
           <a:p>
             <a:pPr algn="ctr"/>
+            <a:endParaRPr/>
           </a:p>
         </p:txBody>
       </p:sp>
@@ -4151,7 +4259,7 @@
 </file>
 
 <file path=ppt/slides/slide11.xml><?xml version="1.0" encoding="utf-8"?>
-<p:sld xmlns:a="http://schemas.openxmlformats.org/drawingml/2006/main" xmlns:p="http://schemas.openxmlformats.org/presentationml/2006/main" xmlns:r="http://schemas.openxmlformats.org/officeDocument/2006/relationships">
+<p:sld xmlns:a="http://schemas.openxmlformats.org/drawingml/2006/main" xmlns:r="http://schemas.openxmlformats.org/officeDocument/2006/relationships" xmlns:p="http://schemas.openxmlformats.org/presentationml/2006/main">
   <p:cSld>
     <p:spTree>
       <p:nvGrpSpPr>
@@ -4159,7 +4267,14 @@
         <p:cNvGrpSpPr/>
         <p:nvPr/>
       </p:nvGrpSpPr>
-      <p:grpSpPr/>
+      <p:grpSpPr>
+        <a:xfrm>
+          <a:off x="0" y="0"/>
+          <a:ext cx="0" cy="0"/>
+          <a:chOff x="0" y="0"/>
+          <a:chExt cx="0" cy="0"/>
+        </a:xfrm>
+      </p:grpSpPr>
       <p:sp>
         <p:nvSpPr>
           <p:cNvPr id="2" name="Rectangle 1"/>
@@ -4200,6 +4315,7 @@
           <a:lstStyle/>
           <a:p>
             <a:pPr algn="ctr"/>
+            <a:endParaRPr/>
           </a:p>
         </p:txBody>
       </p:sp>
@@ -4233,7 +4349,7 @@
                 </a:solidFill>
                 <a:latin typeface="Calibri"/>
               </a:rPr>
-              <a:t>Single Binary – No JVM Required</a:t>
+              <a:t>Structured Subcommands &amp; Built-in Help</a:t>
             </a:r>
           </a:p>
         </p:txBody>
@@ -4268,7 +4384,7 @@
                 </a:solidFill>
                 <a:latin typeface="Calibri"/>
               </a:rPr>
-              <a:t>Go binary vs. Java application</a:t>
+              <a:t>kubectl / gh / aws style resource-verb hierarchy</a:t>
             </a:r>
           </a:p>
         </p:txBody>
@@ -4313,6 +4429,7 @@
           <a:lstStyle/>
           <a:p>
             <a:pPr algn="ctr"/>
+            <a:endParaRPr/>
           </a:p>
         </p:txBody>
       </p:sp>
@@ -4353,240 +4470,14 @@
       </p:sp>
       <p:sp>
         <p:nvSpPr>
-          <p:cNvPr id="7" name="TextBox 6"/>
-          <p:cNvSpPr txBox="1"/>
-          <p:nvPr/>
-        </p:nvSpPr>
-        <p:spPr>
-          <a:xfrm>
-            <a:off x="457200" y="1097280"/>
-            <a:ext cx="5303520" cy="365760"/>
-          </a:xfrm>
-          <a:prstGeom prst="rect">
-            <a:avLst/>
-          </a:prstGeom>
-          <a:noFill/>
-        </p:spPr>
-        <p:txBody>
-          <a:bodyPr wrap="square">
-            <a:spAutoFit/>
-          </a:bodyPr>
-          <a:lstStyle/>
-          <a:p>
-            <a:pPr algn="l"/>
-            <a:r>
-              <a:rPr sz="1400" b="1" i="0">
-                <a:solidFill>
-                  <a:srgbClr val="CC0000"/>
-                </a:solidFill>
-                <a:latin typeface="Calibri"/>
-              </a:rPr>
-              <a:t>Official CLI – Java application</a:t>
-            </a:r>
-          </a:p>
-        </p:txBody>
-      </p:sp>
-      <p:sp>
-        <p:nvSpPr>
-          <p:cNvPr id="8" name="TextBox 7"/>
-          <p:cNvSpPr txBox="1"/>
-          <p:nvPr/>
-        </p:nvSpPr>
-        <p:spPr>
-          <a:xfrm>
-            <a:off x="457200" y="1554480"/>
-            <a:ext cx="5303520" cy="3200400"/>
-          </a:xfrm>
-          <a:prstGeom prst="rect">
-            <a:avLst/>
-          </a:prstGeom>
-          <a:noFill/>
-        </p:spPr>
-        <p:txBody>
-          <a:bodyPr wrap="square">
-            <a:spAutoFit/>
-          </a:bodyPr>
-          <a:lstStyle/>
-          <a:p>
-            <a:r>
-              <a:rPr sz="1500" b="0">
-                <a:solidFill>
-                  <a:srgbClr val="CC0000"/>
-                </a:solidFill>
-                <a:latin typeface="Calibri"/>
-              </a:rPr>
-              <a:t>•  Requires JRE installed on every machine</a:t>
-            </a:r>
-          </a:p>
-          <a:p>
-            <a:r>
-              <a:rPr sz="1500" b="0">
-                <a:solidFill>
-                  <a:srgbClr val="CC0000"/>
-                </a:solidFill>
-                <a:latin typeface="Calibri"/>
-              </a:rPr>
-              <a:t>•  JVM startup overhead on every invocation</a:t>
-            </a:r>
-          </a:p>
-          <a:p>
-            <a:r>
-              <a:rPr sz="1500" b="0">
-                <a:solidFill>
-                  <a:srgbClr val="CC0000"/>
-                </a:solidFill>
-                <a:latin typeface="Calibri"/>
-              </a:rPr>
-              <a:t>•  Larger Docker images (JRE ~200-400 MB)</a:t>
-            </a:r>
-          </a:p>
-          <a:p>
-            <a:r>
-              <a:rPr sz="1500" b="0">
-                <a:solidFill>
-                  <a:srgbClr val="CC0000"/>
-                </a:solidFill>
-                <a:latin typeface="Calibri"/>
-              </a:rPr>
-              <a:t>•  Version conflicts between projects</a:t>
-            </a:r>
-          </a:p>
-          <a:p>
-            <a:r>
-              <a:rPr sz="1500" b="0">
-                <a:solidFill>
-                  <a:srgbClr val="CC0000"/>
-                </a:solidFill>
-                <a:latin typeface="Calibri"/>
-              </a:rPr>
-              <a:t>•  Complex installation procedure</a:t>
-            </a:r>
-          </a:p>
-        </p:txBody>
-      </p:sp>
-      <p:sp>
-        <p:nvSpPr>
-          <p:cNvPr id="9" name="TextBox 8"/>
-          <p:cNvSpPr txBox="1"/>
-          <p:nvPr/>
-        </p:nvSpPr>
-        <p:spPr>
-          <a:xfrm>
-            <a:off x="6400800" y="1097280"/>
-            <a:ext cx="5303520" cy="365760"/>
-          </a:xfrm>
-          <a:prstGeom prst="rect">
-            <a:avLst/>
-          </a:prstGeom>
-          <a:noFill/>
-        </p:spPr>
-        <p:txBody>
-          <a:bodyPr wrap="square">
-            <a:spAutoFit/>
-          </a:bodyPr>
-          <a:lstStyle/>
-          <a:p>
-            <a:pPr algn="l"/>
-            <a:r>
-              <a:rPr sz="1400" b="1" i="0">
-                <a:solidFill>
-                  <a:srgbClr val="009944"/>
-                </a:solidFill>
-                <a:latin typeface="Calibri"/>
-              </a:rPr>
-              <a:t>iics-cli – compiled Go binary</a:t>
-            </a:r>
-          </a:p>
-        </p:txBody>
-      </p:sp>
-      <p:sp>
-        <p:nvSpPr>
-          <p:cNvPr id="10" name="TextBox 9"/>
-          <p:cNvSpPr txBox="1"/>
-          <p:nvPr/>
-        </p:nvSpPr>
-        <p:spPr>
-          <a:xfrm>
-            <a:off x="6400800" y="1554480"/>
-            <a:ext cx="5303520" cy="3200400"/>
-          </a:xfrm>
-          <a:prstGeom prst="rect">
-            <a:avLst/>
-          </a:prstGeom>
-          <a:noFill/>
-        </p:spPr>
-        <p:txBody>
-          <a:bodyPr wrap="square">
-            <a:spAutoFit/>
-          </a:bodyPr>
-          <a:lstStyle/>
-          <a:p>
-            <a:r>
-              <a:rPr sz="1500" b="0">
-                <a:solidFill>
-                  <a:srgbClr val="009944"/>
-                </a:solidFill>
-                <a:latin typeface="Calibri"/>
-              </a:rPr>
-              <a:t>•  Single statically compiled binary – no dependencies</a:t>
-            </a:r>
-          </a:p>
-          <a:p>
-            <a:r>
-              <a:rPr sz="1500" b="0">
-                <a:solidFill>
-                  <a:srgbClr val="009944"/>
-                </a:solidFill>
-                <a:latin typeface="Calibri"/>
-              </a:rPr>
-              <a:t>•  Linux, macOS, Windows (amd64 and arm64)</a:t>
-            </a:r>
-          </a:p>
-          <a:p>
-            <a:r>
-              <a:rPr sz="1500" b="0">
-                <a:solidFill>
-                  <a:srgbClr val="009944"/>
-                </a:solidFill>
-                <a:latin typeface="Calibri"/>
-              </a:rPr>
-              <a:t>•  Copy to PATH and run immediately</a:t>
-            </a:r>
-          </a:p>
-          <a:p>
-            <a:r>
-              <a:rPr sz="1500" b="0">
-                <a:solidFill>
-                  <a:srgbClr val="009944"/>
-                </a:solidFill>
-                <a:latin typeface="Calibri"/>
-              </a:rPr>
-              <a:t>•  ~8 MB binary – tiny Docker layer</a:t>
-            </a:r>
-          </a:p>
-          <a:p>
-            <a:r>
-              <a:rPr sz="1500" b="0">
-                <a:solidFill>
-                  <a:srgbClr val="009944"/>
-                </a:solidFill>
-                <a:latin typeface="Calibri"/>
-              </a:rPr>
-              <a:t>•  Instant startup – no JVM warmup</a:t>
-            </a:r>
-          </a:p>
-        </p:txBody>
-      </p:sp>
-      <p:sp>
-        <p:nvSpPr>
-          <p:cNvPr id="11" name="Rectangle 10"/>
+          <p:cNvPr id="7" name="Rectangle 6"/>
           <p:cNvSpPr/>
           <p:nvPr/>
         </p:nvSpPr>
         <p:spPr>
           <a:xfrm>
-            <a:off x="457200" y="4846320"/>
-            <a:ext cx="11247120" cy="1645920"/>
+            <a:off x="457200" y="1188720"/>
+            <a:ext cx="6858000" cy="5029200"/>
           </a:xfrm>
           <a:prstGeom prst="rect">
             <a:avLst/>
@@ -4617,298 +4508,7 @@
           <a:lstStyle/>
           <a:p>
             <a:pPr algn="ctr"/>
-          </a:p>
-        </p:txBody>
-      </p:sp>
-      <p:sp>
-        <p:nvSpPr>
-          <p:cNvPr id="12" name="TextBox 11"/>
-          <p:cNvSpPr txBox="1"/>
-          <p:nvPr/>
-        </p:nvSpPr>
-        <p:spPr>
-          <a:xfrm>
-            <a:off x="594360" y="4937760"/>
-            <a:ext cx="10972800" cy="1463040"/>
-          </a:xfrm>
-          <a:prstGeom prst="rect">
-            <a:avLst/>
-          </a:prstGeom>
-          <a:noFill/>
-        </p:spPr>
-        <p:txBody>
-          <a:bodyPr wrap="square">
-            <a:spAutoFit/>
-          </a:bodyPr>
-          <a:lstStyle/>
-          <a:p>
-            <a:pPr algn="l"/>
-            <a:r>
-              <a:rPr sz="1100" b="0" i="0">
-                <a:solidFill>
-                  <a:srgbClr val="A6E3A1"/>
-                </a:solidFill>
-                <a:latin typeface="Courier New"/>
-              </a:rPr>
-              <a:t># Install – one line
-curl -L https://github.com/jbrazda/iics-cli/releases/latest/download/iics_linux_amd64 \
-  -o /usr/local/bin/iics &amp;&amp; chmod +x /usr/local/bin/iics
-# Docker – minimal image
-COPY iics /usr/local/bin/iics
-# No apt-get install default-jre needed</a:t>
-            </a:r>
-          </a:p>
-        </p:txBody>
-      </p:sp>
-    </p:spTree>
-  </p:cSld>
-  <p:clrMapOvr>
-    <a:masterClrMapping/>
-  </p:clrMapOvr>
-</p:sld>
-</file>
-
-<file path=ppt/slides/slide12.xml><?xml version="1.0" encoding="utf-8"?>
-<p:sld xmlns:a="http://schemas.openxmlformats.org/drawingml/2006/main" xmlns:p="http://schemas.openxmlformats.org/presentationml/2006/main" xmlns:r="http://schemas.openxmlformats.org/officeDocument/2006/relationships">
-  <p:cSld>
-    <p:spTree>
-      <p:nvGrpSpPr>
-        <p:cNvPr id="1" name=""/>
-        <p:cNvGrpSpPr/>
-        <p:nvPr/>
-      </p:nvGrpSpPr>
-      <p:grpSpPr/>
-      <p:sp>
-        <p:nvSpPr>
-          <p:cNvPr id="2" name="Rectangle 1"/>
-          <p:cNvSpPr/>
-          <p:nvPr/>
-        </p:nvSpPr>
-        <p:spPr>
-          <a:xfrm>
-            <a:off x="0" y="0"/>
-            <a:ext cx="12188952" cy="1005840"/>
-          </a:xfrm>
-          <a:prstGeom prst="rect">
-            <a:avLst/>
-          </a:prstGeom>
-          <a:solidFill>
-            <a:srgbClr val="003366"/>
-          </a:solidFill>
-          <a:ln>
-            <a:noFill/>
-          </a:ln>
-        </p:spPr>
-        <p:style>
-          <a:lnRef idx="1">
-            <a:schemeClr val="accent1"/>
-          </a:lnRef>
-          <a:fillRef idx="3">
-            <a:schemeClr val="accent1"/>
-          </a:fillRef>
-          <a:effectRef idx="2">
-            <a:schemeClr val="accent1"/>
-          </a:effectRef>
-          <a:fontRef idx="minor">
-            <a:schemeClr val="lt1"/>
-          </a:fontRef>
-        </p:style>
-        <p:txBody>
-          <a:bodyPr rtlCol="0" anchor="ctr"/>
-          <a:lstStyle/>
-          <a:p>
-            <a:pPr algn="ctr"/>
-          </a:p>
-        </p:txBody>
-      </p:sp>
-      <p:sp>
-        <p:nvSpPr>
-          <p:cNvPr id="3" name="TextBox 2"/>
-          <p:cNvSpPr txBox="1"/>
-          <p:nvPr/>
-        </p:nvSpPr>
-        <p:spPr>
-          <a:xfrm>
-            <a:off x="274320" y="91440"/>
-            <a:ext cx="11430000" cy="640080"/>
-          </a:xfrm>
-          <a:prstGeom prst="rect">
-            <a:avLst/>
-          </a:prstGeom>
-          <a:noFill/>
-        </p:spPr>
-        <p:txBody>
-          <a:bodyPr wrap="square">
-            <a:spAutoFit/>
-          </a:bodyPr>
-          <a:lstStyle/>
-          <a:p>
-            <a:pPr algn="l"/>
-            <a:r>
-              <a:rPr sz="2800" b="1" i="0">
-                <a:solidFill>
-                  <a:srgbClr val="FFFFFF"/>
-                </a:solidFill>
-                <a:latin typeface="Calibri"/>
-              </a:rPr>
-              <a:t>Structured Subcommands &amp; Built-in Help</a:t>
-            </a:r>
-          </a:p>
-        </p:txBody>
-      </p:sp>
-      <p:sp>
-        <p:nvSpPr>
-          <p:cNvPr id="4" name="TextBox 3"/>
-          <p:cNvSpPr txBox="1"/>
-          <p:nvPr/>
-        </p:nvSpPr>
-        <p:spPr>
-          <a:xfrm>
-            <a:off x="274320" y="685800"/>
-            <a:ext cx="11430000" cy="365760"/>
-          </a:xfrm>
-          <a:prstGeom prst="rect">
-            <a:avLst/>
-          </a:prstGeom>
-          <a:noFill/>
-        </p:spPr>
-        <p:txBody>
-          <a:bodyPr wrap="square">
-            <a:spAutoFit/>
-          </a:bodyPr>
-          <a:lstStyle/>
-          <a:p>
-            <a:pPr algn="l"/>
-            <a:r>
-              <a:rPr sz="1400" b="0" i="0">
-                <a:solidFill>
-                  <a:srgbClr val="BBCCFF"/>
-                </a:solidFill>
-                <a:latin typeface="Calibri"/>
-              </a:rPr>
-              <a:t>kubectl / gh / aws style resource-verb hierarchy</a:t>
-            </a:r>
-          </a:p>
-        </p:txBody>
-      </p:sp>
-      <p:sp>
-        <p:nvSpPr>
-          <p:cNvPr id="5" name="Rectangle 4"/>
-          <p:cNvSpPr/>
-          <p:nvPr/>
-        </p:nvSpPr>
-        <p:spPr>
-          <a:xfrm>
-            <a:off x="0" y="6583680"/>
-            <a:ext cx="12188952" cy="274320"/>
-          </a:xfrm>
-          <a:prstGeom prst="rect">
-            <a:avLst/>
-          </a:prstGeom>
-          <a:solidFill>
-            <a:srgbClr val="003366"/>
-          </a:solidFill>
-          <a:ln>
-            <a:noFill/>
-          </a:ln>
-        </p:spPr>
-        <p:style>
-          <a:lnRef idx="1">
-            <a:schemeClr val="accent1"/>
-          </a:lnRef>
-          <a:fillRef idx="3">
-            <a:schemeClr val="accent1"/>
-          </a:fillRef>
-          <a:effectRef idx="2">
-            <a:schemeClr val="accent1"/>
-          </a:effectRef>
-          <a:fontRef idx="minor">
-            <a:schemeClr val="lt1"/>
-          </a:fontRef>
-        </p:style>
-        <p:txBody>
-          <a:bodyPr rtlCol="0" anchor="ctr"/>
-          <a:lstStyle/>
-          <a:p>
-            <a:pPr algn="ctr"/>
-          </a:p>
-        </p:txBody>
-      </p:sp>
-      <p:sp>
-        <p:nvSpPr>
-          <p:cNvPr id="6" name="TextBox 5"/>
-          <p:cNvSpPr txBox="1"/>
-          <p:nvPr/>
-        </p:nvSpPr>
-        <p:spPr>
-          <a:xfrm>
-            <a:off x="274320" y="6565392"/>
-            <a:ext cx="11612880" cy="274320"/>
-          </a:xfrm>
-          <a:prstGeom prst="rect">
-            <a:avLst/>
-          </a:prstGeom>
-          <a:noFill/>
-        </p:spPr>
-        <p:txBody>
-          <a:bodyPr wrap="square">
-            <a:spAutoFit/>
-          </a:bodyPr>
-          <a:lstStyle/>
-          <a:p>
-            <a:pPr algn="l"/>
-            <a:r>
-              <a:rPr sz="900" b="0" i="0">
-                <a:solidFill>
-                  <a:srgbClr val="AABBCC"/>
-                </a:solidFill>
-                <a:latin typeface="Calibri"/>
-              </a:rPr>
-              <a:t>iics-cli  |  Informatica IICS Command Line Interface</a:t>
-            </a:r>
-          </a:p>
-        </p:txBody>
-      </p:sp>
-      <p:sp>
-        <p:nvSpPr>
-          <p:cNvPr id="7" name="Rectangle 6"/>
-          <p:cNvSpPr/>
-          <p:nvPr/>
-        </p:nvSpPr>
-        <p:spPr>
-          <a:xfrm>
-            <a:off x="457200" y="1188720"/>
-            <a:ext cx="6858000" cy="5029200"/>
-          </a:xfrm>
-          <a:prstGeom prst="rect">
-            <a:avLst/>
-          </a:prstGeom>
-          <a:solidFill>
-            <a:srgbClr val="1E1E2E"/>
-          </a:solidFill>
-          <a:ln>
-            <a:noFill/>
-          </a:ln>
-        </p:spPr>
-        <p:style>
-          <a:lnRef idx="1">
-            <a:schemeClr val="accent1"/>
-          </a:lnRef>
-          <a:fillRef idx="3">
-            <a:schemeClr val="accent1"/>
-          </a:fillRef>
-          <a:effectRef idx="2">
-            <a:schemeClr val="accent1"/>
-          </a:effectRef>
-          <a:fontRef idx="minor">
-            <a:schemeClr val="lt1"/>
-          </a:fontRef>
-        </p:style>
-        <p:txBody>
-          <a:bodyPr rtlCol="0" anchor="ctr"/>
-          <a:lstStyle/>
-          <a:p>
-            <a:pPr algn="ctr"/>
+            <a:endParaRPr/>
           </a:p>
         </p:txBody>
       </p:sp>
@@ -5032,6 +4632,7 @@
           <a:lstStyle/>
           <a:p>
             <a:pPr algn="ctr"/>
+            <a:endParaRPr/>
           </a:p>
         </p:txBody>
       </p:sp>
@@ -5147,8 +4748,8 @@
 </p:sld>
 </file>
 
-<file path=ppt/slides/slide13.xml><?xml version="1.0" encoding="utf-8"?>
-<p:sld xmlns:a="http://schemas.openxmlformats.org/drawingml/2006/main" xmlns:p="http://schemas.openxmlformats.org/presentationml/2006/main" xmlns:r="http://schemas.openxmlformats.org/officeDocument/2006/relationships">
+<file path=ppt/slides/slide12.xml><?xml version="1.0" encoding="utf-8"?>
+<p:sld xmlns:a="http://schemas.openxmlformats.org/drawingml/2006/main" xmlns:r="http://schemas.openxmlformats.org/officeDocument/2006/relationships" xmlns:p="http://schemas.openxmlformats.org/presentationml/2006/main">
   <p:cSld>
     <p:spTree>
       <p:nvGrpSpPr>
@@ -5156,7 +4757,14 @@
         <p:cNvGrpSpPr/>
         <p:nvPr/>
       </p:nvGrpSpPr>
-      <p:grpSpPr/>
+      <p:grpSpPr>
+        <a:xfrm>
+          <a:off x="0" y="0"/>
+          <a:ext cx="0" cy="0"/>
+          <a:chOff x="0" y="0"/>
+          <a:chExt cx="0" cy="0"/>
+        </a:xfrm>
+      </p:grpSpPr>
       <p:sp>
         <p:nvSpPr>
           <p:cNvPr id="2" name="Rectangle 1"/>
@@ -5197,6 +4805,7 @@
           <a:lstStyle/>
           <a:p>
             <a:pPr algn="ctr"/>
+            <a:endParaRPr/>
           </a:p>
         </p:txBody>
       </p:sp>
@@ -5310,6 +4919,7 @@
           <a:lstStyle/>
           <a:p>
             <a:pPr algn="ctr"/>
+            <a:endParaRPr/>
           </a:p>
         </p:txBody>
       </p:sp>
@@ -5423,6 +5033,7 @@
           <a:lstStyle/>
           <a:p>
             <a:pPr algn="ctr"/>
+            <a:endParaRPr/>
           </a:p>
         </p:txBody>
       </p:sp>
@@ -5539,6 +5150,7 @@
           <a:lstStyle/>
           <a:p>
             <a:pPr algn="ctr"/>
+            <a:endParaRPr/>
           </a:p>
         </p:txBody>
       </p:sp>
@@ -5672,8 +5284,8 @@
 </p:sld>
 </file>
 
-<file path=ppt/slides/slide14.xml><?xml version="1.0" encoding="utf-8"?>
-<p:sld xmlns:a="http://schemas.openxmlformats.org/drawingml/2006/main" xmlns:p="http://schemas.openxmlformats.org/presentationml/2006/main" xmlns:r="http://schemas.openxmlformats.org/officeDocument/2006/relationships">
+<file path=ppt/slides/slide13.xml><?xml version="1.0" encoding="utf-8"?>
+<p:sld xmlns:a="http://schemas.openxmlformats.org/drawingml/2006/main" xmlns:r="http://schemas.openxmlformats.org/officeDocument/2006/relationships" xmlns:p="http://schemas.openxmlformats.org/presentationml/2006/main">
   <p:cSld>
     <p:spTree>
       <p:nvGrpSpPr>
@@ -5681,7 +5293,14 @@
         <p:cNvGrpSpPr/>
         <p:nvPr/>
       </p:nvGrpSpPr>
-      <p:grpSpPr/>
+      <p:grpSpPr>
+        <a:xfrm>
+          <a:off x="0" y="0"/>
+          <a:ext cx="0" cy="0"/>
+          <a:chOff x="0" y="0"/>
+          <a:chExt cx="0" cy="0"/>
+        </a:xfrm>
+      </p:grpSpPr>
       <p:sp>
         <p:nvSpPr>
           <p:cNvPr id="2" name="Rectangle 1"/>
@@ -5722,6 +5341,7 @@
           <a:lstStyle/>
           <a:p>
             <a:pPr algn="ctr"/>
+            <a:endParaRPr/>
           </a:p>
         </p:txBody>
       </p:sp>
@@ -5800,6 +5420,7 @@
           <a:lstStyle/>
           <a:p>
             <a:pPr algn="ctr"/>
+            <a:endParaRPr/>
           </a:p>
         </p:txBody>
       </p:sp>
@@ -5844,7 +5465,13 @@
           <p:cNvGraphicFramePr>
             <a:graphicFrameLocks noGrp="1"/>
           </p:cNvGraphicFramePr>
-          <p:nvPr/>
+          <p:nvPr>
+            <p:extLst>
+              <p:ext uri="{D42A27DB-BD31-4B8C-83A1-F6EECF244321}">
+                <p14:modId xmlns:p14="http://schemas.microsoft.com/office/powerpoint/2010/main" val="842640267"/>
+              </p:ext>
+            </p:extLst>
+          </p:nvPr>
         </p:nvGraphicFramePr>
         <p:xfrm>
           <a:off x="365760" y="1097280"/>
@@ -5857,9 +5484,27 @@
                 <a:tableStyleId>{5C22544A-7EE6-4342-B048-85BDC9FD1C3A}</a:tableStyleId>
               </a:tblPr>
               <a:tblGrid>
-                <a:gridCol w="3810000"/>
-                <a:gridCol w="3810000"/>
-                <a:gridCol w="3810000"/>
+                <a:gridCol w="3810000">
+                  <a:extLst>
+                    <a:ext uri="{9D8B030D-6E8A-4147-A177-3AD203B41FA5}">
+                      <a16:colId xmlns:a16="http://schemas.microsoft.com/office/drawing/2014/main" val="20000"/>
+                    </a:ext>
+                  </a:extLst>
+                </a:gridCol>
+                <a:gridCol w="3810000">
+                  <a:extLst>
+                    <a:ext uri="{9D8B030D-6E8A-4147-A177-3AD203B41FA5}">
+                      <a16:colId xmlns:a16="http://schemas.microsoft.com/office/drawing/2014/main" val="20001"/>
+                    </a:ext>
+                  </a:extLst>
+                </a:gridCol>
+                <a:gridCol w="3810000">
+                  <a:extLst>
+                    <a:ext uri="{9D8B030D-6E8A-4147-A177-3AD203B41FA5}">
+                      <a16:colId xmlns:a16="http://schemas.microsoft.com/office/drawing/2014/main" val="20002"/>
+                    </a:ext>
+                  </a:extLst>
+                </a:gridCol>
               </a:tblGrid>
               <a:tr h="340042">
                 <a:tc>
@@ -5869,7 +5514,7 @@
                     <a:p>
                       <a:pPr algn="ctr"/>
                       <a:r>
-                        <a:rPr b="1" sz="1300">
+                        <a:rPr sz="1300" b="1">
                           <a:solidFill>
                             <a:srgbClr val="FFFFFF"/>
                           </a:solidFill>
@@ -5892,7 +5537,7 @@
                     <a:p>
                       <a:pPr algn="ctr"/>
                       <a:r>
-                        <a:rPr b="1" sz="1300">
+                        <a:rPr sz="1300" b="1">
                           <a:solidFill>
                             <a:srgbClr val="FFFFFF"/>
                           </a:solidFill>
@@ -5915,7 +5560,7 @@
                     <a:p>
                       <a:pPr algn="ctr"/>
                       <a:r>
-                        <a:rPr b="1" sz="1300">
+                        <a:rPr sz="1300" b="1">
                           <a:solidFill>
                             <a:srgbClr val="FFFFFF"/>
                           </a:solidFill>
@@ -5931,6 +5576,11 @@
                     </a:solidFill>
                   </a:tcPr>
                 </a:tc>
+                <a:extLst>
+                  <a:ext uri="{0D108BD9-81ED-4DB2-BD59-A6C34878D82A}">
+                    <a16:rowId xmlns:a16="http://schemas.microsoft.com/office/drawing/2014/main" val="10000"/>
+                  </a:ext>
+                </a:extLst>
               </a:tr>
               <a:tr h="340042">
                 <a:tc>
@@ -5986,7 +5636,7 @@
                     <a:p>
                       <a:pPr algn="ctr"/>
                       <a:r>
-                        <a:rPr b="1" sz="1200">
+                        <a:rPr sz="1200" b="1">
                           <a:solidFill>
                             <a:srgbClr val="009944"/>
                           </a:solidFill>
@@ -6002,6 +5652,11 @@
                     </a:solidFill>
                   </a:tcPr>
                 </a:tc>
+                <a:extLst>
+                  <a:ext uri="{0D108BD9-81ED-4DB2-BD59-A6C34878D82A}">
+                    <a16:rowId xmlns:a16="http://schemas.microsoft.com/office/drawing/2014/main" val="10001"/>
+                  </a:ext>
+                </a:extLst>
               </a:tr>
               <a:tr h="340042">
                 <a:tc>
@@ -6057,7 +5712,7 @@
                     <a:p>
                       <a:pPr algn="ctr"/>
                       <a:r>
-                        <a:rPr b="1" sz="1200">
+                        <a:rPr sz="1200" b="1">
                           <a:solidFill>
                             <a:srgbClr val="009944"/>
                           </a:solidFill>
@@ -6073,6 +5728,11 @@
                     </a:solidFill>
                   </a:tcPr>
                 </a:tc>
+                <a:extLst>
+                  <a:ext uri="{0D108BD9-81ED-4DB2-BD59-A6C34878D82A}">
+                    <a16:rowId xmlns:a16="http://schemas.microsoft.com/office/drawing/2014/main" val="10002"/>
+                  </a:ext>
+                </a:extLst>
               </a:tr>
               <a:tr h="340042">
                 <a:tc>
@@ -6128,7 +5788,7 @@
                     <a:p>
                       <a:pPr algn="ctr"/>
                       <a:r>
-                        <a:rPr b="1" sz="1200">
+                        <a:rPr sz="1200" b="1">
                           <a:solidFill>
                             <a:srgbClr val="009944"/>
                           </a:solidFill>
@@ -6144,6 +5804,11 @@
                     </a:solidFill>
                   </a:tcPr>
                 </a:tc>
+                <a:extLst>
+                  <a:ext uri="{0D108BD9-81ED-4DB2-BD59-A6C34878D82A}">
+                    <a16:rowId xmlns:a16="http://schemas.microsoft.com/office/drawing/2014/main" val="10003"/>
+                  </a:ext>
+                </a:extLst>
               </a:tr>
               <a:tr h="340042">
                 <a:tc>
@@ -6199,7 +5864,7 @@
                     <a:p>
                       <a:pPr algn="ctr"/>
                       <a:r>
-                        <a:rPr b="1" sz="1200">
+                        <a:rPr sz="1200" b="1">
                           <a:solidFill>
                             <a:srgbClr val="009944"/>
                           </a:solidFill>
@@ -6215,6 +5880,11 @@
                     </a:solidFill>
                   </a:tcPr>
                 </a:tc>
+                <a:extLst>
+                  <a:ext uri="{0D108BD9-81ED-4DB2-BD59-A6C34878D82A}">
+                    <a16:rowId xmlns:a16="http://schemas.microsoft.com/office/drawing/2014/main" val="10004"/>
+                  </a:ext>
+                </a:extLst>
               </a:tr>
               <a:tr h="340042">
                 <a:tc>
@@ -6270,7 +5940,7 @@
                     <a:p>
                       <a:pPr algn="ctr"/>
                       <a:r>
-                        <a:rPr b="1" sz="1200">
+                        <a:rPr sz="1200" b="1">
                           <a:solidFill>
                             <a:srgbClr val="009944"/>
                           </a:solidFill>
@@ -6286,6 +5956,11 @@
                     </a:solidFill>
                   </a:tcPr>
                 </a:tc>
+                <a:extLst>
+                  <a:ext uri="{0D108BD9-81ED-4DB2-BD59-A6C34878D82A}">
+                    <a16:rowId xmlns:a16="http://schemas.microsoft.com/office/drawing/2014/main" val="10005"/>
+                  </a:ext>
+                </a:extLst>
               </a:tr>
               <a:tr h="340042">
                 <a:tc>
@@ -6341,7 +6016,7 @@
                     <a:p>
                       <a:pPr algn="ctr"/>
                       <a:r>
-                        <a:rPr b="1" sz="1200">
+                        <a:rPr sz="1200" b="1">
                           <a:solidFill>
                             <a:srgbClr val="009944"/>
                           </a:solidFill>
@@ -6357,6 +6032,11 @@
                     </a:solidFill>
                   </a:tcPr>
                 </a:tc>
+                <a:extLst>
+                  <a:ext uri="{0D108BD9-81ED-4DB2-BD59-A6C34878D82A}">
+                    <a16:rowId xmlns:a16="http://schemas.microsoft.com/office/drawing/2014/main" val="10006"/>
+                  </a:ext>
+                </a:extLst>
               </a:tr>
               <a:tr h="340042">
                 <a:tc>
@@ -6412,7 +6092,7 @@
                     <a:p>
                       <a:pPr algn="ctr"/>
                       <a:r>
-                        <a:rPr b="1" sz="1200">
+                        <a:rPr sz="1200" b="1">
                           <a:solidFill>
                             <a:srgbClr val="009944"/>
                           </a:solidFill>
@@ -6428,6 +6108,11 @@
                     </a:solidFill>
                   </a:tcPr>
                 </a:tc>
+                <a:extLst>
+                  <a:ext uri="{0D108BD9-81ED-4DB2-BD59-A6C34878D82A}">
+                    <a16:rowId xmlns:a16="http://schemas.microsoft.com/office/drawing/2014/main" val="10007"/>
+                  </a:ext>
+                </a:extLst>
               </a:tr>
               <a:tr h="340042">
                 <a:tc>
@@ -6483,7 +6168,7 @@
                     <a:p>
                       <a:pPr algn="ctr"/>
                       <a:r>
-                        <a:rPr b="1" sz="1200">
+                        <a:rPr sz="1200" b="1">
                           <a:solidFill>
                             <a:srgbClr val="009944"/>
                           </a:solidFill>
@@ -6499,6 +6184,11 @@
                     </a:solidFill>
                   </a:tcPr>
                 </a:tc>
+                <a:extLst>
+                  <a:ext uri="{0D108BD9-81ED-4DB2-BD59-A6C34878D82A}">
+                    <a16:rowId xmlns:a16="http://schemas.microsoft.com/office/drawing/2014/main" val="10008"/>
+                  </a:ext>
+                </a:extLst>
               </a:tr>
               <a:tr h="340042">
                 <a:tc>
@@ -6554,7 +6244,7 @@
                     <a:p>
                       <a:pPr algn="ctr"/>
                       <a:r>
-                        <a:rPr b="1" sz="1200">
+                        <a:rPr sz="1200" b="1">
                           <a:solidFill>
                             <a:srgbClr val="009944"/>
                           </a:solidFill>
@@ -6570,6 +6260,11 @@
                     </a:solidFill>
                   </a:tcPr>
                 </a:tc>
+                <a:extLst>
+                  <a:ext uri="{0D108BD9-81ED-4DB2-BD59-A6C34878D82A}">
+                    <a16:rowId xmlns:a16="http://schemas.microsoft.com/office/drawing/2014/main" val="10009"/>
+                  </a:ext>
+                </a:extLst>
               </a:tr>
               <a:tr h="340042">
                 <a:tc>
@@ -6625,7 +6320,7 @@
                     <a:p>
                       <a:pPr algn="ctr"/>
                       <a:r>
-                        <a:rPr b="1" sz="1200">
+                        <a:rPr sz="1200" b="1">
                           <a:solidFill>
                             <a:srgbClr val="009944"/>
                           </a:solidFill>
@@ -6641,6 +6336,11 @@
                     </a:solidFill>
                   </a:tcPr>
                 </a:tc>
+                <a:extLst>
+                  <a:ext uri="{0D108BD9-81ED-4DB2-BD59-A6C34878D82A}">
+                    <a16:rowId xmlns:a16="http://schemas.microsoft.com/office/drawing/2014/main" val="10010"/>
+                  </a:ext>
+                </a:extLst>
               </a:tr>
               <a:tr h="340042">
                 <a:tc>
@@ -6696,7 +6396,7 @@
                     <a:p>
                       <a:pPr algn="ctr"/>
                       <a:r>
-                        <a:rPr b="1" sz="1200">
+                        <a:rPr sz="1200" b="1">
                           <a:solidFill>
                             <a:srgbClr val="009944"/>
                           </a:solidFill>
@@ -6712,6 +6412,11 @@
                     </a:solidFill>
                   </a:tcPr>
                 </a:tc>
+                <a:extLst>
+                  <a:ext uri="{0D108BD9-81ED-4DB2-BD59-A6C34878D82A}">
+                    <a16:rowId xmlns:a16="http://schemas.microsoft.com/office/drawing/2014/main" val="10011"/>
+                  </a:ext>
+                </a:extLst>
               </a:tr>
               <a:tr h="340042">
                 <a:tc>
@@ -6767,7 +6472,7 @@
                     <a:p>
                       <a:pPr algn="ctr"/>
                       <a:r>
-                        <a:rPr b="1" sz="1200">
+                        <a:rPr sz="1200" b="1">
                           <a:solidFill>
                             <a:srgbClr val="009944"/>
                           </a:solidFill>
@@ -6783,6 +6488,11 @@
                     </a:solidFill>
                   </a:tcPr>
                 </a:tc>
+                <a:extLst>
+                  <a:ext uri="{0D108BD9-81ED-4DB2-BD59-A6C34878D82A}">
+                    <a16:rowId xmlns:a16="http://schemas.microsoft.com/office/drawing/2014/main" val="10012"/>
+                  </a:ext>
+                </a:extLst>
               </a:tr>
               <a:tr h="340042">
                 <a:tc>
@@ -6838,7 +6548,7 @@
                     <a:p>
                       <a:pPr algn="ctr"/>
                       <a:r>
-                        <a:rPr b="1" sz="1200">
+                        <a:rPr sz="1200" b="1">
                           <a:solidFill>
                             <a:srgbClr val="009944"/>
                           </a:solidFill>
@@ -6854,6 +6564,11 @@
                     </a:solidFill>
                   </a:tcPr>
                 </a:tc>
+                <a:extLst>
+                  <a:ext uri="{0D108BD9-81ED-4DB2-BD59-A6C34878D82A}">
+                    <a16:rowId xmlns:a16="http://schemas.microsoft.com/office/drawing/2014/main" val="10013"/>
+                  </a:ext>
+                </a:extLst>
               </a:tr>
               <a:tr h="340042">
                 <a:tc>
@@ -6863,14 +6578,29 @@
                     <a:p>
                       <a:pPr algn="l"/>
                       <a:r>
-                        <a:rPr sz="1200">
+                        <a:rPr sz="1200" dirty="0">
                           <a:solidFill>
                             <a:srgbClr val="333333"/>
                           </a:solidFill>
                           <a:latin typeface="Calibri"/>
                         </a:rPr>
-                        <a:t>Single binary – no JVM</a:t>
+                        <a:t>Single binary – no </a:t>
                       </a:r>
+                      <a:r>
+                        <a:rPr lang="en-US" sz="1200" dirty="0">
+                          <a:solidFill>
+                            <a:srgbClr val="333333"/>
+                          </a:solidFill>
+                          <a:latin typeface="Calibri"/>
+                        </a:rPr>
+                        <a:t>external dependencies</a:t>
+                      </a:r>
+                      <a:endParaRPr sz="1200" dirty="0">
+                        <a:solidFill>
+                          <a:srgbClr val="333333"/>
+                        </a:solidFill>
+                        <a:latin typeface="Calibri"/>
+                      </a:endParaRPr>
                     </a:p>
                   </a:txBody>
                   <a:tcPr>
@@ -6886,14 +6616,20 @@
                     <a:p>
                       <a:pPr algn="ctr"/>
                       <a:r>
-                        <a:rPr sz="1200">
+                        <a:rPr lang="en-US" sz="1200" b="1" dirty="0">
                           <a:solidFill>
-                            <a:srgbClr val="CC0000"/>
+                            <a:srgbClr val="009944"/>
                           </a:solidFill>
-                          <a:latin typeface="Calibri"/>
+                          <a:latin typeface="+mn-lt"/>
                         </a:rPr>
-                        <a:t>No</a:t>
+                        <a:t>Yes</a:t>
                       </a:r>
+                      <a:endParaRPr sz="1200" dirty="0">
+                        <a:solidFill>
+                          <a:srgbClr val="CC0000"/>
+                        </a:solidFill>
+                        <a:latin typeface="Calibri"/>
+                      </a:endParaRPr>
                     </a:p>
                   </a:txBody>
                   <a:tcPr>
@@ -6909,7 +6645,7 @@
                     <a:p>
                       <a:pPr algn="ctr"/>
                       <a:r>
-                        <a:rPr b="1" sz="1200">
+                        <a:rPr sz="1200" b="1" dirty="0">
                           <a:solidFill>
                             <a:srgbClr val="009944"/>
                           </a:solidFill>
@@ -6925,6 +6661,11 @@
                     </a:solidFill>
                   </a:tcPr>
                 </a:tc>
+                <a:extLst>
+                  <a:ext uri="{0D108BD9-81ED-4DB2-BD59-A6C34878D82A}">
+                    <a16:rowId xmlns:a16="http://schemas.microsoft.com/office/drawing/2014/main" val="10014"/>
+                  </a:ext>
+                </a:extLst>
               </a:tr>
               <a:tr h="340050">
                 <a:tc>
@@ -6980,7 +6721,7 @@
                     <a:p>
                       <a:pPr algn="ctr"/>
                       <a:r>
-                        <a:rPr b="1" sz="1200">
+                        <a:rPr sz="1200" b="1" dirty="0">
                           <a:solidFill>
                             <a:srgbClr val="009944"/>
                           </a:solidFill>
@@ -6996,6 +6737,11 @@
                     </a:solidFill>
                   </a:tcPr>
                 </a:tc>
+                <a:extLst>
+                  <a:ext uri="{0D108BD9-81ED-4DB2-BD59-A6C34878D82A}">
+                    <a16:rowId xmlns:a16="http://schemas.microsoft.com/office/drawing/2014/main" val="10015"/>
+                  </a:ext>
+                </a:extLst>
               </a:tr>
             </a:tbl>
           </a:graphicData>
@@ -7009,8 +6755,8 @@
 </p:sld>
 </file>
 
-<file path=ppt/slides/slide15.xml><?xml version="1.0" encoding="utf-8"?>
-<p:sld xmlns:a="http://schemas.openxmlformats.org/drawingml/2006/main" xmlns:p="http://schemas.openxmlformats.org/presentationml/2006/main" xmlns:r="http://schemas.openxmlformats.org/officeDocument/2006/relationships">
+<file path=ppt/slides/slide14.xml><?xml version="1.0" encoding="utf-8"?>
+<p:sld xmlns:a="http://schemas.openxmlformats.org/drawingml/2006/main" xmlns:r="http://schemas.openxmlformats.org/officeDocument/2006/relationships" xmlns:p="http://schemas.openxmlformats.org/presentationml/2006/main">
   <p:cSld>
     <p:spTree>
       <p:nvGrpSpPr>
@@ -7018,7 +6764,14 @@
         <p:cNvGrpSpPr/>
         <p:nvPr/>
       </p:nvGrpSpPr>
-      <p:grpSpPr/>
+      <p:grpSpPr>
+        <a:xfrm>
+          <a:off x="0" y="0"/>
+          <a:ext cx="0" cy="0"/>
+          <a:chOff x="0" y="0"/>
+          <a:chExt cx="0" cy="0"/>
+        </a:xfrm>
+      </p:grpSpPr>
       <p:sp>
         <p:nvSpPr>
           <p:cNvPr id="2" name="Rectangle 1"/>
@@ -7059,6 +6812,7 @@
           <a:lstStyle/>
           <a:p>
             <a:pPr algn="ctr"/>
+            <a:endParaRPr/>
           </a:p>
         </p:txBody>
       </p:sp>
@@ -7172,6 +6926,7 @@
           <a:lstStyle/>
           <a:p>
             <a:pPr algn="ctr"/>
+            <a:endParaRPr/>
           </a:p>
         </p:txBody>
       </p:sp>
@@ -7250,6 +7005,7 @@
           <a:lstStyle/>
           <a:p>
             <a:pPr algn="ctr"/>
+            <a:endParaRPr/>
           </a:p>
         </p:txBody>
       </p:sp>
@@ -7316,8 +7072,8 @@
 </p:sld>
 </file>
 
-<file path=ppt/slides/slide16.xml><?xml version="1.0" encoding="utf-8"?>
-<p:sld xmlns:a="http://schemas.openxmlformats.org/drawingml/2006/main" xmlns:p="http://schemas.openxmlformats.org/presentationml/2006/main" xmlns:r="http://schemas.openxmlformats.org/officeDocument/2006/relationships">
+<file path=ppt/slides/slide15.xml><?xml version="1.0" encoding="utf-8"?>
+<p:sld xmlns:a="http://schemas.openxmlformats.org/drawingml/2006/main" xmlns:r="http://schemas.openxmlformats.org/officeDocument/2006/relationships" xmlns:p="http://schemas.openxmlformats.org/presentationml/2006/main">
   <p:cSld>
     <p:spTree>
       <p:nvGrpSpPr>
@@ -7325,7 +7081,14 @@
         <p:cNvGrpSpPr/>
         <p:nvPr/>
       </p:nvGrpSpPr>
-      <p:grpSpPr/>
+      <p:grpSpPr>
+        <a:xfrm>
+          <a:off x="0" y="0"/>
+          <a:ext cx="0" cy="0"/>
+          <a:chOff x="0" y="0"/>
+          <a:chExt cx="0" cy="0"/>
+        </a:xfrm>
+      </p:grpSpPr>
       <p:sp>
         <p:nvSpPr>
           <p:cNvPr id="2" name="Rectangle 1"/>
@@ -7366,6 +7129,7 @@
           <a:lstStyle/>
           <a:p>
             <a:pPr algn="ctr"/>
+            <a:endParaRPr/>
           </a:p>
         </p:txBody>
       </p:sp>
@@ -7409,6 +7173,7 @@
           <a:lstStyle/>
           <a:p>
             <a:pPr algn="ctr"/>
+            <a:endParaRPr/>
           </a:p>
         </p:txBody>
       </p:sp>
@@ -7561,7 +7326,7 @@
 </file>
 
 <file path=ppt/slides/slide2.xml><?xml version="1.0" encoding="utf-8"?>
-<p:sld xmlns:a="http://schemas.openxmlformats.org/drawingml/2006/main" xmlns:p="http://schemas.openxmlformats.org/presentationml/2006/main" xmlns:r="http://schemas.openxmlformats.org/officeDocument/2006/relationships">
+<p:sld xmlns:a="http://schemas.openxmlformats.org/drawingml/2006/main" xmlns:r="http://schemas.openxmlformats.org/officeDocument/2006/relationships" xmlns:p="http://schemas.openxmlformats.org/presentationml/2006/main">
   <p:cSld>
     <p:spTree>
       <p:nvGrpSpPr>
@@ -7569,7 +7334,14 @@
         <p:cNvGrpSpPr/>
         <p:nvPr/>
       </p:nvGrpSpPr>
-      <p:grpSpPr/>
+      <p:grpSpPr>
+        <a:xfrm>
+          <a:off x="0" y="0"/>
+          <a:ext cx="0" cy="0"/>
+          <a:chOff x="0" y="0"/>
+          <a:chExt cx="0" cy="0"/>
+        </a:xfrm>
+      </p:grpSpPr>
       <p:sp>
         <p:nvSpPr>
           <p:cNvPr id="2" name="Rectangle 1"/>
@@ -7610,6 +7382,7 @@
           <a:lstStyle/>
           <a:p>
             <a:pPr algn="ctr"/>
+            <a:endParaRPr/>
           </a:p>
         </p:txBody>
       </p:sp>
@@ -7688,6 +7461,7 @@
           <a:lstStyle/>
           <a:p>
             <a:pPr algn="ctr"/>
+            <a:endParaRPr/>
           </a:p>
         </p:txBody>
       </p:sp>
@@ -7813,7 +7587,7 @@
         <p:spPr>
           <a:xfrm>
             <a:off x="6217920" y="1188720"/>
-            <a:ext cx="5486400" cy="5029200"/>
+            <a:ext cx="5486400" cy="1400383"/>
           </a:xfrm>
           <a:prstGeom prst="rect">
             <a:avLst/>
@@ -7827,7 +7601,7 @@
           <a:lstStyle/>
           <a:p>
             <a:r>
-              <a:rPr sz="1700" b="0">
+              <a:rPr sz="1700" b="0" dirty="0">
                 <a:solidFill>
                   <a:srgbClr val="333333"/>
                 </a:solidFill>
@@ -7838,7 +7612,7 @@
           </a:p>
           <a:p>
             <a:r>
-              <a:rPr sz="1700" b="0">
+              <a:rPr sz="1700" b="0" dirty="0">
                 <a:solidFill>
                   <a:srgbClr val="333333"/>
                 </a:solidFill>
@@ -7849,7 +7623,7 @@
           </a:p>
           <a:p>
             <a:r>
-              <a:rPr sz="1700" b="0">
+              <a:rPr sz="1700" b="0" dirty="0">
                 <a:solidFill>
                   <a:srgbClr val="333333"/>
                 </a:solidFill>
@@ -7860,18 +7634,18 @@
           </a:p>
           <a:p>
             <a:r>
-              <a:rPr sz="1700" b="0">
+              <a:rPr lang="en-US" sz="1700" b="0" dirty="0">
                 <a:solidFill>
                   <a:srgbClr val="333333"/>
                 </a:solidFill>
                 <a:latin typeface="Calibri"/>
               </a:rPr>
-              <a:t>  9.  Single Binary – No JVM Required</a:t>
-            </a:r>
-          </a:p>
-          <a:p>
-            <a:r>
-              <a:rPr sz="1700" b="0">
+              <a:t>  9.  Single Binary – No external dependencies required</a:t>
+            </a:r>
+          </a:p>
+          <a:p>
+            <a:r>
+              <a:rPr lang="en-US" sz="1700" b="0" dirty="0">
                 <a:solidFill>
                   <a:srgbClr val="333333"/>
                 </a:solidFill>
@@ -7891,7 +7665,7 @@
 </file>
 
 <file path=ppt/slides/slide3.xml><?xml version="1.0" encoding="utf-8"?>
-<p:sld xmlns:a="http://schemas.openxmlformats.org/drawingml/2006/main" xmlns:p="http://schemas.openxmlformats.org/presentationml/2006/main" xmlns:r="http://schemas.openxmlformats.org/officeDocument/2006/relationships">
+<p:sld xmlns:a="http://schemas.openxmlformats.org/drawingml/2006/main" xmlns:r="http://schemas.openxmlformats.org/officeDocument/2006/relationships" xmlns:p="http://schemas.openxmlformats.org/presentationml/2006/main">
   <p:cSld>
     <p:spTree>
       <p:nvGrpSpPr>
@@ -7899,7 +7673,14 @@
         <p:cNvGrpSpPr/>
         <p:nvPr/>
       </p:nvGrpSpPr>
-      <p:grpSpPr/>
+      <p:grpSpPr>
+        <a:xfrm>
+          <a:off x="0" y="0"/>
+          <a:ext cx="0" cy="0"/>
+          <a:chOff x="0" y="0"/>
+          <a:chExt cx="0" cy="0"/>
+        </a:xfrm>
+      </p:grpSpPr>
       <p:sp>
         <p:nvSpPr>
           <p:cNvPr id="2" name="Rectangle 1"/>
@@ -7940,6 +7721,7 @@
           <a:lstStyle/>
           <a:p>
             <a:pPr algn="ctr"/>
+            <a:endParaRPr/>
           </a:p>
         </p:txBody>
       </p:sp>
@@ -8053,6 +7835,7 @@
           <a:lstStyle/>
           <a:p>
             <a:pPr algn="ctr"/>
+            <a:endParaRPr/>
           </a:p>
         </p:txBody>
       </p:sp>
@@ -8233,7 +8016,7 @@
 </file>
 
 <file path=ppt/slides/slide4.xml><?xml version="1.0" encoding="utf-8"?>
-<p:sld xmlns:a="http://schemas.openxmlformats.org/drawingml/2006/main" xmlns:p="http://schemas.openxmlformats.org/presentationml/2006/main" xmlns:r="http://schemas.openxmlformats.org/officeDocument/2006/relationships">
+<p:sld xmlns:a="http://schemas.openxmlformats.org/drawingml/2006/main" xmlns:r="http://schemas.openxmlformats.org/officeDocument/2006/relationships" xmlns:p="http://schemas.openxmlformats.org/presentationml/2006/main">
   <p:cSld>
     <p:spTree>
       <p:nvGrpSpPr>
@@ -8241,7 +8024,14 @@
         <p:cNvGrpSpPr/>
         <p:nvPr/>
       </p:nvGrpSpPr>
-      <p:grpSpPr/>
+      <p:grpSpPr>
+        <a:xfrm>
+          <a:off x="0" y="0"/>
+          <a:ext cx="0" cy="0"/>
+          <a:chOff x="0" y="0"/>
+          <a:chExt cx="0" cy="0"/>
+        </a:xfrm>
+      </p:grpSpPr>
       <p:sp>
         <p:nvSpPr>
           <p:cNvPr id="2" name="Rectangle 1"/>
@@ -8282,6 +8072,7 @@
           <a:lstStyle/>
           <a:p>
             <a:pPr algn="ctr"/>
+            <a:endParaRPr/>
           </a:p>
         </p:txBody>
       </p:sp>
@@ -8395,6 +8186,7 @@
           <a:lstStyle/>
           <a:p>
             <a:pPr algn="ctr"/>
+            <a:endParaRPr/>
           </a:p>
         </p:txBody>
       </p:sp>
@@ -8508,6 +8300,7 @@
           <a:lstStyle/>
           <a:p>
             <a:pPr algn="ctr"/>
+            <a:endParaRPr/>
           </a:p>
         </p:txBody>
       </p:sp>
@@ -8624,6 +8417,7 @@
           <a:lstStyle/>
           <a:p>
             <a:pPr algn="ctr"/>
+            <a:endParaRPr/>
           </a:p>
         </p:txBody>
       </p:sp>
@@ -8684,9 +8478,27 @@
                 <a:tableStyleId>{5C22544A-7EE6-4342-B048-85BDC9FD1C3A}</a:tableStyleId>
               </a:tblPr>
               <a:tblGrid>
-                <a:gridCol w="2743200"/>
-                <a:gridCol w="2743200"/>
-                <a:gridCol w="2743200"/>
+                <a:gridCol w="2743200">
+                  <a:extLst>
+                    <a:ext uri="{9D8B030D-6E8A-4147-A177-3AD203B41FA5}">
+                      <a16:colId xmlns:a16="http://schemas.microsoft.com/office/drawing/2014/main" val="20000"/>
+                    </a:ext>
+                  </a:extLst>
+                </a:gridCol>
+                <a:gridCol w="2743200">
+                  <a:extLst>
+                    <a:ext uri="{9D8B030D-6E8A-4147-A177-3AD203B41FA5}">
+                      <a16:colId xmlns:a16="http://schemas.microsoft.com/office/drawing/2014/main" val="20001"/>
+                    </a:ext>
+                  </a:extLst>
+                </a:gridCol>
+                <a:gridCol w="2743200">
+                  <a:extLst>
+                    <a:ext uri="{9D8B030D-6E8A-4147-A177-3AD203B41FA5}">
+                      <a16:colId xmlns:a16="http://schemas.microsoft.com/office/drawing/2014/main" val="20002"/>
+                    </a:ext>
+                  </a:extLst>
+                </a:gridCol>
               </a:tblGrid>
               <a:tr h="388620">
                 <a:tc>
@@ -8696,7 +8508,7 @@
                     <a:p>
                       <a:pPr algn="ctr"/>
                       <a:r>
-                        <a:rPr b="1" sz="1300">
+                        <a:rPr sz="1300" b="1">
                           <a:solidFill>
                             <a:srgbClr val="FFFFFF"/>
                           </a:solidFill>
@@ -8719,7 +8531,7 @@
                     <a:p>
                       <a:pPr algn="ctr"/>
                       <a:r>
-                        <a:rPr b="1" sz="1300">
+                        <a:rPr sz="1300" b="1">
                           <a:solidFill>
                             <a:srgbClr val="FFFFFF"/>
                           </a:solidFill>
@@ -8742,7 +8554,7 @@
                     <a:p>
                       <a:pPr algn="ctr"/>
                       <a:r>
-                        <a:rPr b="1" sz="1300">
+                        <a:rPr sz="1300" b="1">
                           <a:solidFill>
                             <a:srgbClr val="FFFFFF"/>
                           </a:solidFill>
@@ -8758,6 +8570,11 @@
                     </a:solidFill>
                   </a:tcPr>
                 </a:tc>
+                <a:extLst>
+                  <a:ext uri="{0D108BD9-81ED-4DB2-BD59-A6C34878D82A}">
+                    <a16:rowId xmlns:a16="http://schemas.microsoft.com/office/drawing/2014/main" val="10000"/>
+                  </a:ext>
+                </a:extLst>
               </a:tr>
               <a:tr h="388620">
                 <a:tc>
@@ -8829,6 +8646,11 @@
                     </a:solidFill>
                   </a:tcPr>
                 </a:tc>
+                <a:extLst>
+                  <a:ext uri="{0D108BD9-81ED-4DB2-BD59-A6C34878D82A}">
+                    <a16:rowId xmlns:a16="http://schemas.microsoft.com/office/drawing/2014/main" val="10001"/>
+                  </a:ext>
+                </a:extLst>
               </a:tr>
               <a:tr h="388620">
                 <a:tc>
@@ -8900,6 +8722,11 @@
                     </a:solidFill>
                   </a:tcPr>
                 </a:tc>
+                <a:extLst>
+                  <a:ext uri="{0D108BD9-81ED-4DB2-BD59-A6C34878D82A}">
+                    <a16:rowId xmlns:a16="http://schemas.microsoft.com/office/drawing/2014/main" val="10002"/>
+                  </a:ext>
+                </a:extLst>
               </a:tr>
               <a:tr h="388620">
                 <a:tc>
@@ -8971,6 +8798,11 @@
                     </a:solidFill>
                   </a:tcPr>
                 </a:tc>
+                <a:extLst>
+                  <a:ext uri="{0D108BD9-81ED-4DB2-BD59-A6C34878D82A}">
+                    <a16:rowId xmlns:a16="http://schemas.microsoft.com/office/drawing/2014/main" val="10003"/>
+                  </a:ext>
+                </a:extLst>
               </a:tr>
             </a:tbl>
           </a:graphicData>
@@ -9020,7 +8852,7 @@
 </file>
 
 <file path=ppt/slides/slide5.xml><?xml version="1.0" encoding="utf-8"?>
-<p:sld xmlns:a="http://schemas.openxmlformats.org/drawingml/2006/main" xmlns:p="http://schemas.openxmlformats.org/presentationml/2006/main" xmlns:r="http://schemas.openxmlformats.org/officeDocument/2006/relationships">
+<p:sld xmlns:a="http://schemas.openxmlformats.org/drawingml/2006/main" xmlns:r="http://schemas.openxmlformats.org/officeDocument/2006/relationships" xmlns:p="http://schemas.openxmlformats.org/presentationml/2006/main">
   <p:cSld>
     <p:spTree>
       <p:nvGrpSpPr>
@@ -9028,7 +8860,14 @@
         <p:cNvGrpSpPr/>
         <p:nvPr/>
       </p:nvGrpSpPr>
-      <p:grpSpPr/>
+      <p:grpSpPr>
+        <a:xfrm>
+          <a:off x="0" y="0"/>
+          <a:ext cx="0" cy="0"/>
+          <a:chOff x="0" y="0"/>
+          <a:chExt cx="0" cy="0"/>
+        </a:xfrm>
+      </p:grpSpPr>
       <p:sp>
         <p:nvSpPr>
           <p:cNvPr id="2" name="Rectangle 1"/>
@@ -9069,6 +8908,7 @@
           <a:lstStyle/>
           <a:p>
             <a:pPr algn="ctr"/>
+            <a:endParaRPr/>
           </a:p>
         </p:txBody>
       </p:sp>
@@ -9182,6 +9022,7 @@
           <a:lstStyle/>
           <a:p>
             <a:pPr algn="ctr"/>
+            <a:endParaRPr/>
           </a:p>
         </p:txBody>
       </p:sp>
@@ -9295,6 +9136,7 @@
           <a:lstStyle/>
           <a:p>
             <a:pPr algn="ctr"/>
+            <a:endParaRPr/>
           </a:p>
         </p:txBody>
       </p:sp>
@@ -9387,7 +9229,7 @@
 </file>
 
 <file path=ppt/slides/slide6.xml><?xml version="1.0" encoding="utf-8"?>
-<p:sld xmlns:a="http://schemas.openxmlformats.org/drawingml/2006/main" xmlns:p="http://schemas.openxmlformats.org/presentationml/2006/main" xmlns:r="http://schemas.openxmlformats.org/officeDocument/2006/relationships">
+<p:sld xmlns:a="http://schemas.openxmlformats.org/drawingml/2006/main" xmlns:r="http://schemas.openxmlformats.org/officeDocument/2006/relationships" xmlns:p="http://schemas.openxmlformats.org/presentationml/2006/main">
   <p:cSld>
     <p:spTree>
       <p:nvGrpSpPr>
@@ -9395,7 +9237,14 @@
         <p:cNvGrpSpPr/>
         <p:nvPr/>
       </p:nvGrpSpPr>
-      <p:grpSpPr/>
+      <p:grpSpPr>
+        <a:xfrm>
+          <a:off x="0" y="0"/>
+          <a:ext cx="0" cy="0"/>
+          <a:chOff x="0" y="0"/>
+          <a:chExt cx="0" cy="0"/>
+        </a:xfrm>
+      </p:grpSpPr>
       <p:sp>
         <p:nvSpPr>
           <p:cNvPr id="2" name="Rectangle 1"/>
@@ -9436,6 +9285,7 @@
           <a:lstStyle/>
           <a:p>
             <a:pPr algn="ctr"/>
+            <a:endParaRPr/>
           </a:p>
         </p:txBody>
       </p:sp>
@@ -9549,6 +9399,7 @@
           <a:lstStyle/>
           <a:p>
             <a:pPr algn="ctr"/>
+            <a:endParaRPr/>
           </a:p>
         </p:txBody>
       </p:sp>
@@ -9662,6 +9513,7 @@
           <a:lstStyle/>
           <a:p>
             <a:pPr algn="ctr"/>
+            <a:endParaRPr/>
           </a:p>
         </p:txBody>
       </p:sp>
@@ -9780,6 +9632,7 @@
           <a:lstStyle/>
           <a:p>
             <a:pPr algn="ctr"/>
+            <a:endParaRPr/>
           </a:p>
         </p:txBody>
       </p:sp>
@@ -9902,7 +9755,7 @@
 </file>
 
 <file path=ppt/slides/slide7.xml><?xml version="1.0" encoding="utf-8"?>
-<p:sld xmlns:a="http://schemas.openxmlformats.org/drawingml/2006/main" xmlns:p="http://schemas.openxmlformats.org/presentationml/2006/main" xmlns:r="http://schemas.openxmlformats.org/officeDocument/2006/relationships">
+<p:sld xmlns:a="http://schemas.openxmlformats.org/drawingml/2006/main" xmlns:r="http://schemas.openxmlformats.org/officeDocument/2006/relationships" xmlns:p="http://schemas.openxmlformats.org/presentationml/2006/main">
   <p:cSld>
     <p:spTree>
       <p:nvGrpSpPr>
@@ -9910,7 +9763,14 @@
         <p:cNvGrpSpPr/>
         <p:nvPr/>
       </p:nvGrpSpPr>
-      <p:grpSpPr/>
+      <p:grpSpPr>
+        <a:xfrm>
+          <a:off x="0" y="0"/>
+          <a:ext cx="0" cy="0"/>
+          <a:chOff x="0" y="0"/>
+          <a:chExt cx="0" cy="0"/>
+        </a:xfrm>
+      </p:grpSpPr>
       <p:sp>
         <p:nvSpPr>
           <p:cNvPr id="2" name="Rectangle 1"/>
@@ -9951,6 +9811,7 @@
           <a:lstStyle/>
           <a:p>
             <a:pPr algn="ctr"/>
+            <a:endParaRPr/>
           </a:p>
         </p:txBody>
       </p:sp>
@@ -10064,6 +9925,7 @@
           <a:lstStyle/>
           <a:p>
             <a:pPr algn="ctr"/>
+            <a:endParaRPr/>
           </a:p>
         </p:txBody>
       </p:sp>
@@ -10142,6 +10004,7 @@
           <a:lstStyle/>
           <a:p>
             <a:pPr algn="ctr"/>
+            <a:endParaRPr/>
           </a:p>
         </p:txBody>
       </p:sp>
@@ -10269,6 +10132,7 @@
           <a:lstStyle/>
           <a:p>
             <a:pPr algn="ctr"/>
+            <a:endParaRPr/>
           </a:p>
         </p:txBody>
       </p:sp>
@@ -10382,7 +10246,7 @@
 </file>
 
 <file path=ppt/slides/slide8.xml><?xml version="1.0" encoding="utf-8"?>
-<p:sld xmlns:a="http://schemas.openxmlformats.org/drawingml/2006/main" xmlns:p="http://schemas.openxmlformats.org/presentationml/2006/main" xmlns:r="http://schemas.openxmlformats.org/officeDocument/2006/relationships">
+<p:sld xmlns:a="http://schemas.openxmlformats.org/drawingml/2006/main" xmlns:r="http://schemas.openxmlformats.org/officeDocument/2006/relationships" xmlns:p="http://schemas.openxmlformats.org/presentationml/2006/main">
   <p:cSld>
     <p:spTree>
       <p:nvGrpSpPr>
@@ -10390,7 +10254,14 @@
         <p:cNvGrpSpPr/>
         <p:nvPr/>
       </p:nvGrpSpPr>
-      <p:grpSpPr/>
+      <p:grpSpPr>
+        <a:xfrm>
+          <a:off x="0" y="0"/>
+          <a:ext cx="0" cy="0"/>
+          <a:chOff x="0" y="0"/>
+          <a:chExt cx="0" cy="0"/>
+        </a:xfrm>
+      </p:grpSpPr>
       <p:sp>
         <p:nvSpPr>
           <p:cNvPr id="2" name="Rectangle 1"/>
@@ -10431,6 +10302,7 @@
           <a:lstStyle/>
           <a:p>
             <a:pPr algn="ctr"/>
+            <a:endParaRPr/>
           </a:p>
         </p:txBody>
       </p:sp>
@@ -10544,6 +10416,7 @@
           <a:lstStyle/>
           <a:p>
             <a:pPr algn="ctr"/>
+            <a:endParaRPr/>
           </a:p>
         </p:txBody>
       </p:sp>
@@ -10748,6 +10621,7 @@
           <a:lstStyle/>
           <a:p>
             <a:pPr algn="ctr"/>
+            <a:endParaRPr/>
           </a:p>
         </p:txBody>
       </p:sp>
@@ -10868,7 +10742,7 @@
 </file>
 
 <file path=ppt/slides/slide9.xml><?xml version="1.0" encoding="utf-8"?>
-<p:sld xmlns:a="http://schemas.openxmlformats.org/drawingml/2006/main" xmlns:p="http://schemas.openxmlformats.org/presentationml/2006/main" xmlns:r="http://schemas.openxmlformats.org/officeDocument/2006/relationships">
+<p:sld xmlns:a="http://schemas.openxmlformats.org/drawingml/2006/main" xmlns:r="http://schemas.openxmlformats.org/officeDocument/2006/relationships" xmlns:p="http://schemas.openxmlformats.org/presentationml/2006/main">
   <p:cSld>
     <p:spTree>
       <p:nvGrpSpPr>
@@ -10876,7 +10750,14 @@
         <p:cNvGrpSpPr/>
         <p:nvPr/>
       </p:nvGrpSpPr>
-      <p:grpSpPr/>
+      <p:grpSpPr>
+        <a:xfrm>
+          <a:off x="0" y="0"/>
+          <a:ext cx="0" cy="0"/>
+          <a:chOff x="0" y="0"/>
+          <a:chExt cx="0" cy="0"/>
+        </a:xfrm>
+      </p:grpSpPr>
       <p:sp>
         <p:nvSpPr>
           <p:cNvPr id="2" name="Rectangle 1"/>
@@ -10917,6 +10798,7 @@
           <a:lstStyle/>
           <a:p>
             <a:pPr algn="ctr"/>
+            <a:endParaRPr/>
           </a:p>
         </p:txBody>
       </p:sp>
@@ -11030,6 +10912,7 @@
           <a:lstStyle/>
           <a:p>
             <a:pPr algn="ctr"/>
+            <a:endParaRPr/>
           </a:p>
         </p:txBody>
       </p:sp>
@@ -11087,8 +10970,20 @@
                 <a:tableStyleId>{5C22544A-7EE6-4342-B048-85BDC9FD1C3A}</a:tableStyleId>
               </a:tblPr>
               <a:tblGrid>
-                <a:gridCol w="2743200"/>
-                <a:gridCol w="2743200"/>
+                <a:gridCol w="2743200">
+                  <a:extLst>
+                    <a:ext uri="{9D8B030D-6E8A-4147-A177-3AD203B41FA5}">
+                      <a16:colId xmlns:a16="http://schemas.microsoft.com/office/drawing/2014/main" val="20000"/>
+                    </a:ext>
+                  </a:extLst>
+                </a:gridCol>
+                <a:gridCol w="2743200">
+                  <a:extLst>
+                    <a:ext uri="{9D8B030D-6E8A-4147-A177-3AD203B41FA5}">
+                      <a16:colId xmlns:a16="http://schemas.microsoft.com/office/drawing/2014/main" val="20001"/>
+                    </a:ext>
+                  </a:extLst>
+                </a:gridCol>
               </a:tblGrid>
               <a:tr h="473825">
                 <a:tc>
@@ -11098,7 +10993,7 @@
                     <a:p>
                       <a:pPr algn="ctr"/>
                       <a:r>
-                        <a:rPr b="1" sz="1300">
+                        <a:rPr sz="1300" b="1">
                           <a:solidFill>
                             <a:srgbClr val="FFFFFF"/>
                           </a:solidFill>
@@ -11121,7 +11016,7 @@
                     <a:p>
                       <a:pPr algn="ctr"/>
                       <a:r>
-                        <a:rPr b="1" sz="1300">
+                        <a:rPr sz="1300" b="1">
                           <a:solidFill>
                             <a:srgbClr val="FFFFFF"/>
                           </a:solidFill>
@@ -11137,6 +11032,11 @@
                     </a:solidFill>
                   </a:tcPr>
                 </a:tc>
+                <a:extLst>
+                  <a:ext uri="{0D108BD9-81ED-4DB2-BD59-A6C34878D82A}">
+                    <a16:rowId xmlns:a16="http://schemas.microsoft.com/office/drawing/2014/main" val="10000"/>
+                  </a:ext>
+                </a:extLst>
               </a:tr>
               <a:tr h="473825">
                 <a:tc>
@@ -11185,6 +11085,11 @@
                     </a:solidFill>
                   </a:tcPr>
                 </a:tc>
+                <a:extLst>
+                  <a:ext uri="{0D108BD9-81ED-4DB2-BD59-A6C34878D82A}">
+                    <a16:rowId xmlns:a16="http://schemas.microsoft.com/office/drawing/2014/main" val="10001"/>
+                  </a:ext>
+                </a:extLst>
               </a:tr>
               <a:tr h="473825">
                 <a:tc>
@@ -11233,6 +11138,11 @@
                     </a:solidFill>
                   </a:tcPr>
                 </a:tc>
+                <a:extLst>
+                  <a:ext uri="{0D108BD9-81ED-4DB2-BD59-A6C34878D82A}">
+                    <a16:rowId xmlns:a16="http://schemas.microsoft.com/office/drawing/2014/main" val="10002"/>
+                  </a:ext>
+                </a:extLst>
               </a:tr>
               <a:tr h="473825">
                 <a:tc>
@@ -11281,6 +11191,11 @@
                     </a:solidFill>
                   </a:tcPr>
                 </a:tc>
+                <a:extLst>
+                  <a:ext uri="{0D108BD9-81ED-4DB2-BD59-A6C34878D82A}">
+                    <a16:rowId xmlns:a16="http://schemas.microsoft.com/office/drawing/2014/main" val="10003"/>
+                  </a:ext>
+                </a:extLst>
               </a:tr>
               <a:tr h="473825">
                 <a:tc>
@@ -11329,6 +11244,11 @@
                     </a:solidFill>
                   </a:tcPr>
                 </a:tc>
+                <a:extLst>
+                  <a:ext uri="{0D108BD9-81ED-4DB2-BD59-A6C34878D82A}">
+                    <a16:rowId xmlns:a16="http://schemas.microsoft.com/office/drawing/2014/main" val="10004"/>
+                  </a:ext>
+                </a:extLst>
               </a:tr>
               <a:tr h="473825">
                 <a:tc>
@@ -11377,6 +11297,11 @@
                     </a:solidFill>
                   </a:tcPr>
                 </a:tc>
+                <a:extLst>
+                  <a:ext uri="{0D108BD9-81ED-4DB2-BD59-A6C34878D82A}">
+                    <a16:rowId xmlns:a16="http://schemas.microsoft.com/office/drawing/2014/main" val="10005"/>
+                  </a:ext>
+                </a:extLst>
               </a:tr>
               <a:tr h="473825">
                 <a:tc>
@@ -11425,6 +11350,11 @@
                     </a:solidFill>
                   </a:tcPr>
                 </a:tc>
+                <a:extLst>
+                  <a:ext uri="{0D108BD9-81ED-4DB2-BD59-A6C34878D82A}">
+                    <a16:rowId xmlns:a16="http://schemas.microsoft.com/office/drawing/2014/main" val="10006"/>
+                  </a:ext>
+                </a:extLst>
               </a:tr>
               <a:tr h="473825">
                 <a:tc>
@@ -11473,6 +11403,11 @@
                     </a:solidFill>
                   </a:tcPr>
                 </a:tc>
+                <a:extLst>
+                  <a:ext uri="{0D108BD9-81ED-4DB2-BD59-A6C34878D82A}">
+                    <a16:rowId xmlns:a16="http://schemas.microsoft.com/office/drawing/2014/main" val="10007"/>
+                  </a:ext>
+                </a:extLst>
               </a:tr>
               <a:tr h="473825">
                 <a:tc>
@@ -11521,6 +11456,11 @@
                     </a:solidFill>
                   </a:tcPr>
                 </a:tc>
+                <a:extLst>
+                  <a:ext uri="{0D108BD9-81ED-4DB2-BD59-A6C34878D82A}">
+                    <a16:rowId xmlns:a16="http://schemas.microsoft.com/office/drawing/2014/main" val="10008"/>
+                  </a:ext>
+                </a:extLst>
               </a:tr>
               <a:tr h="473825">
                 <a:tc>
@@ -11569,6 +11509,11 @@
                     </a:solidFill>
                   </a:tcPr>
                 </a:tc>
+                <a:extLst>
+                  <a:ext uri="{0D108BD9-81ED-4DB2-BD59-A6C34878D82A}">
+                    <a16:rowId xmlns:a16="http://schemas.microsoft.com/office/drawing/2014/main" val="10009"/>
+                  </a:ext>
+                </a:extLst>
               </a:tr>
               <a:tr h="473830">
                 <a:tc>
@@ -11617,6 +11562,11 @@
                     </a:solidFill>
                   </a:tcPr>
                 </a:tc>
+                <a:extLst>
+                  <a:ext uri="{0D108BD9-81ED-4DB2-BD59-A6C34878D82A}">
+                    <a16:rowId xmlns:a16="http://schemas.microsoft.com/office/drawing/2014/main" val="10010"/>
+                  </a:ext>
+                </a:extLst>
               </a:tr>
             </a:tbl>
           </a:graphicData>
@@ -11641,8 +11591,20 @@
                 <a:tableStyleId>{5C22544A-7EE6-4342-B048-85BDC9FD1C3A}</a:tableStyleId>
               </a:tblPr>
               <a:tblGrid>
-                <a:gridCol w="2743200"/>
-                <a:gridCol w="2743200"/>
+                <a:gridCol w="2743200">
+                  <a:extLst>
+                    <a:ext uri="{9D8B030D-6E8A-4147-A177-3AD203B41FA5}">
+                      <a16:colId xmlns:a16="http://schemas.microsoft.com/office/drawing/2014/main" val="20000"/>
+                    </a:ext>
+                  </a:extLst>
+                </a:gridCol>
+                <a:gridCol w="2743200">
+                  <a:extLst>
+                    <a:ext uri="{9D8B030D-6E8A-4147-A177-3AD203B41FA5}">
+                      <a16:colId xmlns:a16="http://schemas.microsoft.com/office/drawing/2014/main" val="20001"/>
+                    </a:ext>
+                  </a:extLst>
+                </a:gridCol>
               </a:tblGrid>
               <a:tr h="473825">
                 <a:tc>
@@ -11652,7 +11614,7 @@
                     <a:p>
                       <a:pPr algn="ctr"/>
                       <a:r>
-                        <a:rPr b="1" sz="1300">
+                        <a:rPr sz="1300" b="1">
                           <a:solidFill>
                             <a:srgbClr val="FFFFFF"/>
                           </a:solidFill>
@@ -11675,7 +11637,7 @@
                     <a:p>
                       <a:pPr algn="ctr"/>
                       <a:r>
-                        <a:rPr b="1" sz="1300">
+                        <a:rPr sz="1300" b="1">
                           <a:solidFill>
                             <a:srgbClr val="FFFFFF"/>
                           </a:solidFill>
@@ -11691,6 +11653,11 @@
                     </a:solidFill>
                   </a:tcPr>
                 </a:tc>
+                <a:extLst>
+                  <a:ext uri="{0D108BD9-81ED-4DB2-BD59-A6C34878D82A}">
+                    <a16:rowId xmlns:a16="http://schemas.microsoft.com/office/drawing/2014/main" val="10000"/>
+                  </a:ext>
+                </a:extLst>
               </a:tr>
               <a:tr h="473825">
                 <a:tc>
@@ -11739,6 +11706,11 @@
                     </a:solidFill>
                   </a:tcPr>
                 </a:tc>
+                <a:extLst>
+                  <a:ext uri="{0D108BD9-81ED-4DB2-BD59-A6C34878D82A}">
+                    <a16:rowId xmlns:a16="http://schemas.microsoft.com/office/drawing/2014/main" val="10001"/>
+                  </a:ext>
+                </a:extLst>
               </a:tr>
               <a:tr h="473825">
                 <a:tc>
@@ -11787,6 +11759,11 @@
                     </a:solidFill>
                   </a:tcPr>
                 </a:tc>
+                <a:extLst>
+                  <a:ext uri="{0D108BD9-81ED-4DB2-BD59-A6C34878D82A}">
+                    <a16:rowId xmlns:a16="http://schemas.microsoft.com/office/drawing/2014/main" val="10002"/>
+                  </a:ext>
+                </a:extLst>
               </a:tr>
               <a:tr h="473825">
                 <a:tc>
@@ -11835,6 +11812,11 @@
                     </a:solidFill>
                   </a:tcPr>
                 </a:tc>
+                <a:extLst>
+                  <a:ext uri="{0D108BD9-81ED-4DB2-BD59-A6C34878D82A}">
+                    <a16:rowId xmlns:a16="http://schemas.microsoft.com/office/drawing/2014/main" val="10003"/>
+                  </a:ext>
+                </a:extLst>
               </a:tr>
               <a:tr h="473825">
                 <a:tc>
@@ -11883,6 +11865,11 @@
                     </a:solidFill>
                   </a:tcPr>
                 </a:tc>
+                <a:extLst>
+                  <a:ext uri="{0D108BD9-81ED-4DB2-BD59-A6C34878D82A}">
+                    <a16:rowId xmlns:a16="http://schemas.microsoft.com/office/drawing/2014/main" val="10004"/>
+                  </a:ext>
+                </a:extLst>
               </a:tr>
               <a:tr h="473825">
                 <a:tc>
@@ -11931,6 +11918,11 @@
                     </a:solidFill>
                   </a:tcPr>
                 </a:tc>
+                <a:extLst>
+                  <a:ext uri="{0D108BD9-81ED-4DB2-BD59-A6C34878D82A}">
+                    <a16:rowId xmlns:a16="http://schemas.microsoft.com/office/drawing/2014/main" val="10005"/>
+                  </a:ext>
+                </a:extLst>
               </a:tr>
               <a:tr h="473825">
                 <a:tc>
@@ -11979,6 +11971,11 @@
                     </a:solidFill>
                   </a:tcPr>
                 </a:tc>
+                <a:extLst>
+                  <a:ext uri="{0D108BD9-81ED-4DB2-BD59-A6C34878D82A}">
+                    <a16:rowId xmlns:a16="http://schemas.microsoft.com/office/drawing/2014/main" val="10006"/>
+                  </a:ext>
+                </a:extLst>
               </a:tr>
               <a:tr h="473825">
                 <a:tc>
@@ -12027,6 +12024,11 @@
                     </a:solidFill>
                   </a:tcPr>
                 </a:tc>
+                <a:extLst>
+                  <a:ext uri="{0D108BD9-81ED-4DB2-BD59-A6C34878D82A}">
+                    <a16:rowId xmlns:a16="http://schemas.microsoft.com/office/drawing/2014/main" val="10007"/>
+                  </a:ext>
+                </a:extLst>
               </a:tr>
               <a:tr h="473825">
                 <a:tc>
@@ -12075,6 +12077,11 @@
                     </a:solidFill>
                   </a:tcPr>
                 </a:tc>
+                <a:extLst>
+                  <a:ext uri="{0D108BD9-81ED-4DB2-BD59-A6C34878D82A}">
+                    <a16:rowId xmlns:a16="http://schemas.microsoft.com/office/drawing/2014/main" val="10008"/>
+                  </a:ext>
+                </a:extLst>
               </a:tr>
               <a:tr h="473825">
                 <a:tc>
@@ -12123,6 +12130,11 @@
                     </a:solidFill>
                   </a:tcPr>
                 </a:tc>
+                <a:extLst>
+                  <a:ext uri="{0D108BD9-81ED-4DB2-BD59-A6C34878D82A}">
+                    <a16:rowId xmlns:a16="http://schemas.microsoft.com/office/drawing/2014/main" val="10009"/>
+                  </a:ext>
+                </a:extLst>
               </a:tr>
               <a:tr h="473830">
                 <a:tc>
@@ -12171,6 +12183,11 @@
                     </a:solidFill>
                   </a:tcPr>
                 </a:tc>
+                <a:extLst>
+                  <a:ext uri="{0D108BD9-81ED-4DB2-BD59-A6C34878D82A}">
+                    <a16:rowId xmlns:a16="http://schemas.microsoft.com/office/drawing/2014/main" val="10010"/>
+                  </a:ext>
+                </a:extLst>
               </a:tr>
             </a:tbl>
           </a:graphicData>

--- a/docs/documentation/iics-cli-presentation.pptx
+++ b/docs/documentation/iics-cli-presentation.pptx
@@ -5,23 +5,24 @@
     <p:sldMasterId id="2147483648" r:id="rId1"/>
   </p:sldMasterIdLst>
   <p:sldIdLst>
-    <p:sldId id="256" r:id="rId2"/>
-    <p:sldId id="257" r:id="rId3"/>
-    <p:sldId id="258" r:id="rId4"/>
-    <p:sldId id="259" r:id="rId5"/>
-    <p:sldId id="260" r:id="rId6"/>
-    <p:sldId id="261" r:id="rId7"/>
-    <p:sldId id="262" r:id="rId8"/>
-    <p:sldId id="263" r:id="rId9"/>
-    <p:sldId id="264" r:id="rId10"/>
-    <p:sldId id="265" r:id="rId11"/>
-    <p:sldId id="267" r:id="rId12"/>
-    <p:sldId id="268" r:id="rId13"/>
-    <p:sldId id="269" r:id="rId14"/>
-    <p:sldId id="270" r:id="rId15"/>
-    <p:sldId id="271" r:id="rId16"/>
+    <p:sldId id="256" r:id="rId7"/>
+    <p:sldId id="257" r:id="rId8"/>
+    <p:sldId id="258" r:id="rId9"/>
+    <p:sldId id="259" r:id="rId10"/>
+    <p:sldId id="260" r:id="rId11"/>
+    <p:sldId id="261" r:id="rId12"/>
+    <p:sldId id="262" r:id="rId13"/>
+    <p:sldId id="263" r:id="rId14"/>
+    <p:sldId id="264" r:id="rId15"/>
+    <p:sldId id="265" r:id="rId16"/>
+    <p:sldId id="266" r:id="rId17"/>
+    <p:sldId id="267" r:id="rId18"/>
+    <p:sldId id="268" r:id="rId19"/>
+    <p:sldId id="269" r:id="rId20"/>
+    <p:sldId id="270" r:id="rId21"/>
+    <p:sldId id="271" r:id="rId22"/>
   </p:sldIdLst>
-  <p:sldSz cx="12188825" cy="6858000"/>
+  <p:sldSz cx="12188952" cy="6858000" type="screen4x3"/>
   <p:notesSz cx="6858000" cy="9144000"/>
   <p:defaultTextStyle>
     <a:defPPr>
@@ -118,22 +119,6 @@
       </a:defRPr>
     </a:lvl9pPr>
   </p:defaultTextStyle>
-  <p:extLst>
-    <p:ext uri="{EFAFB233-063F-42B5-8137-9DF3F51BA10A}">
-      <p15:sldGuideLst xmlns:p15="http://schemas.microsoft.com/office/powerpoint/2012/main">
-        <p15:guide id="1" orient="horz" pos="2160">
-          <p15:clr>
-            <a:srgbClr val="A4A3A4"/>
-          </p15:clr>
-        </p15:guide>
-        <p15:guide id="2" pos="2880">
-          <p15:clr>
-            <a:srgbClr val="A4A3A4"/>
-          </p15:clr>
-        </p15:guide>
-      </p15:sldGuideLst>
-    </p:ext>
-  </p:extLst>
 </p:presentation>
 </file>
 
@@ -175,9 +160,10 @@
           <a:lstStyle/>
           <a:p>
             <a:r>
-              <a:rPr lang="en-US"/>
+              <a:rPr lang="en-US" smtClean="0"/>
               <a:t>Click to edit Master title style</a:t>
             </a:r>
+            <a:endParaRPr lang="en-US"/>
           </a:p>
         </p:txBody>
       </p:sp>
@@ -293,9 +279,10 @@
           </a:lstStyle>
           <a:p>
             <a:r>
-              <a:rPr lang="en-US"/>
+              <a:rPr lang="en-US" smtClean="0"/>
               <a:t>Click to edit Master subtitle style</a:t>
             </a:r>
+            <a:endParaRPr lang="en-US"/>
           </a:p>
         </p:txBody>
       </p:sp>
@@ -316,7 +303,7 @@
           <a:p>
             <a:fld id="{5BCAD085-E8A6-8845-BD4E-CB4CCA059FC4}" type="datetimeFigureOut">
               <a:rPr lang="en-US" smtClean="0"/>
-              <a:t>3/11/2026</a:t>
+              <a:t>1/27/13</a:t>
             </a:fld>
             <a:endParaRPr lang="en-US"/>
           </a:p>
@@ -410,9 +397,10 @@
           <a:lstStyle/>
           <a:p>
             <a:r>
-              <a:rPr lang="en-US"/>
+              <a:rPr lang="en-US" smtClean="0"/>
               <a:t>Click to edit Master title style</a:t>
             </a:r>
+            <a:endParaRPr lang="en-US"/>
           </a:p>
         </p:txBody>
       </p:sp>
@@ -433,37 +421,38 @@
           <a:p>
             <a:pPr lvl="0"/>
             <a:r>
-              <a:rPr lang="en-US"/>
+              <a:rPr lang="en-US" smtClean="0"/>
               <a:t>Click to edit Master text styles</a:t>
             </a:r>
           </a:p>
           <a:p>
             <a:pPr lvl="1"/>
             <a:r>
-              <a:rPr lang="en-US"/>
+              <a:rPr lang="en-US" smtClean="0"/>
               <a:t>Second level</a:t>
             </a:r>
           </a:p>
           <a:p>
             <a:pPr lvl="2"/>
             <a:r>
-              <a:rPr lang="en-US"/>
+              <a:rPr lang="en-US" smtClean="0"/>
               <a:t>Third level</a:t>
             </a:r>
           </a:p>
           <a:p>
             <a:pPr lvl="3"/>
             <a:r>
-              <a:rPr lang="en-US"/>
+              <a:rPr lang="en-US" smtClean="0"/>
               <a:t>Fourth level</a:t>
             </a:r>
           </a:p>
           <a:p>
             <a:pPr lvl="4"/>
             <a:r>
-              <a:rPr lang="en-US"/>
+              <a:rPr lang="en-US" smtClean="0"/>
               <a:t>Fifth level</a:t>
             </a:r>
+            <a:endParaRPr lang="en-US"/>
           </a:p>
         </p:txBody>
       </p:sp>
@@ -484,7 +473,7 @@
           <a:p>
             <a:fld id="{5BCAD085-E8A6-8845-BD4E-CB4CCA059FC4}" type="datetimeFigureOut">
               <a:rPr lang="en-US" smtClean="0"/>
-              <a:t>3/11/2026</a:t>
+              <a:t>1/27/13</a:t>
             </a:fld>
             <a:endParaRPr lang="en-US"/>
           </a:p>
@@ -583,9 +572,10 @@
           <a:lstStyle/>
           <a:p>
             <a:r>
-              <a:rPr lang="en-US"/>
+              <a:rPr lang="en-US" smtClean="0"/>
               <a:t>Click to edit Master title style</a:t>
             </a:r>
+            <a:endParaRPr lang="en-US"/>
           </a:p>
         </p:txBody>
       </p:sp>
@@ -611,37 +601,38 @@
           <a:p>
             <a:pPr lvl="0"/>
             <a:r>
-              <a:rPr lang="en-US"/>
+              <a:rPr lang="en-US" smtClean="0"/>
               <a:t>Click to edit Master text styles</a:t>
             </a:r>
           </a:p>
           <a:p>
             <a:pPr lvl="1"/>
             <a:r>
-              <a:rPr lang="en-US"/>
+              <a:rPr lang="en-US" smtClean="0"/>
               <a:t>Second level</a:t>
             </a:r>
           </a:p>
           <a:p>
             <a:pPr lvl="2"/>
             <a:r>
-              <a:rPr lang="en-US"/>
+              <a:rPr lang="en-US" smtClean="0"/>
               <a:t>Third level</a:t>
             </a:r>
           </a:p>
           <a:p>
             <a:pPr lvl="3"/>
             <a:r>
-              <a:rPr lang="en-US"/>
+              <a:rPr lang="en-US" smtClean="0"/>
               <a:t>Fourth level</a:t>
             </a:r>
           </a:p>
           <a:p>
             <a:pPr lvl="4"/>
             <a:r>
-              <a:rPr lang="en-US"/>
+              <a:rPr lang="en-US" smtClean="0"/>
               <a:t>Fifth level</a:t>
             </a:r>
+            <a:endParaRPr lang="en-US"/>
           </a:p>
         </p:txBody>
       </p:sp>
@@ -662,7 +653,7 @@
           <a:p>
             <a:fld id="{5BCAD085-E8A6-8845-BD4E-CB4CCA059FC4}" type="datetimeFigureOut">
               <a:rPr lang="en-US" smtClean="0"/>
-              <a:t>3/11/2026</a:t>
+              <a:t>1/27/13</a:t>
             </a:fld>
             <a:endParaRPr lang="en-US"/>
           </a:p>
@@ -756,9 +747,10 @@
           <a:lstStyle/>
           <a:p>
             <a:r>
-              <a:rPr lang="en-US"/>
+              <a:rPr lang="en-US" smtClean="0"/>
               <a:t>Click to edit Master title style</a:t>
             </a:r>
+            <a:endParaRPr lang="en-US"/>
           </a:p>
         </p:txBody>
       </p:sp>
@@ -779,37 +771,38 @@
           <a:p>
             <a:pPr lvl="0"/>
             <a:r>
-              <a:rPr lang="en-US"/>
+              <a:rPr lang="en-US" smtClean="0"/>
               <a:t>Click to edit Master text styles</a:t>
             </a:r>
           </a:p>
           <a:p>
             <a:pPr lvl="1"/>
             <a:r>
-              <a:rPr lang="en-US"/>
+              <a:rPr lang="en-US" smtClean="0"/>
               <a:t>Second level</a:t>
             </a:r>
           </a:p>
           <a:p>
             <a:pPr lvl="2"/>
             <a:r>
-              <a:rPr lang="en-US"/>
+              <a:rPr lang="en-US" smtClean="0"/>
               <a:t>Third level</a:t>
             </a:r>
           </a:p>
           <a:p>
             <a:pPr lvl="3"/>
             <a:r>
-              <a:rPr lang="en-US"/>
+              <a:rPr lang="en-US" smtClean="0"/>
               <a:t>Fourth level</a:t>
             </a:r>
           </a:p>
           <a:p>
             <a:pPr lvl="4"/>
             <a:r>
-              <a:rPr lang="en-US"/>
+              <a:rPr lang="en-US" smtClean="0"/>
               <a:t>Fifth level</a:t>
             </a:r>
+            <a:endParaRPr lang="en-US"/>
           </a:p>
         </p:txBody>
       </p:sp>
@@ -830,7 +823,7 @@
           <a:p>
             <a:fld id="{5BCAD085-E8A6-8845-BD4E-CB4CCA059FC4}" type="datetimeFigureOut">
               <a:rPr lang="en-US" smtClean="0"/>
-              <a:t>3/11/2026</a:t>
+              <a:t>1/27/13</a:t>
             </a:fld>
             <a:endParaRPr lang="en-US"/>
           </a:p>
@@ -933,9 +926,10 @@
           </a:lstStyle>
           <a:p>
             <a:r>
-              <a:rPr lang="en-US"/>
+              <a:rPr lang="en-US" smtClean="0"/>
               <a:t>Click to edit Master title style</a:t>
             </a:r>
+            <a:endParaRPr lang="en-US"/>
           </a:p>
         </p:txBody>
       </p:sp>
@@ -1052,7 +1046,7 @@
           <a:p>
             <a:pPr lvl="0"/>
             <a:r>
-              <a:rPr lang="en-US"/>
+              <a:rPr lang="en-US" smtClean="0"/>
               <a:t>Click to edit Master text styles</a:t>
             </a:r>
           </a:p>
@@ -1075,7 +1069,7 @@
           <a:p>
             <a:fld id="{5BCAD085-E8A6-8845-BD4E-CB4CCA059FC4}" type="datetimeFigureOut">
               <a:rPr lang="en-US" smtClean="0"/>
-              <a:t>3/11/2026</a:t>
+              <a:t>1/27/13</a:t>
             </a:fld>
             <a:endParaRPr lang="en-US"/>
           </a:p>
@@ -1169,9 +1163,10 @@
           <a:lstStyle/>
           <a:p>
             <a:r>
-              <a:rPr lang="en-US"/>
+              <a:rPr lang="en-US" smtClean="0"/>
               <a:t>Click to edit Master title style</a:t>
             </a:r>
+            <a:endParaRPr lang="en-US"/>
           </a:p>
         </p:txBody>
       </p:sp>
@@ -1225,37 +1220,38 @@
           <a:p>
             <a:pPr lvl="0"/>
             <a:r>
-              <a:rPr lang="en-US"/>
+              <a:rPr lang="en-US" smtClean="0"/>
               <a:t>Click to edit Master text styles</a:t>
             </a:r>
           </a:p>
           <a:p>
             <a:pPr lvl="1"/>
             <a:r>
-              <a:rPr lang="en-US"/>
+              <a:rPr lang="en-US" smtClean="0"/>
               <a:t>Second level</a:t>
             </a:r>
           </a:p>
           <a:p>
             <a:pPr lvl="2"/>
             <a:r>
-              <a:rPr lang="en-US"/>
+              <a:rPr lang="en-US" smtClean="0"/>
               <a:t>Third level</a:t>
             </a:r>
           </a:p>
           <a:p>
             <a:pPr lvl="3"/>
             <a:r>
-              <a:rPr lang="en-US"/>
+              <a:rPr lang="en-US" smtClean="0"/>
               <a:t>Fourth level</a:t>
             </a:r>
           </a:p>
           <a:p>
             <a:pPr lvl="4"/>
             <a:r>
-              <a:rPr lang="en-US"/>
+              <a:rPr lang="en-US" smtClean="0"/>
               <a:t>Fifth level</a:t>
             </a:r>
+            <a:endParaRPr lang="en-US"/>
           </a:p>
         </p:txBody>
       </p:sp>
@@ -1309,37 +1305,38 @@
           <a:p>
             <a:pPr lvl="0"/>
             <a:r>
-              <a:rPr lang="en-US"/>
+              <a:rPr lang="en-US" smtClean="0"/>
               <a:t>Click to edit Master text styles</a:t>
             </a:r>
           </a:p>
           <a:p>
             <a:pPr lvl="1"/>
             <a:r>
-              <a:rPr lang="en-US"/>
+              <a:rPr lang="en-US" smtClean="0"/>
               <a:t>Second level</a:t>
             </a:r>
           </a:p>
           <a:p>
             <a:pPr lvl="2"/>
             <a:r>
-              <a:rPr lang="en-US"/>
+              <a:rPr lang="en-US" smtClean="0"/>
               <a:t>Third level</a:t>
             </a:r>
           </a:p>
           <a:p>
             <a:pPr lvl="3"/>
             <a:r>
-              <a:rPr lang="en-US"/>
+              <a:rPr lang="en-US" smtClean="0"/>
               <a:t>Fourth level</a:t>
             </a:r>
           </a:p>
           <a:p>
             <a:pPr lvl="4"/>
             <a:r>
-              <a:rPr lang="en-US"/>
+              <a:rPr lang="en-US" smtClean="0"/>
               <a:t>Fifth level</a:t>
             </a:r>
+            <a:endParaRPr lang="en-US"/>
           </a:p>
         </p:txBody>
       </p:sp>
@@ -1360,7 +1357,7 @@
           <a:p>
             <a:fld id="{5BCAD085-E8A6-8845-BD4E-CB4CCA059FC4}" type="datetimeFigureOut">
               <a:rPr lang="en-US" smtClean="0"/>
-              <a:t>3/11/2026</a:t>
+              <a:t>1/27/13</a:t>
             </a:fld>
             <a:endParaRPr lang="en-US"/>
           </a:p>
@@ -1458,9 +1455,10 @@
           </a:lstStyle>
           <a:p>
             <a:r>
-              <a:rPr lang="en-US"/>
+              <a:rPr lang="en-US" smtClean="0"/>
               <a:t>Click to edit Master title style</a:t>
             </a:r>
+            <a:endParaRPr lang="en-US"/>
           </a:p>
         </p:txBody>
       </p:sp>
@@ -1523,7 +1521,7 @@
           <a:p>
             <a:pPr lvl="0"/>
             <a:r>
-              <a:rPr lang="en-US"/>
+              <a:rPr lang="en-US" smtClean="0"/>
               <a:t>Click to edit Master text styles</a:t>
             </a:r>
           </a:p>
@@ -1579,37 +1577,38 @@
           <a:p>
             <a:pPr lvl="0"/>
             <a:r>
-              <a:rPr lang="en-US"/>
+              <a:rPr lang="en-US" smtClean="0"/>
               <a:t>Click to edit Master text styles</a:t>
             </a:r>
           </a:p>
           <a:p>
             <a:pPr lvl="1"/>
             <a:r>
-              <a:rPr lang="en-US"/>
+              <a:rPr lang="en-US" smtClean="0"/>
               <a:t>Second level</a:t>
             </a:r>
           </a:p>
           <a:p>
             <a:pPr lvl="2"/>
             <a:r>
-              <a:rPr lang="en-US"/>
+              <a:rPr lang="en-US" smtClean="0"/>
               <a:t>Third level</a:t>
             </a:r>
           </a:p>
           <a:p>
             <a:pPr lvl="3"/>
             <a:r>
-              <a:rPr lang="en-US"/>
+              <a:rPr lang="en-US" smtClean="0"/>
               <a:t>Fourth level</a:t>
             </a:r>
           </a:p>
           <a:p>
             <a:pPr lvl="4"/>
             <a:r>
-              <a:rPr lang="en-US"/>
+              <a:rPr lang="en-US" smtClean="0"/>
               <a:t>Fifth level</a:t>
             </a:r>
+            <a:endParaRPr lang="en-US"/>
           </a:p>
         </p:txBody>
       </p:sp>
@@ -1672,7 +1671,7 @@
           <a:p>
             <a:pPr lvl="0"/>
             <a:r>
-              <a:rPr lang="en-US"/>
+              <a:rPr lang="en-US" smtClean="0"/>
               <a:t>Click to edit Master text styles</a:t>
             </a:r>
           </a:p>
@@ -1728,37 +1727,38 @@
           <a:p>
             <a:pPr lvl="0"/>
             <a:r>
-              <a:rPr lang="en-US"/>
+              <a:rPr lang="en-US" smtClean="0"/>
               <a:t>Click to edit Master text styles</a:t>
             </a:r>
           </a:p>
           <a:p>
             <a:pPr lvl="1"/>
             <a:r>
-              <a:rPr lang="en-US"/>
+              <a:rPr lang="en-US" smtClean="0"/>
               <a:t>Second level</a:t>
             </a:r>
           </a:p>
           <a:p>
             <a:pPr lvl="2"/>
             <a:r>
-              <a:rPr lang="en-US"/>
+              <a:rPr lang="en-US" smtClean="0"/>
               <a:t>Third level</a:t>
             </a:r>
           </a:p>
           <a:p>
             <a:pPr lvl="3"/>
             <a:r>
-              <a:rPr lang="en-US"/>
+              <a:rPr lang="en-US" smtClean="0"/>
               <a:t>Fourth level</a:t>
             </a:r>
           </a:p>
           <a:p>
             <a:pPr lvl="4"/>
             <a:r>
-              <a:rPr lang="en-US"/>
+              <a:rPr lang="en-US" smtClean="0"/>
               <a:t>Fifth level</a:t>
             </a:r>
+            <a:endParaRPr lang="en-US"/>
           </a:p>
         </p:txBody>
       </p:sp>
@@ -1779,7 +1779,7 @@
           <a:p>
             <a:fld id="{5BCAD085-E8A6-8845-BD4E-CB4CCA059FC4}" type="datetimeFigureOut">
               <a:rPr lang="en-US" smtClean="0"/>
-              <a:t>3/11/2026</a:t>
+              <a:t>1/27/13</a:t>
             </a:fld>
             <a:endParaRPr lang="en-US"/>
           </a:p>
@@ -1873,9 +1873,10 @@
           <a:lstStyle/>
           <a:p>
             <a:r>
-              <a:rPr lang="en-US"/>
+              <a:rPr lang="en-US" smtClean="0"/>
               <a:t>Click to edit Master title style</a:t>
             </a:r>
+            <a:endParaRPr lang="en-US"/>
           </a:p>
         </p:txBody>
       </p:sp>
@@ -1896,7 +1897,7 @@
           <a:p>
             <a:fld id="{5BCAD085-E8A6-8845-BD4E-CB4CCA059FC4}" type="datetimeFigureOut">
               <a:rPr lang="en-US" smtClean="0"/>
-              <a:t>3/11/2026</a:t>
+              <a:t>1/27/13</a:t>
             </a:fld>
             <a:endParaRPr lang="en-US"/>
           </a:p>
@@ -1991,7 +1992,7 @@
           <a:p>
             <a:fld id="{5BCAD085-E8A6-8845-BD4E-CB4CCA059FC4}" type="datetimeFigureOut">
               <a:rPr lang="en-US" smtClean="0"/>
-              <a:t>3/11/2026</a:t>
+              <a:t>1/27/13</a:t>
             </a:fld>
             <a:endParaRPr lang="en-US"/>
           </a:p>
@@ -2094,9 +2095,10 @@
           </a:lstStyle>
           <a:p>
             <a:r>
-              <a:rPr lang="en-US"/>
+              <a:rPr lang="en-US" smtClean="0"/>
               <a:t>Click to edit Master title style</a:t>
             </a:r>
+            <a:endParaRPr lang="en-US"/>
           </a:p>
         </p:txBody>
       </p:sp>
@@ -2150,37 +2152,38 @@
           <a:p>
             <a:pPr lvl="0"/>
             <a:r>
-              <a:rPr lang="en-US"/>
+              <a:rPr lang="en-US" smtClean="0"/>
               <a:t>Click to edit Master text styles</a:t>
             </a:r>
           </a:p>
           <a:p>
             <a:pPr lvl="1"/>
             <a:r>
-              <a:rPr lang="en-US"/>
+              <a:rPr lang="en-US" smtClean="0"/>
               <a:t>Second level</a:t>
             </a:r>
           </a:p>
           <a:p>
             <a:pPr lvl="2"/>
             <a:r>
-              <a:rPr lang="en-US"/>
+              <a:rPr lang="en-US" smtClean="0"/>
               <a:t>Third level</a:t>
             </a:r>
           </a:p>
           <a:p>
             <a:pPr lvl="3"/>
             <a:r>
-              <a:rPr lang="en-US"/>
+              <a:rPr lang="en-US" smtClean="0"/>
               <a:t>Fourth level</a:t>
             </a:r>
           </a:p>
           <a:p>
             <a:pPr lvl="4"/>
             <a:r>
-              <a:rPr lang="en-US"/>
+              <a:rPr lang="en-US" smtClean="0"/>
               <a:t>Fifth level</a:t>
             </a:r>
+            <a:endParaRPr lang="en-US"/>
           </a:p>
         </p:txBody>
       </p:sp>
@@ -2243,7 +2246,7 @@
           <a:p>
             <a:pPr lvl="0"/>
             <a:r>
-              <a:rPr lang="en-US"/>
+              <a:rPr lang="en-US" smtClean="0"/>
               <a:t>Click to edit Master text styles</a:t>
             </a:r>
           </a:p>
@@ -2266,7 +2269,7 @@
           <a:p>
             <a:fld id="{5BCAD085-E8A6-8845-BD4E-CB4CCA059FC4}" type="datetimeFigureOut">
               <a:rPr lang="en-US" smtClean="0"/>
-              <a:t>3/11/2026</a:t>
+              <a:t>1/27/13</a:t>
             </a:fld>
             <a:endParaRPr lang="en-US"/>
           </a:p>
@@ -2369,9 +2372,10 @@
           </a:lstStyle>
           <a:p>
             <a:r>
-              <a:rPr lang="en-US"/>
+              <a:rPr lang="en-US" smtClean="0"/>
               <a:t>Click to edit Master title style</a:t>
             </a:r>
+            <a:endParaRPr lang="en-US"/>
           </a:p>
         </p:txBody>
       </p:sp>
@@ -2495,7 +2499,7 @@
           <a:p>
             <a:pPr lvl="0"/>
             <a:r>
-              <a:rPr lang="en-US"/>
+              <a:rPr lang="en-US" smtClean="0"/>
               <a:t>Click to edit Master text styles</a:t>
             </a:r>
           </a:p>
@@ -2518,7 +2522,7 @@
           <a:p>
             <a:fld id="{5BCAD085-E8A6-8845-BD4E-CB4CCA059FC4}" type="datetimeFigureOut">
               <a:rPr lang="en-US" smtClean="0"/>
-              <a:t>3/11/2026</a:t>
+              <a:t>1/27/13</a:t>
             </a:fld>
             <a:endParaRPr lang="en-US"/>
           </a:p>
@@ -2627,9 +2631,10 @@
           <a:lstStyle/>
           <a:p>
             <a:r>
-              <a:rPr lang="en-US"/>
+              <a:rPr lang="en-US" smtClean="0"/>
               <a:t>Click to edit Master title style</a:t>
             </a:r>
+            <a:endParaRPr lang="en-US"/>
           </a:p>
         </p:txBody>
       </p:sp>
@@ -2660,37 +2665,38 @@
           <a:p>
             <a:pPr lvl="0"/>
             <a:r>
-              <a:rPr lang="en-US"/>
+              <a:rPr lang="en-US" smtClean="0"/>
               <a:t>Click to edit Master text styles</a:t>
             </a:r>
           </a:p>
           <a:p>
             <a:pPr lvl="1"/>
             <a:r>
-              <a:rPr lang="en-US"/>
+              <a:rPr lang="en-US" smtClean="0"/>
               <a:t>Second level</a:t>
             </a:r>
           </a:p>
           <a:p>
             <a:pPr lvl="2"/>
             <a:r>
-              <a:rPr lang="en-US"/>
+              <a:rPr lang="en-US" smtClean="0"/>
               <a:t>Third level</a:t>
             </a:r>
           </a:p>
           <a:p>
             <a:pPr lvl="3"/>
             <a:r>
-              <a:rPr lang="en-US"/>
+              <a:rPr lang="en-US" smtClean="0"/>
               <a:t>Fourth level</a:t>
             </a:r>
           </a:p>
           <a:p>
             <a:pPr lvl="4"/>
             <a:r>
-              <a:rPr lang="en-US"/>
+              <a:rPr lang="en-US" smtClean="0"/>
               <a:t>Fifth level</a:t>
             </a:r>
+            <a:endParaRPr lang="en-US"/>
           </a:p>
         </p:txBody>
       </p:sp>
@@ -2729,7 +2735,7 @@
           <a:p>
             <a:fld id="{5BCAD085-E8A6-8845-BD4E-CB4CCA059FC4}" type="datetimeFigureOut">
               <a:rPr lang="en-US" smtClean="0"/>
-              <a:t>3/11/2026</a:t>
+              <a:t>1/27/13</a:t>
             </a:fld>
             <a:endParaRPr lang="en-US"/>
           </a:p>
@@ -2810,54 +2816,6 @@
               <a:t>‹#›</a:t>
             </a:fld>
             <a:endParaRPr lang="en-US"/>
-          </a:p>
-        </p:txBody>
-      </p:sp>
-      <p:sp>
-        <p:nvSpPr>
-          <p:cNvPr id="8" name="TextBox 7">
-            <a:extLst>
-              <a:ext uri="{FF2B5EF4-FFF2-40B4-BE49-F238E27FC236}">
-                <a16:creationId xmlns:a16="http://schemas.microsoft.com/office/drawing/2014/main" id="{48AD5A96-BEE0-3EA2-A659-AC9DCB1732DD}"/>
-              </a:ext>
-            </a:extLst>
-          </p:cNvPr>
-          <p:cNvSpPr txBox="1"/>
-          <p:nvPr userDrawn="1">
-            <p:extLst>
-              <p:ext uri="{1162E1C5-73C7-4A58-AE30-91384D911F3F}">
-                <p184:classification xmlns:p184="http://schemas.microsoft.com/office/powerpoint/2018/4/main" val="ftr"/>
-              </p:ext>
-            </p:extLst>
-          </p:nvPr>
-        </p:nvSpPr>
-        <p:spPr>
-          <a:xfrm>
-            <a:off x="5556250" y="6642100"/>
-            <a:ext cx="1101725" cy="152400"/>
-          </a:xfrm>
-          <a:prstGeom prst="rect">
-            <a:avLst/>
-          </a:prstGeom>
-        </p:spPr>
-        <p:txBody>
-          <a:bodyPr horzOverflow="overflow" lIns="0" tIns="0" rIns="0" bIns="0">
-            <a:spAutoFit/>
-          </a:bodyPr>
-          <a:lstStyle/>
-          <a:p>
-            <a:pPr algn="l"/>
-            <a:r>
-              <a:rPr lang="en-US" sz="1000">
-                <a:solidFill>
-                  <a:srgbClr val="000000">
-                    <a:alpha val="50000"/>
-                  </a:srgbClr>
-                </a:solidFill>
-                <a:latin typeface="Aptos" panose="020B0004020202020204" pitchFamily="34" charset="0"/>
-              </a:rPr>
-              <a:t>Classified as Public</a:t>
-            </a:r>
           </a:p>
         </p:txBody>
       </p:sp>
@@ -3136,7 +3094,7 @@
 </file>
 
 <file path=ppt/slides/slide1.xml><?xml version="1.0" encoding="utf-8"?>
-<p:sld xmlns:a="http://schemas.openxmlformats.org/drawingml/2006/main" xmlns:r="http://schemas.openxmlformats.org/officeDocument/2006/relationships" xmlns:p="http://schemas.openxmlformats.org/presentationml/2006/main">
+<p:sld xmlns:a="http://schemas.openxmlformats.org/drawingml/2006/main" xmlns:p="http://schemas.openxmlformats.org/presentationml/2006/main" xmlns:r="http://schemas.openxmlformats.org/officeDocument/2006/relationships">
   <p:cSld>
     <p:spTree>
       <p:nvGrpSpPr>
@@ -3144,14 +3102,7 @@
         <p:cNvGrpSpPr/>
         <p:nvPr/>
       </p:nvGrpSpPr>
-      <p:grpSpPr>
-        <a:xfrm>
-          <a:off x="0" y="0"/>
-          <a:ext cx="0" cy="0"/>
-          <a:chOff x="0" y="0"/>
-          <a:chExt cx="0" cy="0"/>
-        </a:xfrm>
-      </p:grpSpPr>
+      <p:grpSpPr/>
       <p:sp>
         <p:nvSpPr>
           <p:cNvPr id="2" name="Rectangle 1"/>
@@ -3192,7 +3143,6 @@
           <a:lstStyle/>
           <a:p>
             <a:pPr algn="ctr"/>
-            <a:endParaRPr/>
           </a:p>
         </p:txBody>
       </p:sp>
@@ -3236,7 +3186,6 @@
           <a:lstStyle/>
           <a:p>
             <a:pPr algn="ctr"/>
-            <a:endParaRPr/>
           </a:p>
         </p:txBody>
       </p:sp>
@@ -3389,7 +3338,7 @@
 </file>
 
 <file path=ppt/slides/slide10.xml><?xml version="1.0" encoding="utf-8"?>
-<p:sld xmlns:a="http://schemas.openxmlformats.org/drawingml/2006/main" xmlns:r="http://schemas.openxmlformats.org/officeDocument/2006/relationships" xmlns:p="http://schemas.openxmlformats.org/presentationml/2006/main">
+<p:sld xmlns:a="http://schemas.openxmlformats.org/drawingml/2006/main" xmlns:p="http://schemas.openxmlformats.org/presentationml/2006/main" xmlns:r="http://schemas.openxmlformats.org/officeDocument/2006/relationships">
   <p:cSld>
     <p:spTree>
       <p:nvGrpSpPr>
@@ -3397,14 +3346,7 @@
         <p:cNvGrpSpPr/>
         <p:nvPr/>
       </p:nvGrpSpPr>
-      <p:grpSpPr>
-        <a:xfrm>
-          <a:off x="0" y="0"/>
-          <a:ext cx="0" cy="0"/>
-          <a:chOff x="0" y="0"/>
-          <a:chExt cx="0" cy="0"/>
-        </a:xfrm>
-      </p:grpSpPr>
+      <p:grpSpPr/>
       <p:sp>
         <p:nvSpPr>
           <p:cNvPr id="2" name="Rectangle 1"/>
@@ -3445,7 +3387,6 @@
           <a:lstStyle/>
           <a:p>
             <a:pPr algn="ctr"/>
-            <a:endParaRPr/>
           </a:p>
         </p:txBody>
       </p:sp>
@@ -3559,7 +3500,6 @@
           <a:lstStyle/>
           <a:p>
             <a:pPr algn="ctr"/>
-            <a:endParaRPr/>
           </a:p>
         </p:txBody>
       </p:sp>
@@ -3743,20 +3683,8 @@
                 <a:tableStyleId>{5C22544A-7EE6-4342-B048-85BDC9FD1C3A}</a:tableStyleId>
               </a:tblPr>
               <a:tblGrid>
-                <a:gridCol w="3566160">
-                  <a:extLst>
-                    <a:ext uri="{9D8B030D-6E8A-4147-A177-3AD203B41FA5}">
-                      <a16:colId xmlns:a16="http://schemas.microsoft.com/office/drawing/2014/main" val="20000"/>
-                    </a:ext>
-                  </a:extLst>
-                </a:gridCol>
-                <a:gridCol w="3566160">
-                  <a:extLst>
-                    <a:ext uri="{9D8B030D-6E8A-4147-A177-3AD203B41FA5}">
-                      <a16:colId xmlns:a16="http://schemas.microsoft.com/office/drawing/2014/main" val="20001"/>
-                    </a:ext>
-                  </a:extLst>
-                </a:gridCol>
+                <a:gridCol w="3566160"/>
+                <a:gridCol w="3566160"/>
               </a:tblGrid>
               <a:tr h="365760">
                 <a:tc>
@@ -3766,7 +3694,7 @@
                     <a:p>
                       <a:pPr algn="ctr"/>
                       <a:r>
-                        <a:rPr sz="1300" b="1">
+                        <a:rPr b="1" sz="1300">
                           <a:solidFill>
                             <a:srgbClr val="FFFFFF"/>
                           </a:solidFill>
@@ -3789,7 +3717,7 @@
                     <a:p>
                       <a:pPr algn="ctr"/>
                       <a:r>
-                        <a:rPr sz="1300" b="1">
+                        <a:rPr b="1" sz="1300">
                           <a:solidFill>
                             <a:srgbClr val="FFFFFF"/>
                           </a:solidFill>
@@ -3805,11 +3733,6 @@
                     </a:solidFill>
                   </a:tcPr>
                 </a:tc>
-                <a:extLst>
-                  <a:ext uri="{0D108BD9-81ED-4DB2-BD59-A6C34878D82A}">
-                    <a16:rowId xmlns:a16="http://schemas.microsoft.com/office/drawing/2014/main" val="10000"/>
-                  </a:ext>
-                </a:extLst>
               </a:tr>
               <a:tr h="365760">
                 <a:tc>
@@ -3858,11 +3781,6 @@
                     </a:solidFill>
                   </a:tcPr>
                 </a:tc>
-                <a:extLst>
-                  <a:ext uri="{0D108BD9-81ED-4DB2-BD59-A6C34878D82A}">
-                    <a16:rowId xmlns:a16="http://schemas.microsoft.com/office/drawing/2014/main" val="10001"/>
-                  </a:ext>
-                </a:extLst>
               </a:tr>
               <a:tr h="365760">
                 <a:tc>
@@ -3911,11 +3829,6 @@
                     </a:solidFill>
                   </a:tcPr>
                 </a:tc>
-                <a:extLst>
-                  <a:ext uri="{0D108BD9-81ED-4DB2-BD59-A6C34878D82A}">
-                    <a16:rowId xmlns:a16="http://schemas.microsoft.com/office/drawing/2014/main" val="10002"/>
-                  </a:ext>
-                </a:extLst>
               </a:tr>
               <a:tr h="365760">
                 <a:tc>
@@ -3964,11 +3877,6 @@
                     </a:solidFill>
                   </a:tcPr>
                 </a:tc>
-                <a:extLst>
-                  <a:ext uri="{0D108BD9-81ED-4DB2-BD59-A6C34878D82A}">
-                    <a16:rowId xmlns:a16="http://schemas.microsoft.com/office/drawing/2014/main" val="10003"/>
-                  </a:ext>
-                </a:extLst>
               </a:tr>
               <a:tr h="365760">
                 <a:tc>
@@ -4017,11 +3925,6 @@
                     </a:solidFill>
                   </a:tcPr>
                 </a:tc>
-                <a:extLst>
-                  <a:ext uri="{0D108BD9-81ED-4DB2-BD59-A6C34878D82A}">
-                    <a16:rowId xmlns:a16="http://schemas.microsoft.com/office/drawing/2014/main" val="10004"/>
-                  </a:ext>
-                </a:extLst>
               </a:tr>
               <a:tr h="365760">
                 <a:tc>
@@ -4070,11 +3973,6 @@
                     </a:solidFill>
                   </a:tcPr>
                 </a:tc>
-                <a:extLst>
-                  <a:ext uri="{0D108BD9-81ED-4DB2-BD59-A6C34878D82A}">
-                    <a16:rowId xmlns:a16="http://schemas.microsoft.com/office/drawing/2014/main" val="10005"/>
-                  </a:ext>
-                </a:extLst>
               </a:tr>
               <a:tr h="365760">
                 <a:tc>
@@ -4123,11 +4021,6 @@
                     </a:solidFill>
                   </a:tcPr>
                 </a:tc>
-                <a:extLst>
-                  <a:ext uri="{0D108BD9-81ED-4DB2-BD59-A6C34878D82A}">
-                    <a16:rowId xmlns:a16="http://schemas.microsoft.com/office/drawing/2014/main" val="10006"/>
-                  </a:ext>
-                </a:extLst>
               </a:tr>
             </a:tbl>
           </a:graphicData>
@@ -4208,7 +4101,6 @@
           <a:lstStyle/>
           <a:p>
             <a:pPr algn="ctr"/>
-            <a:endParaRPr/>
           </a:p>
         </p:txBody>
       </p:sp>
@@ -4259,7 +4151,7 @@
 </file>
 
 <file path=ppt/slides/slide11.xml><?xml version="1.0" encoding="utf-8"?>
-<p:sld xmlns:a="http://schemas.openxmlformats.org/drawingml/2006/main" xmlns:r="http://schemas.openxmlformats.org/officeDocument/2006/relationships" xmlns:p="http://schemas.openxmlformats.org/presentationml/2006/main">
+<p:sld xmlns:a="http://schemas.openxmlformats.org/drawingml/2006/main" xmlns:p="http://schemas.openxmlformats.org/presentationml/2006/main" xmlns:r="http://schemas.openxmlformats.org/officeDocument/2006/relationships">
   <p:cSld>
     <p:spTree>
       <p:nvGrpSpPr>
@@ -4267,14 +4159,7 @@
         <p:cNvGrpSpPr/>
         <p:nvPr/>
       </p:nvGrpSpPr>
-      <p:grpSpPr>
-        <a:xfrm>
-          <a:off x="0" y="0"/>
-          <a:ext cx="0" cy="0"/>
-          <a:chOff x="0" y="0"/>
-          <a:chExt cx="0" cy="0"/>
-        </a:xfrm>
-      </p:grpSpPr>
+      <p:grpSpPr/>
       <p:sp>
         <p:nvSpPr>
           <p:cNvPr id="2" name="Rectangle 1"/>
@@ -4315,7 +4200,6 @@
           <a:lstStyle/>
           <a:p>
             <a:pPr algn="ctr"/>
-            <a:endParaRPr/>
           </a:p>
         </p:txBody>
       </p:sp>
@@ -4349,7 +4233,7 @@
                 </a:solidFill>
                 <a:latin typeface="Calibri"/>
               </a:rPr>
-              <a:t>Structured Subcommands &amp; Built-in Help</a:t>
+              <a:t>Modern Design &amp; Broad Platform Support</a:t>
             </a:r>
           </a:p>
         </p:txBody>
@@ -4384,7 +4268,7 @@
                 </a:solidFill>
                 <a:latin typeface="Calibri"/>
               </a:rPr>
-              <a:t>kubectl / gh / aws style resource-verb hierarchy</a:t>
+              <a:t>Built for today's DevOps toolchains</a:t>
             </a:r>
           </a:p>
         </p:txBody>
@@ -4429,7 +4313,6 @@
           <a:lstStyle/>
           <a:p>
             <a:pPr algn="ctr"/>
-            <a:endParaRPr/>
           </a:p>
         </p:txBody>
       </p:sp>
@@ -4470,14 +4353,240 @@
       </p:sp>
       <p:sp>
         <p:nvSpPr>
-          <p:cNvPr id="7" name="Rectangle 6"/>
+          <p:cNvPr id="7" name="TextBox 6"/>
+          <p:cNvSpPr txBox="1"/>
+          <p:nvPr/>
+        </p:nvSpPr>
+        <p:spPr>
+          <a:xfrm>
+            <a:off x="457200" y="1097280"/>
+            <a:ext cx="5303520" cy="365760"/>
+          </a:xfrm>
+          <a:prstGeom prst="rect">
+            <a:avLst/>
+          </a:prstGeom>
+          <a:noFill/>
+        </p:spPr>
+        <p:txBody>
+          <a:bodyPr wrap="square">
+            <a:spAutoFit/>
+          </a:bodyPr>
+          <a:lstStyle/>
+          <a:p>
+            <a:pPr algn="l"/>
+            <a:r>
+              <a:rPr sz="1400" b="1" i="0">
+                <a:solidFill>
+                  <a:srgbClr val="CC0000"/>
+                </a:solidFill>
+                <a:latin typeface="Calibri"/>
+              </a:rPr>
+              <a:t>Official CLI – Limited and outdated</a:t>
+            </a:r>
+          </a:p>
+        </p:txBody>
+      </p:sp>
+      <p:sp>
+        <p:nvSpPr>
+          <p:cNvPr id="8" name="TextBox 7"/>
+          <p:cNvSpPr txBox="1"/>
+          <p:nvPr/>
+        </p:nvSpPr>
+        <p:spPr>
+          <a:xfrm>
+            <a:off x="457200" y="1554480"/>
+            <a:ext cx="5303520" cy="3200400"/>
+          </a:xfrm>
+          <a:prstGeom prst="rect">
+            <a:avLst/>
+          </a:prstGeom>
+          <a:noFill/>
+        </p:spPr>
+        <p:txBody>
+          <a:bodyPr wrap="square">
+            <a:spAutoFit/>
+          </a:bodyPr>
+          <a:lstStyle/>
+          <a:p>
+            <a:r>
+              <a:rPr sz="1500" b="0">
+                <a:solidFill>
+                  <a:srgbClr val="CC0000"/>
+                </a:solidFill>
+                <a:latin typeface="Calibri"/>
+              </a:rPr>
+              <a:t>•  No longer maintained – frozen in time</a:t>
+            </a:r>
+          </a:p>
+          <a:p>
+            <a:r>
+              <a:rPr sz="1500" b="0">
+                <a:solidFill>
+                  <a:srgbClr val="CC0000"/>
+                </a:solidFill>
+                <a:latin typeface="Calibri"/>
+              </a:rPr>
+              <a:t>•  Covers only export/import/publish operations</a:t>
+            </a:r>
+          </a:p>
+          <a:p>
+            <a:r>
+              <a:rPr sz="1500" b="0">
+                <a:solidFill>
+                  <a:srgbClr val="CC0000"/>
+                </a:solidFill>
+                <a:latin typeface="Calibri"/>
+              </a:rPr>
+              <a:t>•  Limited region support (us/eu/ap only)</a:t>
+            </a:r>
+          </a:p>
+          <a:p>
+            <a:r>
+              <a:rPr sz="1500" b="0">
+                <a:solidFill>
+                  <a:srgbClr val="CC0000"/>
+                </a:solidFill>
+                <a:latin typeface="Calibri"/>
+              </a:rPr>
+              <a:t>•  Complex credential and profile management</a:t>
+            </a:r>
+          </a:p>
+          <a:p>
+            <a:r>
+              <a:rPr sz="1500" b="0">
+                <a:solidFill>
+                  <a:srgbClr val="CC0000"/>
+                </a:solidFill>
+                <a:latin typeface="Calibri"/>
+              </a:rPr>
+              <a:t>•  No modern automation-friendly features</a:t>
+            </a:r>
+          </a:p>
+        </p:txBody>
+      </p:sp>
+      <p:sp>
+        <p:nvSpPr>
+          <p:cNvPr id="9" name="TextBox 8"/>
+          <p:cNvSpPr txBox="1"/>
+          <p:nvPr/>
+        </p:nvSpPr>
+        <p:spPr>
+          <a:xfrm>
+            <a:off x="6400800" y="1097280"/>
+            <a:ext cx="5303520" cy="365760"/>
+          </a:xfrm>
+          <a:prstGeom prst="rect">
+            <a:avLst/>
+          </a:prstGeom>
+          <a:noFill/>
+        </p:spPr>
+        <p:txBody>
+          <a:bodyPr wrap="square">
+            <a:spAutoFit/>
+          </a:bodyPr>
+          <a:lstStyle/>
+          <a:p>
+            <a:pPr algn="l"/>
+            <a:r>
+              <a:rPr sz="1400" b="1" i="0">
+                <a:solidFill>
+                  <a:srgbClr val="009944"/>
+                </a:solidFill>
+                <a:latin typeface="Calibri"/>
+              </a:rPr>
+              <a:t>iics-cli – Modern, actively maintained</a:t>
+            </a:r>
+          </a:p>
+        </p:txBody>
+      </p:sp>
+      <p:sp>
+        <p:nvSpPr>
+          <p:cNvPr id="10" name="TextBox 9"/>
+          <p:cNvSpPr txBox="1"/>
+          <p:nvPr/>
+        </p:nvSpPr>
+        <p:spPr>
+          <a:xfrm>
+            <a:off x="6400800" y="1554480"/>
+            <a:ext cx="5303520" cy="3200400"/>
+          </a:xfrm>
+          <a:prstGeom prst="rect">
+            <a:avLst/>
+          </a:prstGeom>
+          <a:noFill/>
+        </p:spPr>
+        <p:txBody>
+          <a:bodyPr wrap="square">
+            <a:spAutoFit/>
+          </a:bodyPr>
+          <a:lstStyle/>
+          <a:p>
+            <a:r>
+              <a:rPr sz="1500" b="0">
+                <a:solidFill>
+                  <a:srgbClr val="009944"/>
+                </a:solidFill>
+                <a:latin typeface="Calibri"/>
+              </a:rPr>
+              <a:t>•  Actively maintained with regular updates</a:t>
+            </a:r>
+          </a:p>
+          <a:p>
+            <a:r>
+              <a:rPr sz="1500" b="0">
+                <a:solidFill>
+                  <a:srgbClr val="009944"/>
+                </a:solidFill>
+                <a:latin typeface="Calibri"/>
+              </a:rPr>
+              <a:t>•  20+ resource types with full CRUD operations</a:t>
+            </a:r>
+          </a:p>
+          <a:p>
+            <a:r>
+              <a:rPr sz="1500" b="0">
+                <a:solidFill>
+                  <a:srgbClr val="009944"/>
+                </a:solidFill>
+                <a:latin typeface="Calibri"/>
+              </a:rPr>
+              <a:t>•  All IICS pod regions supported</a:t>
+            </a:r>
+          </a:p>
+          <a:p>
+            <a:r>
+              <a:rPr sz="1500" b="0">
+                <a:solidFill>
+                  <a:srgbClr val="009944"/>
+                </a:solidFill>
+                <a:latin typeface="Calibri"/>
+              </a:rPr>
+              <a:t>•  Named profiles and session caching</a:t>
+            </a:r>
+          </a:p>
+          <a:p>
+            <a:r>
+              <a:rPr sz="1500" b="0">
+                <a:solidFill>
+                  <a:srgbClr val="009944"/>
+                </a:solidFill>
+                <a:latin typeface="Calibri"/>
+              </a:rPr>
+              <a:t>•  ~8 MB statically-linked Go binary</a:t>
+            </a:r>
+          </a:p>
+        </p:txBody>
+      </p:sp>
+      <p:sp>
+        <p:nvSpPr>
+          <p:cNvPr id="11" name="Rectangle 10"/>
           <p:cNvSpPr/>
           <p:nvPr/>
         </p:nvSpPr>
         <p:spPr>
           <a:xfrm>
-            <a:off x="457200" y="1188720"/>
-            <a:ext cx="6858000" cy="5029200"/>
+            <a:off x="457200" y="4846320"/>
+            <a:ext cx="11247120" cy="1645920"/>
           </a:xfrm>
           <a:prstGeom prst="rect">
             <a:avLst/>
@@ -4508,7 +4617,298 @@
           <a:lstStyle/>
           <a:p>
             <a:pPr algn="ctr"/>
-            <a:endParaRPr/>
+          </a:p>
+        </p:txBody>
+      </p:sp>
+      <p:sp>
+        <p:nvSpPr>
+          <p:cNvPr id="12" name="TextBox 11"/>
+          <p:cNvSpPr txBox="1"/>
+          <p:nvPr/>
+        </p:nvSpPr>
+        <p:spPr>
+          <a:xfrm>
+            <a:off x="594360" y="4937760"/>
+            <a:ext cx="10972800" cy="1463040"/>
+          </a:xfrm>
+          <a:prstGeom prst="rect">
+            <a:avLst/>
+          </a:prstGeom>
+          <a:noFill/>
+        </p:spPr>
+        <p:txBody>
+          <a:bodyPr wrap="square">
+            <a:spAutoFit/>
+          </a:bodyPr>
+          <a:lstStyle/>
+          <a:p>
+            <a:pPr algn="l"/>
+            <a:r>
+              <a:rPr sz="1100" b="0" i="0">
+                <a:solidFill>
+                  <a:srgbClr val="A6E3A1"/>
+                </a:solidFill>
+                <a:latin typeface="Courier New"/>
+              </a:rPr>
+              <a:t># Install – one line
+curl -L https://github.com/jbrazda/iics-cli/releases/latest/download/iics_linux_amd64 \
+  -o /usr/local/bin/iics &amp;&amp; chmod +x /usr/local/bin/iics
+# Docker – minimal image
+COPY iics /usr/local/bin/iics
+# No apt-get install default-jre needed</a:t>
+            </a:r>
+          </a:p>
+        </p:txBody>
+      </p:sp>
+    </p:spTree>
+  </p:cSld>
+  <p:clrMapOvr>
+    <a:masterClrMapping/>
+  </p:clrMapOvr>
+</p:sld>
+</file>
+
+<file path=ppt/slides/slide12.xml><?xml version="1.0" encoding="utf-8"?>
+<p:sld xmlns:a="http://schemas.openxmlformats.org/drawingml/2006/main" xmlns:p="http://schemas.openxmlformats.org/presentationml/2006/main" xmlns:r="http://schemas.openxmlformats.org/officeDocument/2006/relationships">
+  <p:cSld>
+    <p:spTree>
+      <p:nvGrpSpPr>
+        <p:cNvPr id="1" name=""/>
+        <p:cNvGrpSpPr/>
+        <p:nvPr/>
+      </p:nvGrpSpPr>
+      <p:grpSpPr/>
+      <p:sp>
+        <p:nvSpPr>
+          <p:cNvPr id="2" name="Rectangle 1"/>
+          <p:cNvSpPr/>
+          <p:nvPr/>
+        </p:nvSpPr>
+        <p:spPr>
+          <a:xfrm>
+            <a:off x="0" y="0"/>
+            <a:ext cx="12188952" cy="1005840"/>
+          </a:xfrm>
+          <a:prstGeom prst="rect">
+            <a:avLst/>
+          </a:prstGeom>
+          <a:solidFill>
+            <a:srgbClr val="003366"/>
+          </a:solidFill>
+          <a:ln>
+            <a:noFill/>
+          </a:ln>
+        </p:spPr>
+        <p:style>
+          <a:lnRef idx="1">
+            <a:schemeClr val="accent1"/>
+          </a:lnRef>
+          <a:fillRef idx="3">
+            <a:schemeClr val="accent1"/>
+          </a:fillRef>
+          <a:effectRef idx="2">
+            <a:schemeClr val="accent1"/>
+          </a:effectRef>
+          <a:fontRef idx="minor">
+            <a:schemeClr val="lt1"/>
+          </a:fontRef>
+        </p:style>
+        <p:txBody>
+          <a:bodyPr rtlCol="0" anchor="ctr"/>
+          <a:lstStyle/>
+          <a:p>
+            <a:pPr algn="ctr"/>
+          </a:p>
+        </p:txBody>
+      </p:sp>
+      <p:sp>
+        <p:nvSpPr>
+          <p:cNvPr id="3" name="TextBox 2"/>
+          <p:cNvSpPr txBox="1"/>
+          <p:nvPr/>
+        </p:nvSpPr>
+        <p:spPr>
+          <a:xfrm>
+            <a:off x="274320" y="91440"/>
+            <a:ext cx="11430000" cy="640080"/>
+          </a:xfrm>
+          <a:prstGeom prst="rect">
+            <a:avLst/>
+          </a:prstGeom>
+          <a:noFill/>
+        </p:spPr>
+        <p:txBody>
+          <a:bodyPr wrap="square">
+            <a:spAutoFit/>
+          </a:bodyPr>
+          <a:lstStyle/>
+          <a:p>
+            <a:pPr algn="l"/>
+            <a:r>
+              <a:rPr sz="2800" b="1" i="0">
+                <a:solidFill>
+                  <a:srgbClr val="FFFFFF"/>
+                </a:solidFill>
+                <a:latin typeface="Calibri"/>
+              </a:rPr>
+              <a:t>Structured Subcommands &amp; Built-in Help</a:t>
+            </a:r>
+          </a:p>
+        </p:txBody>
+      </p:sp>
+      <p:sp>
+        <p:nvSpPr>
+          <p:cNvPr id="4" name="TextBox 3"/>
+          <p:cNvSpPr txBox="1"/>
+          <p:nvPr/>
+        </p:nvSpPr>
+        <p:spPr>
+          <a:xfrm>
+            <a:off x="274320" y="685800"/>
+            <a:ext cx="11430000" cy="365760"/>
+          </a:xfrm>
+          <a:prstGeom prst="rect">
+            <a:avLst/>
+          </a:prstGeom>
+          <a:noFill/>
+        </p:spPr>
+        <p:txBody>
+          <a:bodyPr wrap="square">
+            <a:spAutoFit/>
+          </a:bodyPr>
+          <a:lstStyle/>
+          <a:p>
+            <a:pPr algn="l"/>
+            <a:r>
+              <a:rPr sz="1400" b="0" i="0">
+                <a:solidFill>
+                  <a:srgbClr val="BBCCFF"/>
+                </a:solidFill>
+                <a:latin typeface="Calibri"/>
+              </a:rPr>
+              <a:t>kubectl / gh / aws style resource-verb hierarchy</a:t>
+            </a:r>
+          </a:p>
+        </p:txBody>
+      </p:sp>
+      <p:sp>
+        <p:nvSpPr>
+          <p:cNvPr id="5" name="Rectangle 4"/>
+          <p:cNvSpPr/>
+          <p:nvPr/>
+        </p:nvSpPr>
+        <p:spPr>
+          <a:xfrm>
+            <a:off x="0" y="6583680"/>
+            <a:ext cx="12188952" cy="274320"/>
+          </a:xfrm>
+          <a:prstGeom prst="rect">
+            <a:avLst/>
+          </a:prstGeom>
+          <a:solidFill>
+            <a:srgbClr val="003366"/>
+          </a:solidFill>
+          <a:ln>
+            <a:noFill/>
+          </a:ln>
+        </p:spPr>
+        <p:style>
+          <a:lnRef idx="1">
+            <a:schemeClr val="accent1"/>
+          </a:lnRef>
+          <a:fillRef idx="3">
+            <a:schemeClr val="accent1"/>
+          </a:fillRef>
+          <a:effectRef idx="2">
+            <a:schemeClr val="accent1"/>
+          </a:effectRef>
+          <a:fontRef idx="minor">
+            <a:schemeClr val="lt1"/>
+          </a:fontRef>
+        </p:style>
+        <p:txBody>
+          <a:bodyPr rtlCol="0" anchor="ctr"/>
+          <a:lstStyle/>
+          <a:p>
+            <a:pPr algn="ctr"/>
+          </a:p>
+        </p:txBody>
+      </p:sp>
+      <p:sp>
+        <p:nvSpPr>
+          <p:cNvPr id="6" name="TextBox 5"/>
+          <p:cNvSpPr txBox="1"/>
+          <p:nvPr/>
+        </p:nvSpPr>
+        <p:spPr>
+          <a:xfrm>
+            <a:off x="274320" y="6565392"/>
+            <a:ext cx="11612880" cy="274320"/>
+          </a:xfrm>
+          <a:prstGeom prst="rect">
+            <a:avLst/>
+          </a:prstGeom>
+          <a:noFill/>
+        </p:spPr>
+        <p:txBody>
+          <a:bodyPr wrap="square">
+            <a:spAutoFit/>
+          </a:bodyPr>
+          <a:lstStyle/>
+          <a:p>
+            <a:pPr algn="l"/>
+            <a:r>
+              <a:rPr sz="900" b="0" i="0">
+                <a:solidFill>
+                  <a:srgbClr val="AABBCC"/>
+                </a:solidFill>
+                <a:latin typeface="Calibri"/>
+              </a:rPr>
+              <a:t>iics-cli  |  Informatica IICS Command Line Interface</a:t>
+            </a:r>
+          </a:p>
+        </p:txBody>
+      </p:sp>
+      <p:sp>
+        <p:nvSpPr>
+          <p:cNvPr id="7" name="Rectangle 6"/>
+          <p:cNvSpPr/>
+          <p:nvPr/>
+        </p:nvSpPr>
+        <p:spPr>
+          <a:xfrm>
+            <a:off x="457200" y="1188720"/>
+            <a:ext cx="6858000" cy="5029200"/>
+          </a:xfrm>
+          <a:prstGeom prst="rect">
+            <a:avLst/>
+          </a:prstGeom>
+          <a:solidFill>
+            <a:srgbClr val="1E1E2E"/>
+          </a:solidFill>
+          <a:ln>
+            <a:noFill/>
+          </a:ln>
+        </p:spPr>
+        <p:style>
+          <a:lnRef idx="1">
+            <a:schemeClr val="accent1"/>
+          </a:lnRef>
+          <a:fillRef idx="3">
+            <a:schemeClr val="accent1"/>
+          </a:fillRef>
+          <a:effectRef idx="2">
+            <a:schemeClr val="accent1"/>
+          </a:effectRef>
+          <a:fontRef idx="minor">
+            <a:schemeClr val="lt1"/>
+          </a:fontRef>
+        </p:style>
+        <p:txBody>
+          <a:bodyPr rtlCol="0" anchor="ctr"/>
+          <a:lstStyle/>
+          <a:p>
+            <a:pPr algn="ctr"/>
           </a:p>
         </p:txBody>
       </p:sp>
@@ -4632,7 +5032,6 @@
           <a:lstStyle/>
           <a:p>
             <a:pPr algn="ctr"/>
-            <a:endParaRPr/>
           </a:p>
         </p:txBody>
       </p:sp>
@@ -4748,8 +5147,8 @@
 </p:sld>
 </file>
 
-<file path=ppt/slides/slide12.xml><?xml version="1.0" encoding="utf-8"?>
-<p:sld xmlns:a="http://schemas.openxmlformats.org/drawingml/2006/main" xmlns:r="http://schemas.openxmlformats.org/officeDocument/2006/relationships" xmlns:p="http://schemas.openxmlformats.org/presentationml/2006/main">
+<file path=ppt/slides/slide13.xml><?xml version="1.0" encoding="utf-8"?>
+<p:sld xmlns:a="http://schemas.openxmlformats.org/drawingml/2006/main" xmlns:p="http://schemas.openxmlformats.org/presentationml/2006/main" xmlns:r="http://schemas.openxmlformats.org/officeDocument/2006/relationships">
   <p:cSld>
     <p:spTree>
       <p:nvGrpSpPr>
@@ -4757,14 +5156,7 @@
         <p:cNvGrpSpPr/>
         <p:nvPr/>
       </p:nvGrpSpPr>
-      <p:grpSpPr>
-        <a:xfrm>
-          <a:off x="0" y="0"/>
-          <a:ext cx="0" cy="0"/>
-          <a:chOff x="0" y="0"/>
-          <a:chExt cx="0" cy="0"/>
-        </a:xfrm>
-      </p:grpSpPr>
+      <p:grpSpPr/>
       <p:sp>
         <p:nvSpPr>
           <p:cNvPr id="2" name="Rectangle 1"/>
@@ -4805,7 +5197,6 @@
           <a:lstStyle/>
           <a:p>
             <a:pPr algn="ctr"/>
-            <a:endParaRPr/>
           </a:p>
         </p:txBody>
       </p:sp>
@@ -4919,7 +5310,6 @@
           <a:lstStyle/>
           <a:p>
             <a:pPr algn="ctr"/>
-            <a:endParaRPr/>
           </a:p>
         </p:txBody>
       </p:sp>
@@ -5033,7 +5423,6 @@
           <a:lstStyle/>
           <a:p>
             <a:pPr algn="ctr"/>
-            <a:endParaRPr/>
           </a:p>
         </p:txBody>
       </p:sp>
@@ -5150,7 +5539,6 @@
           <a:lstStyle/>
           <a:p>
             <a:pPr algn="ctr"/>
-            <a:endParaRPr/>
           </a:p>
         </p:txBody>
       </p:sp>
@@ -5284,8 +5672,8 @@
 </p:sld>
 </file>
 
-<file path=ppt/slides/slide13.xml><?xml version="1.0" encoding="utf-8"?>
-<p:sld xmlns:a="http://schemas.openxmlformats.org/drawingml/2006/main" xmlns:r="http://schemas.openxmlformats.org/officeDocument/2006/relationships" xmlns:p="http://schemas.openxmlformats.org/presentationml/2006/main">
+<file path=ppt/slides/slide14.xml><?xml version="1.0" encoding="utf-8"?>
+<p:sld xmlns:a="http://schemas.openxmlformats.org/drawingml/2006/main" xmlns:p="http://schemas.openxmlformats.org/presentationml/2006/main" xmlns:r="http://schemas.openxmlformats.org/officeDocument/2006/relationships">
   <p:cSld>
     <p:spTree>
       <p:nvGrpSpPr>
@@ -5293,14 +5681,7 @@
         <p:cNvGrpSpPr/>
         <p:nvPr/>
       </p:nvGrpSpPr>
-      <p:grpSpPr>
-        <a:xfrm>
-          <a:off x="0" y="0"/>
-          <a:ext cx="0" cy="0"/>
-          <a:chOff x="0" y="0"/>
-          <a:chExt cx="0" cy="0"/>
-        </a:xfrm>
-      </p:grpSpPr>
+      <p:grpSpPr/>
       <p:sp>
         <p:nvSpPr>
           <p:cNvPr id="2" name="Rectangle 1"/>
@@ -5341,7 +5722,6 @@
           <a:lstStyle/>
           <a:p>
             <a:pPr algn="ctr"/>
-            <a:endParaRPr/>
           </a:p>
         </p:txBody>
       </p:sp>
@@ -5420,7 +5800,6 @@
           <a:lstStyle/>
           <a:p>
             <a:pPr algn="ctr"/>
-            <a:endParaRPr/>
           </a:p>
         </p:txBody>
       </p:sp>
@@ -5465,13 +5844,7 @@
           <p:cNvGraphicFramePr>
             <a:graphicFrameLocks noGrp="1"/>
           </p:cNvGraphicFramePr>
-          <p:nvPr>
-            <p:extLst>
-              <p:ext uri="{D42A27DB-BD31-4B8C-83A1-F6EECF244321}">
-                <p14:modId xmlns:p14="http://schemas.microsoft.com/office/powerpoint/2010/main" val="842640267"/>
-              </p:ext>
-            </p:extLst>
-          </p:nvPr>
+          <p:nvPr/>
         </p:nvGraphicFramePr>
         <p:xfrm>
           <a:off x="365760" y="1097280"/>
@@ -5484,27 +5857,9 @@
                 <a:tableStyleId>{5C22544A-7EE6-4342-B048-85BDC9FD1C3A}</a:tableStyleId>
               </a:tblPr>
               <a:tblGrid>
-                <a:gridCol w="3810000">
-                  <a:extLst>
-                    <a:ext uri="{9D8B030D-6E8A-4147-A177-3AD203B41FA5}">
-                      <a16:colId xmlns:a16="http://schemas.microsoft.com/office/drawing/2014/main" val="20000"/>
-                    </a:ext>
-                  </a:extLst>
-                </a:gridCol>
-                <a:gridCol w="3810000">
-                  <a:extLst>
-                    <a:ext uri="{9D8B030D-6E8A-4147-A177-3AD203B41FA5}">
-                      <a16:colId xmlns:a16="http://schemas.microsoft.com/office/drawing/2014/main" val="20001"/>
-                    </a:ext>
-                  </a:extLst>
-                </a:gridCol>
-                <a:gridCol w="3810000">
-                  <a:extLst>
-                    <a:ext uri="{9D8B030D-6E8A-4147-A177-3AD203B41FA5}">
-                      <a16:colId xmlns:a16="http://schemas.microsoft.com/office/drawing/2014/main" val="20002"/>
-                    </a:ext>
-                  </a:extLst>
-                </a:gridCol>
+                <a:gridCol w="3810000"/>
+                <a:gridCol w="3810000"/>
+                <a:gridCol w="3810000"/>
               </a:tblGrid>
               <a:tr h="340042">
                 <a:tc>
@@ -5514,7 +5869,7 @@
                     <a:p>
                       <a:pPr algn="ctr"/>
                       <a:r>
-                        <a:rPr sz="1300" b="1">
+                        <a:rPr b="1" sz="1300">
                           <a:solidFill>
                             <a:srgbClr val="FFFFFF"/>
                           </a:solidFill>
@@ -5537,7 +5892,7 @@
                     <a:p>
                       <a:pPr algn="ctr"/>
                       <a:r>
-                        <a:rPr sz="1300" b="1">
+                        <a:rPr b="1" sz="1300">
                           <a:solidFill>
                             <a:srgbClr val="FFFFFF"/>
                           </a:solidFill>
@@ -5560,7 +5915,7 @@
                     <a:p>
                       <a:pPr algn="ctr"/>
                       <a:r>
-                        <a:rPr sz="1300" b="1">
+                        <a:rPr b="1" sz="1300">
                           <a:solidFill>
                             <a:srgbClr val="FFFFFF"/>
                           </a:solidFill>
@@ -5576,11 +5931,6 @@
                     </a:solidFill>
                   </a:tcPr>
                 </a:tc>
-                <a:extLst>
-                  <a:ext uri="{0D108BD9-81ED-4DB2-BD59-A6C34878D82A}">
-                    <a16:rowId xmlns:a16="http://schemas.microsoft.com/office/drawing/2014/main" val="10000"/>
-                  </a:ext>
-                </a:extLst>
               </a:tr>
               <a:tr h="340042">
                 <a:tc>
@@ -5636,7 +5986,7 @@
                     <a:p>
                       <a:pPr algn="ctr"/>
                       <a:r>
-                        <a:rPr sz="1200" b="1">
+                        <a:rPr b="1" sz="1200">
                           <a:solidFill>
                             <a:srgbClr val="009944"/>
                           </a:solidFill>
@@ -5652,11 +6002,6 @@
                     </a:solidFill>
                   </a:tcPr>
                 </a:tc>
-                <a:extLst>
-                  <a:ext uri="{0D108BD9-81ED-4DB2-BD59-A6C34878D82A}">
-                    <a16:rowId xmlns:a16="http://schemas.microsoft.com/office/drawing/2014/main" val="10001"/>
-                  </a:ext>
-                </a:extLst>
               </a:tr>
               <a:tr h="340042">
                 <a:tc>
@@ -5712,7 +6057,7 @@
                     <a:p>
                       <a:pPr algn="ctr"/>
                       <a:r>
-                        <a:rPr sz="1200" b="1">
+                        <a:rPr b="1" sz="1200">
                           <a:solidFill>
                             <a:srgbClr val="009944"/>
                           </a:solidFill>
@@ -5728,11 +6073,6 @@
                     </a:solidFill>
                   </a:tcPr>
                 </a:tc>
-                <a:extLst>
-                  <a:ext uri="{0D108BD9-81ED-4DB2-BD59-A6C34878D82A}">
-                    <a16:rowId xmlns:a16="http://schemas.microsoft.com/office/drawing/2014/main" val="10002"/>
-                  </a:ext>
-                </a:extLst>
               </a:tr>
               <a:tr h="340042">
                 <a:tc>
@@ -5788,7 +6128,7 @@
                     <a:p>
                       <a:pPr algn="ctr"/>
                       <a:r>
-                        <a:rPr sz="1200" b="1">
+                        <a:rPr b="1" sz="1200">
                           <a:solidFill>
                             <a:srgbClr val="009944"/>
                           </a:solidFill>
@@ -5804,11 +6144,6 @@
                     </a:solidFill>
                   </a:tcPr>
                 </a:tc>
-                <a:extLst>
-                  <a:ext uri="{0D108BD9-81ED-4DB2-BD59-A6C34878D82A}">
-                    <a16:rowId xmlns:a16="http://schemas.microsoft.com/office/drawing/2014/main" val="10003"/>
-                  </a:ext>
-                </a:extLst>
               </a:tr>
               <a:tr h="340042">
                 <a:tc>
@@ -5864,7 +6199,7 @@
                     <a:p>
                       <a:pPr algn="ctr"/>
                       <a:r>
-                        <a:rPr sz="1200" b="1">
+                        <a:rPr b="1" sz="1200">
                           <a:solidFill>
                             <a:srgbClr val="009944"/>
                           </a:solidFill>
@@ -5880,11 +6215,6 @@
                     </a:solidFill>
                   </a:tcPr>
                 </a:tc>
-                <a:extLst>
-                  <a:ext uri="{0D108BD9-81ED-4DB2-BD59-A6C34878D82A}">
-                    <a16:rowId xmlns:a16="http://schemas.microsoft.com/office/drawing/2014/main" val="10004"/>
-                  </a:ext>
-                </a:extLst>
               </a:tr>
               <a:tr h="340042">
                 <a:tc>
@@ -5940,7 +6270,7 @@
                     <a:p>
                       <a:pPr algn="ctr"/>
                       <a:r>
-                        <a:rPr sz="1200" b="1">
+                        <a:rPr b="1" sz="1200">
                           <a:solidFill>
                             <a:srgbClr val="009944"/>
                           </a:solidFill>
@@ -5956,11 +6286,6 @@
                     </a:solidFill>
                   </a:tcPr>
                 </a:tc>
-                <a:extLst>
-                  <a:ext uri="{0D108BD9-81ED-4DB2-BD59-A6C34878D82A}">
-                    <a16:rowId xmlns:a16="http://schemas.microsoft.com/office/drawing/2014/main" val="10005"/>
-                  </a:ext>
-                </a:extLst>
               </a:tr>
               <a:tr h="340042">
                 <a:tc>
@@ -6016,7 +6341,7 @@
                     <a:p>
                       <a:pPr algn="ctr"/>
                       <a:r>
-                        <a:rPr sz="1200" b="1">
+                        <a:rPr b="1" sz="1200">
                           <a:solidFill>
                             <a:srgbClr val="009944"/>
                           </a:solidFill>
@@ -6032,11 +6357,6 @@
                     </a:solidFill>
                   </a:tcPr>
                 </a:tc>
-                <a:extLst>
-                  <a:ext uri="{0D108BD9-81ED-4DB2-BD59-A6C34878D82A}">
-                    <a16:rowId xmlns:a16="http://schemas.microsoft.com/office/drawing/2014/main" val="10006"/>
-                  </a:ext>
-                </a:extLst>
               </a:tr>
               <a:tr h="340042">
                 <a:tc>
@@ -6092,7 +6412,7 @@
                     <a:p>
                       <a:pPr algn="ctr"/>
                       <a:r>
-                        <a:rPr sz="1200" b="1">
+                        <a:rPr b="1" sz="1200">
                           <a:solidFill>
                             <a:srgbClr val="009944"/>
                           </a:solidFill>
@@ -6108,11 +6428,6 @@
                     </a:solidFill>
                   </a:tcPr>
                 </a:tc>
-                <a:extLst>
-                  <a:ext uri="{0D108BD9-81ED-4DB2-BD59-A6C34878D82A}">
-                    <a16:rowId xmlns:a16="http://schemas.microsoft.com/office/drawing/2014/main" val="10007"/>
-                  </a:ext>
-                </a:extLst>
               </a:tr>
               <a:tr h="340042">
                 <a:tc>
@@ -6168,7 +6483,7 @@
                     <a:p>
                       <a:pPr algn="ctr"/>
                       <a:r>
-                        <a:rPr sz="1200" b="1">
+                        <a:rPr b="1" sz="1200">
                           <a:solidFill>
                             <a:srgbClr val="009944"/>
                           </a:solidFill>
@@ -6184,11 +6499,6 @@
                     </a:solidFill>
                   </a:tcPr>
                 </a:tc>
-                <a:extLst>
-                  <a:ext uri="{0D108BD9-81ED-4DB2-BD59-A6C34878D82A}">
-                    <a16:rowId xmlns:a16="http://schemas.microsoft.com/office/drawing/2014/main" val="10008"/>
-                  </a:ext>
-                </a:extLst>
               </a:tr>
               <a:tr h="340042">
                 <a:tc>
@@ -6244,7 +6554,7 @@
                     <a:p>
                       <a:pPr algn="ctr"/>
                       <a:r>
-                        <a:rPr sz="1200" b="1">
+                        <a:rPr b="1" sz="1200">
                           <a:solidFill>
                             <a:srgbClr val="009944"/>
                           </a:solidFill>
@@ -6260,11 +6570,6 @@
                     </a:solidFill>
                   </a:tcPr>
                 </a:tc>
-                <a:extLst>
-                  <a:ext uri="{0D108BD9-81ED-4DB2-BD59-A6C34878D82A}">
-                    <a16:rowId xmlns:a16="http://schemas.microsoft.com/office/drawing/2014/main" val="10009"/>
-                  </a:ext>
-                </a:extLst>
               </a:tr>
               <a:tr h="340042">
                 <a:tc>
@@ -6320,7 +6625,7 @@
                     <a:p>
                       <a:pPr algn="ctr"/>
                       <a:r>
-                        <a:rPr sz="1200" b="1">
+                        <a:rPr b="1" sz="1200">
                           <a:solidFill>
                             <a:srgbClr val="009944"/>
                           </a:solidFill>
@@ -6336,11 +6641,6 @@
                     </a:solidFill>
                   </a:tcPr>
                 </a:tc>
-                <a:extLst>
-                  <a:ext uri="{0D108BD9-81ED-4DB2-BD59-A6C34878D82A}">
-                    <a16:rowId xmlns:a16="http://schemas.microsoft.com/office/drawing/2014/main" val="10010"/>
-                  </a:ext>
-                </a:extLst>
               </a:tr>
               <a:tr h="340042">
                 <a:tc>
@@ -6396,7 +6696,7 @@
                     <a:p>
                       <a:pPr algn="ctr"/>
                       <a:r>
-                        <a:rPr sz="1200" b="1">
+                        <a:rPr b="1" sz="1200">
                           <a:solidFill>
                             <a:srgbClr val="009944"/>
                           </a:solidFill>
@@ -6412,11 +6712,6 @@
                     </a:solidFill>
                   </a:tcPr>
                 </a:tc>
-                <a:extLst>
-                  <a:ext uri="{0D108BD9-81ED-4DB2-BD59-A6C34878D82A}">
-                    <a16:rowId xmlns:a16="http://schemas.microsoft.com/office/drawing/2014/main" val="10011"/>
-                  </a:ext>
-                </a:extLst>
               </a:tr>
               <a:tr h="340042">
                 <a:tc>
@@ -6472,7 +6767,7 @@
                     <a:p>
                       <a:pPr algn="ctr"/>
                       <a:r>
-                        <a:rPr sz="1200" b="1">
+                        <a:rPr b="1" sz="1200">
                           <a:solidFill>
                             <a:srgbClr val="009944"/>
                           </a:solidFill>
@@ -6488,11 +6783,6 @@
                     </a:solidFill>
                   </a:tcPr>
                 </a:tc>
-                <a:extLst>
-                  <a:ext uri="{0D108BD9-81ED-4DB2-BD59-A6C34878D82A}">
-                    <a16:rowId xmlns:a16="http://schemas.microsoft.com/office/drawing/2014/main" val="10012"/>
-                  </a:ext>
-                </a:extLst>
               </a:tr>
               <a:tr h="340042">
                 <a:tc>
@@ -6548,7 +6838,7 @@
                     <a:p>
                       <a:pPr algn="ctr"/>
                       <a:r>
-                        <a:rPr sz="1200" b="1">
+                        <a:rPr b="1" sz="1200">
                           <a:solidFill>
                             <a:srgbClr val="009944"/>
                           </a:solidFill>
@@ -6564,11 +6854,6 @@
                     </a:solidFill>
                   </a:tcPr>
                 </a:tc>
-                <a:extLst>
-                  <a:ext uri="{0D108BD9-81ED-4DB2-BD59-A6C34878D82A}">
-                    <a16:rowId xmlns:a16="http://schemas.microsoft.com/office/drawing/2014/main" val="10013"/>
-                  </a:ext>
-                </a:extLst>
               </a:tr>
               <a:tr h="340042">
                 <a:tc>
@@ -6578,29 +6863,14 @@
                     <a:p>
                       <a:pPr algn="l"/>
                       <a:r>
-                        <a:rPr sz="1200" dirty="0">
+                        <a:rPr sz="1200">
                           <a:solidFill>
                             <a:srgbClr val="333333"/>
                           </a:solidFill>
                           <a:latin typeface="Calibri"/>
                         </a:rPr>
-                        <a:t>Single binary – no </a:t>
+                        <a:t>Structured subcommands</a:t>
                       </a:r>
-                      <a:r>
-                        <a:rPr lang="en-US" sz="1200" dirty="0">
-                          <a:solidFill>
-                            <a:srgbClr val="333333"/>
-                          </a:solidFill>
-                          <a:latin typeface="Calibri"/>
-                        </a:rPr>
-                        <a:t>external dependencies</a:t>
-                      </a:r>
-                      <a:endParaRPr sz="1200" dirty="0">
-                        <a:solidFill>
-                          <a:srgbClr val="333333"/>
-                        </a:solidFill>
-                        <a:latin typeface="Calibri"/>
-                      </a:endParaRPr>
                     </a:p>
                   </a:txBody>
                   <a:tcPr>
@@ -6616,20 +6886,14 @@
                     <a:p>
                       <a:pPr algn="ctr"/>
                       <a:r>
-                        <a:rPr lang="en-US" sz="1200" b="1" dirty="0">
+                        <a:rPr sz="1200">
                           <a:solidFill>
-                            <a:srgbClr val="009944"/>
+                            <a:srgbClr val="CC0000"/>
                           </a:solidFill>
-                          <a:latin typeface="+mn-lt"/>
+                          <a:latin typeface="Calibri"/>
                         </a:rPr>
-                        <a:t>Yes</a:t>
+                        <a:t>No</a:t>
                       </a:r>
-                      <a:endParaRPr sz="1200" dirty="0">
-                        <a:solidFill>
-                          <a:srgbClr val="CC0000"/>
-                        </a:solidFill>
-                        <a:latin typeface="Calibri"/>
-                      </a:endParaRPr>
                     </a:p>
                   </a:txBody>
                   <a:tcPr>
@@ -6645,7 +6909,7 @@
                     <a:p>
                       <a:pPr algn="ctr"/>
                       <a:r>
-                        <a:rPr sz="1200" b="1" dirty="0">
+                        <a:rPr b="1" sz="1200">
                           <a:solidFill>
                             <a:srgbClr val="009944"/>
                           </a:solidFill>
@@ -6661,11 +6925,6 @@
                     </a:solidFill>
                   </a:tcPr>
                 </a:tc>
-                <a:extLst>
-                  <a:ext uri="{0D108BD9-81ED-4DB2-BD59-A6C34878D82A}">
-                    <a16:rowId xmlns:a16="http://schemas.microsoft.com/office/drawing/2014/main" val="10014"/>
-                  </a:ext>
-                </a:extLst>
               </a:tr>
               <a:tr h="340050">
                 <a:tc>
@@ -6721,7 +6980,7 @@
                     <a:p>
                       <a:pPr algn="ctr"/>
                       <a:r>
-                        <a:rPr sz="1200" b="1" dirty="0">
+                        <a:rPr b="1" sz="1200">
                           <a:solidFill>
                             <a:srgbClr val="009944"/>
                           </a:solidFill>
@@ -6737,11 +6996,6 @@
                     </a:solidFill>
                   </a:tcPr>
                 </a:tc>
-                <a:extLst>
-                  <a:ext uri="{0D108BD9-81ED-4DB2-BD59-A6C34878D82A}">
-                    <a16:rowId xmlns:a16="http://schemas.microsoft.com/office/drawing/2014/main" val="10015"/>
-                  </a:ext>
-                </a:extLst>
               </a:tr>
             </a:tbl>
           </a:graphicData>
@@ -6755,8 +7009,8 @@
 </p:sld>
 </file>
 
-<file path=ppt/slides/slide14.xml><?xml version="1.0" encoding="utf-8"?>
-<p:sld xmlns:a="http://schemas.openxmlformats.org/drawingml/2006/main" xmlns:r="http://schemas.openxmlformats.org/officeDocument/2006/relationships" xmlns:p="http://schemas.openxmlformats.org/presentationml/2006/main">
+<file path=ppt/slides/slide15.xml><?xml version="1.0" encoding="utf-8"?>
+<p:sld xmlns:a="http://schemas.openxmlformats.org/drawingml/2006/main" xmlns:p="http://schemas.openxmlformats.org/presentationml/2006/main" xmlns:r="http://schemas.openxmlformats.org/officeDocument/2006/relationships">
   <p:cSld>
     <p:spTree>
       <p:nvGrpSpPr>
@@ -6764,14 +7018,7 @@
         <p:cNvGrpSpPr/>
         <p:nvPr/>
       </p:nvGrpSpPr>
-      <p:grpSpPr>
-        <a:xfrm>
-          <a:off x="0" y="0"/>
-          <a:ext cx="0" cy="0"/>
-          <a:chOff x="0" y="0"/>
-          <a:chExt cx="0" cy="0"/>
-        </a:xfrm>
-      </p:grpSpPr>
+      <p:grpSpPr/>
       <p:sp>
         <p:nvSpPr>
           <p:cNvPr id="2" name="Rectangle 1"/>
@@ -6812,7 +7059,6 @@
           <a:lstStyle/>
           <a:p>
             <a:pPr algn="ctr"/>
-            <a:endParaRPr/>
           </a:p>
         </p:txBody>
       </p:sp>
@@ -6926,7 +7172,6 @@
           <a:lstStyle/>
           <a:p>
             <a:pPr algn="ctr"/>
-            <a:endParaRPr/>
           </a:p>
         </p:txBody>
       </p:sp>
@@ -7005,7 +7250,6 @@
           <a:lstStyle/>
           <a:p>
             <a:pPr algn="ctr"/>
-            <a:endParaRPr/>
           </a:p>
         </p:txBody>
       </p:sp>
@@ -7072,8 +7316,8 @@
 </p:sld>
 </file>
 
-<file path=ppt/slides/slide15.xml><?xml version="1.0" encoding="utf-8"?>
-<p:sld xmlns:a="http://schemas.openxmlformats.org/drawingml/2006/main" xmlns:r="http://schemas.openxmlformats.org/officeDocument/2006/relationships" xmlns:p="http://schemas.openxmlformats.org/presentationml/2006/main">
+<file path=ppt/slides/slide16.xml><?xml version="1.0" encoding="utf-8"?>
+<p:sld xmlns:a="http://schemas.openxmlformats.org/drawingml/2006/main" xmlns:p="http://schemas.openxmlformats.org/presentationml/2006/main" xmlns:r="http://schemas.openxmlformats.org/officeDocument/2006/relationships">
   <p:cSld>
     <p:spTree>
       <p:nvGrpSpPr>
@@ -7081,14 +7325,7 @@
         <p:cNvGrpSpPr/>
         <p:nvPr/>
       </p:nvGrpSpPr>
-      <p:grpSpPr>
-        <a:xfrm>
-          <a:off x="0" y="0"/>
-          <a:ext cx="0" cy="0"/>
-          <a:chOff x="0" y="0"/>
-          <a:chExt cx="0" cy="0"/>
-        </a:xfrm>
-      </p:grpSpPr>
+      <p:grpSpPr/>
       <p:sp>
         <p:nvSpPr>
           <p:cNvPr id="2" name="Rectangle 1"/>
@@ -7129,7 +7366,6 @@
           <a:lstStyle/>
           <a:p>
             <a:pPr algn="ctr"/>
-            <a:endParaRPr/>
           </a:p>
         </p:txBody>
       </p:sp>
@@ -7173,7 +7409,6 @@
           <a:lstStyle/>
           <a:p>
             <a:pPr algn="ctr"/>
-            <a:endParaRPr/>
           </a:p>
         </p:txBody>
       </p:sp>
@@ -7326,7 +7561,7 @@
 </file>
 
 <file path=ppt/slides/slide2.xml><?xml version="1.0" encoding="utf-8"?>
-<p:sld xmlns:a="http://schemas.openxmlformats.org/drawingml/2006/main" xmlns:r="http://schemas.openxmlformats.org/officeDocument/2006/relationships" xmlns:p="http://schemas.openxmlformats.org/presentationml/2006/main">
+<p:sld xmlns:a="http://schemas.openxmlformats.org/drawingml/2006/main" xmlns:p="http://schemas.openxmlformats.org/presentationml/2006/main" xmlns:r="http://schemas.openxmlformats.org/officeDocument/2006/relationships">
   <p:cSld>
     <p:spTree>
       <p:nvGrpSpPr>
@@ -7334,14 +7569,7 @@
         <p:cNvGrpSpPr/>
         <p:nvPr/>
       </p:nvGrpSpPr>
-      <p:grpSpPr>
-        <a:xfrm>
-          <a:off x="0" y="0"/>
-          <a:ext cx="0" cy="0"/>
-          <a:chOff x="0" y="0"/>
-          <a:chExt cx="0" cy="0"/>
-        </a:xfrm>
-      </p:grpSpPr>
+      <p:grpSpPr/>
       <p:sp>
         <p:nvSpPr>
           <p:cNvPr id="2" name="Rectangle 1"/>
@@ -7382,7 +7610,6 @@
           <a:lstStyle/>
           <a:p>
             <a:pPr algn="ctr"/>
-            <a:endParaRPr/>
           </a:p>
         </p:txBody>
       </p:sp>
@@ -7461,7 +7688,6 @@
           <a:lstStyle/>
           <a:p>
             <a:pPr algn="ctr"/>
-            <a:endParaRPr/>
           </a:p>
         </p:txBody>
       </p:sp>
@@ -7587,7 +7813,7 @@
         <p:spPr>
           <a:xfrm>
             <a:off x="6217920" y="1188720"/>
-            <a:ext cx="5486400" cy="1400383"/>
+            <a:ext cx="5486400" cy="5029200"/>
           </a:xfrm>
           <a:prstGeom prst="rect">
             <a:avLst/>
@@ -7601,7 +7827,7 @@
           <a:lstStyle/>
           <a:p>
             <a:r>
-              <a:rPr sz="1700" b="0" dirty="0">
+              <a:rPr sz="1700" b="0">
                 <a:solidFill>
                   <a:srgbClr val="333333"/>
                 </a:solidFill>
@@ -7612,7 +7838,7 @@
           </a:p>
           <a:p>
             <a:r>
-              <a:rPr sz="1700" b="0" dirty="0">
+              <a:rPr sz="1700" b="0">
                 <a:solidFill>
                   <a:srgbClr val="333333"/>
                 </a:solidFill>
@@ -7623,7 +7849,7 @@
           </a:p>
           <a:p>
             <a:r>
-              <a:rPr sz="1700" b="0" dirty="0">
+              <a:rPr sz="1700" b="0">
                 <a:solidFill>
                   <a:srgbClr val="333333"/>
                 </a:solidFill>
@@ -7634,18 +7860,18 @@
           </a:p>
           <a:p>
             <a:r>
-              <a:rPr lang="en-US" sz="1700" b="0" dirty="0">
+              <a:rPr sz="1700" b="0">
                 <a:solidFill>
                   <a:srgbClr val="333333"/>
                 </a:solidFill>
                 <a:latin typeface="Calibri"/>
               </a:rPr>
-              <a:t>  9.  Single Binary – No external dependencies required</a:t>
-            </a:r>
-          </a:p>
-          <a:p>
-            <a:r>
-              <a:rPr lang="en-US" sz="1700" b="0" dirty="0">
+              <a:t>  9.  Single Binary – No JVM Required</a:t>
+            </a:r>
+          </a:p>
+          <a:p>
+            <a:r>
+              <a:rPr sz="1700" b="0">
                 <a:solidFill>
                   <a:srgbClr val="333333"/>
                 </a:solidFill>
@@ -7665,7 +7891,7 @@
 </file>
 
 <file path=ppt/slides/slide3.xml><?xml version="1.0" encoding="utf-8"?>
-<p:sld xmlns:a="http://schemas.openxmlformats.org/drawingml/2006/main" xmlns:r="http://schemas.openxmlformats.org/officeDocument/2006/relationships" xmlns:p="http://schemas.openxmlformats.org/presentationml/2006/main">
+<p:sld xmlns:a="http://schemas.openxmlformats.org/drawingml/2006/main" xmlns:p="http://schemas.openxmlformats.org/presentationml/2006/main" xmlns:r="http://schemas.openxmlformats.org/officeDocument/2006/relationships">
   <p:cSld>
     <p:spTree>
       <p:nvGrpSpPr>
@@ -7673,14 +7899,7 @@
         <p:cNvGrpSpPr/>
         <p:nvPr/>
       </p:nvGrpSpPr>
-      <p:grpSpPr>
-        <a:xfrm>
-          <a:off x="0" y="0"/>
-          <a:ext cx="0" cy="0"/>
-          <a:chOff x="0" y="0"/>
-          <a:chExt cx="0" cy="0"/>
-        </a:xfrm>
-      </p:grpSpPr>
+      <p:grpSpPr/>
       <p:sp>
         <p:nvSpPr>
           <p:cNvPr id="2" name="Rectangle 1"/>
@@ -7721,7 +7940,6 @@
           <a:lstStyle/>
           <a:p>
             <a:pPr algn="ctr"/>
-            <a:endParaRPr/>
           </a:p>
         </p:txBody>
       </p:sp>
@@ -7835,7 +8053,6 @@
           <a:lstStyle/>
           <a:p>
             <a:pPr algn="ctr"/>
-            <a:endParaRPr/>
           </a:p>
         </p:txBody>
       </p:sp>
@@ -7991,7 +8208,7 @@
                 </a:solidFill>
                 <a:latin typeface="Calibri"/>
               </a:rPr>
-              <a:t>•  Java-based – requires JVM on every machine / Docker image</a:t>
+              <a:t>•  Limited to export/import/publish operations only – no user, role, connection, or schedule management</a:t>
             </a:r>
           </a:p>
           <a:p>
@@ -8016,7 +8233,7 @@
 </file>
 
 <file path=ppt/slides/slide4.xml><?xml version="1.0" encoding="utf-8"?>
-<p:sld xmlns:a="http://schemas.openxmlformats.org/drawingml/2006/main" xmlns:r="http://schemas.openxmlformats.org/officeDocument/2006/relationships" xmlns:p="http://schemas.openxmlformats.org/presentationml/2006/main">
+<p:sld xmlns:a="http://schemas.openxmlformats.org/drawingml/2006/main" xmlns:p="http://schemas.openxmlformats.org/presentationml/2006/main" xmlns:r="http://schemas.openxmlformats.org/officeDocument/2006/relationships">
   <p:cSld>
     <p:spTree>
       <p:nvGrpSpPr>
@@ -8024,14 +8241,7 @@
         <p:cNvGrpSpPr/>
         <p:nvPr/>
       </p:nvGrpSpPr>
-      <p:grpSpPr>
-        <a:xfrm>
-          <a:off x="0" y="0"/>
-          <a:ext cx="0" cy="0"/>
-          <a:chOff x="0" y="0"/>
-          <a:chExt cx="0" cy="0"/>
-        </a:xfrm>
-      </p:grpSpPr>
+      <p:grpSpPr/>
       <p:sp>
         <p:nvSpPr>
           <p:cNvPr id="2" name="Rectangle 1"/>
@@ -8072,7 +8282,6 @@
           <a:lstStyle/>
           <a:p>
             <a:pPr algn="ctr"/>
-            <a:endParaRPr/>
           </a:p>
         </p:txBody>
       </p:sp>
@@ -8186,7 +8395,6 @@
           <a:lstStyle/>
           <a:p>
             <a:pPr algn="ctr"/>
-            <a:endParaRPr/>
           </a:p>
         </p:txBody>
       </p:sp>
@@ -8300,7 +8508,6 @@
           <a:lstStyle/>
           <a:p>
             <a:pPr algn="ctr"/>
-            <a:endParaRPr/>
           </a:p>
         </p:txBody>
       </p:sp>
@@ -8417,7 +8624,6 @@
           <a:lstStyle/>
           <a:p>
             <a:pPr algn="ctr"/>
-            <a:endParaRPr/>
           </a:p>
         </p:txBody>
       </p:sp>
@@ -8478,27 +8684,9 @@
                 <a:tableStyleId>{5C22544A-7EE6-4342-B048-85BDC9FD1C3A}</a:tableStyleId>
               </a:tblPr>
               <a:tblGrid>
-                <a:gridCol w="2743200">
-                  <a:extLst>
-                    <a:ext uri="{9D8B030D-6E8A-4147-A177-3AD203B41FA5}">
-                      <a16:colId xmlns:a16="http://schemas.microsoft.com/office/drawing/2014/main" val="20000"/>
-                    </a:ext>
-                  </a:extLst>
-                </a:gridCol>
-                <a:gridCol w="2743200">
-                  <a:extLst>
-                    <a:ext uri="{9D8B030D-6E8A-4147-A177-3AD203B41FA5}">
-                      <a16:colId xmlns:a16="http://schemas.microsoft.com/office/drawing/2014/main" val="20001"/>
-                    </a:ext>
-                  </a:extLst>
-                </a:gridCol>
-                <a:gridCol w="2743200">
-                  <a:extLst>
-                    <a:ext uri="{9D8B030D-6E8A-4147-A177-3AD203B41FA5}">
-                      <a16:colId xmlns:a16="http://schemas.microsoft.com/office/drawing/2014/main" val="20002"/>
-                    </a:ext>
-                  </a:extLst>
-                </a:gridCol>
+                <a:gridCol w="2743200"/>
+                <a:gridCol w="2743200"/>
+                <a:gridCol w="2743200"/>
               </a:tblGrid>
               <a:tr h="388620">
                 <a:tc>
@@ -8508,7 +8696,7 @@
                     <a:p>
                       <a:pPr algn="ctr"/>
                       <a:r>
-                        <a:rPr sz="1300" b="1">
+                        <a:rPr b="1" sz="1300">
                           <a:solidFill>
                             <a:srgbClr val="FFFFFF"/>
                           </a:solidFill>
@@ -8531,7 +8719,7 @@
                     <a:p>
                       <a:pPr algn="ctr"/>
                       <a:r>
-                        <a:rPr sz="1300" b="1">
+                        <a:rPr b="1" sz="1300">
                           <a:solidFill>
                             <a:srgbClr val="FFFFFF"/>
                           </a:solidFill>
@@ -8554,7 +8742,7 @@
                     <a:p>
                       <a:pPr algn="ctr"/>
                       <a:r>
-                        <a:rPr sz="1300" b="1">
+                        <a:rPr b="1" sz="1300">
                           <a:solidFill>
                             <a:srgbClr val="FFFFFF"/>
                           </a:solidFill>
@@ -8570,11 +8758,6 @@
                     </a:solidFill>
                   </a:tcPr>
                 </a:tc>
-                <a:extLst>
-                  <a:ext uri="{0D108BD9-81ED-4DB2-BD59-A6C34878D82A}">
-                    <a16:rowId xmlns:a16="http://schemas.microsoft.com/office/drawing/2014/main" val="10000"/>
-                  </a:ext>
-                </a:extLst>
               </a:tr>
               <a:tr h="388620">
                 <a:tc>
@@ -8646,11 +8829,6 @@
                     </a:solidFill>
                   </a:tcPr>
                 </a:tc>
-                <a:extLst>
-                  <a:ext uri="{0D108BD9-81ED-4DB2-BD59-A6C34878D82A}">
-                    <a16:rowId xmlns:a16="http://schemas.microsoft.com/office/drawing/2014/main" val="10001"/>
-                  </a:ext>
-                </a:extLst>
               </a:tr>
               <a:tr h="388620">
                 <a:tc>
@@ -8722,11 +8900,6 @@
                     </a:solidFill>
                   </a:tcPr>
                 </a:tc>
-                <a:extLst>
-                  <a:ext uri="{0D108BD9-81ED-4DB2-BD59-A6C34878D82A}">
-                    <a16:rowId xmlns:a16="http://schemas.microsoft.com/office/drawing/2014/main" val="10002"/>
-                  </a:ext>
-                </a:extLst>
               </a:tr>
               <a:tr h="388620">
                 <a:tc>
@@ -8798,11 +8971,6 @@
                     </a:solidFill>
                   </a:tcPr>
                 </a:tc>
-                <a:extLst>
-                  <a:ext uri="{0D108BD9-81ED-4DB2-BD59-A6C34878D82A}">
-                    <a16:rowId xmlns:a16="http://schemas.microsoft.com/office/drawing/2014/main" val="10003"/>
-                  </a:ext>
-                </a:extLst>
               </a:tr>
             </a:tbl>
           </a:graphicData>
@@ -8852,7 +9020,7 @@
 </file>
 
 <file path=ppt/slides/slide5.xml><?xml version="1.0" encoding="utf-8"?>
-<p:sld xmlns:a="http://schemas.openxmlformats.org/drawingml/2006/main" xmlns:r="http://schemas.openxmlformats.org/officeDocument/2006/relationships" xmlns:p="http://schemas.openxmlformats.org/presentationml/2006/main">
+<p:sld xmlns:a="http://schemas.openxmlformats.org/drawingml/2006/main" xmlns:p="http://schemas.openxmlformats.org/presentationml/2006/main" xmlns:r="http://schemas.openxmlformats.org/officeDocument/2006/relationships">
   <p:cSld>
     <p:spTree>
       <p:nvGrpSpPr>
@@ -8860,14 +9028,7 @@
         <p:cNvGrpSpPr/>
         <p:nvPr/>
       </p:nvGrpSpPr>
-      <p:grpSpPr>
-        <a:xfrm>
-          <a:off x="0" y="0"/>
-          <a:ext cx="0" cy="0"/>
-          <a:chOff x="0" y="0"/>
-          <a:chExt cx="0" cy="0"/>
-        </a:xfrm>
-      </p:grpSpPr>
+      <p:grpSpPr/>
       <p:sp>
         <p:nvSpPr>
           <p:cNvPr id="2" name="Rectangle 1"/>
@@ -8908,7 +9069,6 @@
           <a:lstStyle/>
           <a:p>
             <a:pPr algn="ctr"/>
-            <a:endParaRPr/>
           </a:p>
         </p:txBody>
       </p:sp>
@@ -9022,7 +9182,6 @@
           <a:lstStyle/>
           <a:p>
             <a:pPr algn="ctr"/>
-            <a:endParaRPr/>
           </a:p>
         </p:txBody>
       </p:sp>
@@ -9136,7 +9295,6 @@
           <a:lstStyle/>
           <a:p>
             <a:pPr algn="ctr"/>
-            <a:endParaRPr/>
           </a:p>
         </p:txBody>
       </p:sp>
@@ -9229,7 +9387,7 @@
 </file>
 
 <file path=ppt/slides/slide6.xml><?xml version="1.0" encoding="utf-8"?>
-<p:sld xmlns:a="http://schemas.openxmlformats.org/drawingml/2006/main" xmlns:r="http://schemas.openxmlformats.org/officeDocument/2006/relationships" xmlns:p="http://schemas.openxmlformats.org/presentationml/2006/main">
+<p:sld xmlns:a="http://schemas.openxmlformats.org/drawingml/2006/main" xmlns:p="http://schemas.openxmlformats.org/presentationml/2006/main" xmlns:r="http://schemas.openxmlformats.org/officeDocument/2006/relationships">
   <p:cSld>
     <p:spTree>
       <p:nvGrpSpPr>
@@ -9237,14 +9395,7 @@
         <p:cNvGrpSpPr/>
         <p:nvPr/>
       </p:nvGrpSpPr>
-      <p:grpSpPr>
-        <a:xfrm>
-          <a:off x="0" y="0"/>
-          <a:ext cx="0" cy="0"/>
-          <a:chOff x="0" y="0"/>
-          <a:chExt cx="0" cy="0"/>
-        </a:xfrm>
-      </p:grpSpPr>
+      <p:grpSpPr/>
       <p:sp>
         <p:nvSpPr>
           <p:cNvPr id="2" name="Rectangle 1"/>
@@ -9285,7 +9436,6 @@
           <a:lstStyle/>
           <a:p>
             <a:pPr algn="ctr"/>
-            <a:endParaRPr/>
           </a:p>
         </p:txBody>
       </p:sp>
@@ -9399,7 +9549,6 @@
           <a:lstStyle/>
           <a:p>
             <a:pPr algn="ctr"/>
-            <a:endParaRPr/>
           </a:p>
         </p:txBody>
       </p:sp>
@@ -9513,7 +9662,6 @@
           <a:lstStyle/>
           <a:p>
             <a:pPr algn="ctr"/>
-            <a:endParaRPr/>
           </a:p>
         </p:txBody>
       </p:sp>
@@ -9632,7 +9780,6 @@
           <a:lstStyle/>
           <a:p>
             <a:pPr algn="ctr"/>
-            <a:endParaRPr/>
           </a:p>
         </p:txBody>
       </p:sp>
@@ -9755,7 +9902,7 @@
 </file>
 
 <file path=ppt/slides/slide7.xml><?xml version="1.0" encoding="utf-8"?>
-<p:sld xmlns:a="http://schemas.openxmlformats.org/drawingml/2006/main" xmlns:r="http://schemas.openxmlformats.org/officeDocument/2006/relationships" xmlns:p="http://schemas.openxmlformats.org/presentationml/2006/main">
+<p:sld xmlns:a="http://schemas.openxmlformats.org/drawingml/2006/main" xmlns:p="http://schemas.openxmlformats.org/presentationml/2006/main" xmlns:r="http://schemas.openxmlformats.org/officeDocument/2006/relationships">
   <p:cSld>
     <p:spTree>
       <p:nvGrpSpPr>
@@ -9763,14 +9910,7 @@
         <p:cNvGrpSpPr/>
         <p:nvPr/>
       </p:nvGrpSpPr>
-      <p:grpSpPr>
-        <a:xfrm>
-          <a:off x="0" y="0"/>
-          <a:ext cx="0" cy="0"/>
-          <a:chOff x="0" y="0"/>
-          <a:chExt cx="0" cy="0"/>
-        </a:xfrm>
-      </p:grpSpPr>
+      <p:grpSpPr/>
       <p:sp>
         <p:nvSpPr>
           <p:cNvPr id="2" name="Rectangle 1"/>
@@ -9811,7 +9951,6 @@
           <a:lstStyle/>
           <a:p>
             <a:pPr algn="ctr"/>
-            <a:endParaRPr/>
           </a:p>
         </p:txBody>
       </p:sp>
@@ -9925,7 +10064,6 @@
           <a:lstStyle/>
           <a:p>
             <a:pPr algn="ctr"/>
-            <a:endParaRPr/>
           </a:p>
         </p:txBody>
       </p:sp>
@@ -10004,7 +10142,6 @@
           <a:lstStyle/>
           <a:p>
             <a:pPr algn="ctr"/>
-            <a:endParaRPr/>
           </a:p>
         </p:txBody>
       </p:sp>
@@ -10132,7 +10269,6 @@
           <a:lstStyle/>
           <a:p>
             <a:pPr algn="ctr"/>
-            <a:endParaRPr/>
           </a:p>
         </p:txBody>
       </p:sp>
@@ -10246,7 +10382,7 @@
 </file>
 
 <file path=ppt/slides/slide8.xml><?xml version="1.0" encoding="utf-8"?>
-<p:sld xmlns:a="http://schemas.openxmlformats.org/drawingml/2006/main" xmlns:r="http://schemas.openxmlformats.org/officeDocument/2006/relationships" xmlns:p="http://schemas.openxmlformats.org/presentationml/2006/main">
+<p:sld xmlns:a="http://schemas.openxmlformats.org/drawingml/2006/main" xmlns:p="http://schemas.openxmlformats.org/presentationml/2006/main" xmlns:r="http://schemas.openxmlformats.org/officeDocument/2006/relationships">
   <p:cSld>
     <p:spTree>
       <p:nvGrpSpPr>
@@ -10254,14 +10390,7 @@
         <p:cNvGrpSpPr/>
         <p:nvPr/>
       </p:nvGrpSpPr>
-      <p:grpSpPr>
-        <a:xfrm>
-          <a:off x="0" y="0"/>
-          <a:ext cx="0" cy="0"/>
-          <a:chOff x="0" y="0"/>
-          <a:chExt cx="0" cy="0"/>
-        </a:xfrm>
-      </p:grpSpPr>
+      <p:grpSpPr/>
       <p:sp>
         <p:nvSpPr>
           <p:cNvPr id="2" name="Rectangle 1"/>
@@ -10302,7 +10431,6 @@
           <a:lstStyle/>
           <a:p>
             <a:pPr algn="ctr"/>
-            <a:endParaRPr/>
           </a:p>
         </p:txBody>
       </p:sp>
@@ -10416,7 +10544,6 @@
           <a:lstStyle/>
           <a:p>
             <a:pPr algn="ctr"/>
-            <a:endParaRPr/>
           </a:p>
         </p:txBody>
       </p:sp>
@@ -10621,7 +10748,6 @@
           <a:lstStyle/>
           <a:p>
             <a:pPr algn="ctr"/>
-            <a:endParaRPr/>
           </a:p>
         </p:txBody>
       </p:sp>
@@ -10742,7 +10868,7 @@
 </file>
 
 <file path=ppt/slides/slide9.xml><?xml version="1.0" encoding="utf-8"?>
-<p:sld xmlns:a="http://schemas.openxmlformats.org/drawingml/2006/main" xmlns:r="http://schemas.openxmlformats.org/officeDocument/2006/relationships" xmlns:p="http://schemas.openxmlformats.org/presentationml/2006/main">
+<p:sld xmlns:a="http://schemas.openxmlformats.org/drawingml/2006/main" xmlns:p="http://schemas.openxmlformats.org/presentationml/2006/main" xmlns:r="http://schemas.openxmlformats.org/officeDocument/2006/relationships">
   <p:cSld>
     <p:spTree>
       <p:nvGrpSpPr>
@@ -10750,14 +10876,7 @@
         <p:cNvGrpSpPr/>
         <p:nvPr/>
       </p:nvGrpSpPr>
-      <p:grpSpPr>
-        <a:xfrm>
-          <a:off x="0" y="0"/>
-          <a:ext cx="0" cy="0"/>
-          <a:chOff x="0" y="0"/>
-          <a:chExt cx="0" cy="0"/>
-        </a:xfrm>
-      </p:grpSpPr>
+      <p:grpSpPr/>
       <p:sp>
         <p:nvSpPr>
           <p:cNvPr id="2" name="Rectangle 1"/>
@@ -10798,7 +10917,6 @@
           <a:lstStyle/>
           <a:p>
             <a:pPr algn="ctr"/>
-            <a:endParaRPr/>
           </a:p>
         </p:txBody>
       </p:sp>
@@ -10912,7 +11030,6 @@
           <a:lstStyle/>
           <a:p>
             <a:pPr algn="ctr"/>
-            <a:endParaRPr/>
           </a:p>
         </p:txBody>
       </p:sp>
@@ -10970,20 +11087,8 @@
                 <a:tableStyleId>{5C22544A-7EE6-4342-B048-85BDC9FD1C3A}</a:tableStyleId>
               </a:tblPr>
               <a:tblGrid>
-                <a:gridCol w="2743200">
-                  <a:extLst>
-                    <a:ext uri="{9D8B030D-6E8A-4147-A177-3AD203B41FA5}">
-                      <a16:colId xmlns:a16="http://schemas.microsoft.com/office/drawing/2014/main" val="20000"/>
-                    </a:ext>
-                  </a:extLst>
-                </a:gridCol>
-                <a:gridCol w="2743200">
-                  <a:extLst>
-                    <a:ext uri="{9D8B030D-6E8A-4147-A177-3AD203B41FA5}">
-                      <a16:colId xmlns:a16="http://schemas.microsoft.com/office/drawing/2014/main" val="20001"/>
-                    </a:ext>
-                  </a:extLst>
-                </a:gridCol>
+                <a:gridCol w="2743200"/>
+                <a:gridCol w="2743200"/>
               </a:tblGrid>
               <a:tr h="473825">
                 <a:tc>
@@ -10993,7 +11098,7 @@
                     <a:p>
                       <a:pPr algn="ctr"/>
                       <a:r>
-                        <a:rPr sz="1300" b="1">
+                        <a:rPr b="1" sz="1300">
                           <a:solidFill>
                             <a:srgbClr val="FFFFFF"/>
                           </a:solidFill>
@@ -11016,7 +11121,7 @@
                     <a:p>
                       <a:pPr algn="ctr"/>
                       <a:r>
-                        <a:rPr sz="1300" b="1">
+                        <a:rPr b="1" sz="1300">
                           <a:solidFill>
                             <a:srgbClr val="FFFFFF"/>
                           </a:solidFill>
@@ -11032,11 +11137,6 @@
                     </a:solidFill>
                   </a:tcPr>
                 </a:tc>
-                <a:extLst>
-                  <a:ext uri="{0D108BD9-81ED-4DB2-BD59-A6C34878D82A}">
-                    <a16:rowId xmlns:a16="http://schemas.microsoft.com/office/drawing/2014/main" val="10000"/>
-                  </a:ext>
-                </a:extLst>
               </a:tr>
               <a:tr h="473825">
                 <a:tc>
@@ -11085,11 +11185,6 @@
                     </a:solidFill>
                   </a:tcPr>
                 </a:tc>
-                <a:extLst>
-                  <a:ext uri="{0D108BD9-81ED-4DB2-BD59-A6C34878D82A}">
-                    <a16:rowId xmlns:a16="http://schemas.microsoft.com/office/drawing/2014/main" val="10001"/>
-                  </a:ext>
-                </a:extLst>
               </a:tr>
               <a:tr h="473825">
                 <a:tc>
@@ -11138,11 +11233,6 @@
                     </a:solidFill>
                   </a:tcPr>
                 </a:tc>
-                <a:extLst>
-                  <a:ext uri="{0D108BD9-81ED-4DB2-BD59-A6C34878D82A}">
-                    <a16:rowId xmlns:a16="http://schemas.microsoft.com/office/drawing/2014/main" val="10002"/>
-                  </a:ext>
-                </a:extLst>
               </a:tr>
               <a:tr h="473825">
                 <a:tc>
@@ -11191,11 +11281,6 @@
                     </a:solidFill>
                   </a:tcPr>
                 </a:tc>
-                <a:extLst>
-                  <a:ext uri="{0D108BD9-81ED-4DB2-BD59-A6C34878D82A}">
-                    <a16:rowId xmlns:a16="http://schemas.microsoft.com/office/drawing/2014/main" val="10003"/>
-                  </a:ext>
-                </a:extLst>
               </a:tr>
               <a:tr h="473825">
                 <a:tc>
@@ -11244,11 +11329,6 @@
                     </a:solidFill>
                   </a:tcPr>
                 </a:tc>
-                <a:extLst>
-                  <a:ext uri="{0D108BD9-81ED-4DB2-BD59-A6C34878D82A}">
-                    <a16:rowId xmlns:a16="http://schemas.microsoft.com/office/drawing/2014/main" val="10004"/>
-                  </a:ext>
-                </a:extLst>
               </a:tr>
               <a:tr h="473825">
                 <a:tc>
@@ -11297,11 +11377,6 @@
                     </a:solidFill>
                   </a:tcPr>
                 </a:tc>
-                <a:extLst>
-                  <a:ext uri="{0D108BD9-81ED-4DB2-BD59-A6C34878D82A}">
-                    <a16:rowId xmlns:a16="http://schemas.microsoft.com/office/drawing/2014/main" val="10005"/>
-                  </a:ext>
-                </a:extLst>
               </a:tr>
               <a:tr h="473825">
                 <a:tc>
@@ -11350,11 +11425,6 @@
                     </a:solidFill>
                   </a:tcPr>
                 </a:tc>
-                <a:extLst>
-                  <a:ext uri="{0D108BD9-81ED-4DB2-BD59-A6C34878D82A}">
-                    <a16:rowId xmlns:a16="http://schemas.microsoft.com/office/drawing/2014/main" val="10006"/>
-                  </a:ext>
-                </a:extLst>
               </a:tr>
               <a:tr h="473825">
                 <a:tc>
@@ -11403,11 +11473,6 @@
                     </a:solidFill>
                   </a:tcPr>
                 </a:tc>
-                <a:extLst>
-                  <a:ext uri="{0D108BD9-81ED-4DB2-BD59-A6C34878D82A}">
-                    <a16:rowId xmlns:a16="http://schemas.microsoft.com/office/drawing/2014/main" val="10007"/>
-                  </a:ext>
-                </a:extLst>
               </a:tr>
               <a:tr h="473825">
                 <a:tc>
@@ -11456,11 +11521,6 @@
                     </a:solidFill>
                   </a:tcPr>
                 </a:tc>
-                <a:extLst>
-                  <a:ext uri="{0D108BD9-81ED-4DB2-BD59-A6C34878D82A}">
-                    <a16:rowId xmlns:a16="http://schemas.microsoft.com/office/drawing/2014/main" val="10008"/>
-                  </a:ext>
-                </a:extLst>
               </a:tr>
               <a:tr h="473825">
                 <a:tc>
@@ -11509,11 +11569,6 @@
                     </a:solidFill>
                   </a:tcPr>
                 </a:tc>
-                <a:extLst>
-                  <a:ext uri="{0D108BD9-81ED-4DB2-BD59-A6C34878D82A}">
-                    <a16:rowId xmlns:a16="http://schemas.microsoft.com/office/drawing/2014/main" val="10009"/>
-                  </a:ext>
-                </a:extLst>
               </a:tr>
               <a:tr h="473830">
                 <a:tc>
@@ -11562,11 +11617,6 @@
                     </a:solidFill>
                   </a:tcPr>
                 </a:tc>
-                <a:extLst>
-                  <a:ext uri="{0D108BD9-81ED-4DB2-BD59-A6C34878D82A}">
-                    <a16:rowId xmlns:a16="http://schemas.microsoft.com/office/drawing/2014/main" val="10010"/>
-                  </a:ext>
-                </a:extLst>
               </a:tr>
             </a:tbl>
           </a:graphicData>
@@ -11591,20 +11641,8 @@
                 <a:tableStyleId>{5C22544A-7EE6-4342-B048-85BDC9FD1C3A}</a:tableStyleId>
               </a:tblPr>
               <a:tblGrid>
-                <a:gridCol w="2743200">
-                  <a:extLst>
-                    <a:ext uri="{9D8B030D-6E8A-4147-A177-3AD203B41FA5}">
-                      <a16:colId xmlns:a16="http://schemas.microsoft.com/office/drawing/2014/main" val="20000"/>
-                    </a:ext>
-                  </a:extLst>
-                </a:gridCol>
-                <a:gridCol w="2743200">
-                  <a:extLst>
-                    <a:ext uri="{9D8B030D-6E8A-4147-A177-3AD203B41FA5}">
-                      <a16:colId xmlns:a16="http://schemas.microsoft.com/office/drawing/2014/main" val="20001"/>
-                    </a:ext>
-                  </a:extLst>
-                </a:gridCol>
+                <a:gridCol w="2743200"/>
+                <a:gridCol w="2743200"/>
               </a:tblGrid>
               <a:tr h="473825">
                 <a:tc>
@@ -11614,7 +11652,7 @@
                     <a:p>
                       <a:pPr algn="ctr"/>
                       <a:r>
-                        <a:rPr sz="1300" b="1">
+                        <a:rPr b="1" sz="1300">
                           <a:solidFill>
                             <a:srgbClr val="FFFFFF"/>
                           </a:solidFill>
@@ -11637,7 +11675,7 @@
                     <a:p>
                       <a:pPr algn="ctr"/>
                       <a:r>
-                        <a:rPr sz="1300" b="1">
+                        <a:rPr b="1" sz="1300">
                           <a:solidFill>
                             <a:srgbClr val="FFFFFF"/>
                           </a:solidFill>
@@ -11653,11 +11691,6 @@
                     </a:solidFill>
                   </a:tcPr>
                 </a:tc>
-                <a:extLst>
-                  <a:ext uri="{0D108BD9-81ED-4DB2-BD59-A6C34878D82A}">
-                    <a16:rowId xmlns:a16="http://schemas.microsoft.com/office/drawing/2014/main" val="10000"/>
-                  </a:ext>
-                </a:extLst>
               </a:tr>
               <a:tr h="473825">
                 <a:tc>
@@ -11706,11 +11739,6 @@
                     </a:solidFill>
                   </a:tcPr>
                 </a:tc>
-                <a:extLst>
-                  <a:ext uri="{0D108BD9-81ED-4DB2-BD59-A6C34878D82A}">
-                    <a16:rowId xmlns:a16="http://schemas.microsoft.com/office/drawing/2014/main" val="10001"/>
-                  </a:ext>
-                </a:extLst>
               </a:tr>
               <a:tr h="473825">
                 <a:tc>
@@ -11759,11 +11787,6 @@
                     </a:solidFill>
                   </a:tcPr>
                 </a:tc>
-                <a:extLst>
-                  <a:ext uri="{0D108BD9-81ED-4DB2-BD59-A6C34878D82A}">
-                    <a16:rowId xmlns:a16="http://schemas.microsoft.com/office/drawing/2014/main" val="10002"/>
-                  </a:ext>
-                </a:extLst>
               </a:tr>
               <a:tr h="473825">
                 <a:tc>
@@ -11812,11 +11835,6 @@
                     </a:solidFill>
                   </a:tcPr>
                 </a:tc>
-                <a:extLst>
-                  <a:ext uri="{0D108BD9-81ED-4DB2-BD59-A6C34878D82A}">
-                    <a16:rowId xmlns:a16="http://schemas.microsoft.com/office/drawing/2014/main" val="10003"/>
-                  </a:ext>
-                </a:extLst>
               </a:tr>
               <a:tr h="473825">
                 <a:tc>
@@ -11865,11 +11883,6 @@
                     </a:solidFill>
                   </a:tcPr>
                 </a:tc>
-                <a:extLst>
-                  <a:ext uri="{0D108BD9-81ED-4DB2-BD59-A6C34878D82A}">
-                    <a16:rowId xmlns:a16="http://schemas.microsoft.com/office/drawing/2014/main" val="10004"/>
-                  </a:ext>
-                </a:extLst>
               </a:tr>
               <a:tr h="473825">
                 <a:tc>
@@ -11918,11 +11931,6 @@
                     </a:solidFill>
                   </a:tcPr>
                 </a:tc>
-                <a:extLst>
-                  <a:ext uri="{0D108BD9-81ED-4DB2-BD59-A6C34878D82A}">
-                    <a16:rowId xmlns:a16="http://schemas.microsoft.com/office/drawing/2014/main" val="10005"/>
-                  </a:ext>
-                </a:extLst>
               </a:tr>
               <a:tr h="473825">
                 <a:tc>
@@ -11971,11 +11979,6 @@
                     </a:solidFill>
                   </a:tcPr>
                 </a:tc>
-                <a:extLst>
-                  <a:ext uri="{0D108BD9-81ED-4DB2-BD59-A6C34878D82A}">
-                    <a16:rowId xmlns:a16="http://schemas.microsoft.com/office/drawing/2014/main" val="10006"/>
-                  </a:ext>
-                </a:extLst>
               </a:tr>
               <a:tr h="473825">
                 <a:tc>
@@ -12024,11 +12027,6 @@
                     </a:solidFill>
                   </a:tcPr>
                 </a:tc>
-                <a:extLst>
-                  <a:ext uri="{0D108BD9-81ED-4DB2-BD59-A6C34878D82A}">
-                    <a16:rowId xmlns:a16="http://schemas.microsoft.com/office/drawing/2014/main" val="10007"/>
-                  </a:ext>
-                </a:extLst>
               </a:tr>
               <a:tr h="473825">
                 <a:tc>
@@ -12077,11 +12075,6 @@
                     </a:solidFill>
                   </a:tcPr>
                 </a:tc>
-                <a:extLst>
-                  <a:ext uri="{0D108BD9-81ED-4DB2-BD59-A6C34878D82A}">
-                    <a16:rowId xmlns:a16="http://schemas.microsoft.com/office/drawing/2014/main" val="10008"/>
-                  </a:ext>
-                </a:extLst>
               </a:tr>
               <a:tr h="473825">
                 <a:tc>
@@ -12130,11 +12123,6 @@
                     </a:solidFill>
                   </a:tcPr>
                 </a:tc>
-                <a:extLst>
-                  <a:ext uri="{0D108BD9-81ED-4DB2-BD59-A6C34878D82A}">
-                    <a16:rowId xmlns:a16="http://schemas.microsoft.com/office/drawing/2014/main" val="10009"/>
-                  </a:ext>
-                </a:extLst>
               </a:tr>
               <a:tr h="473830">
                 <a:tc>
@@ -12183,11 +12171,6 @@
                     </a:solidFill>
                   </a:tcPr>
                 </a:tc>
-                <a:extLst>
-                  <a:ext uri="{0D108BD9-81ED-4DB2-BD59-A6C34878D82A}">
-                    <a16:rowId xmlns:a16="http://schemas.microsoft.com/office/drawing/2014/main" val="10010"/>
-                  </a:ext>
-                </a:extLst>
               </a:tr>
             </a:tbl>
           </a:graphicData>

--- a/docs/documentation/iics-cli-presentation.pptx
+++ b/docs/documentation/iics-cli-presentation.pptx
@@ -21,6 +21,10 @@
     <p:sldId id="269" r:id="rId20"/>
     <p:sldId id="270" r:id="rId21"/>
     <p:sldId id="271" r:id="rId22"/>
+    <p:sldId id="272" r:id="rId23"/>
+    <p:sldId id="273" r:id="rId24"/>
+    <p:sldId id="274" r:id="rId25"/>
+    <p:sldId id="275" r:id="rId26"/>
   </p:sldIdLst>
   <p:sldSz cx="12188952" cy="6858000" type="screen4x3"/>
   <p:notesSz cx="6858000" cy="9144000"/>
@@ -3324,7 +3328,7 @@
                 </a:solidFill>
                 <a:latin typeface="Calibri"/>
               </a:rPr>
-              <a:t>Replacing the abandoned Informatica Asset Management CLI V2</a:t>
+              <a:t>30+ resource types  |  OS Keychain  |  Package management  |  CI/CD release workflows</a:t>
             </a:r>
           </a:p>
         </p:txBody>
@@ -3420,7 +3424,7 @@
                 </a:solidFill>
                 <a:latin typeface="Calibri"/>
               </a:rPr>
-              <a:t>Comprehensive Region Support</a:t>
+              <a:t>Package Command</a:t>
             </a:r>
           </a:p>
         </p:txBody>
@@ -3455,7 +3459,7 @@
                 </a:solidFill>
                 <a:latin typeface="Calibri"/>
               </a:rPr>
-              <a:t>All IICS pod regions – not just us / eu / ap</a:t>
+              <a:t>Expand, create, and inspect IICS export packages locally</a:t>
             </a:r>
           </a:p>
         </p:txBody>
@@ -3547,7 +3551,7 @@
         <p:spPr>
           <a:xfrm>
             <a:off x="457200" y="1097280"/>
-            <a:ext cx="3657600" cy="365760"/>
+            <a:ext cx="11430000" cy="365760"/>
           </a:xfrm>
           <a:prstGeom prst="rect">
             <a:avLst/>
@@ -3562,13 +3566,13 @@
           <a:p>
             <a:pPr algn="l"/>
             <a:r>
-              <a:rPr sz="1400" b="1" i="0">
-                <a:solidFill>
-                  <a:srgbClr val="CC0000"/>
-                </a:solidFill>
-                <a:latin typeface="Calibri"/>
-              </a:rPr>
-              <a:t>Official CLI – 3 hardcoded regions</a:t>
+              <a:rPr sz="1500" b="1" i="0">
+                <a:solidFill>
+                  <a:srgbClr val="003366"/>
+                </a:solidFill>
+                <a:latin typeface="Calibri"/>
+              </a:rPr>
+              <a:t>Local file operations – no API calls required</a:t>
             </a:r>
           </a:p>
         </p:txBody>
@@ -3581,8 +3585,8 @@
         </p:nvSpPr>
         <p:spPr>
           <a:xfrm>
-            <a:off x="457200" y="1508760"/>
-            <a:ext cx="3657600" cy="1097280"/>
+            <a:off x="457200" y="1554480"/>
+            <a:ext cx="5303520" cy="320040"/>
           </a:xfrm>
           <a:prstGeom prst="rect">
             <a:avLst/>
@@ -3595,482 +3599,29 @@
           </a:bodyPr>
           <a:lstStyle/>
           <a:p>
-            <a:r>
-              <a:rPr sz="1400" b="0">
-                <a:solidFill>
-                  <a:srgbClr val="CC0000"/>
-                </a:solidFill>
-                <a:latin typeface="Calibri"/>
-              </a:rPr>
-              <a:t>•  -r us</a:t>
-            </a:r>
-          </a:p>
-          <a:p>
-            <a:r>
-              <a:rPr sz="1400" b="0">
-                <a:solidFill>
-                  <a:srgbClr val="CC0000"/>
-                </a:solidFill>
-                <a:latin typeface="Calibri"/>
-              </a:rPr>
-              <a:t>•  -r eu</a:t>
-            </a:r>
-          </a:p>
-          <a:p>
-            <a:r>
-              <a:rPr sz="1400" b="0">
-                <a:solidFill>
-                  <a:srgbClr val="CC0000"/>
-                </a:solidFill>
-                <a:latin typeface="Calibri"/>
-              </a:rPr>
-              <a:t>•  -r ap</a:t>
-            </a:r>
-          </a:p>
-        </p:txBody>
-      </p:sp>
-      <p:sp>
-        <p:nvSpPr>
-          <p:cNvPr id="9" name="TextBox 8"/>
-          <p:cNvSpPr txBox="1"/>
-          <p:nvPr/>
-        </p:nvSpPr>
-        <p:spPr>
-          <a:xfrm>
-            <a:off x="4572000" y="1097280"/>
-            <a:ext cx="7132320" cy="365760"/>
-          </a:xfrm>
-          <a:prstGeom prst="rect">
-            <a:avLst/>
-          </a:prstGeom>
-          <a:noFill/>
-        </p:spPr>
-        <p:txBody>
-          <a:bodyPr wrap="square">
-            <a:spAutoFit/>
-          </a:bodyPr>
-          <a:lstStyle/>
-          <a:p>
             <a:pPr algn="l"/>
             <a:r>
-              <a:rPr sz="1400" b="1" i="0">
-                <a:solidFill>
-                  <a:srgbClr val="009944"/>
-                </a:solidFill>
-                <a:latin typeface="Calibri"/>
-              </a:rPr>
-              <a:t>iics-cli – full pod registry</a:t>
-            </a:r>
-          </a:p>
-        </p:txBody>
-      </p:sp>
-      <p:graphicFrame>
-        <p:nvGraphicFramePr>
-          <p:cNvPr id="10" name="Table 9"/>
-          <p:cNvGraphicFramePr>
-            <a:graphicFrameLocks noGrp="1"/>
-          </p:cNvGraphicFramePr>
-          <p:nvPr/>
-        </p:nvGraphicFramePr>
-        <p:xfrm>
-          <a:off x="4572000" y="1508760"/>
-          <a:ext cx="7132320" cy="2560320"/>
-        </p:xfrm>
-        <a:graphic>
-          <a:graphicData uri="http://schemas.openxmlformats.org/drawingml/2006/table">
-            <a:tbl>
-              <a:tblPr firstRow="1" bandRow="1">
-                <a:tableStyleId>{5C22544A-7EE6-4342-B048-85BDC9FD1C3A}</a:tableStyleId>
-              </a:tblPr>
-              <a:tblGrid>
-                <a:gridCol w="3566160"/>
-                <a:gridCol w="3566160"/>
-              </a:tblGrid>
-              <a:tr h="365760">
-                <a:tc>
-                  <a:txBody>
-                    <a:bodyPr/>
-                    <a:lstStyle/>
-                    <a:p>
-                      <a:pPr algn="ctr"/>
-                      <a:r>
-                        <a:rPr b="1" sz="1300">
-                          <a:solidFill>
-                            <a:srgbClr val="FFFFFF"/>
-                          </a:solidFill>
-                          <a:latin typeface="Calibri"/>
-                        </a:rPr>
-                        <a:t>Region Code(s)</a:t>
-                      </a:r>
-                    </a:p>
-                  </a:txBody>
-                  <a:tcPr>
-                    <a:solidFill>
-                      <a:srgbClr val="0066CC"/>
-                    </a:solidFill>
-                  </a:tcPr>
-                </a:tc>
-                <a:tc>
-                  <a:txBody>
-                    <a:bodyPr/>
-                    <a:lstStyle/>
-                    <a:p>
-                      <a:pPr algn="ctr"/>
-                      <a:r>
-                        <a:rPr b="1" sz="1300">
-                          <a:solidFill>
-                            <a:srgbClr val="FFFFFF"/>
-                          </a:solidFill>
-                          <a:latin typeface="Calibri"/>
-                        </a:rPr>
-                        <a:t>Geography</a:t>
-                      </a:r>
-                    </a:p>
-                  </a:txBody>
-                  <a:tcPr>
-                    <a:solidFill>
-                      <a:srgbClr val="0066CC"/>
-                    </a:solidFill>
-                  </a:tcPr>
-                </a:tc>
-              </a:tr>
-              <a:tr h="365760">
-                <a:tc>
-                  <a:txBody>
-                    <a:bodyPr/>
-                    <a:lstStyle/>
-                    <a:p>
-                      <a:pPr algn="l"/>
-                      <a:r>
-                        <a:rPr sz="1200">
-                          <a:solidFill>
-                            <a:srgbClr val="333333"/>
-                          </a:solidFill>
-                          <a:latin typeface="Calibri"/>
-                        </a:rPr>
-                        <a:t>USW1, USW1-1, USW1-2</a:t>
-                      </a:r>
-                    </a:p>
-                  </a:txBody>
-                  <a:tcPr>
-                    <a:solidFill>
-                      <a:srgbClr val="F2F2F2"/>
-                    </a:solidFill>
-                  </a:tcPr>
-                </a:tc>
-                <a:tc>
-                  <a:txBody>
-                    <a:bodyPr/>
-                    <a:lstStyle/>
-                    <a:p>
-                      <a:pPr algn="ctr"/>
-                      <a:r>
-                        <a:rPr sz="1200">
-                          <a:solidFill>
-                            <a:srgbClr val="333333"/>
-                          </a:solidFill>
-                          <a:latin typeface="Calibri"/>
-                        </a:rPr>
-                        <a:t>US West</a:t>
-                      </a:r>
-                    </a:p>
-                  </a:txBody>
-                  <a:tcPr>
-                    <a:solidFill>
-                      <a:srgbClr val="F2F2F2"/>
-                    </a:solidFill>
-                  </a:tcPr>
-                </a:tc>
-              </a:tr>
-              <a:tr h="365760">
-                <a:tc>
-                  <a:txBody>
-                    <a:bodyPr/>
-                    <a:lstStyle/>
-                    <a:p>
-                      <a:pPr algn="l"/>
-                      <a:r>
-                        <a:rPr sz="1200">
-                          <a:solidFill>
-                            <a:srgbClr val="333333"/>
-                          </a:solidFill>
-                          <a:latin typeface="Calibri"/>
-                        </a:rPr>
-                        <a:t>USE2, USE4, USE6</a:t>
-                      </a:r>
-                    </a:p>
-                  </a:txBody>
-                  <a:tcPr>
-                    <a:solidFill>
-                      <a:srgbClr val="FFFFFF"/>
-                    </a:solidFill>
-                  </a:tcPr>
-                </a:tc>
-                <a:tc>
-                  <a:txBody>
-                    <a:bodyPr/>
-                    <a:lstStyle/>
-                    <a:p>
-                      <a:pPr algn="ctr"/>
-                      <a:r>
-                        <a:rPr sz="1200">
-                          <a:solidFill>
-                            <a:srgbClr val="333333"/>
-                          </a:solidFill>
-                          <a:latin typeface="Calibri"/>
-                        </a:rPr>
-                        <a:t>US East</a:t>
-                      </a:r>
-                    </a:p>
-                  </a:txBody>
-                  <a:tcPr>
-                    <a:solidFill>
-                      <a:srgbClr val="FFFFFF"/>
-                    </a:solidFill>
-                  </a:tcPr>
-                </a:tc>
-              </a:tr>
-              <a:tr h="365760">
-                <a:tc>
-                  <a:txBody>
-                    <a:bodyPr/>
-                    <a:lstStyle/>
-                    <a:p>
-                      <a:pPr algn="l"/>
-                      <a:r>
-                        <a:rPr sz="1200">
-                          <a:solidFill>
-                            <a:srgbClr val="333333"/>
-                          </a:solidFill>
-                          <a:latin typeface="Calibri"/>
-                        </a:rPr>
-                        <a:t>USW3, USW3-1, USW5</a:t>
-                      </a:r>
-                    </a:p>
-                  </a:txBody>
-                  <a:tcPr>
-                    <a:solidFill>
-                      <a:srgbClr val="F2F2F2"/>
-                    </a:solidFill>
-                  </a:tcPr>
-                </a:tc>
-                <a:tc>
-                  <a:txBody>
-                    <a:bodyPr/>
-                    <a:lstStyle/>
-                    <a:p>
-                      <a:pPr algn="ctr"/>
-                      <a:r>
-                        <a:rPr sz="1200">
-                          <a:solidFill>
-                            <a:srgbClr val="333333"/>
-                          </a:solidFill>
-                          <a:latin typeface="Calibri"/>
-                        </a:rPr>
-                        <a:t>US West (additional)</a:t>
-                      </a:r>
-                    </a:p>
-                  </a:txBody>
-                  <a:tcPr>
-                    <a:solidFill>
-                      <a:srgbClr val="F2F2F2"/>
-                    </a:solidFill>
-                  </a:tcPr>
-                </a:tc>
-              </a:tr>
-              <a:tr h="365760">
-                <a:tc>
-                  <a:txBody>
-                    <a:bodyPr/>
-                    <a:lstStyle/>
-                    <a:p>
-                      <a:pPr algn="l"/>
-                      <a:r>
-                        <a:rPr sz="1200">
-                          <a:solidFill>
-                            <a:srgbClr val="333333"/>
-                          </a:solidFill>
-                          <a:latin typeface="Calibri"/>
-                        </a:rPr>
-                        <a:t>CAC1</a:t>
-                      </a:r>
-                    </a:p>
-                  </a:txBody>
-                  <a:tcPr>
-                    <a:solidFill>
-                      <a:srgbClr val="FFFFFF"/>
-                    </a:solidFill>
-                  </a:tcPr>
-                </a:tc>
-                <a:tc>
-                  <a:txBody>
-                    <a:bodyPr/>
-                    <a:lstStyle/>
-                    <a:p>
-                      <a:pPr algn="ctr"/>
-                      <a:r>
-                        <a:rPr sz="1200">
-                          <a:solidFill>
-                            <a:srgbClr val="333333"/>
-                          </a:solidFill>
-                          <a:latin typeface="Calibri"/>
-                        </a:rPr>
-                        <a:t>Canada</a:t>
-                      </a:r>
-                    </a:p>
-                  </a:txBody>
-                  <a:tcPr>
-                    <a:solidFill>
-                      <a:srgbClr val="FFFFFF"/>
-                    </a:solidFill>
-                  </a:tcPr>
-                </a:tc>
-              </a:tr>
-              <a:tr h="365760">
-                <a:tc>
-                  <a:txBody>
-                    <a:bodyPr/>
-                    <a:lstStyle/>
-                    <a:p>
-                      <a:pPr algn="l"/>
-                      <a:r>
-                        <a:rPr sz="1200">
-                          <a:solidFill>
-                            <a:srgbClr val="333333"/>
-                          </a:solidFill>
-                          <a:latin typeface="Calibri"/>
-                        </a:rPr>
-                        <a:t>EMEA, EMWE1</a:t>
-                      </a:r>
-                    </a:p>
-                  </a:txBody>
-                  <a:tcPr>
-                    <a:solidFill>
-                      <a:srgbClr val="F2F2F2"/>
-                    </a:solidFill>
-                  </a:tcPr>
-                </a:tc>
-                <a:tc>
-                  <a:txBody>
-                    <a:bodyPr/>
-                    <a:lstStyle/>
-                    <a:p>
-                      <a:pPr algn="ctr"/>
-                      <a:r>
-                        <a:rPr sz="1200">
-                          <a:solidFill>
-                            <a:srgbClr val="333333"/>
-                          </a:solidFill>
-                          <a:latin typeface="Calibri"/>
-                        </a:rPr>
-                        <a:t>Europe / Middle East / Africa</a:t>
-                      </a:r>
-                    </a:p>
-                  </a:txBody>
-                  <a:tcPr>
-                    <a:solidFill>
-                      <a:srgbClr val="F2F2F2"/>
-                    </a:solidFill>
-                  </a:tcPr>
-                </a:tc>
-              </a:tr>
-              <a:tr h="365760">
-                <a:tc>
-                  <a:txBody>
-                    <a:bodyPr/>
-                    <a:lstStyle/>
-                    <a:p>
-                      <a:pPr algn="l"/>
-                      <a:r>
-                        <a:rPr sz="1200">
-                          <a:solidFill>
-                            <a:srgbClr val="333333"/>
-                          </a:solidFill>
-                          <a:latin typeface="Calibri"/>
-                        </a:rPr>
-                        <a:t>APSE1, APJ, APNE1</a:t>
-                      </a:r>
-                    </a:p>
-                  </a:txBody>
-                  <a:tcPr>
-                    <a:solidFill>
-                      <a:srgbClr val="FFFFFF"/>
-                    </a:solidFill>
-                  </a:tcPr>
-                </a:tc>
-                <a:tc>
-                  <a:txBody>
-                    <a:bodyPr/>
-                    <a:lstStyle/>
-                    <a:p>
-                      <a:pPr algn="ctr"/>
-                      <a:r>
-                        <a:rPr sz="1200">
-                          <a:solidFill>
-                            <a:srgbClr val="333333"/>
-                          </a:solidFill>
-                          <a:latin typeface="Calibri"/>
-                        </a:rPr>
-                        <a:t>Asia Pacific</a:t>
-                      </a:r>
-                    </a:p>
-                  </a:txBody>
-                  <a:tcPr>
-                    <a:solidFill>
-                      <a:srgbClr val="FFFFFF"/>
-                    </a:solidFill>
-                  </a:tcPr>
-                </a:tc>
-              </a:tr>
-            </a:tbl>
-          </a:graphicData>
-        </a:graphic>
-      </p:graphicFrame>
-      <p:sp>
-        <p:nvSpPr>
-          <p:cNvPr id="11" name="TextBox 10"/>
-          <p:cNvSpPr txBox="1"/>
-          <p:nvPr/>
-        </p:nvSpPr>
-        <p:spPr>
-          <a:xfrm>
-            <a:off x="457200" y="5120640"/>
-            <a:ext cx="11247120" cy="365760"/>
-          </a:xfrm>
-          <a:prstGeom prst="rect">
-            <a:avLst/>
-          </a:prstGeom>
-          <a:noFill/>
-        </p:spPr>
-        <p:txBody>
-          <a:bodyPr wrap="square">
-            <a:spAutoFit/>
-          </a:bodyPr>
-          <a:lstStyle/>
-          <a:p>
-            <a:pPr algn="l"/>
-            <a:r>
-              <a:rPr sz="1400" b="0" i="1">
+              <a:rPr sz="1300" b="1" i="0">
                 <a:solidFill>
                   <a:srgbClr val="0066CC"/>
                 </a:solidFill>
                 <a:latin typeface="Calibri"/>
               </a:rPr>
-              <a:t>A loginUrl override is also supported for future pods or custom deployments.</a:t>
-            </a:r>
-          </a:p>
-        </p:txBody>
-      </p:sp>
-      <p:sp>
-        <p:nvSpPr>
-          <p:cNvPr id="12" name="Rectangle 11"/>
+              <a:t>Expand, Create, Inspect</a:t>
+            </a:r>
+          </a:p>
+        </p:txBody>
+      </p:sp>
+      <p:sp>
+        <p:nvSpPr>
+          <p:cNvPr id="9" name="Rectangle 8"/>
           <p:cNvSpPr/>
           <p:nvPr/>
         </p:nvSpPr>
         <p:spPr>
           <a:xfrm>
-            <a:off x="457200" y="3931920"/>
-            <a:ext cx="11247120" cy="1097280"/>
+            <a:off x="457200" y="1920240"/>
+            <a:ext cx="5303520" cy="4114800"/>
           </a:xfrm>
           <a:prstGeom prst="rect">
             <a:avLst/>
@@ -4106,14 +3657,14 @@
       </p:sp>
       <p:sp>
         <p:nvSpPr>
-          <p:cNvPr id="13" name="TextBox 12"/>
+          <p:cNvPr id="10" name="TextBox 9"/>
           <p:cNvSpPr txBox="1"/>
           <p:nvPr/>
         </p:nvSpPr>
         <p:spPr>
           <a:xfrm>
-            <a:off x="594360" y="4023360"/>
-            <a:ext cx="10972800" cy="914400"/>
+            <a:off x="594360" y="2011680"/>
+            <a:ext cx="5029200" cy="3931920"/>
           </a:xfrm>
           <a:prstGeom prst="rect">
             <a:avLst/>
@@ -4134,10 +3685,176 @@
                 </a:solidFill>
                 <a:latin typeface="Courier New"/>
               </a:rPr>
-              <a:t># Use a built-in region
-iics user list --profile emea   # region: EMEA in config
-# Override with explicit login URL
-# loginUrl: https://dm-us.informaticacloud.com/ma/api/v2/user/login</a:t>
+              <a:t># Expand a ZIP into a source-control-friendly tree
+iics package expand --source export.zip \
+  --target ./workspace/Prod
+# Create a ZIP from an expanded workspace
+iics package create --source ./workspace/Prod \
+  --target deploy.zip
+# Selective packaging via manifest
+iics package create --source ./workspace/Prod \
+  --manifest-file manifest.csv \
+  --target deploy.zip
+# Inspect dependencies in a package
+iics package dependencies --source ./workspace/Prod \
+  -o json | jq '.[].location'</a:t>
+            </a:r>
+          </a:p>
+        </p:txBody>
+      </p:sp>
+      <p:sp>
+        <p:nvSpPr>
+          <p:cNvPr id="11" name="TextBox 10"/>
+          <p:cNvSpPr txBox="1"/>
+          <p:nvPr/>
+        </p:nvSpPr>
+        <p:spPr>
+          <a:xfrm>
+            <a:off x="6400800" y="1554480"/>
+            <a:ext cx="5303520" cy="320040"/>
+          </a:xfrm>
+          <a:prstGeom prst="rect">
+            <a:avLst/>
+          </a:prstGeom>
+          <a:noFill/>
+        </p:spPr>
+        <p:txBody>
+          <a:bodyPr wrap="square">
+            <a:spAutoFit/>
+          </a:bodyPr>
+          <a:lstStyle/>
+          <a:p>
+            <a:pPr algn="l"/>
+            <a:r>
+              <a:rPr sz="1300" b="1" i="0">
+                <a:solidFill>
+                  <a:srgbClr val="0066CC"/>
+                </a:solidFill>
+                <a:latin typeface="Calibri"/>
+              </a:rPr>
+              <a:t>Key capabilities</a:t>
+            </a:r>
+          </a:p>
+        </p:txBody>
+      </p:sp>
+      <p:sp>
+        <p:nvSpPr>
+          <p:cNvPr id="12" name="TextBox 11"/>
+          <p:cNvSpPr txBox="1"/>
+          <p:nvPr/>
+        </p:nvSpPr>
+        <p:spPr>
+          <a:xfrm>
+            <a:off x="6400800" y="1920240"/>
+            <a:ext cx="5303520" cy="4114800"/>
+          </a:xfrm>
+          <a:prstGeom prst="rect">
+            <a:avLst/>
+          </a:prstGeom>
+          <a:noFill/>
+        </p:spPr>
+        <p:txBody>
+          <a:bodyPr wrap="square">
+            <a:spAutoFit/>
+          </a:bodyPr>
+          <a:lstStyle/>
+          <a:p>
+            <a:r>
+              <a:rPr sz="1300" b="0">
+                <a:solidFill>
+                  <a:srgbClr val="333333"/>
+                </a:solidFill>
+                <a:latin typeface="Calibri"/>
+              </a:rPr>
+              <a:t>•  Expand: unzip to Project/Folder/Asset tree for git version control</a:t>
+            </a:r>
+          </a:p>
+          <a:p>
+            <a:r>
+              <a:rPr sz="1300" b="0">
+                <a:solidFill>
+                  <a:srgbClr val="333333"/>
+                </a:solidFill>
+                <a:latin typeface="Calibri"/>
+              </a:rPr>
+              <a:t>•  Create: re-assemble a deployment ZIP from workspace directory</a:t>
+            </a:r>
+          </a:p>
+          <a:p>
+            <a:r>
+              <a:rPr sz="1300" b="0">
+                <a:solidFill>
+                  <a:srgbClr val="333333"/>
+                </a:solidFill>
+                <a:latin typeface="Calibri"/>
+              </a:rPr>
+              <a:t>•  Selective create: drive asset selection via CSV/JSON/YAML/TXT manifest</a:t>
+            </a:r>
+          </a:p>
+          <a:p>
+            <a:r>
+              <a:rPr sz="1300" b="0">
+                <a:solidFill>
+                  <a:srgbClr val="333333"/>
+                </a:solidFill>
+                <a:latin typeface="Calibri"/>
+              </a:rPr>
+              <a:t>•  Manifest auto-detects format – stdin or --manifest-file (-m)</a:t>
+            </a:r>
+          </a:p>
+          <a:p>
+            <a:r>
+              <a:rPr sz="1300" b="0">
+                <a:solidFill>
+                  <a:srgbClr val="333333"/>
+                </a:solidFill>
+                <a:latin typeface="Calibri"/>
+              </a:rPr>
+              <a:t>•  Transitive dependency resolution – auto-include connections and agents</a:t>
+            </a:r>
+          </a:p>
+          <a:p>
+            <a:r>
+              <a:rPr sz="1300" b="0">
+                <a:solidFill>
+                  <a:srgbClr val="333333"/>
+                </a:solidFill>
+                <a:latin typeface="Calibri"/>
+              </a:rPr>
+              <a:t>•  Generates ContentsofExportPackage_*.csv and exportMetadata.v2.json</a:t>
+            </a:r>
+          </a:p>
+          <a:p>
+            <a:r>
+              <a:rPr sz="1300" b="0">
+                <a:solidFill>
+                  <a:srgbClr val="333333"/>
+                </a:solidFill>
+                <a:latin typeface="Calibri"/>
+              </a:rPr>
+              <a:t>•  Computes xexportPackage.chksum checksum file</a:t>
+            </a:r>
+          </a:p>
+          <a:p>
+            <a:r>
+              <a:rPr sz="1300" b="0">
+                <a:solidFill>
+                  <a:srgbClr val="333333"/>
+                </a:solidFill>
+                <a:latin typeface="Calibri"/>
+              </a:rPr>
+              <a:t>•  Strip CurrentServerDateTime to enable clean git diffs</a:t>
+            </a:r>
+          </a:p>
+          <a:p>
+            <a:r>
+              <a:rPr sz="1300" b="0">
+                <a:solidFill>
+                  <a:srgbClr val="333333"/>
+                </a:solidFill>
+                <a:latin typeface="Calibri"/>
+              </a:rPr>
+              <a:t>•  Backward-compatible with official CLI asset list text files</a:t>
             </a:r>
           </a:p>
         </p:txBody>
@@ -4233,7 +3950,7 @@
                 </a:solidFill>
                 <a:latin typeface="Calibri"/>
               </a:rPr>
-              <a:t>Modern Design &amp; Broad Platform Support</a:t>
+              <a:t>Release Workflow</a:t>
             </a:r>
           </a:p>
         </p:txBody>
@@ -4268,7 +3985,7 @@
                 </a:solidFill>
                 <a:latin typeface="Calibri"/>
               </a:rPr>
-              <a:t>Built for today's DevOps toolchains</a:t>
+              <a:t>CI/CD manifests and per-environment deployment plans</a:t>
             </a:r>
           </a:p>
         </p:txBody>
@@ -4360,7 +4077,7 @@
         <p:spPr>
           <a:xfrm>
             <a:off x="457200" y="1097280"/>
-            <a:ext cx="5303520" cy="365760"/>
+            <a:ext cx="11247120" cy="320040"/>
           </a:xfrm>
           <a:prstGeom prst="rect">
             <a:avLst/>
@@ -4375,218 +4092,27 @@
           <a:p>
             <a:pPr algn="l"/>
             <a:r>
-              <a:rPr sz="1400" b="1" i="0">
-                <a:solidFill>
-                  <a:srgbClr val="CC0000"/>
-                </a:solidFill>
-                <a:latin typeface="Calibri"/>
-              </a:rPr>
-              <a:t>Official CLI – Limited and outdated</a:t>
-            </a:r>
-          </a:p>
-        </p:txBody>
-      </p:sp>
-      <p:sp>
-        <p:nvSpPr>
-          <p:cNvPr id="8" name="TextBox 7"/>
-          <p:cNvSpPr txBox="1"/>
-          <p:nvPr/>
-        </p:nvSpPr>
-        <p:spPr>
-          <a:xfrm>
-            <a:off x="457200" y="1554480"/>
-            <a:ext cx="5303520" cy="3200400"/>
-          </a:xfrm>
-          <a:prstGeom prst="rect">
-            <a:avLst/>
-          </a:prstGeom>
-          <a:noFill/>
-        </p:spPr>
-        <p:txBody>
-          <a:bodyPr wrap="square">
-            <a:spAutoFit/>
-          </a:bodyPr>
-          <a:lstStyle/>
-          <a:p>
-            <a:r>
-              <a:rPr sz="1500" b="0">
-                <a:solidFill>
-                  <a:srgbClr val="CC0000"/>
-                </a:solidFill>
-                <a:latin typeface="Calibri"/>
-              </a:rPr>
-              <a:t>•  No longer maintained – frozen in time</a:t>
-            </a:r>
-          </a:p>
-          <a:p>
-            <a:r>
-              <a:rPr sz="1500" b="0">
-                <a:solidFill>
-                  <a:srgbClr val="CC0000"/>
-                </a:solidFill>
-                <a:latin typeface="Calibri"/>
-              </a:rPr>
-              <a:t>•  Covers only export/import/publish operations</a:t>
-            </a:r>
-          </a:p>
-          <a:p>
-            <a:r>
-              <a:rPr sz="1500" b="0">
-                <a:solidFill>
-                  <a:srgbClr val="CC0000"/>
-                </a:solidFill>
-                <a:latin typeface="Calibri"/>
-              </a:rPr>
-              <a:t>•  Limited region support (us/eu/ap only)</a:t>
-            </a:r>
-          </a:p>
-          <a:p>
-            <a:r>
-              <a:rPr sz="1500" b="0">
-                <a:solidFill>
-                  <a:srgbClr val="CC0000"/>
-                </a:solidFill>
-                <a:latin typeface="Calibri"/>
-              </a:rPr>
-              <a:t>•  Complex credential and profile management</a:t>
-            </a:r>
-          </a:p>
-          <a:p>
-            <a:r>
-              <a:rPr sz="1500" b="0">
-                <a:solidFill>
-                  <a:srgbClr val="CC0000"/>
-                </a:solidFill>
-                <a:latin typeface="Calibri"/>
-              </a:rPr>
-              <a:t>•  No modern automation-friendly features</a:t>
-            </a:r>
-          </a:p>
-        </p:txBody>
-      </p:sp>
-      <p:sp>
-        <p:nvSpPr>
-          <p:cNvPr id="9" name="TextBox 8"/>
-          <p:cNvSpPr txBox="1"/>
-          <p:nvPr/>
-        </p:nvSpPr>
-        <p:spPr>
-          <a:xfrm>
-            <a:off x="6400800" y="1097280"/>
-            <a:ext cx="5303520" cy="365760"/>
-          </a:xfrm>
-          <a:prstGeom prst="rect">
-            <a:avLst/>
-          </a:prstGeom>
-          <a:noFill/>
-        </p:spPr>
-        <p:txBody>
-          <a:bodyPr wrap="square">
-            <a:spAutoFit/>
-          </a:bodyPr>
-          <a:lstStyle/>
-          <a:p>
-            <a:pPr algn="l"/>
-            <a:r>
-              <a:rPr sz="1400" b="1" i="0">
-                <a:solidFill>
-                  <a:srgbClr val="009944"/>
-                </a:solidFill>
-                <a:latin typeface="Calibri"/>
-              </a:rPr>
-              <a:t>iics-cli – Modern, actively maintained</a:t>
-            </a:r>
-          </a:p>
-        </p:txBody>
-      </p:sp>
-      <p:sp>
-        <p:nvSpPr>
-          <p:cNvPr id="10" name="TextBox 9"/>
-          <p:cNvSpPr txBox="1"/>
-          <p:nvPr/>
-        </p:nvSpPr>
-        <p:spPr>
-          <a:xfrm>
-            <a:off x="6400800" y="1554480"/>
-            <a:ext cx="5303520" cy="3200400"/>
-          </a:xfrm>
-          <a:prstGeom prst="rect">
-            <a:avLst/>
-          </a:prstGeom>
-          <a:noFill/>
-        </p:spPr>
-        <p:txBody>
-          <a:bodyPr wrap="square">
-            <a:spAutoFit/>
-          </a:bodyPr>
-          <a:lstStyle/>
-          <a:p>
-            <a:r>
-              <a:rPr sz="1500" b="0">
-                <a:solidFill>
-                  <a:srgbClr val="009944"/>
-                </a:solidFill>
-                <a:latin typeface="Calibri"/>
-              </a:rPr>
-              <a:t>•  Actively maintained with regular updates</a:t>
-            </a:r>
-          </a:p>
-          <a:p>
-            <a:r>
-              <a:rPr sz="1500" b="0">
-                <a:solidFill>
-                  <a:srgbClr val="009944"/>
-                </a:solidFill>
-                <a:latin typeface="Calibri"/>
-              </a:rPr>
-              <a:t>•  20+ resource types with full CRUD operations</a:t>
-            </a:r>
-          </a:p>
-          <a:p>
-            <a:r>
-              <a:rPr sz="1500" b="0">
-                <a:solidFill>
-                  <a:srgbClr val="009944"/>
-                </a:solidFill>
-                <a:latin typeface="Calibri"/>
-              </a:rPr>
-              <a:t>•  All IICS pod regions supported</a:t>
-            </a:r>
-          </a:p>
-          <a:p>
-            <a:r>
-              <a:rPr sz="1500" b="0">
-                <a:solidFill>
-                  <a:srgbClr val="009944"/>
-                </a:solidFill>
-                <a:latin typeface="Calibri"/>
-              </a:rPr>
-              <a:t>•  Named profiles and session caching</a:t>
-            </a:r>
-          </a:p>
-          <a:p>
-            <a:r>
-              <a:rPr sz="1500" b="0">
-                <a:solidFill>
-                  <a:srgbClr val="009944"/>
-                </a:solidFill>
-                <a:latin typeface="Calibri"/>
-              </a:rPr>
-              <a:t>•  ~8 MB statically-linked Go binary</a:t>
-            </a:r>
-          </a:p>
-        </p:txBody>
-      </p:sp>
-      <p:sp>
-        <p:nvSpPr>
-          <p:cNvPr id="11" name="Rectangle 10"/>
+              <a:rPr sz="1500" b="1" i="0">
+                <a:solidFill>
+                  <a:srgbClr val="003366"/>
+                </a:solidFill>
+                <a:latin typeface="Calibri"/>
+              </a:rPr>
+              <a:t>Three-step release pipeline</a:t>
+            </a:r>
+          </a:p>
+        </p:txBody>
+      </p:sp>
+      <p:sp>
+        <p:nvSpPr>
+          <p:cNvPr id="8" name="Rectangle 7"/>
           <p:cNvSpPr/>
           <p:nvPr/>
         </p:nvSpPr>
         <p:spPr>
           <a:xfrm>
-            <a:off x="457200" y="4846320"/>
-            <a:ext cx="11247120" cy="1645920"/>
+            <a:off x="457200" y="1508760"/>
+            <a:ext cx="5486400" cy="4114800"/>
           </a:xfrm>
           <a:prstGeom prst="rect">
             <a:avLst/>
@@ -4622,14 +4148,14 @@
       </p:sp>
       <p:sp>
         <p:nvSpPr>
-          <p:cNvPr id="12" name="TextBox 11"/>
+          <p:cNvPr id="9" name="TextBox 8"/>
           <p:cNvSpPr txBox="1"/>
           <p:nvPr/>
         </p:nvSpPr>
         <p:spPr>
           <a:xfrm>
-            <a:off x="594360" y="4937760"/>
-            <a:ext cx="10972800" cy="1463040"/>
+            <a:off x="594360" y="1600200"/>
+            <a:ext cx="5212080" cy="3931920"/>
           </a:xfrm>
           <a:prstGeom prst="rect">
             <a:avLst/>
@@ -4650,12 +4176,165 @@
                 </a:solidFill>
                 <a:latin typeface="Courier New"/>
               </a:rPr>
-              <a:t># Install – one line
-curl -L https://github.com/jbrazda/iics-cli/releases/latest/download/iics_linux_amd64 \
-  -o /usr/local/bin/iics &amp;&amp; chmod +x /usr/local/bin/iics
-# Docker – minimal image
-COPY iics /usr/local/bin/iics
-# No apt-get install default-jre needed</a:t>
+              <a:t># 1. Generate a release manifest from dependency graph
+iics release manifest \
+  --project Prod \
+  --output release-manifest.yaml
+# 2. Validate the manifest against each target
+iics release validate \
+  --manifest release-manifest.yaml \
+  --profile staging
+# 3. Generate per-environment deployment plans
+iics release plan \
+  --manifest release-manifest.yaml \
+  --targets dev,staging,prod \
+  --output-dir ./plans</a:t>
+            </a:r>
+          </a:p>
+        </p:txBody>
+      </p:sp>
+      <p:sp>
+        <p:nvSpPr>
+          <p:cNvPr id="10" name="TextBox 9"/>
+          <p:cNvSpPr txBox="1"/>
+          <p:nvPr/>
+        </p:nvSpPr>
+        <p:spPr>
+          <a:xfrm>
+            <a:off x="6400800" y="1097280"/>
+            <a:ext cx="5303520" cy="320040"/>
+          </a:xfrm>
+          <a:prstGeom prst="rect">
+            <a:avLst/>
+          </a:prstGeom>
+          <a:noFill/>
+        </p:spPr>
+        <p:txBody>
+          <a:bodyPr wrap="square">
+            <a:spAutoFit/>
+          </a:bodyPr>
+          <a:lstStyle/>
+          <a:p>
+            <a:pPr algn="l"/>
+            <a:r>
+              <a:rPr sz="1400" b="1" i="0">
+                <a:solidFill>
+                  <a:srgbClr val="0066CC"/>
+                </a:solidFill>
+                <a:latin typeface="Calibri"/>
+              </a:rPr>
+              <a:t>CI/CD integration</a:t>
+            </a:r>
+          </a:p>
+        </p:txBody>
+      </p:sp>
+      <p:sp>
+        <p:nvSpPr>
+          <p:cNvPr id="11" name="TextBox 10"/>
+          <p:cNvSpPr txBox="1"/>
+          <p:nvPr/>
+        </p:nvSpPr>
+        <p:spPr>
+          <a:xfrm>
+            <a:off x="6400800" y="1508760"/>
+            <a:ext cx="5303520" cy="4114800"/>
+          </a:xfrm>
+          <a:prstGeom prst="rect">
+            <a:avLst/>
+          </a:prstGeom>
+          <a:noFill/>
+        </p:spPr>
+        <p:txBody>
+          <a:bodyPr wrap="square">
+            <a:spAutoFit/>
+          </a:bodyPr>
+          <a:lstStyle/>
+          <a:p>
+            <a:r>
+              <a:rPr sz="1300" b="0">
+                <a:solidFill>
+                  <a:srgbClr val="333333"/>
+                </a:solidFill>
+                <a:latin typeface="Calibri"/>
+              </a:rPr>
+              <a:t>•  release manifest – scans object dependencies and outputs a YAML manifest</a:t>
+            </a:r>
+          </a:p>
+          <a:p>
+            <a:r>
+              <a:rPr sz="1300" b="0">
+                <a:solidFill>
+                  <a:srgbClr val="333333"/>
+                </a:solidFill>
+                <a:latin typeface="Calibri"/>
+              </a:rPr>
+              <a:t>•  release validate – checks each asset exists in the target org</a:t>
+            </a:r>
+          </a:p>
+          <a:p>
+            <a:r>
+              <a:rPr sz="1300" b="0">
+                <a:solidFill>
+                  <a:srgbClr val="333333"/>
+                </a:solidFill>
+                <a:latin typeface="Calibri"/>
+              </a:rPr>
+              <a:t>•  release plan – generates one plan CSV per deployment target</a:t>
+            </a:r>
+          </a:p>
+          <a:p>
+            <a:r>
+              <a:rPr sz="1300" b="0">
+                <a:solidFill>
+                  <a:srgbClr val="333333"/>
+                </a:solidFill>
+                <a:latin typeface="Calibri"/>
+              </a:rPr>
+              <a:t>•  IICS_VALID_DEPLOY_TARGETS – allowlist of approved targets</a:t>
+            </a:r>
+          </a:p>
+          <a:p>
+            <a:r>
+              <a:rPr sz="1300" b="0">
+                <a:solidFill>
+                  <a:srgbClr val="333333"/>
+                </a:solidFill>
+                <a:latin typeface="Calibri"/>
+              </a:rPr>
+              <a:t>•  IICS_TARGET_PROFILE_MAP – maps target names to profiles</a:t>
+            </a:r>
+          </a:p>
+          <a:p>
+            <a:r>
+              <a:rPr sz="1300" b="0">
+                <a:solidFill>
+                  <a:srgbClr val="333333"/>
+                </a:solidFill>
+                <a:latin typeface="Calibri"/>
+              </a:rPr>
+              <a:t>•  Per-target CI credentials: IICS_USER_&lt;TARGET&gt;, IICS_PWD_&lt;TARGET&gt;</a:t>
+            </a:r>
+          </a:p>
+          <a:p>
+            <a:r>
+              <a:rPr sz="1300" b="0">
+                <a:solidFill>
+                  <a:srgbClr val="333333"/>
+                </a:solidFill>
+                <a:latin typeface="Calibri"/>
+              </a:rPr>
+              <a:t>•  Works with GitHub Actions, Jenkins, GitLab CI, and any shell pipeline</a:t>
+            </a:r>
+          </a:p>
+          <a:p>
+            <a:r>
+              <a:rPr sz="1300" b="0">
+                <a:solidFill>
+                  <a:srgbClr val="333333"/>
+                </a:solidFill>
+                <a:latin typeface="Calibri"/>
+              </a:rPr>
+              <a:t>•  Publish order enforcement – dependencies deployed before dependents</a:t>
             </a:r>
           </a:p>
         </p:txBody>
@@ -4751,7 +4430,7 @@
                 </a:solidFill>
                 <a:latin typeface="Calibri"/>
               </a:rPr>
-              <a:t>Structured Subcommands &amp; Built-in Help</a:t>
+              <a:t>Publish &amp; Unpublish CAI Assets</a:t>
             </a:r>
           </a:p>
         </p:txBody>
@@ -4786,7 +4465,7 @@
                 </a:solidFill>
                 <a:latin typeface="Calibri"/>
               </a:rPr>
-              <a:t>kubectl / gh / aws style resource-verb hierarchy</a:t>
+              <a:t>Control asset lifecycle on the runtime</a:t>
             </a:r>
           </a:p>
         </p:txBody>
@@ -4871,14 +4550,49 @@
       </p:sp>
       <p:sp>
         <p:nvSpPr>
-          <p:cNvPr id="7" name="Rectangle 6"/>
+          <p:cNvPr id="7" name="TextBox 6"/>
+          <p:cNvSpPr txBox="1"/>
+          <p:nvPr/>
+        </p:nvSpPr>
+        <p:spPr>
+          <a:xfrm>
+            <a:off x="457200" y="1097280"/>
+            <a:ext cx="5303520" cy="320040"/>
+          </a:xfrm>
+          <a:prstGeom prst="rect">
+            <a:avLst/>
+          </a:prstGeom>
+          <a:noFill/>
+        </p:spPr>
+        <p:txBody>
+          <a:bodyPr wrap="square">
+            <a:spAutoFit/>
+          </a:bodyPr>
+          <a:lstStyle/>
+          <a:p>
+            <a:pPr algn="l"/>
+            <a:r>
+              <a:rPr sz="1400" b="1" i="0">
+                <a:solidFill>
+                  <a:srgbClr val="009944"/>
+                </a:solidFill>
+                <a:latin typeface="Calibri"/>
+              </a:rPr>
+              <a:t>Publish assets to the runtime</a:t>
+            </a:r>
+          </a:p>
+        </p:txBody>
+      </p:sp>
+      <p:sp>
+        <p:nvSpPr>
+          <p:cNvPr id="8" name="Rectangle 7"/>
           <p:cNvSpPr/>
           <p:nvPr/>
         </p:nvSpPr>
         <p:spPr>
           <a:xfrm>
-            <a:off x="457200" y="1188720"/>
-            <a:ext cx="6858000" cy="5029200"/>
+            <a:off x="457200" y="1463040"/>
+            <a:ext cx="5303520" cy="2194560"/>
           </a:xfrm>
           <a:prstGeom prst="rect">
             <a:avLst/>
@@ -4914,14 +4628,14 @@
       </p:sp>
       <p:sp>
         <p:nvSpPr>
-          <p:cNvPr id="8" name="TextBox 7"/>
+          <p:cNvPr id="9" name="TextBox 8"/>
           <p:cNvSpPr txBox="1"/>
           <p:nvPr/>
         </p:nvSpPr>
         <p:spPr>
           <a:xfrm>
-            <a:off x="594360" y="1280160"/>
-            <a:ext cx="6583680" cy="4846320"/>
+            <a:off x="594360" y="1554480"/>
+            <a:ext cx="5029200" cy="2011680"/>
           </a:xfrm>
           <a:prstGeom prst="rect">
             <a:avLst/>
@@ -4942,31 +4656,27 @@
                 </a:solidFill>
                 <a:latin typeface="Courier New"/>
               </a:rPr>
-              <a:t># Resource  Verb  Flags
-iics user   list
-iics user   get   --id abc123
-iics user   create --from-file user.json
-iics connection list
-iics connection update --id xyz --from-file conn.json
-iics export create --name nightly --project Prod
-iics export status --job-id 12345
-iics export download --job-id 12345 --output export.zip
-iics sourcecontrol checkin --project Prod --comment "release 2.4"
-iics state fetch --project Prod --output state.json</a:t>
-            </a:r>
-          </a:p>
-        </p:txBody>
-      </p:sp>
-      <p:sp>
-        <p:nvSpPr>
-          <p:cNvPr id="9" name="TextBox 8"/>
+              <a:t># Publish immediately and wait for completion
+iics publish run \
+  --ids &lt;asset-id-1&gt;,&lt;asset-id-2&gt;
+# Start async publish job
+iics publish start --ids &lt;asset-id-1&gt;
+# Check publish status
+iics publish status --id &lt;job-id&gt;</a:t>
+            </a:r>
+          </a:p>
+        </p:txBody>
+      </p:sp>
+      <p:sp>
+        <p:nvSpPr>
+          <p:cNvPr id="10" name="TextBox 9"/>
           <p:cNvSpPr txBox="1"/>
           <p:nvPr/>
         </p:nvSpPr>
         <p:spPr>
           <a:xfrm>
-            <a:off x="7498079" y="1188720"/>
-            <a:ext cx="4389120" cy="365760"/>
+            <a:off x="6400800" y="1097280"/>
+            <a:ext cx="5303520" cy="320040"/>
           </a:xfrm>
           <a:prstGeom prst="rect">
             <a:avLst/>
@@ -4983,25 +4693,25 @@
             <a:r>
               <a:rPr sz="1400" b="1" i="0">
                 <a:solidFill>
-                  <a:srgbClr val="003366"/>
-                </a:solidFill>
-                <a:latin typeface="Calibri"/>
-              </a:rPr>
-              <a:t>Built-in help at every level</a:t>
-            </a:r>
-          </a:p>
-        </p:txBody>
-      </p:sp>
-      <p:sp>
-        <p:nvSpPr>
-          <p:cNvPr id="10" name="Rectangle 9"/>
+                  <a:srgbClr val="FF6600"/>
+                </a:solidFill>
+                <a:latin typeface="Calibri"/>
+              </a:rPr>
+              <a:t>Unpublish assets from the runtime</a:t>
+            </a:r>
+          </a:p>
+        </p:txBody>
+      </p:sp>
+      <p:sp>
+        <p:nvSpPr>
+          <p:cNvPr id="11" name="Rectangle 10"/>
           <p:cNvSpPr/>
           <p:nvPr/>
         </p:nvSpPr>
         <p:spPr>
           <a:xfrm>
-            <a:off x="7498079" y="1600200"/>
-            <a:ext cx="4389120" cy="1371600"/>
+            <a:off x="6400800" y="1463040"/>
+            <a:ext cx="5303520" cy="2194560"/>
           </a:xfrm>
           <a:prstGeom prst="rect">
             <a:avLst/>
@@ -5037,14 +4747,14 @@
       </p:sp>
       <p:sp>
         <p:nvSpPr>
-          <p:cNvPr id="11" name="TextBox 10"/>
+          <p:cNvPr id="12" name="TextBox 11"/>
           <p:cNvSpPr txBox="1"/>
           <p:nvPr/>
         </p:nvSpPr>
         <p:spPr>
           <a:xfrm>
-            <a:off x="7635239" y="1691640"/>
-            <a:ext cx="4114800" cy="1188720"/>
+            <a:off x="6537960" y="1554480"/>
+            <a:ext cx="5029200" cy="2011680"/>
           </a:xfrm>
           <a:prstGeom prst="rect">
             <a:avLst/>
@@ -5065,23 +4775,27 @@
                 </a:solidFill>
                 <a:latin typeface="Courier New"/>
               </a:rPr>
-              <a:t>iics --help
-iics user --help
-iics export create --help</a:t>
-            </a:r>
-          </a:p>
-        </p:txBody>
-      </p:sp>
-      <p:sp>
-        <p:nvSpPr>
-          <p:cNvPr id="12" name="TextBox 11"/>
+              <a:t># Unpublish immediately and wait for completion
+iics unpublish run \
+  --ids &lt;asset-id-1&gt;,&lt;asset-id-2&gt;
+# Start async unpublish job
+iics unpublish start --ids &lt;asset-id-1&gt;
+# Check unpublish status
+iics unpublish status --id &lt;job-id&gt;</a:t>
+            </a:r>
+          </a:p>
+        </p:txBody>
+      </p:sp>
+      <p:sp>
+        <p:nvSpPr>
+          <p:cNvPr id="13" name="TextBox 12"/>
           <p:cNvSpPr txBox="1"/>
           <p:nvPr/>
         </p:nvSpPr>
         <p:spPr>
           <a:xfrm>
-            <a:off x="7498079" y="3108960"/>
-            <a:ext cx="4389120" cy="2286000"/>
+            <a:off x="457200" y="3749039"/>
+            <a:ext cx="11247120" cy="320040"/>
           </a:xfrm>
           <a:prstGeom prst="rect">
             <a:avLst/>
@@ -5094,51 +4808,543 @@
           </a:bodyPr>
           <a:lstStyle/>
           <a:p>
-            <a:r>
-              <a:rPr sz="1300" b="0">
-                <a:solidFill>
-                  <a:srgbClr val="333333"/>
-                </a:solidFill>
-                <a:latin typeface="Calibri"/>
-              </a:rPr>
-              <a:t>•  Same pattern as kubectl, gh, aws – familiar to DevOps teams</a:t>
-            </a:r>
-          </a:p>
-          <a:p>
-            <a:r>
-              <a:rPr sz="1300" b="0">
-                <a:solidFill>
-                  <a:srgbClr val="333333"/>
-                </a:solidFill>
-                <a:latin typeface="Calibri"/>
-              </a:rPr>
-              <a:t>•  Tab completion supported</a:t>
-            </a:r>
-          </a:p>
-          <a:p>
-            <a:r>
-              <a:rPr sz="1300" b="0">
-                <a:solidFill>
-                  <a:srgbClr val="333333"/>
-                </a:solidFill>
-                <a:latin typeface="Calibri"/>
-              </a:rPr>
-              <a:t>•  Per-command docs in docs/documentation/</a:t>
-            </a:r>
-          </a:p>
-          <a:p>
-            <a:r>
-              <a:rPr sz="1300" b="0">
-                <a:solidFill>
-                  <a:srgbClr val="333333"/>
-                </a:solidFill>
-                <a:latin typeface="Calibri"/>
-              </a:rPr>
-              <a:t>•  Full flag reference in built-in --help</a:t>
-            </a:r>
-          </a:p>
-        </p:txBody>
-      </p:sp>
+            <a:pPr algn="l"/>
+            <a:r>
+              <a:rPr sz="1400" b="1" i="0">
+                <a:solidFill>
+                  <a:srgbClr val="003366"/>
+                </a:solidFill>
+                <a:latin typeface="Calibri"/>
+              </a:rPr>
+              <a:t>Supported asset types</a:t>
+            </a:r>
+          </a:p>
+        </p:txBody>
+      </p:sp>
+      <p:graphicFrame>
+        <p:nvGraphicFramePr>
+          <p:cNvPr id="14" name="Table 13"/>
+          <p:cNvGraphicFramePr>
+            <a:graphicFrameLocks noGrp="1"/>
+          </p:cNvGraphicFramePr>
+          <p:nvPr/>
+        </p:nvGraphicFramePr>
+        <p:xfrm>
+          <a:off x="457200" y="4160520"/>
+          <a:ext cx="11247120" cy="2103120"/>
+        </p:xfrm>
+        <a:graphic>
+          <a:graphicData uri="http://schemas.openxmlformats.org/drawingml/2006/table">
+            <a:tbl>
+              <a:tblPr firstRow="1" bandRow="1">
+                <a:tableStyleId>{5C22544A-7EE6-4342-B048-85BDC9FD1C3A}</a:tableStyleId>
+              </a:tblPr>
+              <a:tblGrid>
+                <a:gridCol w="3749040"/>
+                <a:gridCol w="3749040"/>
+                <a:gridCol w="3749040"/>
+              </a:tblGrid>
+              <a:tr h="300445">
+                <a:tc>
+                  <a:txBody>
+                    <a:bodyPr/>
+                    <a:lstStyle/>
+                    <a:p>
+                      <a:pPr algn="ctr"/>
+                      <a:r>
+                        <a:rPr b="1" sz="1300">
+                          <a:solidFill>
+                            <a:srgbClr val="FFFFFF"/>
+                          </a:solidFill>
+                          <a:latin typeface="Calibri"/>
+                        </a:rPr>
+                        <a:t>Asset Type</a:t>
+                      </a:r>
+                    </a:p>
+                  </a:txBody>
+                  <a:tcPr>
+                    <a:solidFill>
+                      <a:srgbClr val="0066CC"/>
+                    </a:solidFill>
+                  </a:tcPr>
+                </a:tc>
+                <a:tc>
+                  <a:txBody>
+                    <a:bodyPr/>
+                    <a:lstStyle/>
+                    <a:p>
+                      <a:pPr algn="ctr"/>
+                      <a:r>
+                        <a:rPr b="1" sz="1300">
+                          <a:solidFill>
+                            <a:srgbClr val="FFFFFF"/>
+                          </a:solidFill>
+                          <a:latin typeface="Calibri"/>
+                        </a:rPr>
+                        <a:t>Publishable</a:t>
+                      </a:r>
+                    </a:p>
+                  </a:txBody>
+                  <a:tcPr>
+                    <a:solidFill>
+                      <a:srgbClr val="0066CC"/>
+                    </a:solidFill>
+                  </a:tcPr>
+                </a:tc>
+                <a:tc>
+                  <a:txBody>
+                    <a:bodyPr/>
+                    <a:lstStyle/>
+                    <a:p>
+                      <a:pPr algn="ctr"/>
+                      <a:r>
+                        <a:rPr b="1" sz="1300">
+                          <a:solidFill>
+                            <a:srgbClr val="FFFFFF"/>
+                          </a:solidFill>
+                          <a:latin typeface="Calibri"/>
+                        </a:rPr>
+                        <a:t>Notes</a:t>
+                      </a:r>
+                    </a:p>
+                  </a:txBody>
+                  <a:tcPr>
+                    <a:solidFill>
+                      <a:srgbClr val="0066CC"/>
+                    </a:solidFill>
+                  </a:tcPr>
+                </a:tc>
+              </a:tr>
+              <a:tr h="300445">
+                <a:tc>
+                  <a:txBody>
+                    <a:bodyPr/>
+                    <a:lstStyle/>
+                    <a:p>
+                      <a:pPr algn="l"/>
+                      <a:r>
+                        <a:rPr sz="1200">
+                          <a:solidFill>
+                            <a:srgbClr val="333333"/>
+                          </a:solidFill>
+                          <a:latin typeface="Calibri"/>
+                        </a:rPr>
+                        <a:t>PROCESS</a:t>
+                      </a:r>
+                    </a:p>
+                  </a:txBody>
+                  <a:tcPr>
+                    <a:solidFill>
+                      <a:srgbClr val="F2F2F2"/>
+                    </a:solidFill>
+                  </a:tcPr>
+                </a:tc>
+                <a:tc>
+                  <a:txBody>
+                    <a:bodyPr/>
+                    <a:lstStyle/>
+                    <a:p>
+                      <a:pPr algn="ctr"/>
+                      <a:r>
+                        <a:rPr b="1" sz="1200">
+                          <a:solidFill>
+                            <a:srgbClr val="009944"/>
+                          </a:solidFill>
+                          <a:latin typeface="Calibri"/>
+                        </a:rPr>
+                        <a:t>Yes</a:t>
+                      </a:r>
+                    </a:p>
+                  </a:txBody>
+                  <a:tcPr>
+                    <a:solidFill>
+                      <a:srgbClr val="F2F2F2"/>
+                    </a:solidFill>
+                  </a:tcPr>
+                </a:tc>
+                <a:tc>
+                  <a:txBody>
+                    <a:bodyPr/>
+                    <a:lstStyle/>
+                    <a:p>
+                      <a:pPr algn="ctr"/>
+                      <a:r>
+                        <a:rPr sz="1200">
+                          <a:solidFill>
+                            <a:srgbClr val="333333"/>
+                          </a:solidFill>
+                          <a:latin typeface="Calibri"/>
+                        </a:rPr>
+                        <a:t>Application Integration processes</a:t>
+                      </a:r>
+                    </a:p>
+                  </a:txBody>
+                  <a:tcPr>
+                    <a:solidFill>
+                      <a:srgbClr val="F2F2F2"/>
+                    </a:solidFill>
+                  </a:tcPr>
+                </a:tc>
+              </a:tr>
+              <a:tr h="300445">
+                <a:tc>
+                  <a:txBody>
+                    <a:bodyPr/>
+                    <a:lstStyle/>
+                    <a:p>
+                      <a:pPr algn="l"/>
+                      <a:r>
+                        <a:rPr sz="1200">
+                          <a:solidFill>
+                            <a:srgbClr val="333333"/>
+                          </a:solidFill>
+                          <a:latin typeface="Calibri"/>
+                        </a:rPr>
+                        <a:t>GUIDE</a:t>
+                      </a:r>
+                    </a:p>
+                  </a:txBody>
+                  <a:tcPr>
+                    <a:solidFill>
+                      <a:srgbClr val="FFFFFF"/>
+                    </a:solidFill>
+                  </a:tcPr>
+                </a:tc>
+                <a:tc>
+                  <a:txBody>
+                    <a:bodyPr/>
+                    <a:lstStyle/>
+                    <a:p>
+                      <a:pPr algn="ctr"/>
+                      <a:r>
+                        <a:rPr b="1" sz="1200">
+                          <a:solidFill>
+                            <a:srgbClr val="009944"/>
+                          </a:solidFill>
+                          <a:latin typeface="Calibri"/>
+                        </a:rPr>
+                        <a:t>Yes</a:t>
+                      </a:r>
+                    </a:p>
+                  </a:txBody>
+                  <a:tcPr>
+                    <a:solidFill>
+                      <a:srgbClr val="FFFFFF"/>
+                    </a:solidFill>
+                  </a:tcPr>
+                </a:tc>
+                <a:tc>
+                  <a:txBody>
+                    <a:bodyPr/>
+                    <a:lstStyle/>
+                    <a:p>
+                      <a:pPr algn="ctr"/>
+                      <a:r>
+                        <a:rPr sz="1200">
+                          <a:solidFill>
+                            <a:srgbClr val="333333"/>
+                          </a:solidFill>
+                          <a:latin typeface="Calibri"/>
+                        </a:rPr>
+                        <a:t>Application Integration guides</a:t>
+                      </a:r>
+                    </a:p>
+                  </a:txBody>
+                  <a:tcPr>
+                    <a:solidFill>
+                      <a:srgbClr val="FFFFFF"/>
+                    </a:solidFill>
+                  </a:tcPr>
+                </a:tc>
+              </a:tr>
+              <a:tr h="300445">
+                <a:tc>
+                  <a:txBody>
+                    <a:bodyPr/>
+                    <a:lstStyle/>
+                    <a:p>
+                      <a:pPr algn="l"/>
+                      <a:r>
+                        <a:rPr sz="1200">
+                          <a:solidFill>
+                            <a:srgbClr val="333333"/>
+                          </a:solidFill>
+                          <a:latin typeface="Calibri"/>
+                        </a:rPr>
+                        <a:t>TASKFLOW</a:t>
+                      </a:r>
+                    </a:p>
+                  </a:txBody>
+                  <a:tcPr>
+                    <a:solidFill>
+                      <a:srgbClr val="F2F2F2"/>
+                    </a:solidFill>
+                  </a:tcPr>
+                </a:tc>
+                <a:tc>
+                  <a:txBody>
+                    <a:bodyPr/>
+                    <a:lstStyle/>
+                    <a:p>
+                      <a:pPr algn="ctr"/>
+                      <a:r>
+                        <a:rPr b="1" sz="1200">
+                          <a:solidFill>
+                            <a:srgbClr val="009944"/>
+                          </a:solidFill>
+                          <a:latin typeface="Calibri"/>
+                        </a:rPr>
+                        <a:t>Yes</a:t>
+                      </a:r>
+                    </a:p>
+                  </a:txBody>
+                  <a:tcPr>
+                    <a:solidFill>
+                      <a:srgbClr val="F2F2F2"/>
+                    </a:solidFill>
+                  </a:tcPr>
+                </a:tc>
+                <a:tc>
+                  <a:txBody>
+                    <a:bodyPr/>
+                    <a:lstStyle/>
+                    <a:p>
+                      <a:pPr algn="ctr"/>
+                      <a:r>
+                        <a:rPr sz="1200">
+                          <a:solidFill>
+                            <a:srgbClr val="333333"/>
+                          </a:solidFill>
+                          <a:latin typeface="Calibri"/>
+                        </a:rPr>
+                        <a:t>Taskflows</a:t>
+                      </a:r>
+                    </a:p>
+                  </a:txBody>
+                  <a:tcPr>
+                    <a:solidFill>
+                      <a:srgbClr val="F2F2F2"/>
+                    </a:solidFill>
+                  </a:tcPr>
+                </a:tc>
+              </a:tr>
+              <a:tr h="300445">
+                <a:tc>
+                  <a:txBody>
+                    <a:bodyPr/>
+                    <a:lstStyle/>
+                    <a:p>
+                      <a:pPr algn="l"/>
+                      <a:r>
+                        <a:rPr sz="1200">
+                          <a:solidFill>
+                            <a:srgbClr val="333333"/>
+                          </a:solidFill>
+                          <a:latin typeface="Calibri"/>
+                        </a:rPr>
+                        <a:t>AI_CONNECTION</a:t>
+                      </a:r>
+                    </a:p>
+                  </a:txBody>
+                  <a:tcPr>
+                    <a:solidFill>
+                      <a:srgbClr val="FFFFFF"/>
+                    </a:solidFill>
+                  </a:tcPr>
+                </a:tc>
+                <a:tc>
+                  <a:txBody>
+                    <a:bodyPr/>
+                    <a:lstStyle/>
+                    <a:p>
+                      <a:pPr algn="ctr"/>
+                      <a:r>
+                        <a:rPr b="1" sz="1200">
+                          <a:solidFill>
+                            <a:srgbClr val="009944"/>
+                          </a:solidFill>
+                          <a:latin typeface="Calibri"/>
+                        </a:rPr>
+                        <a:t>Yes</a:t>
+                      </a:r>
+                    </a:p>
+                  </a:txBody>
+                  <a:tcPr>
+                    <a:solidFill>
+                      <a:srgbClr val="FFFFFF"/>
+                    </a:solidFill>
+                  </a:tcPr>
+                </a:tc>
+                <a:tc>
+                  <a:txBody>
+                    <a:bodyPr/>
+                    <a:lstStyle/>
+                    <a:p>
+                      <a:pPr algn="ctr"/>
+                      <a:r>
+                        <a:rPr sz="1200">
+                          <a:solidFill>
+                            <a:srgbClr val="333333"/>
+                          </a:solidFill>
+                          <a:latin typeface="Calibri"/>
+                        </a:rPr>
+                        <a:t>Application Integration connections</a:t>
+                      </a:r>
+                    </a:p>
+                  </a:txBody>
+                  <a:tcPr>
+                    <a:solidFill>
+                      <a:srgbClr val="FFFFFF"/>
+                    </a:solidFill>
+                  </a:tcPr>
+                </a:tc>
+              </a:tr>
+              <a:tr h="300445">
+                <a:tc>
+                  <a:txBody>
+                    <a:bodyPr/>
+                    <a:lstStyle/>
+                    <a:p>
+                      <a:pPr algn="l"/>
+                      <a:r>
+                        <a:rPr sz="1200">
+                          <a:solidFill>
+                            <a:srgbClr val="333333"/>
+                          </a:solidFill>
+                          <a:latin typeface="Calibri"/>
+                        </a:rPr>
+                        <a:t>AI_SERVICE_CONNECTOR</a:t>
+                      </a:r>
+                    </a:p>
+                  </a:txBody>
+                  <a:tcPr>
+                    <a:solidFill>
+                      <a:srgbClr val="F2F2F2"/>
+                    </a:solidFill>
+                  </a:tcPr>
+                </a:tc>
+                <a:tc>
+                  <a:txBody>
+                    <a:bodyPr/>
+                    <a:lstStyle/>
+                    <a:p>
+                      <a:pPr algn="ctr"/>
+                      <a:r>
+                        <a:rPr b="1" sz="1200">
+                          <a:solidFill>
+                            <a:srgbClr val="009944"/>
+                          </a:solidFill>
+                          <a:latin typeface="Calibri"/>
+                        </a:rPr>
+                        <a:t>Yes</a:t>
+                      </a:r>
+                    </a:p>
+                  </a:txBody>
+                  <a:tcPr>
+                    <a:solidFill>
+                      <a:srgbClr val="F2F2F2"/>
+                    </a:solidFill>
+                  </a:tcPr>
+                </a:tc>
+                <a:tc>
+                  <a:txBody>
+                    <a:bodyPr/>
+                    <a:lstStyle/>
+                    <a:p>
+                      <a:pPr algn="ctr"/>
+                      <a:r>
+                        <a:rPr sz="1200">
+                          <a:solidFill>
+                            <a:srgbClr val="333333"/>
+                          </a:solidFill>
+                          <a:latin typeface="Calibri"/>
+                        </a:rPr>
+                        <a:t>Application Integration service connectors</a:t>
+                      </a:r>
+                    </a:p>
+                  </a:txBody>
+                  <a:tcPr>
+                    <a:solidFill>
+                      <a:srgbClr val="F2F2F2"/>
+                    </a:solidFill>
+                  </a:tcPr>
+                </a:tc>
+              </a:tr>
+              <a:tr h="300450">
+                <a:tc>
+                  <a:txBody>
+                    <a:bodyPr/>
+                    <a:lstStyle/>
+                    <a:p>
+                      <a:pPr algn="l"/>
+                      <a:r>
+                        <a:rPr sz="1200">
+                          <a:solidFill>
+                            <a:srgbClr val="333333"/>
+                          </a:solidFill>
+                          <a:latin typeface="Calibri"/>
+                        </a:rPr>
+                        <a:t>DTEMPLATE</a:t>
+                      </a:r>
+                    </a:p>
+                  </a:txBody>
+                  <a:tcPr>
+                    <a:solidFill>
+                      <a:srgbClr val="FFFFFF"/>
+                    </a:solidFill>
+                  </a:tcPr>
+                </a:tc>
+                <a:tc>
+                  <a:txBody>
+                    <a:bodyPr/>
+                    <a:lstStyle/>
+                    <a:p>
+                      <a:pPr algn="ctr"/>
+                      <a:r>
+                        <a:rPr sz="1200">
+                          <a:solidFill>
+                            <a:srgbClr val="CC0000"/>
+                          </a:solidFill>
+                          <a:latin typeface="Calibri"/>
+                        </a:rPr>
+                        <a:t>No</a:t>
+                      </a:r>
+                    </a:p>
+                  </a:txBody>
+                  <a:tcPr>
+                    <a:solidFill>
+                      <a:srgbClr val="FFFFFF"/>
+                    </a:solidFill>
+                  </a:tcPr>
+                </a:tc>
+                <a:tc>
+                  <a:txBody>
+                    <a:bodyPr/>
+                    <a:lstStyle/>
+                    <a:p>
+                      <a:pPr algn="ctr"/>
+                      <a:r>
+                        <a:rPr sz="1200">
+                          <a:solidFill>
+                            <a:srgbClr val="333333"/>
+                          </a:solidFill>
+                          <a:latin typeface="Calibri"/>
+                        </a:rPr>
+                        <a:t>Mappings – deployed via import, not publish</a:t>
+                      </a:r>
+                    </a:p>
+                  </a:txBody>
+                  <a:tcPr>
+                    <a:solidFill>
+                      <a:srgbClr val="FFFFFF"/>
+                    </a:solidFill>
+                  </a:tcPr>
+                </a:tc>
+              </a:tr>
+            </a:tbl>
+          </a:graphicData>
+        </a:graphic>
+      </p:graphicFrame>
     </p:spTree>
   </p:cSld>
   <p:clrMapOvr>
@@ -5230,7 +5436,7 @@
                 </a:solidFill>
                 <a:latin typeface="Calibri"/>
               </a:rPr>
-              <a:t>Better Error Reporting</a:t>
+              <a:t>Table Themes &amp; Output Styles</a:t>
             </a:r>
           </a:p>
         </p:txBody>
@@ -5265,7 +5471,7 @@
                 </a:solidFill>
                 <a:latin typeface="Calibri"/>
               </a:rPr>
-              <a:t>Structured API errors with HTTP context – all on stderr</a:t>
+              <a:t>Human-readable and automation-friendly in the same tool</a:t>
             </a:r>
           </a:p>
         </p:txBody>
@@ -5357,7 +5563,7 @@
         <p:spPr>
           <a:xfrm>
             <a:off x="457200" y="1097280"/>
-            <a:ext cx="5303520" cy="365760"/>
+            <a:ext cx="11247120" cy="365760"/>
           </a:xfrm>
           <a:prstGeom prst="rect">
             <a:avLst/>
@@ -5372,27 +5578,748 @@
           <a:p>
             <a:pPr algn="l"/>
             <a:r>
+              <a:rPr sz="1500" b="1" i="0">
+                <a:solidFill>
+                  <a:srgbClr val="003366"/>
+                </a:solidFill>
+                <a:latin typeface="Calibri"/>
+              </a:rPr>
+              <a:t>Six built-in table themes – global or per-command</a:t>
+            </a:r>
+          </a:p>
+        </p:txBody>
+      </p:sp>
+      <p:graphicFrame>
+        <p:nvGraphicFramePr>
+          <p:cNvPr id="8" name="Table 7"/>
+          <p:cNvGraphicFramePr>
+            <a:graphicFrameLocks noGrp="1"/>
+          </p:cNvGraphicFramePr>
+          <p:nvPr/>
+        </p:nvGraphicFramePr>
+        <p:xfrm>
+          <a:off x="457200" y="1554480"/>
+          <a:ext cx="11247120" cy="2560320"/>
+        </p:xfrm>
+        <a:graphic>
+          <a:graphicData uri="http://schemas.openxmlformats.org/drawingml/2006/table">
+            <a:tbl>
+              <a:tblPr firstRow="1" bandRow="1">
+                <a:tableStyleId>{5C22544A-7EE6-4342-B048-85BDC9FD1C3A}</a:tableStyleId>
+              </a:tblPr>
+              <a:tblGrid>
+                <a:gridCol w="2811780"/>
+                <a:gridCol w="2811780"/>
+                <a:gridCol w="2811780"/>
+                <a:gridCol w="2811780"/>
+              </a:tblGrid>
+              <a:tr h="365760">
+                <a:tc>
+                  <a:txBody>
+                    <a:bodyPr/>
+                    <a:lstStyle/>
+                    <a:p>
+                      <a:pPr algn="ctr"/>
+                      <a:r>
+                        <a:rPr b="1" sz="1300">
+                          <a:solidFill>
+                            <a:srgbClr val="FFFFFF"/>
+                          </a:solidFill>
+                          <a:latin typeface="Calibri"/>
+                        </a:rPr>
+                        <a:t>Theme</a:t>
+                      </a:r>
+                    </a:p>
+                  </a:txBody>
+                  <a:tcPr>
+                    <a:solidFill>
+                      <a:srgbClr val="0066CC"/>
+                    </a:solidFill>
+                  </a:tcPr>
+                </a:tc>
+                <a:tc>
+                  <a:txBody>
+                    <a:bodyPr/>
+                    <a:lstStyle/>
+                    <a:p>
+                      <a:pPr algn="ctr"/>
+                      <a:r>
+                        <a:rPr b="1" sz="1300">
+                          <a:solidFill>
+                            <a:srgbClr val="FFFFFF"/>
+                          </a:solidFill>
+                          <a:latin typeface="Calibri"/>
+                        </a:rPr>
+                        <a:t>Description</a:t>
+                      </a:r>
+                    </a:p>
+                  </a:txBody>
+                  <a:tcPr>
+                    <a:solidFill>
+                      <a:srgbClr val="0066CC"/>
+                    </a:solidFill>
+                  </a:tcPr>
+                </a:tc>
+                <a:tc>
+                  <a:txBody>
+                    <a:bodyPr/>
+                    <a:lstStyle/>
+                    <a:p>
+                      <a:pPr algn="ctr"/>
+                      <a:r>
+                        <a:rPr b="1" sz="1300">
+                          <a:solidFill>
+                            <a:srgbClr val="FFFFFF"/>
+                          </a:solidFill>
+                          <a:latin typeface="Calibri"/>
+                        </a:rPr>
+                        <a:t>Color</a:t>
+                      </a:r>
+                    </a:p>
+                  </a:txBody>
+                  <a:tcPr>
+                    <a:solidFill>
+                      <a:srgbClr val="0066CC"/>
+                    </a:solidFill>
+                  </a:tcPr>
+                </a:tc>
+                <a:tc>
+                  <a:txBody>
+                    <a:bodyPr/>
+                    <a:lstStyle/>
+                    <a:p>
+                      <a:pPr algn="ctr"/>
+                      <a:r>
+                        <a:rPr b="1" sz="1300">
+                          <a:solidFill>
+                            <a:srgbClr val="FFFFFF"/>
+                          </a:solidFill>
+                          <a:latin typeface="Calibri"/>
+                        </a:rPr>
+                        <a:t>Always Renders</a:t>
+                      </a:r>
+                    </a:p>
+                  </a:txBody>
+                  <a:tcPr>
+                    <a:solidFill>
+                      <a:srgbClr val="0066CC"/>
+                    </a:solidFill>
+                  </a:tcPr>
+                </a:tc>
+              </a:tr>
+              <a:tr h="365760">
+                <a:tc>
+                  <a:txBody>
+                    <a:bodyPr/>
+                    <a:lstStyle/>
+                    <a:p>
+                      <a:pPr algn="l"/>
+                      <a:r>
+                        <a:rPr sz="1200">
+                          <a:solidFill>
+                            <a:srgbClr val="333333"/>
+                          </a:solidFill>
+                          <a:latin typeface="Calibri"/>
+                        </a:rPr>
+                        <a:t>default</a:t>
+                      </a:r>
+                    </a:p>
+                  </a:txBody>
+                  <a:tcPr>
+                    <a:solidFill>
+                      <a:srgbClr val="F2F2F2"/>
+                    </a:solidFill>
+                  </a:tcPr>
+                </a:tc>
+                <a:tc>
+                  <a:txBody>
+                    <a:bodyPr/>
+                    <a:lstStyle/>
+                    <a:p>
+                      <a:pPr algn="ctr"/>
+                      <a:r>
+                        <a:rPr sz="1200">
+                          <a:solidFill>
+                            <a:srgbClr val="333333"/>
+                          </a:solidFill>
+                          <a:latin typeface="Calibri"/>
+                        </a:rPr>
+                        <a:t>Unicode rounded borders, cyan bold headers</a:t>
+                      </a:r>
+                    </a:p>
+                  </a:txBody>
+                  <a:tcPr>
+                    <a:solidFill>
+                      <a:srgbClr val="F2F2F2"/>
+                    </a:solidFill>
+                  </a:tcPr>
+                </a:tc>
+                <a:tc>
+                  <a:txBody>
+                    <a:bodyPr/>
+                    <a:lstStyle/>
+                    <a:p>
+                      <a:pPr algn="ctr"/>
+                      <a:r>
+                        <a:rPr sz="1200">
+                          <a:solidFill>
+                            <a:srgbClr val="333333"/>
+                          </a:solidFill>
+                          <a:latin typeface="Calibri"/>
+                        </a:rPr>
+                        <a:t>Yes (TTY)</a:t>
+                      </a:r>
+                    </a:p>
+                  </a:txBody>
+                  <a:tcPr>
+                    <a:solidFill>
+                      <a:srgbClr val="F2F2F2"/>
+                    </a:solidFill>
+                  </a:tcPr>
+                </a:tc>
+                <a:tc>
+                  <a:txBody>
+                    <a:bodyPr/>
+                    <a:lstStyle/>
+                    <a:p>
+                      <a:pPr algn="ctr"/>
+                      <a:r>
+                        <a:rPr sz="1200">
+                          <a:solidFill>
+                            <a:srgbClr val="CC0000"/>
+                          </a:solidFill>
+                          <a:latin typeface="Calibri"/>
+                        </a:rPr>
+                        <a:t>No</a:t>
+                      </a:r>
+                    </a:p>
+                  </a:txBody>
+                  <a:tcPr>
+                    <a:solidFill>
+                      <a:srgbClr val="F2F2F2"/>
+                    </a:solidFill>
+                  </a:tcPr>
+                </a:tc>
+              </a:tr>
+              <a:tr h="365760">
+                <a:tc>
+                  <a:txBody>
+                    <a:bodyPr/>
+                    <a:lstStyle/>
+                    <a:p>
+                      <a:pPr algn="l"/>
+                      <a:r>
+                        <a:rPr sz="1200">
+                          <a:solidFill>
+                            <a:srgbClr val="333333"/>
+                          </a:solidFill>
+                          <a:latin typeface="Calibri"/>
+                        </a:rPr>
+                        <a:t>minimal</a:t>
+                      </a:r>
+                    </a:p>
+                  </a:txBody>
+                  <a:tcPr>
+                    <a:solidFill>
+                      <a:srgbClr val="FFFFFF"/>
+                    </a:solidFill>
+                  </a:tcPr>
+                </a:tc>
+                <a:tc>
+                  <a:txBody>
+                    <a:bodyPr/>
+                    <a:lstStyle/>
+                    <a:p>
+                      <a:pPr algn="ctr"/>
+                      <a:r>
+                        <a:rPr sz="1200">
+                          <a:solidFill>
+                            <a:srgbClr val="333333"/>
+                          </a:solidFill>
+                          <a:latin typeface="Calibri"/>
+                        </a:rPr>
+                        <a:t>No borders, colored bold headers, unicode underline</a:t>
+                      </a:r>
+                    </a:p>
+                  </a:txBody>
+                  <a:tcPr>
+                    <a:solidFill>
+                      <a:srgbClr val="FFFFFF"/>
+                    </a:solidFill>
+                  </a:tcPr>
+                </a:tc>
+                <a:tc>
+                  <a:txBody>
+                    <a:bodyPr/>
+                    <a:lstStyle/>
+                    <a:p>
+                      <a:pPr algn="ctr"/>
+                      <a:r>
+                        <a:rPr sz="1200">
+                          <a:solidFill>
+                            <a:srgbClr val="333333"/>
+                          </a:solidFill>
+                          <a:latin typeface="Calibri"/>
+                        </a:rPr>
+                        <a:t>Yes (TTY)</a:t>
+                      </a:r>
+                    </a:p>
+                  </a:txBody>
+                  <a:tcPr>
+                    <a:solidFill>
+                      <a:srgbClr val="FFFFFF"/>
+                    </a:solidFill>
+                  </a:tcPr>
+                </a:tc>
+                <a:tc>
+                  <a:txBody>
+                    <a:bodyPr/>
+                    <a:lstStyle/>
+                    <a:p>
+                      <a:pPr algn="ctr"/>
+                      <a:r>
+                        <a:rPr sz="1200">
+                          <a:solidFill>
+                            <a:srgbClr val="CC0000"/>
+                          </a:solidFill>
+                          <a:latin typeface="Calibri"/>
+                        </a:rPr>
+                        <a:t>No</a:t>
+                      </a:r>
+                    </a:p>
+                  </a:txBody>
+                  <a:tcPr>
+                    <a:solidFill>
+                      <a:srgbClr val="FFFFFF"/>
+                    </a:solidFill>
+                  </a:tcPr>
+                </a:tc>
+              </a:tr>
+              <a:tr h="365760">
+                <a:tc>
+                  <a:txBody>
+                    <a:bodyPr/>
+                    <a:lstStyle/>
+                    <a:p>
+                      <a:pPr algn="l"/>
+                      <a:r>
+                        <a:rPr sz="1200">
+                          <a:solidFill>
+                            <a:srgbClr val="333333"/>
+                          </a:solidFill>
+                          <a:latin typeface="Calibri"/>
+                        </a:rPr>
+                        <a:t>compact</a:t>
+                      </a:r>
+                    </a:p>
+                  </a:txBody>
+                  <a:tcPr>
+                    <a:solidFill>
+                      <a:srgbClr val="F2F2F2"/>
+                    </a:solidFill>
+                  </a:tcPr>
+                </a:tc>
+                <a:tc>
+                  <a:txBody>
+                    <a:bodyPr/>
+                    <a:lstStyle/>
+                    <a:p>
+                      <a:pPr algn="ctr"/>
+                      <a:r>
+                        <a:rPr sz="1200">
+                          <a:solidFill>
+                            <a:srgbClr val="333333"/>
+                          </a:solidFill>
+                          <a:latin typeface="Calibri"/>
+                        </a:rPr>
+                        <a:t>No borders, gray bold headers, 1-space column gap</a:t>
+                      </a:r>
+                    </a:p>
+                  </a:txBody>
+                  <a:tcPr>
+                    <a:solidFill>
+                      <a:srgbClr val="F2F2F2"/>
+                    </a:solidFill>
+                  </a:tcPr>
+                </a:tc>
+                <a:tc>
+                  <a:txBody>
+                    <a:bodyPr/>
+                    <a:lstStyle/>
+                    <a:p>
+                      <a:pPr algn="ctr"/>
+                      <a:r>
+                        <a:rPr sz="1200">
+                          <a:solidFill>
+                            <a:srgbClr val="333333"/>
+                          </a:solidFill>
+                          <a:latin typeface="Calibri"/>
+                        </a:rPr>
+                        <a:t>Yes (TTY)</a:t>
+                      </a:r>
+                    </a:p>
+                  </a:txBody>
+                  <a:tcPr>
+                    <a:solidFill>
+                      <a:srgbClr val="F2F2F2"/>
+                    </a:solidFill>
+                  </a:tcPr>
+                </a:tc>
+                <a:tc>
+                  <a:txBody>
+                    <a:bodyPr/>
+                    <a:lstStyle/>
+                    <a:p>
+                      <a:pPr algn="ctr"/>
+                      <a:r>
+                        <a:rPr sz="1200">
+                          <a:solidFill>
+                            <a:srgbClr val="CC0000"/>
+                          </a:solidFill>
+                          <a:latin typeface="Calibri"/>
+                        </a:rPr>
+                        <a:t>No</a:t>
+                      </a:r>
+                    </a:p>
+                  </a:txBody>
+                  <a:tcPr>
+                    <a:solidFill>
+                      <a:srgbClr val="F2F2F2"/>
+                    </a:solidFill>
+                  </a:tcPr>
+                </a:tc>
+              </a:tr>
+              <a:tr h="365760">
+                <a:tc>
+                  <a:txBody>
+                    <a:bodyPr/>
+                    <a:lstStyle/>
+                    <a:p>
+                      <a:pPr algn="l"/>
+                      <a:r>
+                        <a:rPr sz="1200">
+                          <a:solidFill>
+                            <a:srgbClr val="333333"/>
+                          </a:solidFill>
+                          <a:latin typeface="Calibri"/>
+                        </a:rPr>
+                        <a:t>plain</a:t>
+                      </a:r>
+                    </a:p>
+                  </a:txBody>
+                  <a:tcPr>
+                    <a:solidFill>
+                      <a:srgbClr val="FFFFFF"/>
+                    </a:solidFill>
+                  </a:tcPr>
+                </a:tc>
+                <a:tc>
+                  <a:txBody>
+                    <a:bodyPr/>
+                    <a:lstStyle/>
+                    <a:p>
+                      <a:pPr algn="ctr"/>
+                      <a:r>
+                        <a:rPr sz="1200">
+                          <a:solidFill>
+                            <a:srgbClr val="333333"/>
+                          </a:solidFill>
+                          <a:latin typeface="Calibri"/>
+                        </a:rPr>
+                        <a:t>ASCII borders, no color – auto-used for non-TTY</a:t>
+                      </a:r>
+                    </a:p>
+                  </a:txBody>
+                  <a:tcPr>
+                    <a:solidFill>
+                      <a:srgbClr val="FFFFFF"/>
+                    </a:solidFill>
+                  </a:tcPr>
+                </a:tc>
+                <a:tc>
+                  <a:txBody>
+                    <a:bodyPr/>
+                    <a:lstStyle/>
+                    <a:p>
+                      <a:pPr algn="ctr"/>
+                      <a:r>
+                        <a:rPr sz="1200">
+                          <a:solidFill>
+                            <a:srgbClr val="CC0000"/>
+                          </a:solidFill>
+                          <a:latin typeface="Calibri"/>
+                        </a:rPr>
+                        <a:t>No</a:t>
+                      </a:r>
+                    </a:p>
+                  </a:txBody>
+                  <a:tcPr>
+                    <a:solidFill>
+                      <a:srgbClr val="FFFFFF"/>
+                    </a:solidFill>
+                  </a:tcPr>
+                </a:tc>
+                <a:tc>
+                  <a:txBody>
+                    <a:bodyPr/>
+                    <a:lstStyle/>
+                    <a:p>
+                      <a:pPr algn="ctr"/>
+                      <a:r>
+                        <a:rPr sz="1200">
+                          <a:solidFill>
+                            <a:srgbClr val="CC0000"/>
+                          </a:solidFill>
+                          <a:latin typeface="Calibri"/>
+                        </a:rPr>
+                        <a:t>No</a:t>
+                      </a:r>
+                    </a:p>
+                  </a:txBody>
+                  <a:tcPr>
+                    <a:solidFill>
+                      <a:srgbClr val="FFFFFF"/>
+                    </a:solidFill>
+                  </a:tcPr>
+                </a:tc>
+              </a:tr>
+              <a:tr h="365760">
+                <a:tc>
+                  <a:txBody>
+                    <a:bodyPr/>
+                    <a:lstStyle/>
+                    <a:p>
+                      <a:pPr algn="l"/>
+                      <a:r>
+                        <a:rPr sz="1200">
+                          <a:solidFill>
+                            <a:srgbClr val="333333"/>
+                          </a:solidFill>
+                          <a:latin typeface="Calibri"/>
+                        </a:rPr>
+                        <a:t>markdown</a:t>
+                      </a:r>
+                    </a:p>
+                  </a:txBody>
+                  <a:tcPr>
+                    <a:solidFill>
+                      <a:srgbClr val="F2F2F2"/>
+                    </a:solidFill>
+                  </a:tcPr>
+                </a:tc>
+                <a:tc>
+                  <a:txBody>
+                    <a:bodyPr/>
+                    <a:lstStyle/>
+                    <a:p>
+                      <a:pPr algn="ctr"/>
+                      <a:r>
+                        <a:rPr sz="1200">
+                          <a:solidFill>
+                            <a:srgbClr val="333333"/>
+                          </a:solidFill>
+                          <a:latin typeface="Calibri"/>
+                        </a:rPr>
+                        <a:t>GitHub-flavored markdown table</a:t>
+                      </a:r>
+                    </a:p>
+                  </a:txBody>
+                  <a:tcPr>
+                    <a:solidFill>
+                      <a:srgbClr val="F2F2F2"/>
+                    </a:solidFill>
+                  </a:tcPr>
+                </a:tc>
+                <a:tc>
+                  <a:txBody>
+                    <a:bodyPr/>
+                    <a:lstStyle/>
+                    <a:p>
+                      <a:pPr algn="ctr"/>
+                      <a:r>
+                        <a:rPr sz="1200">
+                          <a:solidFill>
+                            <a:srgbClr val="CC0000"/>
+                          </a:solidFill>
+                          <a:latin typeface="Calibri"/>
+                        </a:rPr>
+                        <a:t>No</a:t>
+                      </a:r>
+                    </a:p>
+                  </a:txBody>
+                  <a:tcPr>
+                    <a:solidFill>
+                      <a:srgbClr val="F2F2F2"/>
+                    </a:solidFill>
+                  </a:tcPr>
+                </a:tc>
+                <a:tc>
+                  <a:txBody>
+                    <a:bodyPr/>
+                    <a:lstStyle/>
+                    <a:p>
+                      <a:pPr algn="ctr"/>
+                      <a:r>
+                        <a:rPr b="1" sz="1200">
+                          <a:solidFill>
+                            <a:srgbClr val="009944"/>
+                          </a:solidFill>
+                          <a:latin typeface="Calibri"/>
+                        </a:rPr>
+                        <a:t>Yes</a:t>
+                      </a:r>
+                    </a:p>
+                  </a:txBody>
+                  <a:tcPr>
+                    <a:solidFill>
+                      <a:srgbClr val="F2F2F2"/>
+                    </a:solidFill>
+                  </a:tcPr>
+                </a:tc>
+              </a:tr>
+              <a:tr h="365760">
+                <a:tc>
+                  <a:txBody>
+                    <a:bodyPr/>
+                    <a:lstStyle/>
+                    <a:p>
+                      <a:pPr algn="l"/>
+                      <a:r>
+                        <a:rPr sz="1200">
+                          <a:solidFill>
+                            <a:srgbClr val="333333"/>
+                          </a:solidFill>
+                          <a:latin typeface="Calibri"/>
+                        </a:rPr>
+                        <a:t>gh</a:t>
+                      </a:r>
+                    </a:p>
+                  </a:txBody>
+                  <a:tcPr>
+                    <a:solidFill>
+                      <a:srgbClr val="FFFFFF"/>
+                    </a:solidFill>
+                  </a:tcPr>
+                </a:tc>
+                <a:tc>
+                  <a:txBody>
+                    <a:bodyPr/>
+                    <a:lstStyle/>
+                    <a:p>
+                      <a:pPr algn="ctr"/>
+                      <a:r>
+                        <a:rPr sz="1200">
+                          <a:solidFill>
+                            <a:srgbClr val="333333"/>
+                          </a:solidFill>
+                          <a:latin typeface="Calibri"/>
+                        </a:rPr>
+                        <a:t>GitHub CLI-style: no borders, plain headers</a:t>
+                      </a:r>
+                    </a:p>
+                  </a:txBody>
+                  <a:tcPr>
+                    <a:solidFill>
+                      <a:srgbClr val="FFFFFF"/>
+                    </a:solidFill>
+                  </a:tcPr>
+                </a:tc>
+                <a:tc>
+                  <a:txBody>
+                    <a:bodyPr/>
+                    <a:lstStyle/>
+                    <a:p>
+                      <a:pPr algn="ctr"/>
+                      <a:r>
+                        <a:rPr sz="1200">
+                          <a:solidFill>
+                            <a:srgbClr val="CC0000"/>
+                          </a:solidFill>
+                          <a:latin typeface="Calibri"/>
+                        </a:rPr>
+                        <a:t>No</a:t>
+                      </a:r>
+                    </a:p>
+                  </a:txBody>
+                  <a:tcPr>
+                    <a:solidFill>
+                      <a:srgbClr val="FFFFFF"/>
+                    </a:solidFill>
+                  </a:tcPr>
+                </a:tc>
+                <a:tc>
+                  <a:txBody>
+                    <a:bodyPr/>
+                    <a:lstStyle/>
+                    <a:p>
+                      <a:pPr algn="ctr"/>
+                      <a:r>
+                        <a:rPr b="1" sz="1200">
+                          <a:solidFill>
+                            <a:srgbClr val="009944"/>
+                          </a:solidFill>
+                          <a:latin typeface="Calibri"/>
+                        </a:rPr>
+                        <a:t>Yes</a:t>
+                      </a:r>
+                    </a:p>
+                  </a:txBody>
+                  <a:tcPr>
+                    <a:solidFill>
+                      <a:srgbClr val="FFFFFF"/>
+                    </a:solidFill>
+                  </a:tcPr>
+                </a:tc>
+              </a:tr>
+            </a:tbl>
+          </a:graphicData>
+        </a:graphic>
+      </p:graphicFrame>
+      <p:sp>
+        <p:nvSpPr>
+          <p:cNvPr id="9" name="TextBox 8"/>
+          <p:cNvSpPr txBox="1"/>
+          <p:nvPr/>
+        </p:nvSpPr>
+        <p:spPr>
+          <a:xfrm>
+            <a:off x="457200" y="4251960"/>
+            <a:ext cx="11247120" cy="320040"/>
+          </a:xfrm>
+          <a:prstGeom prst="rect">
+            <a:avLst/>
+          </a:prstGeom>
+          <a:noFill/>
+        </p:spPr>
+        <p:txBody>
+          <a:bodyPr wrap="square">
+            <a:spAutoFit/>
+          </a:bodyPr>
+          <a:lstStyle/>
+          <a:p>
+            <a:pPr algn="l"/>
+            <a:r>
               <a:rPr sz="1400" b="1" i="0">
                 <a:solidFill>
-                  <a:srgbClr val="CC0000"/>
-                </a:solidFill>
-                <a:latin typeface="Calibri"/>
-              </a:rPr>
-              <a:t>Official CLI – vague error messages</a:t>
-            </a:r>
-          </a:p>
-        </p:txBody>
-      </p:sp>
-      <p:sp>
-        <p:nvSpPr>
-          <p:cNvPr id="8" name="Rectangle 7"/>
+                  <a:srgbClr val="003366"/>
+                </a:solidFill>
+                <a:latin typeface="Calibri"/>
+              </a:rPr>
+              <a:t>Configure theme globally or per invocation</a:t>
+            </a:r>
+          </a:p>
+        </p:txBody>
+      </p:sp>
+      <p:sp>
+        <p:nvSpPr>
+          <p:cNvPr id="10" name="Rectangle 9"/>
           <p:cNvSpPr/>
           <p:nvPr/>
         </p:nvSpPr>
         <p:spPr>
           <a:xfrm>
-            <a:off x="457200" y="1508760"/>
-            <a:ext cx="5303520" cy="1371600"/>
+            <a:off x="457200" y="4617720"/>
+            <a:ext cx="11247120" cy="1828800"/>
           </a:xfrm>
           <a:prstGeom prst="rect">
             <a:avLst/>
@@ -5428,14 +6355,14 @@
       </p:sp>
       <p:sp>
         <p:nvSpPr>
-          <p:cNvPr id="9" name="TextBox 8"/>
+          <p:cNvPr id="11" name="TextBox 10"/>
           <p:cNvSpPr txBox="1"/>
           <p:nvPr/>
         </p:nvSpPr>
         <p:spPr>
           <a:xfrm>
-            <a:off x="594360" y="1600200"/>
-            <a:ext cx="5029200" cy="1188720"/>
+            <a:off x="594360" y="4709160"/>
+            <a:ext cx="10972800" cy="1645920"/>
           </a:xfrm>
           <a:prstGeom prst="rect">
             <a:avLst/>
@@ -5456,210 +6383,16 @@
                 </a:solidFill>
                 <a:latin typeface="Courier New"/>
               </a:rPr>
-              <a:t>$ iics export -u user -p pass -r us \
-  -a "Project/Missing.Process"
-Error occurred.
-exit code: 0</a:t>
-            </a:r>
-          </a:p>
-        </p:txBody>
-      </p:sp>
-      <p:sp>
-        <p:nvSpPr>
-          <p:cNvPr id="10" name="TextBox 9"/>
-          <p:cNvSpPr txBox="1"/>
-          <p:nvPr/>
-        </p:nvSpPr>
-        <p:spPr>
-          <a:xfrm>
-            <a:off x="6400800" y="1097280"/>
-            <a:ext cx="5303520" cy="365760"/>
-          </a:xfrm>
-          <a:prstGeom prst="rect">
-            <a:avLst/>
-          </a:prstGeom>
-          <a:noFill/>
-        </p:spPr>
-        <p:txBody>
-          <a:bodyPr wrap="square">
-            <a:spAutoFit/>
-          </a:bodyPr>
-          <a:lstStyle/>
-          <a:p>
-            <a:pPr algn="l"/>
-            <a:r>
-              <a:rPr sz="1400" b="1" i="0">
-                <a:solidFill>
-                  <a:srgbClr val="009944"/>
-                </a:solidFill>
-                <a:latin typeface="Calibri"/>
-              </a:rPr>
-              <a:t>iics-cli – structured errors to stderr</a:t>
-            </a:r>
-          </a:p>
-        </p:txBody>
-      </p:sp>
-      <p:sp>
-        <p:nvSpPr>
-          <p:cNvPr id="11" name="Rectangle 10"/>
-          <p:cNvSpPr/>
-          <p:nvPr/>
-        </p:nvSpPr>
-        <p:spPr>
-          <a:xfrm>
-            <a:off x="6400800" y="1508760"/>
-            <a:ext cx="5303520" cy="2286000"/>
-          </a:xfrm>
-          <a:prstGeom prst="rect">
-            <a:avLst/>
-          </a:prstGeom>
-          <a:solidFill>
-            <a:srgbClr val="1E1E2E"/>
-          </a:solidFill>
-          <a:ln>
-            <a:noFill/>
-          </a:ln>
-        </p:spPr>
-        <p:style>
-          <a:lnRef idx="1">
-            <a:schemeClr val="accent1"/>
-          </a:lnRef>
-          <a:fillRef idx="3">
-            <a:schemeClr val="accent1"/>
-          </a:fillRef>
-          <a:effectRef idx="2">
-            <a:schemeClr val="accent1"/>
-          </a:effectRef>
-          <a:fontRef idx="minor">
-            <a:schemeClr val="lt1"/>
-          </a:fontRef>
-        </p:style>
-        <p:txBody>
-          <a:bodyPr rtlCol="0" anchor="ctr"/>
-          <a:lstStyle/>
-          <a:p>
-            <a:pPr algn="ctr"/>
-          </a:p>
-        </p:txBody>
-      </p:sp>
-      <p:sp>
-        <p:nvSpPr>
-          <p:cNvPr id="12" name="TextBox 11"/>
-          <p:cNvSpPr txBox="1"/>
-          <p:nvPr/>
-        </p:nvSpPr>
-        <p:spPr>
-          <a:xfrm>
-            <a:off x="6537960" y="1600200"/>
-            <a:ext cx="5029200" cy="2103120"/>
-          </a:xfrm>
-          <a:prstGeom prst="rect">
-            <a:avLst/>
-          </a:prstGeom>
-          <a:noFill/>
-        </p:spPr>
-        <p:txBody>
-          <a:bodyPr wrap="square">
-            <a:spAutoFit/>
-          </a:bodyPr>
-          <a:lstStyle/>
-          <a:p>
-            <a:pPr algn="l"/>
-            <a:r>
-              <a:rPr sz="1100" b="0" i="0">
-                <a:solidFill>
-                  <a:srgbClr val="A6E3A1"/>
-                </a:solidFill>
-                <a:latin typeface="Courier New"/>
-              </a:rPr>
-              <a:t>$ iics export create --name bad --project X
-Error: API error 400: project 'X' not found
-  HTTP 400 Bad Request
-  {
-    "error": {
-      "code": "ICS-012345",
-      "message": "project 'X' not found"
-    }
-  }
-exit code: 1</a:t>
-            </a:r>
-          </a:p>
-        </p:txBody>
-      </p:sp>
-      <p:sp>
-        <p:nvSpPr>
-          <p:cNvPr id="13" name="TextBox 12"/>
-          <p:cNvSpPr txBox="1"/>
-          <p:nvPr/>
-        </p:nvSpPr>
-        <p:spPr>
-          <a:xfrm>
-            <a:off x="457200" y="4023360"/>
-            <a:ext cx="11247120" cy="2286000"/>
-          </a:xfrm>
-          <a:prstGeom prst="rect">
-            <a:avLst/>
-          </a:prstGeom>
-          <a:noFill/>
-        </p:spPr>
-        <p:txBody>
-          <a:bodyPr wrap="square">
-            <a:spAutoFit/>
-          </a:bodyPr>
-          <a:lstStyle/>
-          <a:p>
-            <a:r>
-              <a:rPr sz="1500" b="0">
-                <a:solidFill>
-                  <a:srgbClr val="333333"/>
-                </a:solidFill>
-                <a:latin typeface="Calibri"/>
-              </a:rPr>
-              <a:t>•  Error summary always on stderr – stdout stays clean for piping</a:t>
-            </a:r>
-          </a:p>
-          <a:p>
-            <a:r>
-              <a:rPr sz="1500" b="0">
-                <a:solidFill>
-                  <a:srgbClr val="333333"/>
-                </a:solidFill>
-                <a:latin typeface="Calibri"/>
-              </a:rPr>
-              <a:t>•  --debug flag prints full request body for deep troubleshooting</a:t>
-            </a:r>
-          </a:p>
-          <a:p>
-            <a:r>
-              <a:rPr sz="1500" b="0">
-                <a:solidFill>
-                  <a:srgbClr val="333333"/>
-                </a:solidFill>
-                <a:latin typeface="Calibri"/>
-              </a:rPr>
-              <a:t>•  --verbose flag enables extra HTTP detail</a:t>
-            </a:r>
-          </a:p>
-          <a:p>
-            <a:r>
-              <a:rPr sz="1500" b="0">
-                <a:solidFill>
-                  <a:srgbClr val="333333"/>
-                </a:solidFill>
-                <a:latin typeface="Calibri"/>
-              </a:rPr>
-              <a:t>•  API error code, HTTP status, and response body all included</a:t>
-            </a:r>
-          </a:p>
-          <a:p>
-            <a:r>
-              <a:rPr sz="1500" b="0">
-                <a:solidFill>
-                  <a:srgbClr val="333333"/>
-                </a:solidFill>
-                <a:latin typeface="Calibri"/>
-              </a:rPr>
-              <a:t>•  Usage errors (exit 2) print a hint without cluttering stdout</a:t>
+              <a:t># Set a default theme in config
+# ~/.iics/config.yaml
+style:
+  theme: minimal
+  noColor: false
+  headerColor: "6"  # lipgloss: 6=cyan, 244=gray, #FF0000=hex
+# Override per command
+iics user list --theme markdown   # paste into GitHub / Confluence
+iics connection list --theme gh   # GitHub CLI style
+IICS_THEME=compact iics role list # env var override</a:t>
             </a:r>
           </a:p>
         </p:txBody>
@@ -5755,14 +6488,49 @@
                 </a:solidFill>
                 <a:latin typeface="Calibri"/>
               </a:rPr>
-              <a:t>Feature Comparison Summary</a:t>
-            </a:r>
-          </a:p>
-        </p:txBody>
-      </p:sp>
-      <p:sp>
-        <p:nvSpPr>
-          <p:cNvPr id="4" name="Rectangle 3"/>
+              <a:t>Comprehensive Region Support</a:t>
+            </a:r>
+          </a:p>
+        </p:txBody>
+      </p:sp>
+      <p:sp>
+        <p:nvSpPr>
+          <p:cNvPr id="4" name="TextBox 3"/>
+          <p:cNvSpPr txBox="1"/>
+          <p:nvPr/>
+        </p:nvSpPr>
+        <p:spPr>
+          <a:xfrm>
+            <a:off x="274320" y="685800"/>
+            <a:ext cx="11430000" cy="365760"/>
+          </a:xfrm>
+          <a:prstGeom prst="rect">
+            <a:avLst/>
+          </a:prstGeom>
+          <a:noFill/>
+        </p:spPr>
+        <p:txBody>
+          <a:bodyPr wrap="square">
+            <a:spAutoFit/>
+          </a:bodyPr>
+          <a:lstStyle/>
+          <a:p>
+            <a:pPr algn="l"/>
+            <a:r>
+              <a:rPr sz="1400" b="0" i="0">
+                <a:solidFill>
+                  <a:srgbClr val="BBCCFF"/>
+                </a:solidFill>
+                <a:latin typeface="Calibri"/>
+              </a:rPr>
+              <a:t>All IICS pod regions – not just us / eu / ap</a:t>
+            </a:r>
+          </a:p>
+        </p:txBody>
+      </p:sp>
+      <p:sp>
+        <p:nvSpPr>
+          <p:cNvPr id="5" name="Rectangle 4"/>
           <p:cNvSpPr/>
           <p:nvPr/>
         </p:nvSpPr>
@@ -5805,7 +6573,7 @@
       </p:sp>
       <p:sp>
         <p:nvSpPr>
-          <p:cNvPr id="5" name="TextBox 4"/>
+          <p:cNvPr id="6" name="TextBox 5"/>
           <p:cNvSpPr txBox="1"/>
           <p:nvPr/>
         </p:nvSpPr>
@@ -5838,17 +6606,143 @@
           </a:p>
         </p:txBody>
       </p:sp>
+      <p:sp>
+        <p:nvSpPr>
+          <p:cNvPr id="7" name="TextBox 6"/>
+          <p:cNvSpPr txBox="1"/>
+          <p:nvPr/>
+        </p:nvSpPr>
+        <p:spPr>
+          <a:xfrm>
+            <a:off x="457200" y="1097280"/>
+            <a:ext cx="3657600" cy="365760"/>
+          </a:xfrm>
+          <a:prstGeom prst="rect">
+            <a:avLst/>
+          </a:prstGeom>
+          <a:noFill/>
+        </p:spPr>
+        <p:txBody>
+          <a:bodyPr wrap="square">
+            <a:spAutoFit/>
+          </a:bodyPr>
+          <a:lstStyle/>
+          <a:p>
+            <a:pPr algn="l"/>
+            <a:r>
+              <a:rPr sz="1400" b="1" i="0">
+                <a:solidFill>
+                  <a:srgbClr val="CC0000"/>
+                </a:solidFill>
+                <a:latin typeface="Calibri"/>
+              </a:rPr>
+              <a:t>Official CLI – 3 hardcoded regions</a:t>
+            </a:r>
+          </a:p>
+        </p:txBody>
+      </p:sp>
+      <p:sp>
+        <p:nvSpPr>
+          <p:cNvPr id="8" name="TextBox 7"/>
+          <p:cNvSpPr txBox="1"/>
+          <p:nvPr/>
+        </p:nvSpPr>
+        <p:spPr>
+          <a:xfrm>
+            <a:off x="457200" y="1508760"/>
+            <a:ext cx="3657600" cy="1097280"/>
+          </a:xfrm>
+          <a:prstGeom prst="rect">
+            <a:avLst/>
+          </a:prstGeom>
+          <a:noFill/>
+        </p:spPr>
+        <p:txBody>
+          <a:bodyPr wrap="square">
+            <a:spAutoFit/>
+          </a:bodyPr>
+          <a:lstStyle/>
+          <a:p>
+            <a:r>
+              <a:rPr sz="1400" b="0">
+                <a:solidFill>
+                  <a:srgbClr val="CC0000"/>
+                </a:solidFill>
+                <a:latin typeface="Calibri"/>
+              </a:rPr>
+              <a:t>•  -r us</a:t>
+            </a:r>
+          </a:p>
+          <a:p>
+            <a:r>
+              <a:rPr sz="1400" b="0">
+                <a:solidFill>
+                  <a:srgbClr val="CC0000"/>
+                </a:solidFill>
+                <a:latin typeface="Calibri"/>
+              </a:rPr>
+              <a:t>•  -r eu</a:t>
+            </a:r>
+          </a:p>
+          <a:p>
+            <a:r>
+              <a:rPr sz="1400" b="0">
+                <a:solidFill>
+                  <a:srgbClr val="CC0000"/>
+                </a:solidFill>
+                <a:latin typeface="Calibri"/>
+              </a:rPr>
+              <a:t>•  -r ap</a:t>
+            </a:r>
+          </a:p>
+        </p:txBody>
+      </p:sp>
+      <p:sp>
+        <p:nvSpPr>
+          <p:cNvPr id="9" name="TextBox 8"/>
+          <p:cNvSpPr txBox="1"/>
+          <p:nvPr/>
+        </p:nvSpPr>
+        <p:spPr>
+          <a:xfrm>
+            <a:off x="4572000" y="1097280"/>
+            <a:ext cx="7132320" cy="365760"/>
+          </a:xfrm>
+          <a:prstGeom prst="rect">
+            <a:avLst/>
+          </a:prstGeom>
+          <a:noFill/>
+        </p:spPr>
+        <p:txBody>
+          <a:bodyPr wrap="square">
+            <a:spAutoFit/>
+          </a:bodyPr>
+          <a:lstStyle/>
+          <a:p>
+            <a:pPr algn="l"/>
+            <a:r>
+              <a:rPr sz="1400" b="1" i="0">
+                <a:solidFill>
+                  <a:srgbClr val="009944"/>
+                </a:solidFill>
+                <a:latin typeface="Calibri"/>
+              </a:rPr>
+              <a:t>iics-cli – full pod registry</a:t>
+            </a:r>
+          </a:p>
+        </p:txBody>
+      </p:sp>
       <p:graphicFrame>
         <p:nvGraphicFramePr>
-          <p:cNvPr id="6" name="Table 5"/>
+          <p:cNvPr id="10" name="Table 9"/>
           <p:cNvGraphicFramePr>
             <a:graphicFrameLocks noGrp="1"/>
           </p:cNvGraphicFramePr>
           <p:nvPr/>
         </p:nvGraphicFramePr>
         <p:xfrm>
-          <a:off x="365760" y="1097280"/>
-          <a:ext cx="11430000" cy="5440680"/>
+          <a:off x="4572000" y="1508760"/>
+          <a:ext cx="7132320" cy="2834640"/>
         </p:xfrm>
         <a:graphic>
           <a:graphicData uri="http://schemas.openxmlformats.org/drawingml/2006/table">
@@ -5857,11 +6751,10 @@
                 <a:tableStyleId>{5C22544A-7EE6-4342-B048-85BDC9FD1C3A}</a:tableStyleId>
               </a:tblPr>
               <a:tblGrid>
-                <a:gridCol w="3810000"/>
-                <a:gridCol w="3810000"/>
-                <a:gridCol w="3810000"/>
+                <a:gridCol w="3566160"/>
+                <a:gridCol w="3566160"/>
               </a:tblGrid>
-              <a:tr h="340042">
+              <a:tr h="354330">
                 <a:tc>
                   <a:txBody>
                     <a:bodyPr/>
@@ -5875,7 +6768,7 @@
                           </a:solidFill>
                           <a:latin typeface="Calibri"/>
                         </a:rPr>
-                        <a:t>Capability</a:t>
+                        <a:t>Region Code(s)</a:t>
                       </a:r>
                     </a:p>
                   </a:txBody>
@@ -5898,7 +6791,7 @@
                           </a:solidFill>
                           <a:latin typeface="Calibri"/>
                         </a:rPr>
-                        <a:t>Informatica CLI V2</a:t>
+                        <a:t>Geography</a:t>
                       </a:r>
                     </a:p>
                   </a:txBody>
@@ -5908,6 +6801,31 @@
                     </a:solidFill>
                   </a:tcPr>
                 </a:tc>
+              </a:tr>
+              <a:tr h="354330">
+                <a:tc>
+                  <a:txBody>
+                    <a:bodyPr/>
+                    <a:lstStyle/>
+                    <a:p>
+                      <a:pPr algn="l"/>
+                      <a:r>
+                        <a:rPr sz="1200">
+                          <a:solidFill>
+                            <a:srgbClr val="333333"/>
+                          </a:solidFill>
+                          <a:latin typeface="Calibri"/>
+                        </a:rPr>
+                        <a:t>US, USW1, USE2, USW3, USE4, USW5, USE6</a:t>
+                      </a:r>
+                    </a:p>
+                  </a:txBody>
+                  <a:tcPr>
+                    <a:solidFill>
+                      <a:srgbClr val="F2F2F2"/>
+                    </a:solidFill>
+                  </a:tcPr>
+                </a:tc>
                 <a:tc>
                   <a:txBody>
                     <a:bodyPr/>
@@ -5915,24 +6833,24 @@
                     <a:p>
                       <a:pPr algn="ctr"/>
                       <a:r>
-                        <a:rPr b="1" sz="1300">
-                          <a:solidFill>
-                            <a:srgbClr val="FFFFFF"/>
-                          </a:solidFill>
-                          <a:latin typeface="Calibri"/>
-                        </a:rPr>
-                        <a:t>iics-cli</a:t>
-                      </a:r>
-                    </a:p>
-                  </a:txBody>
-                  <a:tcPr>
-                    <a:solidFill>
-                      <a:srgbClr val="0066CC"/>
+                        <a:rPr sz="1200">
+                          <a:solidFill>
+                            <a:srgbClr val="333333"/>
+                          </a:solidFill>
+                          <a:latin typeface="Calibri"/>
+                        </a:rPr>
+                        <a:t>US (various pods)</a:t>
+                      </a:r>
+                    </a:p>
+                  </a:txBody>
+                  <a:tcPr>
+                    <a:solidFill>
+                      <a:srgbClr val="F2F2F2"/>
                     </a:solidFill>
                   </a:tcPr>
                 </a:tc>
               </a:tr>
-              <a:tr h="340042">
+              <a:tr h="354330">
                 <a:tc>
                   <a:txBody>
                     <a:bodyPr/>
@@ -5946,7 +6864,55 @@
                           </a:solidFill>
                           <a:latin typeface="Calibri"/>
                         </a:rPr>
-                        <a:t>Actively maintained</a:t>
+                        <a:t>USW1-1, USW3-1</a:t>
+                      </a:r>
+                    </a:p>
+                  </a:txBody>
+                  <a:tcPr>
+                    <a:solidFill>
+                      <a:srgbClr val="FFFFFF"/>
+                    </a:solidFill>
+                  </a:tcPr>
+                </a:tc>
+                <a:tc>
+                  <a:txBody>
+                    <a:bodyPr/>
+                    <a:lstStyle/>
+                    <a:p>
+                      <a:pPr algn="ctr"/>
+                      <a:r>
+                        <a:rPr sz="1200">
+                          <a:solidFill>
+                            <a:srgbClr val="333333"/>
+                          </a:solidFill>
+                          <a:latin typeface="Calibri"/>
+                        </a:rPr>
+                        <a:t>US West (dm1 hosts)</a:t>
+                      </a:r>
+                    </a:p>
+                  </a:txBody>
+                  <a:tcPr>
+                    <a:solidFill>
+                      <a:srgbClr val="FFFFFF"/>
+                    </a:solidFill>
+                  </a:tcPr>
+                </a:tc>
+              </a:tr>
+              <a:tr h="354330">
+                <a:tc>
+                  <a:txBody>
+                    <a:bodyPr/>
+                    <a:lstStyle/>
+                    <a:p>
+                      <a:pPr algn="l"/>
+                      <a:r>
+                        <a:rPr sz="1200">
+                          <a:solidFill>
+                            <a:srgbClr val="333333"/>
+                          </a:solidFill>
+                          <a:latin typeface="Calibri"/>
+                        </a:rPr>
+                        <a:t>USW1-2</a:t>
                       </a:r>
                     </a:p>
                   </a:txBody>
@@ -5965,11 +6931,11 @@
                       <a:r>
                         <a:rPr sz="1200">
                           <a:solidFill>
-                            <a:srgbClr val="CC0000"/>
-                          </a:solidFill>
-                          <a:latin typeface="Calibri"/>
-                        </a:rPr>
-                        <a:t>No</a:t>
+                            <a:srgbClr val="333333"/>
+                          </a:solidFill>
+                          <a:latin typeface="Calibri"/>
+                        </a:rPr>
+                        <a:t>US West (dm2 host)</a:t>
                       </a:r>
                     </a:p>
                   </a:txBody>
@@ -5979,6 +6945,31 @@
                     </a:solidFill>
                   </a:tcPr>
                 </a:tc>
+              </a:tr>
+              <a:tr h="354330">
+                <a:tc>
+                  <a:txBody>
+                    <a:bodyPr/>
+                    <a:lstStyle/>
+                    <a:p>
+                      <a:pPr algn="l"/>
+                      <a:r>
+                        <a:rPr sz="1200">
+                          <a:solidFill>
+                            <a:srgbClr val="333333"/>
+                          </a:solidFill>
+                          <a:latin typeface="Calibri"/>
+                        </a:rPr>
+                        <a:t>CAC1</a:t>
+                      </a:r>
+                    </a:p>
+                  </a:txBody>
+                  <a:tcPr>
+                    <a:solidFill>
+                      <a:srgbClr val="FFFFFF"/>
+                    </a:solidFill>
+                  </a:tcPr>
+                </a:tc>
                 <a:tc>
                   <a:txBody>
                     <a:bodyPr/>
@@ -5986,13 +6977,38 @@
                     <a:p>
                       <a:pPr algn="ctr"/>
                       <a:r>
-                        <a:rPr b="1" sz="1200">
-                          <a:solidFill>
-                            <a:srgbClr val="009944"/>
-                          </a:solidFill>
-                          <a:latin typeface="Calibri"/>
-                        </a:rPr>
-                        <a:t>Yes</a:t>
+                        <a:rPr sz="1200">
+                          <a:solidFill>
+                            <a:srgbClr val="333333"/>
+                          </a:solidFill>
+                          <a:latin typeface="Calibri"/>
+                        </a:rPr>
+                        <a:t>Canada</a:t>
+                      </a:r>
+                    </a:p>
+                  </a:txBody>
+                  <a:tcPr>
+                    <a:solidFill>
+                      <a:srgbClr val="FFFFFF"/>
+                    </a:solidFill>
+                  </a:tcPr>
+                </a:tc>
+              </a:tr>
+              <a:tr h="354330">
+                <a:tc>
+                  <a:txBody>
+                    <a:bodyPr/>
+                    <a:lstStyle/>
+                    <a:p>
+                      <a:pPr algn="l"/>
+                      <a:r>
+                        <a:rPr sz="1200">
+                          <a:solidFill>
+                            <a:srgbClr val="333333"/>
+                          </a:solidFill>
+                          <a:latin typeface="Calibri"/>
+                        </a:rPr>
+                        <a:t>EMEA, EMWE1</a:t>
                       </a:r>
                     </a:p>
                   </a:txBody>
@@ -6002,8 +7018,31 @@
                     </a:solidFill>
                   </a:tcPr>
                 </a:tc>
+                <a:tc>
+                  <a:txBody>
+                    <a:bodyPr/>
+                    <a:lstStyle/>
+                    <a:p>
+                      <a:pPr algn="ctr"/>
+                      <a:r>
+                        <a:rPr sz="1200">
+                          <a:solidFill>
+                            <a:srgbClr val="333333"/>
+                          </a:solidFill>
+                          <a:latin typeface="Calibri"/>
+                        </a:rPr>
+                        <a:t>Europe / Middle East / Africa</a:t>
+                      </a:r>
+                    </a:p>
+                  </a:txBody>
+                  <a:tcPr>
+                    <a:solidFill>
+                      <a:srgbClr val="F2F2F2"/>
+                    </a:solidFill>
+                  </a:tcPr>
+                </a:tc>
               </a:tr>
-              <a:tr h="340042">
+              <a:tr h="354330">
                 <a:tc>
                   <a:txBody>
                     <a:bodyPr/>
@@ -6017,7 +7056,7 @@
                           </a:solidFill>
                           <a:latin typeface="Calibri"/>
                         </a:rPr>
-                        <a:t>POSIX exit codes</a:t>
+                        <a:t>APSE1, APJ</a:t>
                       </a:r>
                     </a:p>
                   </a:txBody>
@@ -6036,11 +7075,11 @@
                       <a:r>
                         <a:rPr sz="1200">
                           <a:solidFill>
-                            <a:srgbClr val="CC0000"/>
-                          </a:solidFill>
-                          <a:latin typeface="Calibri"/>
-                        </a:rPr>
-                        <a:t>No</a:t>
+                            <a:srgbClr val="333333"/>
+                          </a:solidFill>
+                          <a:latin typeface="Calibri"/>
+                        </a:rPr>
+                        <a:t>Asia Pacific</a:t>
                       </a:r>
                     </a:p>
                   </a:txBody>
@@ -6050,6 +7089,31 @@
                     </a:solidFill>
                   </a:tcPr>
                 </a:tc>
+              </a:tr>
+              <a:tr h="354330">
+                <a:tc>
+                  <a:txBody>
+                    <a:bodyPr/>
+                    <a:lstStyle/>
+                    <a:p>
+                      <a:pPr algn="l"/>
+                      <a:r>
+                        <a:rPr sz="1200">
+                          <a:solidFill>
+                            <a:srgbClr val="333333"/>
+                          </a:solidFill>
+                          <a:latin typeface="Calibri"/>
+                        </a:rPr>
+                        <a:t>APNE1</a:t>
+                      </a:r>
+                    </a:p>
+                  </a:txBody>
+                  <a:tcPr>
+                    <a:solidFill>
+                      <a:srgbClr val="F2F2F2"/>
+                    </a:solidFill>
+                  </a:tcPr>
+                </a:tc>
                 <a:tc>
                   <a:txBody>
                     <a:bodyPr/>
@@ -6057,936 +7121,13 @@
                     <a:p>
                       <a:pPr algn="ctr"/>
                       <a:r>
-                        <a:rPr b="1" sz="1200">
-                          <a:solidFill>
-                            <a:srgbClr val="009944"/>
-                          </a:solidFill>
-                          <a:latin typeface="Calibri"/>
-                        </a:rPr>
-                        <a:t>Yes</a:t>
-                      </a:r>
-                    </a:p>
-                  </a:txBody>
-                  <a:tcPr>
-                    <a:solidFill>
-                      <a:srgbClr val="FFFFFF"/>
-                    </a:solidFill>
-                  </a:tcPr>
-                </a:tc>
-              </a:tr>
-              <a:tr h="340042">
-                <a:tc>
-                  <a:txBody>
-                    <a:bodyPr/>
-                    <a:lstStyle/>
-                    <a:p>
-                      <a:pPr algn="l"/>
-                      <a:r>
                         <a:rPr sz="1200">
                           <a:solidFill>
                             <a:srgbClr val="333333"/>
                           </a:solidFill>
                           <a:latin typeface="Calibri"/>
                         </a:rPr>
-                        <a:t>JSON / CSV output</a:t>
-                      </a:r>
-                    </a:p>
-                  </a:txBody>
-                  <a:tcPr>
-                    <a:solidFill>
-                      <a:srgbClr val="F2F2F2"/>
-                    </a:solidFill>
-                  </a:tcPr>
-                </a:tc>
-                <a:tc>
-                  <a:txBody>
-                    <a:bodyPr/>
-                    <a:lstStyle/>
-                    <a:p>
-                      <a:pPr algn="ctr"/>
-                      <a:r>
-                        <a:rPr sz="1200">
-                          <a:solidFill>
-                            <a:srgbClr val="CC0000"/>
-                          </a:solidFill>
-                          <a:latin typeface="Calibri"/>
-                        </a:rPr>
-                        <a:t>No</a:t>
-                      </a:r>
-                    </a:p>
-                  </a:txBody>
-                  <a:tcPr>
-                    <a:solidFill>
-                      <a:srgbClr val="F2F2F2"/>
-                    </a:solidFill>
-                  </a:tcPr>
-                </a:tc>
-                <a:tc>
-                  <a:txBody>
-                    <a:bodyPr/>
-                    <a:lstStyle/>
-                    <a:p>
-                      <a:pPr algn="ctr"/>
-                      <a:r>
-                        <a:rPr b="1" sz="1200">
-                          <a:solidFill>
-                            <a:srgbClr val="009944"/>
-                          </a:solidFill>
-                          <a:latin typeface="Calibri"/>
-                        </a:rPr>
-                        <a:t>Yes</a:t>
-                      </a:r>
-                    </a:p>
-                  </a:txBody>
-                  <a:tcPr>
-                    <a:solidFill>
-                      <a:srgbClr val="F2F2F2"/>
-                    </a:solidFill>
-                  </a:tcPr>
-                </a:tc>
-              </a:tr>
-              <a:tr h="340042">
-                <a:tc>
-                  <a:txBody>
-                    <a:bodyPr/>
-                    <a:lstStyle/>
-                    <a:p>
-                      <a:pPr algn="l"/>
-                      <a:r>
-                        <a:rPr sz="1200">
-                          <a:solidFill>
-                            <a:srgbClr val="333333"/>
-                          </a:solidFill>
-                          <a:latin typeface="Calibri"/>
-                        </a:rPr>
-                        <a:t>Pipe-friendly stdout/stderr split</a:t>
-                      </a:r>
-                    </a:p>
-                  </a:txBody>
-                  <a:tcPr>
-                    <a:solidFill>
-                      <a:srgbClr val="FFFFFF"/>
-                    </a:solidFill>
-                  </a:tcPr>
-                </a:tc>
-                <a:tc>
-                  <a:txBody>
-                    <a:bodyPr/>
-                    <a:lstStyle/>
-                    <a:p>
-                      <a:pPr algn="ctr"/>
-                      <a:r>
-                        <a:rPr sz="1200">
-                          <a:solidFill>
-                            <a:srgbClr val="CC0000"/>
-                          </a:solidFill>
-                          <a:latin typeface="Calibri"/>
-                        </a:rPr>
-                        <a:t>No</a:t>
-                      </a:r>
-                    </a:p>
-                  </a:txBody>
-                  <a:tcPr>
-                    <a:solidFill>
-                      <a:srgbClr val="FFFFFF"/>
-                    </a:solidFill>
-                  </a:tcPr>
-                </a:tc>
-                <a:tc>
-                  <a:txBody>
-                    <a:bodyPr/>
-                    <a:lstStyle/>
-                    <a:p>
-                      <a:pPr algn="ctr"/>
-                      <a:r>
-                        <a:rPr b="1" sz="1200">
-                          <a:solidFill>
-                            <a:srgbClr val="009944"/>
-                          </a:solidFill>
-                          <a:latin typeface="Calibri"/>
-                        </a:rPr>
-                        <a:t>Yes</a:t>
-                      </a:r>
-                    </a:p>
-                  </a:txBody>
-                  <a:tcPr>
-                    <a:solidFill>
-                      <a:srgbClr val="FFFFFF"/>
-                    </a:solidFill>
-                  </a:tcPr>
-                </a:tc>
-              </a:tr>
-              <a:tr h="340042">
-                <a:tc>
-                  <a:txBody>
-                    <a:bodyPr/>
-                    <a:lstStyle/>
-                    <a:p>
-                      <a:pPr algn="l"/>
-                      <a:r>
-                        <a:rPr sz="1200">
-                          <a:solidFill>
-                            <a:srgbClr val="333333"/>
-                          </a:solidFill>
-                          <a:latin typeface="Calibri"/>
-                        </a:rPr>
-                        <a:t>Credentials in config file</a:t>
-                      </a:r>
-                    </a:p>
-                  </a:txBody>
-                  <a:tcPr>
-                    <a:solidFill>
-                      <a:srgbClr val="F2F2F2"/>
-                    </a:solidFill>
-                  </a:tcPr>
-                </a:tc>
-                <a:tc>
-                  <a:txBody>
-                    <a:bodyPr/>
-                    <a:lstStyle/>
-                    <a:p>
-                      <a:pPr algn="ctr"/>
-                      <a:r>
-                        <a:rPr sz="1200">
-                          <a:solidFill>
-                            <a:srgbClr val="CC0000"/>
-                          </a:solidFill>
-                          <a:latin typeface="Calibri"/>
-                        </a:rPr>
-                        <a:t>No</a:t>
-                      </a:r>
-                    </a:p>
-                  </a:txBody>
-                  <a:tcPr>
-                    <a:solidFill>
-                      <a:srgbClr val="F2F2F2"/>
-                    </a:solidFill>
-                  </a:tcPr>
-                </a:tc>
-                <a:tc>
-                  <a:txBody>
-                    <a:bodyPr/>
-                    <a:lstStyle/>
-                    <a:p>
-                      <a:pPr algn="ctr"/>
-                      <a:r>
-                        <a:rPr b="1" sz="1200">
-                          <a:solidFill>
-                            <a:srgbClr val="009944"/>
-                          </a:solidFill>
-                          <a:latin typeface="Calibri"/>
-                        </a:rPr>
-                        <a:t>Yes</a:t>
-                      </a:r>
-                    </a:p>
-                  </a:txBody>
-                  <a:tcPr>
-                    <a:solidFill>
-                      <a:srgbClr val="F2F2F2"/>
-                    </a:solidFill>
-                  </a:tcPr>
-                </a:tc>
-              </a:tr>
-              <a:tr h="340042">
-                <a:tc>
-                  <a:txBody>
-                    <a:bodyPr/>
-                    <a:lstStyle/>
-                    <a:p>
-                      <a:pPr algn="l"/>
-                      <a:r>
-                        <a:rPr sz="1200">
-                          <a:solidFill>
-                            <a:srgbClr val="333333"/>
-                          </a:solidFill>
-                          <a:latin typeface="Calibri"/>
-                        </a:rPr>
-                        <a:t>Named environment profiles</a:t>
-                      </a:r>
-                    </a:p>
-                  </a:txBody>
-                  <a:tcPr>
-                    <a:solidFill>
-                      <a:srgbClr val="FFFFFF"/>
-                    </a:solidFill>
-                  </a:tcPr>
-                </a:tc>
-                <a:tc>
-                  <a:txBody>
-                    <a:bodyPr/>
-                    <a:lstStyle/>
-                    <a:p>
-                      <a:pPr algn="ctr"/>
-                      <a:r>
-                        <a:rPr sz="1200">
-                          <a:solidFill>
-                            <a:srgbClr val="CC0000"/>
-                          </a:solidFill>
-                          <a:latin typeface="Calibri"/>
-                        </a:rPr>
-                        <a:t>No</a:t>
-                      </a:r>
-                    </a:p>
-                  </a:txBody>
-                  <a:tcPr>
-                    <a:solidFill>
-                      <a:srgbClr val="FFFFFF"/>
-                    </a:solidFill>
-                  </a:tcPr>
-                </a:tc>
-                <a:tc>
-                  <a:txBody>
-                    <a:bodyPr/>
-                    <a:lstStyle/>
-                    <a:p>
-                      <a:pPr algn="ctr"/>
-                      <a:r>
-                        <a:rPr b="1" sz="1200">
-                          <a:solidFill>
-                            <a:srgbClr val="009944"/>
-                          </a:solidFill>
-                          <a:latin typeface="Calibri"/>
-                        </a:rPr>
-                        <a:t>Yes</a:t>
-                      </a:r>
-                    </a:p>
-                  </a:txBody>
-                  <a:tcPr>
-                    <a:solidFill>
-                      <a:srgbClr val="FFFFFF"/>
-                    </a:solidFill>
-                  </a:tcPr>
-                </a:tc>
-              </a:tr>
-              <a:tr h="340042">
-                <a:tc>
-                  <a:txBody>
-                    <a:bodyPr/>
-                    <a:lstStyle/>
-                    <a:p>
-                      <a:pPr algn="l"/>
-                      <a:r>
-                        <a:rPr sz="1200">
-                          <a:solidFill>
-                            <a:srgbClr val="333333"/>
-                          </a:solidFill>
-                          <a:latin typeface="Calibri"/>
-                        </a:rPr>
-                        <a:t>Session caching</a:t>
-                      </a:r>
-                    </a:p>
-                  </a:txBody>
-                  <a:tcPr>
-                    <a:solidFill>
-                      <a:srgbClr val="F2F2F2"/>
-                    </a:solidFill>
-                  </a:tcPr>
-                </a:tc>
-                <a:tc>
-                  <a:txBody>
-                    <a:bodyPr/>
-                    <a:lstStyle/>
-                    <a:p>
-                      <a:pPr algn="ctr"/>
-                      <a:r>
-                        <a:rPr sz="1200">
-                          <a:solidFill>
-                            <a:srgbClr val="CC0000"/>
-                          </a:solidFill>
-                          <a:latin typeface="Calibri"/>
-                        </a:rPr>
-                        <a:t>No</a:t>
-                      </a:r>
-                    </a:p>
-                  </a:txBody>
-                  <a:tcPr>
-                    <a:solidFill>
-                      <a:srgbClr val="F2F2F2"/>
-                    </a:solidFill>
-                  </a:tcPr>
-                </a:tc>
-                <a:tc>
-                  <a:txBody>
-                    <a:bodyPr/>
-                    <a:lstStyle/>
-                    <a:p>
-                      <a:pPr algn="ctr"/>
-                      <a:r>
-                        <a:rPr b="1" sz="1200">
-                          <a:solidFill>
-                            <a:srgbClr val="009944"/>
-                          </a:solidFill>
-                          <a:latin typeface="Calibri"/>
-                        </a:rPr>
-                        <a:t>Yes</a:t>
-                      </a:r>
-                    </a:p>
-                  </a:txBody>
-                  <a:tcPr>
-                    <a:solidFill>
-                      <a:srgbClr val="F2F2F2"/>
-                    </a:solidFill>
-                  </a:tcPr>
-                </a:tc>
-              </a:tr>
-              <a:tr h="340042">
-                <a:tc>
-                  <a:txBody>
-                    <a:bodyPr/>
-                    <a:lstStyle/>
-                    <a:p>
-                      <a:pPr algn="l"/>
-                      <a:r>
-                        <a:rPr sz="1200">
-                          <a:solidFill>
-                            <a:srgbClr val="333333"/>
-                          </a:solidFill>
-                          <a:latin typeface="Calibri"/>
-                        </a:rPr>
-                        <a:t>User &amp; group management</a:t>
-                      </a:r>
-                    </a:p>
-                  </a:txBody>
-                  <a:tcPr>
-                    <a:solidFill>
-                      <a:srgbClr val="FFFFFF"/>
-                    </a:solidFill>
-                  </a:tcPr>
-                </a:tc>
-                <a:tc>
-                  <a:txBody>
-                    <a:bodyPr/>
-                    <a:lstStyle/>
-                    <a:p>
-                      <a:pPr algn="ctr"/>
-                      <a:r>
-                        <a:rPr sz="1200">
-                          <a:solidFill>
-                            <a:srgbClr val="CC0000"/>
-                          </a:solidFill>
-                          <a:latin typeface="Calibri"/>
-                        </a:rPr>
-                        <a:t>No</a:t>
-                      </a:r>
-                    </a:p>
-                  </a:txBody>
-                  <a:tcPr>
-                    <a:solidFill>
-                      <a:srgbClr val="FFFFFF"/>
-                    </a:solidFill>
-                  </a:tcPr>
-                </a:tc>
-                <a:tc>
-                  <a:txBody>
-                    <a:bodyPr/>
-                    <a:lstStyle/>
-                    <a:p>
-                      <a:pPr algn="ctr"/>
-                      <a:r>
-                        <a:rPr b="1" sz="1200">
-                          <a:solidFill>
-                            <a:srgbClr val="009944"/>
-                          </a:solidFill>
-                          <a:latin typeface="Calibri"/>
-                        </a:rPr>
-                        <a:t>Yes</a:t>
-                      </a:r>
-                    </a:p>
-                  </a:txBody>
-                  <a:tcPr>
-                    <a:solidFill>
-                      <a:srgbClr val="FFFFFF"/>
-                    </a:solidFill>
-                  </a:tcPr>
-                </a:tc>
-              </a:tr>
-              <a:tr h="340042">
-                <a:tc>
-                  <a:txBody>
-                    <a:bodyPr/>
-                    <a:lstStyle/>
-                    <a:p>
-                      <a:pPr algn="l"/>
-                      <a:r>
-                        <a:rPr sz="1200">
-                          <a:solidFill>
-                            <a:srgbClr val="333333"/>
-                          </a:solidFill>
-                          <a:latin typeface="Calibri"/>
-                        </a:rPr>
-                        <a:t>Connection CRUD</a:t>
-                      </a:r>
-                    </a:p>
-                  </a:txBody>
-                  <a:tcPr>
-                    <a:solidFill>
-                      <a:srgbClr val="F2F2F2"/>
-                    </a:solidFill>
-                  </a:tcPr>
-                </a:tc>
-                <a:tc>
-                  <a:txBody>
-                    <a:bodyPr/>
-                    <a:lstStyle/>
-                    <a:p>
-                      <a:pPr algn="ctr"/>
-                      <a:r>
-                        <a:rPr sz="1200">
-                          <a:solidFill>
-                            <a:srgbClr val="CC0000"/>
-                          </a:solidFill>
-                          <a:latin typeface="Calibri"/>
-                        </a:rPr>
-                        <a:t>No</a:t>
-                      </a:r>
-                    </a:p>
-                  </a:txBody>
-                  <a:tcPr>
-                    <a:solidFill>
-                      <a:srgbClr val="F2F2F2"/>
-                    </a:solidFill>
-                  </a:tcPr>
-                </a:tc>
-                <a:tc>
-                  <a:txBody>
-                    <a:bodyPr/>
-                    <a:lstStyle/>
-                    <a:p>
-                      <a:pPr algn="ctr"/>
-                      <a:r>
-                        <a:rPr b="1" sz="1200">
-                          <a:solidFill>
-                            <a:srgbClr val="009944"/>
-                          </a:solidFill>
-                          <a:latin typeface="Calibri"/>
-                        </a:rPr>
-                        <a:t>Yes</a:t>
-                      </a:r>
-                    </a:p>
-                  </a:txBody>
-                  <a:tcPr>
-                    <a:solidFill>
-                      <a:srgbClr val="F2F2F2"/>
-                    </a:solidFill>
-                  </a:tcPr>
-                </a:tc>
-              </a:tr>
-              <a:tr h="340042">
-                <a:tc>
-                  <a:txBody>
-                    <a:bodyPr/>
-                    <a:lstStyle/>
-                    <a:p>
-                      <a:pPr algn="l"/>
-                      <a:r>
-                        <a:rPr sz="1200">
-                          <a:solidFill>
-                            <a:srgbClr val="333333"/>
-                          </a:solidFill>
-                          <a:latin typeface="Calibri"/>
-                        </a:rPr>
-                        <a:t>Schedule CRUD</a:t>
-                      </a:r>
-                    </a:p>
-                  </a:txBody>
-                  <a:tcPr>
-                    <a:solidFill>
-                      <a:srgbClr val="FFFFFF"/>
-                    </a:solidFill>
-                  </a:tcPr>
-                </a:tc>
-                <a:tc>
-                  <a:txBody>
-                    <a:bodyPr/>
-                    <a:lstStyle/>
-                    <a:p>
-                      <a:pPr algn="ctr"/>
-                      <a:r>
-                        <a:rPr sz="1200">
-                          <a:solidFill>
-                            <a:srgbClr val="CC0000"/>
-                          </a:solidFill>
-                          <a:latin typeface="Calibri"/>
-                        </a:rPr>
-                        <a:t>No</a:t>
-                      </a:r>
-                    </a:p>
-                  </a:txBody>
-                  <a:tcPr>
-                    <a:solidFill>
-                      <a:srgbClr val="FFFFFF"/>
-                    </a:solidFill>
-                  </a:tcPr>
-                </a:tc>
-                <a:tc>
-                  <a:txBody>
-                    <a:bodyPr/>
-                    <a:lstStyle/>
-                    <a:p>
-                      <a:pPr algn="ctr"/>
-                      <a:r>
-                        <a:rPr b="1" sz="1200">
-                          <a:solidFill>
-                            <a:srgbClr val="009944"/>
-                          </a:solidFill>
-                          <a:latin typeface="Calibri"/>
-                        </a:rPr>
-                        <a:t>Yes</a:t>
-                      </a:r>
-                    </a:p>
-                  </a:txBody>
-                  <a:tcPr>
-                    <a:solidFill>
-                      <a:srgbClr val="FFFFFF"/>
-                    </a:solidFill>
-                  </a:tcPr>
-                </a:tc>
-              </a:tr>
-              <a:tr h="340042">
-                <a:tc>
-                  <a:txBody>
-                    <a:bodyPr/>
-                    <a:lstStyle/>
-                    <a:p>
-                      <a:pPr algn="l"/>
-                      <a:r>
-                        <a:rPr sz="1200">
-                          <a:solidFill>
-                            <a:srgbClr val="333333"/>
-                          </a:solidFill>
-                          <a:latin typeface="Calibri"/>
-                        </a:rPr>
-                        <a:t>Agent &amp; runtime management</a:t>
-                      </a:r>
-                    </a:p>
-                  </a:txBody>
-                  <a:tcPr>
-                    <a:solidFill>
-                      <a:srgbClr val="F2F2F2"/>
-                    </a:solidFill>
-                  </a:tcPr>
-                </a:tc>
-                <a:tc>
-                  <a:txBody>
-                    <a:bodyPr/>
-                    <a:lstStyle/>
-                    <a:p>
-                      <a:pPr algn="ctr"/>
-                      <a:r>
-                        <a:rPr sz="1200">
-                          <a:solidFill>
-                            <a:srgbClr val="CC0000"/>
-                          </a:solidFill>
-                          <a:latin typeface="Calibri"/>
-                        </a:rPr>
-                        <a:t>No</a:t>
-                      </a:r>
-                    </a:p>
-                  </a:txBody>
-                  <a:tcPr>
-                    <a:solidFill>
-                      <a:srgbClr val="F2F2F2"/>
-                    </a:solidFill>
-                  </a:tcPr>
-                </a:tc>
-                <a:tc>
-                  <a:txBody>
-                    <a:bodyPr/>
-                    <a:lstStyle/>
-                    <a:p>
-                      <a:pPr algn="ctr"/>
-                      <a:r>
-                        <a:rPr b="1" sz="1200">
-                          <a:solidFill>
-                            <a:srgbClr val="009944"/>
-                          </a:solidFill>
-                          <a:latin typeface="Calibri"/>
-                        </a:rPr>
-                        <a:t>Yes</a:t>
-                      </a:r>
-                    </a:p>
-                  </a:txBody>
-                  <a:tcPr>
-                    <a:solidFill>
-                      <a:srgbClr val="F2F2F2"/>
-                    </a:solidFill>
-                  </a:tcPr>
-                </a:tc>
-              </a:tr>
-              <a:tr h="340042">
-                <a:tc>
-                  <a:txBody>
-                    <a:bodyPr/>
-                    <a:lstStyle/>
-                    <a:p>
-                      <a:pPr algn="l"/>
-                      <a:r>
-                        <a:rPr sz="1200">
-                          <a:solidFill>
-                            <a:srgbClr val="333333"/>
-                          </a:solidFill>
-                          <a:latin typeface="Calibri"/>
-                        </a:rPr>
-                        <a:t>Source control operations</a:t>
-                      </a:r>
-                    </a:p>
-                  </a:txBody>
-                  <a:tcPr>
-                    <a:solidFill>
-                      <a:srgbClr val="FFFFFF"/>
-                    </a:solidFill>
-                  </a:tcPr>
-                </a:tc>
-                <a:tc>
-                  <a:txBody>
-                    <a:bodyPr/>
-                    <a:lstStyle/>
-                    <a:p>
-                      <a:pPr algn="ctr"/>
-                      <a:r>
-                        <a:rPr sz="1200">
-                          <a:solidFill>
-                            <a:srgbClr val="CC0000"/>
-                          </a:solidFill>
-                          <a:latin typeface="Calibri"/>
-                        </a:rPr>
-                        <a:t>No</a:t>
-                      </a:r>
-                    </a:p>
-                  </a:txBody>
-                  <a:tcPr>
-                    <a:solidFill>
-                      <a:srgbClr val="FFFFFF"/>
-                    </a:solidFill>
-                  </a:tcPr>
-                </a:tc>
-                <a:tc>
-                  <a:txBody>
-                    <a:bodyPr/>
-                    <a:lstStyle/>
-                    <a:p>
-                      <a:pPr algn="ctr"/>
-                      <a:r>
-                        <a:rPr b="1" sz="1200">
-                          <a:solidFill>
-                            <a:srgbClr val="009944"/>
-                          </a:solidFill>
-                          <a:latin typeface="Calibri"/>
-                        </a:rPr>
-                        <a:t>Yes</a:t>
-                      </a:r>
-                    </a:p>
-                  </a:txBody>
-                  <a:tcPr>
-                    <a:solidFill>
-                      <a:srgbClr val="FFFFFF"/>
-                    </a:solidFill>
-                  </a:tcPr>
-                </a:tc>
-              </a:tr>
-              <a:tr h="340042">
-                <a:tc>
-                  <a:txBody>
-                    <a:bodyPr/>
-                    <a:lstStyle/>
-                    <a:p>
-                      <a:pPr algn="l"/>
-                      <a:r>
-                        <a:rPr sz="1200">
-                          <a:solidFill>
-                            <a:srgbClr val="333333"/>
-                          </a:solidFill>
-                          <a:latin typeface="Calibri"/>
-                        </a:rPr>
-                        <a:t>All IICS regions</a:t>
-                      </a:r>
-                    </a:p>
-                  </a:txBody>
-                  <a:tcPr>
-                    <a:solidFill>
-                      <a:srgbClr val="F2F2F2"/>
-                    </a:solidFill>
-                  </a:tcPr>
-                </a:tc>
-                <a:tc>
-                  <a:txBody>
-                    <a:bodyPr/>
-                    <a:lstStyle/>
-                    <a:p>
-                      <a:pPr algn="ctr"/>
-                      <a:r>
-                        <a:rPr sz="1200">
-                          <a:solidFill>
-                            <a:srgbClr val="CC0000"/>
-                          </a:solidFill>
-                          <a:latin typeface="Calibri"/>
-                        </a:rPr>
-                        <a:t>No</a:t>
-                      </a:r>
-                    </a:p>
-                  </a:txBody>
-                  <a:tcPr>
-                    <a:solidFill>
-                      <a:srgbClr val="F2F2F2"/>
-                    </a:solidFill>
-                  </a:tcPr>
-                </a:tc>
-                <a:tc>
-                  <a:txBody>
-                    <a:bodyPr/>
-                    <a:lstStyle/>
-                    <a:p>
-                      <a:pPr algn="ctr"/>
-                      <a:r>
-                        <a:rPr b="1" sz="1200">
-                          <a:solidFill>
-                            <a:srgbClr val="009944"/>
-                          </a:solidFill>
-                          <a:latin typeface="Calibri"/>
-                        </a:rPr>
-                        <a:t>Yes</a:t>
-                      </a:r>
-                    </a:p>
-                  </a:txBody>
-                  <a:tcPr>
-                    <a:solidFill>
-                      <a:srgbClr val="F2F2F2"/>
-                    </a:solidFill>
-                  </a:tcPr>
-                </a:tc>
-              </a:tr>
-              <a:tr h="340042">
-                <a:tc>
-                  <a:txBody>
-                    <a:bodyPr/>
-                    <a:lstStyle/>
-                    <a:p>
-                      <a:pPr algn="l"/>
-                      <a:r>
-                        <a:rPr sz="1200">
-                          <a:solidFill>
-                            <a:srgbClr val="333333"/>
-                          </a:solidFill>
-                          <a:latin typeface="Calibri"/>
-                        </a:rPr>
-                        <a:t>Structured subcommands</a:t>
-                      </a:r>
-                    </a:p>
-                  </a:txBody>
-                  <a:tcPr>
-                    <a:solidFill>
-                      <a:srgbClr val="FFFFFF"/>
-                    </a:solidFill>
-                  </a:tcPr>
-                </a:tc>
-                <a:tc>
-                  <a:txBody>
-                    <a:bodyPr/>
-                    <a:lstStyle/>
-                    <a:p>
-                      <a:pPr algn="ctr"/>
-                      <a:r>
-                        <a:rPr sz="1200">
-                          <a:solidFill>
-                            <a:srgbClr val="CC0000"/>
-                          </a:solidFill>
-                          <a:latin typeface="Calibri"/>
-                        </a:rPr>
-                        <a:t>No</a:t>
-                      </a:r>
-                    </a:p>
-                  </a:txBody>
-                  <a:tcPr>
-                    <a:solidFill>
-                      <a:srgbClr val="FFFFFF"/>
-                    </a:solidFill>
-                  </a:tcPr>
-                </a:tc>
-                <a:tc>
-                  <a:txBody>
-                    <a:bodyPr/>
-                    <a:lstStyle/>
-                    <a:p>
-                      <a:pPr algn="ctr"/>
-                      <a:r>
-                        <a:rPr b="1" sz="1200">
-                          <a:solidFill>
-                            <a:srgbClr val="009944"/>
-                          </a:solidFill>
-                          <a:latin typeface="Calibri"/>
-                        </a:rPr>
-                        <a:t>Yes</a:t>
-                      </a:r>
-                    </a:p>
-                  </a:txBody>
-                  <a:tcPr>
-                    <a:solidFill>
-                      <a:srgbClr val="FFFFFF"/>
-                    </a:solidFill>
-                  </a:tcPr>
-                </a:tc>
-              </a:tr>
-              <a:tr h="340050">
-                <a:tc>
-                  <a:txBody>
-                    <a:bodyPr/>
-                    <a:lstStyle/>
-                    <a:p>
-                      <a:pPr algn="l"/>
-                      <a:r>
-                        <a:rPr sz="1200">
-                          <a:solidFill>
-                            <a:srgbClr val="333333"/>
-                          </a:solidFill>
-                          <a:latin typeface="Calibri"/>
-                        </a:rPr>
-                        <a:t>Built-in contextual help</a:t>
-                      </a:r>
-                    </a:p>
-                  </a:txBody>
-                  <a:tcPr>
-                    <a:solidFill>
-                      <a:srgbClr val="F2F2F2"/>
-                    </a:solidFill>
-                  </a:tcPr>
-                </a:tc>
-                <a:tc>
-                  <a:txBody>
-                    <a:bodyPr/>
-                    <a:lstStyle/>
-                    <a:p>
-                      <a:pPr algn="ctr"/>
-                      <a:r>
-                        <a:rPr sz="1200">
-                          <a:solidFill>
-                            <a:srgbClr val="333333"/>
-                          </a:solidFill>
-                          <a:latin typeface="Calibri"/>
-                        </a:rPr>
-                        <a:t>Minimal</a:t>
-                      </a:r>
-                    </a:p>
-                  </a:txBody>
-                  <a:tcPr>
-                    <a:solidFill>
-                      <a:srgbClr val="F2F2F2"/>
-                    </a:solidFill>
-                  </a:tcPr>
-                </a:tc>
-                <a:tc>
-                  <a:txBody>
-                    <a:bodyPr/>
-                    <a:lstStyle/>
-                    <a:p>
-                      <a:pPr algn="ctr"/>
-                      <a:r>
-                        <a:rPr b="1" sz="1200">
-                          <a:solidFill>
-                            <a:srgbClr val="009944"/>
-                          </a:solidFill>
-                          <a:latin typeface="Calibri"/>
-                        </a:rPr>
-                        <a:t>Yes</a:t>
+                        <a:t>Asia Pacific North-East</a:t>
                       </a:r>
                     </a:p>
                   </a:txBody>
@@ -7001,6 +7142,122 @@
           </a:graphicData>
         </a:graphic>
       </p:graphicFrame>
+      <p:sp>
+        <p:nvSpPr>
+          <p:cNvPr id="11" name="TextBox 10"/>
+          <p:cNvSpPr txBox="1"/>
+          <p:nvPr/>
+        </p:nvSpPr>
+        <p:spPr>
+          <a:xfrm>
+            <a:off x="457200" y="5029200"/>
+            <a:ext cx="11247120" cy="365760"/>
+          </a:xfrm>
+          <a:prstGeom prst="rect">
+            <a:avLst/>
+          </a:prstGeom>
+          <a:noFill/>
+        </p:spPr>
+        <p:txBody>
+          <a:bodyPr wrap="square">
+            <a:spAutoFit/>
+          </a:bodyPr>
+          <a:lstStyle/>
+          <a:p>
+            <a:pPr algn="l"/>
+            <a:r>
+              <a:rPr sz="1400" b="0" i="1">
+                <a:solidFill>
+                  <a:srgbClr val="0066CC"/>
+                </a:solidFill>
+                <a:latin typeface="Calibri"/>
+              </a:rPr>
+              <a:t>loginUrl and baseApiUrl auto-populated on first iics login – no manual URL entry needed.</a:t>
+            </a:r>
+          </a:p>
+        </p:txBody>
+      </p:sp>
+      <p:sp>
+        <p:nvSpPr>
+          <p:cNvPr id="12" name="Rectangle 11"/>
+          <p:cNvSpPr/>
+          <p:nvPr/>
+        </p:nvSpPr>
+        <p:spPr>
+          <a:xfrm>
+            <a:off x="457200" y="3657600"/>
+            <a:ext cx="11247120" cy="1280160"/>
+          </a:xfrm>
+          <a:prstGeom prst="rect">
+            <a:avLst/>
+          </a:prstGeom>
+          <a:solidFill>
+            <a:srgbClr val="1E1E2E"/>
+          </a:solidFill>
+          <a:ln>
+            <a:noFill/>
+          </a:ln>
+        </p:spPr>
+        <p:style>
+          <a:lnRef idx="1">
+            <a:schemeClr val="accent1"/>
+          </a:lnRef>
+          <a:fillRef idx="3">
+            <a:schemeClr val="accent1"/>
+          </a:fillRef>
+          <a:effectRef idx="2">
+            <a:schemeClr val="accent1"/>
+          </a:effectRef>
+          <a:fontRef idx="minor">
+            <a:schemeClr val="lt1"/>
+          </a:fontRef>
+        </p:style>
+        <p:txBody>
+          <a:bodyPr rtlCol="0" anchor="ctr"/>
+          <a:lstStyle/>
+          <a:p>
+            <a:pPr algn="ctr"/>
+          </a:p>
+        </p:txBody>
+      </p:sp>
+      <p:sp>
+        <p:nvSpPr>
+          <p:cNvPr id="13" name="TextBox 12"/>
+          <p:cNvSpPr txBox="1"/>
+          <p:nvPr/>
+        </p:nvSpPr>
+        <p:spPr>
+          <a:xfrm>
+            <a:off x="594360" y="3749040"/>
+            <a:ext cx="10972800" cy="1097280"/>
+          </a:xfrm>
+          <a:prstGeom prst="rect">
+            <a:avLst/>
+          </a:prstGeom>
+          <a:noFill/>
+        </p:spPr>
+        <p:txBody>
+          <a:bodyPr wrap="square">
+            <a:spAutoFit/>
+          </a:bodyPr>
+          <a:lstStyle/>
+          <a:p>
+            <a:pPr algn="l"/>
+            <a:r>
+              <a:rPr sz="1100" b="0" i="0">
+                <a:solidFill>
+                  <a:srgbClr val="A6E3A1"/>
+                </a:solidFill>
+                <a:latin typeface="Courier New"/>
+              </a:rPr>
+              <a:t># Use a built-in region
+iics user list --profile emea   # region: EMEA in config
+# Override with explicit login URL (future pods / custom deployments)
+# loginUrl: https://dm-us.informaticacloud.com/saas/public/core/v3/login</a:t>
+            </a:r>
+          </a:p>
+        </p:txBody>
+      </p:sp>
     </p:spTree>
   </p:cSld>
   <p:clrMapOvr>
@@ -7092,7 +7349,7 @@
                 </a:solidFill>
                 <a:latin typeface="Calibri"/>
               </a:rPr>
-              <a:t>Getting Started</a:t>
+              <a:t>Modern Design &amp; Broad Platform Support</a:t>
             </a:r>
           </a:p>
         </p:txBody>
@@ -7127,7 +7384,7 @@
                 </a:solidFill>
                 <a:latin typeface="Calibri"/>
               </a:rPr>
-              <a:t>Install, configure, and run your first command in minutes</a:t>
+              <a:t>Built for today's DevOps toolchains</a:t>
             </a:r>
           </a:p>
         </p:txBody>
@@ -7212,14 +7469,240 @@
       </p:sp>
       <p:sp>
         <p:nvSpPr>
-          <p:cNvPr id="7" name="Rectangle 6"/>
+          <p:cNvPr id="7" name="TextBox 6"/>
+          <p:cNvSpPr txBox="1"/>
+          <p:nvPr/>
+        </p:nvSpPr>
+        <p:spPr>
+          <a:xfrm>
+            <a:off x="457200" y="1097280"/>
+            <a:ext cx="5303520" cy="365760"/>
+          </a:xfrm>
+          <a:prstGeom prst="rect">
+            <a:avLst/>
+          </a:prstGeom>
+          <a:noFill/>
+        </p:spPr>
+        <p:txBody>
+          <a:bodyPr wrap="square">
+            <a:spAutoFit/>
+          </a:bodyPr>
+          <a:lstStyle/>
+          <a:p>
+            <a:pPr algn="l"/>
+            <a:r>
+              <a:rPr sz="1400" b="1" i="0">
+                <a:solidFill>
+                  <a:srgbClr val="CC0000"/>
+                </a:solidFill>
+                <a:latin typeface="Calibri"/>
+              </a:rPr>
+              <a:t>Official CLI – Limited and outdated</a:t>
+            </a:r>
+          </a:p>
+        </p:txBody>
+      </p:sp>
+      <p:sp>
+        <p:nvSpPr>
+          <p:cNvPr id="8" name="TextBox 7"/>
+          <p:cNvSpPr txBox="1"/>
+          <p:nvPr/>
+        </p:nvSpPr>
+        <p:spPr>
+          <a:xfrm>
+            <a:off x="457200" y="1554480"/>
+            <a:ext cx="5303520" cy="3200400"/>
+          </a:xfrm>
+          <a:prstGeom prst="rect">
+            <a:avLst/>
+          </a:prstGeom>
+          <a:noFill/>
+        </p:spPr>
+        <p:txBody>
+          <a:bodyPr wrap="square">
+            <a:spAutoFit/>
+          </a:bodyPr>
+          <a:lstStyle/>
+          <a:p>
+            <a:r>
+              <a:rPr sz="1500" b="0">
+                <a:solidFill>
+                  <a:srgbClr val="CC0000"/>
+                </a:solidFill>
+                <a:latin typeface="Calibri"/>
+              </a:rPr>
+              <a:t>•  No longer maintained – frozen in time</a:t>
+            </a:r>
+          </a:p>
+          <a:p>
+            <a:r>
+              <a:rPr sz="1500" b="0">
+                <a:solidFill>
+                  <a:srgbClr val="CC0000"/>
+                </a:solidFill>
+                <a:latin typeface="Calibri"/>
+              </a:rPr>
+              <a:t>•  Covers only export/import/publish operations</a:t>
+            </a:r>
+          </a:p>
+          <a:p>
+            <a:r>
+              <a:rPr sz="1500" b="0">
+                <a:solidFill>
+                  <a:srgbClr val="CC0000"/>
+                </a:solidFill>
+                <a:latin typeface="Calibri"/>
+              </a:rPr>
+              <a:t>•  Limited region support (us/eu/ap only)</a:t>
+            </a:r>
+          </a:p>
+          <a:p>
+            <a:r>
+              <a:rPr sz="1500" b="0">
+                <a:solidFill>
+                  <a:srgbClr val="CC0000"/>
+                </a:solidFill>
+                <a:latin typeface="Calibri"/>
+              </a:rPr>
+              <a:t>•  Complex credential and profile management</a:t>
+            </a:r>
+          </a:p>
+          <a:p>
+            <a:r>
+              <a:rPr sz="1500" b="0">
+                <a:solidFill>
+                  <a:srgbClr val="CC0000"/>
+                </a:solidFill>
+                <a:latin typeface="Calibri"/>
+              </a:rPr>
+              <a:t>•  No modern automation-friendly features</a:t>
+            </a:r>
+          </a:p>
+        </p:txBody>
+      </p:sp>
+      <p:sp>
+        <p:nvSpPr>
+          <p:cNvPr id="9" name="TextBox 8"/>
+          <p:cNvSpPr txBox="1"/>
+          <p:nvPr/>
+        </p:nvSpPr>
+        <p:spPr>
+          <a:xfrm>
+            <a:off x="6400800" y="1097280"/>
+            <a:ext cx="5303520" cy="365760"/>
+          </a:xfrm>
+          <a:prstGeom prst="rect">
+            <a:avLst/>
+          </a:prstGeom>
+          <a:noFill/>
+        </p:spPr>
+        <p:txBody>
+          <a:bodyPr wrap="square">
+            <a:spAutoFit/>
+          </a:bodyPr>
+          <a:lstStyle/>
+          <a:p>
+            <a:pPr algn="l"/>
+            <a:r>
+              <a:rPr sz="1400" b="1" i="0">
+                <a:solidFill>
+                  <a:srgbClr val="009944"/>
+                </a:solidFill>
+                <a:latin typeface="Calibri"/>
+              </a:rPr>
+              <a:t>iics-cli – Modern, actively maintained</a:t>
+            </a:r>
+          </a:p>
+        </p:txBody>
+      </p:sp>
+      <p:sp>
+        <p:nvSpPr>
+          <p:cNvPr id="10" name="TextBox 9"/>
+          <p:cNvSpPr txBox="1"/>
+          <p:nvPr/>
+        </p:nvSpPr>
+        <p:spPr>
+          <a:xfrm>
+            <a:off x="6400800" y="1554480"/>
+            <a:ext cx="5303520" cy="3200400"/>
+          </a:xfrm>
+          <a:prstGeom prst="rect">
+            <a:avLst/>
+          </a:prstGeom>
+          <a:noFill/>
+        </p:spPr>
+        <p:txBody>
+          <a:bodyPr wrap="square">
+            <a:spAutoFit/>
+          </a:bodyPr>
+          <a:lstStyle/>
+          <a:p>
+            <a:r>
+              <a:rPr sz="1500" b="0">
+                <a:solidFill>
+                  <a:srgbClr val="009944"/>
+                </a:solidFill>
+                <a:latin typeface="Calibri"/>
+              </a:rPr>
+              <a:t>•  Actively maintained with regular updates</a:t>
+            </a:r>
+          </a:p>
+          <a:p>
+            <a:r>
+              <a:rPr sz="1500" b="0">
+                <a:solidFill>
+                  <a:srgbClr val="009944"/>
+                </a:solidFill>
+                <a:latin typeface="Calibri"/>
+              </a:rPr>
+              <a:t>•  27+ resource types with full CRUD operations</a:t>
+            </a:r>
+          </a:p>
+          <a:p>
+            <a:r>
+              <a:rPr sz="1500" b="0">
+                <a:solidFill>
+                  <a:srgbClr val="009944"/>
+                </a:solidFill>
+                <a:latin typeface="Calibri"/>
+              </a:rPr>
+              <a:t>•  All IICS pod regions supported</a:t>
+            </a:r>
+          </a:p>
+          <a:p>
+            <a:r>
+              <a:rPr sz="1500" b="0">
+                <a:solidFill>
+                  <a:srgbClr val="009944"/>
+                </a:solidFill>
+                <a:latin typeface="Calibri"/>
+              </a:rPr>
+              <a:t>•  Named profiles, OS keychain, and session caching</a:t>
+            </a:r>
+          </a:p>
+          <a:p>
+            <a:r>
+              <a:rPr sz="1500" b="0">
+                <a:solidFill>
+                  <a:srgbClr val="009944"/>
+                </a:solidFill>
+                <a:latin typeface="Calibri"/>
+              </a:rPr>
+              <a:t>•  ~8 MB statically-linked Go binary – no runtime dependencies</a:t>
+            </a:r>
+          </a:p>
+        </p:txBody>
+      </p:sp>
+      <p:sp>
+        <p:nvSpPr>
+          <p:cNvPr id="11" name="Rectangle 10"/>
           <p:cNvSpPr/>
           <p:nvPr/>
         </p:nvSpPr>
         <p:spPr>
           <a:xfrm>
-            <a:off x="457200" y="1188720"/>
-            <a:ext cx="11247120" cy="5303520"/>
+            <a:off x="457200" y="4846320"/>
+            <a:ext cx="11247120" cy="1645920"/>
           </a:xfrm>
           <a:prstGeom prst="rect">
             <a:avLst/>
@@ -7255,14 +7738,14 @@
       </p:sp>
       <p:sp>
         <p:nvSpPr>
-          <p:cNvPr id="8" name="TextBox 7"/>
+          <p:cNvPr id="12" name="TextBox 11"/>
           <p:cNvSpPr txBox="1"/>
           <p:nvPr/>
         </p:nvSpPr>
         <p:spPr>
           <a:xfrm>
-            <a:off x="594360" y="1280160"/>
-            <a:ext cx="10972800" cy="5120640"/>
+            <a:off x="594360" y="4937760"/>
+            <a:ext cx="10972800" cy="1463040"/>
           </a:xfrm>
           <a:prstGeom prst="rect">
             <a:avLst/>
@@ -7283,27 +7766,11 @@
                 </a:solidFill>
                 <a:latin typeface="Courier New"/>
               </a:rPr>
-              <a:t># 1. Download the binary for your platform
+              <a:t># Install – one line
 curl -L https://github.com/jbrazda/iics-cli/releases/latest/download/iics_linux_amd64 \
   -o /usr/local/bin/iics &amp;&amp; chmod +x /usr/local/bin/iics
-# 2. Create ~/.iics/config.yaml
-mkdir -p ~/.iics &amp;&amp; chmod 700 ~/.iics
-cat &gt; ~/.iics/config.yaml &lt;&lt; 'EOF'
-defaultProfile: default
-profiles:
-  default:
-    region: US
-    username: your-email@company.com
-EOF
-chmod 600 ~/.iics/config.yaml
-# 3. Set your password in the environment
-export IICS_PASSWORD='your-password'
-# 4. Login (optional – cached for 30 min)
-iics login
-# 5. Start exploring
-iics user list
-iics connection list -o json | jq '.[].name'
-iics export create --name my-first-export --project MyProject</a:t>
+# Docker – copy single binary
+COPY iics /usr/local/bin/iics</a:t>
             </a:r>
           </a:p>
         </p:txBody>
@@ -7335,7 +7802,7 @@
         <p:spPr>
           <a:xfrm>
             <a:off x="0" y="0"/>
-            <a:ext cx="12188952" cy="6858000"/>
+            <a:ext cx="12188952" cy="1005840"/>
           </a:xfrm>
           <a:prstGeom prst="rect">
             <a:avLst/>
@@ -7371,20 +7838,90 @@
       </p:sp>
       <p:sp>
         <p:nvSpPr>
-          <p:cNvPr id="3" name="Rectangle 2"/>
+          <p:cNvPr id="3" name="TextBox 2"/>
+          <p:cNvSpPr txBox="1"/>
+          <p:nvPr/>
+        </p:nvSpPr>
+        <p:spPr>
+          <a:xfrm>
+            <a:off x="274320" y="91440"/>
+            <a:ext cx="11430000" cy="640080"/>
+          </a:xfrm>
+          <a:prstGeom prst="rect">
+            <a:avLst/>
+          </a:prstGeom>
+          <a:noFill/>
+        </p:spPr>
+        <p:txBody>
+          <a:bodyPr wrap="square">
+            <a:spAutoFit/>
+          </a:bodyPr>
+          <a:lstStyle/>
+          <a:p>
+            <a:pPr algn="l"/>
+            <a:r>
+              <a:rPr sz="2800" b="1" i="0">
+                <a:solidFill>
+                  <a:srgbClr val="FFFFFF"/>
+                </a:solidFill>
+                <a:latin typeface="Calibri"/>
+              </a:rPr>
+              <a:t>Structured Subcommands &amp; Built-in Help</a:t>
+            </a:r>
+          </a:p>
+        </p:txBody>
+      </p:sp>
+      <p:sp>
+        <p:nvSpPr>
+          <p:cNvPr id="4" name="TextBox 3"/>
+          <p:cNvSpPr txBox="1"/>
+          <p:nvPr/>
+        </p:nvSpPr>
+        <p:spPr>
+          <a:xfrm>
+            <a:off x="274320" y="685800"/>
+            <a:ext cx="11430000" cy="365760"/>
+          </a:xfrm>
+          <a:prstGeom prst="rect">
+            <a:avLst/>
+          </a:prstGeom>
+          <a:noFill/>
+        </p:spPr>
+        <p:txBody>
+          <a:bodyPr wrap="square">
+            <a:spAutoFit/>
+          </a:bodyPr>
+          <a:lstStyle/>
+          <a:p>
+            <a:pPr algn="l"/>
+            <a:r>
+              <a:rPr sz="1400" b="0" i="0">
+                <a:solidFill>
+                  <a:srgbClr val="BBCCFF"/>
+                </a:solidFill>
+                <a:latin typeface="Calibri"/>
+              </a:rPr>
+              <a:t>kubectl / gh / aws style resource-verb hierarchy</a:t>
+            </a:r>
+          </a:p>
+        </p:txBody>
+      </p:sp>
+      <p:sp>
+        <p:nvSpPr>
+          <p:cNvPr id="5" name="Rectangle 4"/>
           <p:cNvSpPr/>
           <p:nvPr/>
         </p:nvSpPr>
         <p:spPr>
           <a:xfrm>
-            <a:off x="0" y="3200400"/>
-            <a:ext cx="12188952" cy="54864"/>
+            <a:off x="0" y="6583680"/>
+            <a:ext cx="12188952" cy="274320"/>
           </a:xfrm>
           <a:prstGeom prst="rect">
             <a:avLst/>
           </a:prstGeom>
           <a:solidFill>
-            <a:srgbClr val="FF6600"/>
+            <a:srgbClr val="003366"/>
           </a:solidFill>
           <a:ln>
             <a:noFill/>
@@ -7414,14 +7951,14 @@
       </p:sp>
       <p:sp>
         <p:nvSpPr>
-          <p:cNvPr id="4" name="TextBox 3"/>
+          <p:cNvPr id="6" name="TextBox 5"/>
           <p:cNvSpPr txBox="1"/>
           <p:nvPr/>
         </p:nvSpPr>
         <p:spPr>
           <a:xfrm>
-            <a:off x="914400" y="1371600"/>
-            <a:ext cx="10058400" cy="914400"/>
+            <a:off x="274320" y="6565392"/>
+            <a:ext cx="11612880" cy="274320"/>
           </a:xfrm>
           <a:prstGeom prst="rect">
             <a:avLst/>
@@ -7434,29 +7971,72 @@
           </a:bodyPr>
           <a:lstStyle/>
           <a:p>
+            <a:pPr algn="l"/>
+            <a:r>
+              <a:rPr sz="900" b="0" i="0">
+                <a:solidFill>
+                  <a:srgbClr val="AABBCC"/>
+                </a:solidFill>
+                <a:latin typeface="Calibri"/>
+              </a:rPr>
+              <a:t>iics-cli  |  Informatica IICS Command Line Interface</a:t>
+            </a:r>
+          </a:p>
+        </p:txBody>
+      </p:sp>
+      <p:sp>
+        <p:nvSpPr>
+          <p:cNvPr id="7" name="Rectangle 6"/>
+          <p:cNvSpPr/>
+          <p:nvPr/>
+        </p:nvSpPr>
+        <p:spPr>
+          <a:xfrm>
+            <a:off x="457200" y="1188720"/>
+            <a:ext cx="6858000" cy="5029200"/>
+          </a:xfrm>
+          <a:prstGeom prst="rect">
+            <a:avLst/>
+          </a:prstGeom>
+          <a:solidFill>
+            <a:srgbClr val="1E1E2E"/>
+          </a:solidFill>
+          <a:ln>
+            <a:noFill/>
+          </a:ln>
+        </p:spPr>
+        <p:style>
+          <a:lnRef idx="1">
+            <a:schemeClr val="accent1"/>
+          </a:lnRef>
+          <a:fillRef idx="3">
+            <a:schemeClr val="accent1"/>
+          </a:fillRef>
+          <a:effectRef idx="2">
+            <a:schemeClr val="accent1"/>
+          </a:effectRef>
+          <a:fontRef idx="minor">
+            <a:schemeClr val="lt1"/>
+          </a:fontRef>
+        </p:style>
+        <p:txBody>
+          <a:bodyPr rtlCol="0" anchor="ctr"/>
+          <a:lstStyle/>
+          <a:p>
             <a:pPr algn="ctr"/>
-            <a:r>
-              <a:rPr sz="5400" b="1" i="0">
-                <a:solidFill>
-                  <a:srgbClr val="FFFFFF"/>
-                </a:solidFill>
-                <a:latin typeface="Calibri"/>
-              </a:rPr>
-              <a:t>Questions?</a:t>
-            </a:r>
-          </a:p>
-        </p:txBody>
-      </p:sp>
-      <p:sp>
-        <p:nvSpPr>
-          <p:cNvPr id="5" name="TextBox 4"/>
+          </a:p>
+        </p:txBody>
+      </p:sp>
+      <p:sp>
+        <p:nvSpPr>
+          <p:cNvPr id="8" name="TextBox 7"/>
           <p:cNvSpPr txBox="1"/>
           <p:nvPr/>
         </p:nvSpPr>
         <p:spPr>
           <a:xfrm>
-            <a:off x="914400" y="2560320"/>
-            <a:ext cx="10058400" cy="548640"/>
+            <a:off x="594360" y="1280160"/>
+            <a:ext cx="6583680" cy="4846320"/>
           </a:xfrm>
           <a:prstGeom prst="rect">
             <a:avLst/>
@@ -7469,29 +8049,43 @@
           </a:bodyPr>
           <a:lstStyle/>
           <a:p>
-            <a:pPr algn="ctr"/>
-            <a:r>
-              <a:rPr sz="2200" b="0" i="0">
-                <a:solidFill>
-                  <a:srgbClr val="FFAA44"/>
-                </a:solidFill>
-                <a:latin typeface="Calibri"/>
-              </a:rPr>
-              <a:t>github.com/jbrazda/iics-cli</a:t>
-            </a:r>
-          </a:p>
-        </p:txBody>
-      </p:sp>
-      <p:sp>
-        <p:nvSpPr>
-          <p:cNvPr id="6" name="TextBox 5"/>
+            <a:pPr algn="l"/>
+            <a:r>
+              <a:rPr sz="1000" b="0" i="0">
+                <a:solidFill>
+                  <a:srgbClr val="A6E3A1"/>
+                </a:solidFill>
+                <a:latin typeface="Courier New"/>
+              </a:rPr>
+              <a:t># Resource  Verb  Flags
+iics user   list
+iics user   get   --id abc123
+iics user   create --from-file user.json
+iics connection list
+iics connection update --id xyz --from-file conn.json
+iics export run --name nightly --project Prod
+iics export status --id 12345
+iics export download --id 12345 --output export.zip
+iics package expand --source export.zip --target ./workspace
+iics package create --source ./workspace --manifest-file plan.csv
+iics release manifest --project Prod --output manifest.yaml
+iics release plan --manifest manifest.yaml --targets dev,prod
+iics sourcecontrol checkin --project Prod --comment "release 2.4"
+iics state fetch --project Prod --output state.json</a:t>
+            </a:r>
+          </a:p>
+        </p:txBody>
+      </p:sp>
+      <p:sp>
+        <p:nvSpPr>
+          <p:cNvPr id="9" name="TextBox 8"/>
           <p:cNvSpPr txBox="1"/>
           <p:nvPr/>
         </p:nvSpPr>
         <p:spPr>
           <a:xfrm>
-            <a:off x="914400" y="3291840"/>
-            <a:ext cx="10058400" cy="457200"/>
+            <a:off x="7498079" y="1188720"/>
+            <a:ext cx="4389120" cy="365760"/>
           </a:xfrm>
           <a:prstGeom prst="rect">
             <a:avLst/>
@@ -7504,29 +8098,72 @@
           </a:bodyPr>
           <a:lstStyle/>
           <a:p>
+            <a:pPr algn="l"/>
+            <a:r>
+              <a:rPr sz="1400" b="1" i="0">
+                <a:solidFill>
+                  <a:srgbClr val="003366"/>
+                </a:solidFill>
+                <a:latin typeface="Calibri"/>
+              </a:rPr>
+              <a:t>Built-in help at every level</a:t>
+            </a:r>
+          </a:p>
+        </p:txBody>
+      </p:sp>
+      <p:sp>
+        <p:nvSpPr>
+          <p:cNvPr id="10" name="Rectangle 9"/>
+          <p:cNvSpPr/>
+          <p:nvPr/>
+        </p:nvSpPr>
+        <p:spPr>
+          <a:xfrm>
+            <a:off x="7498079" y="1600200"/>
+            <a:ext cx="4389120" cy="1554480"/>
+          </a:xfrm>
+          <a:prstGeom prst="rect">
+            <a:avLst/>
+          </a:prstGeom>
+          <a:solidFill>
+            <a:srgbClr val="1E1E2E"/>
+          </a:solidFill>
+          <a:ln>
+            <a:noFill/>
+          </a:ln>
+        </p:spPr>
+        <p:style>
+          <a:lnRef idx="1">
+            <a:schemeClr val="accent1"/>
+          </a:lnRef>
+          <a:fillRef idx="3">
+            <a:schemeClr val="accent1"/>
+          </a:fillRef>
+          <a:effectRef idx="2">
+            <a:schemeClr val="accent1"/>
+          </a:effectRef>
+          <a:fontRef idx="minor">
+            <a:schemeClr val="lt1"/>
+          </a:fontRef>
+        </p:style>
+        <p:txBody>
+          <a:bodyPr rtlCol="0" anchor="ctr"/>
+          <a:lstStyle/>
+          <a:p>
             <a:pPr algn="ctr"/>
-            <a:r>
-              <a:rPr sz="1600" b="0" i="0">
-                <a:solidFill>
-                  <a:srgbClr val="BBCCFF"/>
-                </a:solidFill>
-                <a:latin typeface="Calibri"/>
-              </a:rPr>
-              <a:t>Source code  •  Releases  •  Issues  •  Documentation</a:t>
-            </a:r>
-          </a:p>
-        </p:txBody>
-      </p:sp>
-      <p:sp>
-        <p:nvSpPr>
-          <p:cNvPr id="7" name="TextBox 6"/>
+          </a:p>
+        </p:txBody>
+      </p:sp>
+      <p:sp>
+        <p:nvSpPr>
+          <p:cNvPr id="11" name="TextBox 10"/>
           <p:cNvSpPr txBox="1"/>
           <p:nvPr/>
         </p:nvSpPr>
         <p:spPr>
           <a:xfrm>
-            <a:off x="914400" y="3931920"/>
-            <a:ext cx="10058400" cy="457200"/>
+            <a:off x="7635239" y="1691640"/>
+            <a:ext cx="4114800" cy="1371600"/>
           </a:xfrm>
           <a:prstGeom prst="rect">
             <a:avLst/>
@@ -7539,15 +8176,2765 @@
           </a:bodyPr>
           <a:lstStyle/>
           <a:p>
+            <a:pPr algn="l"/>
+            <a:r>
+              <a:rPr sz="1100" b="0" i="0">
+                <a:solidFill>
+                  <a:srgbClr val="A6E3A1"/>
+                </a:solidFill>
+                <a:latin typeface="Courier New"/>
+              </a:rPr>
+              <a:t>iics --help
+iics user --help
+iics export create --help
+iics package --help</a:t>
+            </a:r>
+          </a:p>
+        </p:txBody>
+      </p:sp>
+      <p:sp>
+        <p:nvSpPr>
+          <p:cNvPr id="12" name="TextBox 11"/>
+          <p:cNvSpPr txBox="1"/>
+          <p:nvPr/>
+        </p:nvSpPr>
+        <p:spPr>
+          <a:xfrm>
+            <a:off x="7498079" y="3291840"/>
+            <a:ext cx="4389120" cy="2560320"/>
+          </a:xfrm>
+          <a:prstGeom prst="rect">
+            <a:avLst/>
+          </a:prstGeom>
+          <a:noFill/>
+        </p:spPr>
+        <p:txBody>
+          <a:bodyPr wrap="square">
+            <a:spAutoFit/>
+          </a:bodyPr>
+          <a:lstStyle/>
+          <a:p>
+            <a:r>
+              <a:rPr sz="1300" b="0">
+                <a:solidFill>
+                  <a:srgbClr val="333333"/>
+                </a:solidFill>
+                <a:latin typeface="Calibri"/>
+              </a:rPr>
+              <a:t>•  Same pattern as kubectl, gh, aws – familiar to DevOps teams</a:t>
+            </a:r>
+          </a:p>
+          <a:p>
+            <a:r>
+              <a:rPr sz="1300" b="0">
+                <a:solidFill>
+                  <a:srgbClr val="333333"/>
+                </a:solidFill>
+                <a:latin typeface="Calibri"/>
+              </a:rPr>
+              <a:t>•  Tab completion: bash, zsh, fish, powershell</a:t>
+            </a:r>
+          </a:p>
+          <a:p>
+            <a:r>
+              <a:rPr sz="1300" b="0">
+                <a:solidFill>
+                  <a:srgbClr val="333333"/>
+                </a:solidFill>
+                <a:latin typeface="Calibri"/>
+              </a:rPr>
+              <a:t>•  Per-command docs in docs/documentation/</a:t>
+            </a:r>
+          </a:p>
+          <a:p>
+            <a:r>
+              <a:rPr sz="1300" b="0">
+                <a:solidFill>
+                  <a:srgbClr val="333333"/>
+                </a:solidFill>
+                <a:latin typeface="Calibri"/>
+              </a:rPr>
+              <a:t>•  Full flag reference in built-in --help</a:t>
+            </a:r>
+          </a:p>
+          <a:p>
+            <a:r>
+              <a:rPr sz="1300" b="0">
+                <a:solidFill>
+                  <a:srgbClr val="333333"/>
+                </a:solidFill>
+                <a:latin typeface="Calibri"/>
+              </a:rPr>
+              <a:t>•  --debug prints full HTTP trace to stderr</a:t>
+            </a:r>
+          </a:p>
+        </p:txBody>
+      </p:sp>
+    </p:spTree>
+  </p:cSld>
+  <p:clrMapOvr>
+    <a:masterClrMapping/>
+  </p:clrMapOvr>
+</p:sld>
+</file>
+
+<file path=ppt/slides/slide17.xml><?xml version="1.0" encoding="utf-8"?>
+<p:sld xmlns:a="http://schemas.openxmlformats.org/drawingml/2006/main" xmlns:p="http://schemas.openxmlformats.org/presentationml/2006/main" xmlns:r="http://schemas.openxmlformats.org/officeDocument/2006/relationships">
+  <p:cSld>
+    <p:spTree>
+      <p:nvGrpSpPr>
+        <p:cNvPr id="1" name=""/>
+        <p:cNvGrpSpPr/>
+        <p:nvPr/>
+      </p:nvGrpSpPr>
+      <p:grpSpPr/>
+      <p:sp>
+        <p:nvSpPr>
+          <p:cNvPr id="2" name="Rectangle 1"/>
+          <p:cNvSpPr/>
+          <p:nvPr/>
+        </p:nvSpPr>
+        <p:spPr>
+          <a:xfrm>
+            <a:off x="0" y="0"/>
+            <a:ext cx="12188952" cy="1005840"/>
+          </a:xfrm>
+          <a:prstGeom prst="rect">
+            <a:avLst/>
+          </a:prstGeom>
+          <a:solidFill>
+            <a:srgbClr val="003366"/>
+          </a:solidFill>
+          <a:ln>
+            <a:noFill/>
+          </a:ln>
+        </p:spPr>
+        <p:style>
+          <a:lnRef idx="1">
+            <a:schemeClr val="accent1"/>
+          </a:lnRef>
+          <a:fillRef idx="3">
+            <a:schemeClr val="accent1"/>
+          </a:fillRef>
+          <a:effectRef idx="2">
+            <a:schemeClr val="accent1"/>
+          </a:effectRef>
+          <a:fontRef idx="minor">
+            <a:schemeClr val="lt1"/>
+          </a:fontRef>
+        </p:style>
+        <p:txBody>
+          <a:bodyPr rtlCol="0" anchor="ctr"/>
+          <a:lstStyle/>
+          <a:p>
             <a:pPr algn="ctr"/>
-            <a:r>
-              <a:rPr sz="1400" b="0" i="1">
-                <a:solidFill>
-                  <a:srgbClr val="888888"/>
-                </a:solidFill>
-                <a:latin typeface="Calibri"/>
-              </a:rPr>
-              <a:t>docs/documentation/  in the repository for full per-command reference</a:t>
+          </a:p>
+        </p:txBody>
+      </p:sp>
+      <p:sp>
+        <p:nvSpPr>
+          <p:cNvPr id="3" name="TextBox 2"/>
+          <p:cNvSpPr txBox="1"/>
+          <p:nvPr/>
+        </p:nvSpPr>
+        <p:spPr>
+          <a:xfrm>
+            <a:off x="274320" y="91440"/>
+            <a:ext cx="11430000" cy="640080"/>
+          </a:xfrm>
+          <a:prstGeom prst="rect">
+            <a:avLst/>
+          </a:prstGeom>
+          <a:noFill/>
+        </p:spPr>
+        <p:txBody>
+          <a:bodyPr wrap="square">
+            <a:spAutoFit/>
+          </a:bodyPr>
+          <a:lstStyle/>
+          <a:p>
+            <a:pPr algn="l"/>
+            <a:r>
+              <a:rPr sz="2800" b="1" i="0">
+                <a:solidFill>
+                  <a:srgbClr val="FFFFFF"/>
+                </a:solidFill>
+                <a:latin typeface="Calibri"/>
+              </a:rPr>
+              <a:t>Better Error Reporting</a:t>
+            </a:r>
+          </a:p>
+        </p:txBody>
+      </p:sp>
+      <p:sp>
+        <p:nvSpPr>
+          <p:cNvPr id="4" name="TextBox 3"/>
+          <p:cNvSpPr txBox="1"/>
+          <p:nvPr/>
+        </p:nvSpPr>
+        <p:spPr>
+          <a:xfrm>
+            <a:off x="274320" y="685800"/>
+            <a:ext cx="11430000" cy="365760"/>
+          </a:xfrm>
+          <a:prstGeom prst="rect">
+            <a:avLst/>
+          </a:prstGeom>
+          <a:noFill/>
+        </p:spPr>
+        <p:txBody>
+          <a:bodyPr wrap="square">
+            <a:spAutoFit/>
+          </a:bodyPr>
+          <a:lstStyle/>
+          <a:p>
+            <a:pPr algn="l"/>
+            <a:r>
+              <a:rPr sz="1400" b="0" i="0">
+                <a:solidFill>
+                  <a:srgbClr val="BBCCFF"/>
+                </a:solidFill>
+                <a:latin typeface="Calibri"/>
+              </a:rPr>
+              <a:t>Structured API errors with HTTP context – all on stderr</a:t>
+            </a:r>
+          </a:p>
+        </p:txBody>
+      </p:sp>
+      <p:sp>
+        <p:nvSpPr>
+          <p:cNvPr id="5" name="Rectangle 4"/>
+          <p:cNvSpPr/>
+          <p:nvPr/>
+        </p:nvSpPr>
+        <p:spPr>
+          <a:xfrm>
+            <a:off x="0" y="6583680"/>
+            <a:ext cx="12188952" cy="274320"/>
+          </a:xfrm>
+          <a:prstGeom prst="rect">
+            <a:avLst/>
+          </a:prstGeom>
+          <a:solidFill>
+            <a:srgbClr val="003366"/>
+          </a:solidFill>
+          <a:ln>
+            <a:noFill/>
+          </a:ln>
+        </p:spPr>
+        <p:style>
+          <a:lnRef idx="1">
+            <a:schemeClr val="accent1"/>
+          </a:lnRef>
+          <a:fillRef idx="3">
+            <a:schemeClr val="accent1"/>
+          </a:fillRef>
+          <a:effectRef idx="2">
+            <a:schemeClr val="accent1"/>
+          </a:effectRef>
+          <a:fontRef idx="minor">
+            <a:schemeClr val="lt1"/>
+          </a:fontRef>
+        </p:style>
+        <p:txBody>
+          <a:bodyPr rtlCol="0" anchor="ctr"/>
+          <a:lstStyle/>
+          <a:p>
+            <a:pPr algn="ctr"/>
+          </a:p>
+        </p:txBody>
+      </p:sp>
+      <p:sp>
+        <p:nvSpPr>
+          <p:cNvPr id="6" name="TextBox 5"/>
+          <p:cNvSpPr txBox="1"/>
+          <p:nvPr/>
+        </p:nvSpPr>
+        <p:spPr>
+          <a:xfrm>
+            <a:off x="274320" y="6565392"/>
+            <a:ext cx="11612880" cy="274320"/>
+          </a:xfrm>
+          <a:prstGeom prst="rect">
+            <a:avLst/>
+          </a:prstGeom>
+          <a:noFill/>
+        </p:spPr>
+        <p:txBody>
+          <a:bodyPr wrap="square">
+            <a:spAutoFit/>
+          </a:bodyPr>
+          <a:lstStyle/>
+          <a:p>
+            <a:pPr algn="l"/>
+            <a:r>
+              <a:rPr sz="900" b="0" i="0">
+                <a:solidFill>
+                  <a:srgbClr val="AABBCC"/>
+                </a:solidFill>
+                <a:latin typeface="Calibri"/>
+              </a:rPr>
+              <a:t>iics-cli  |  Informatica IICS Command Line Interface</a:t>
+            </a:r>
+          </a:p>
+        </p:txBody>
+      </p:sp>
+      <p:sp>
+        <p:nvSpPr>
+          <p:cNvPr id="7" name="TextBox 6"/>
+          <p:cNvSpPr txBox="1"/>
+          <p:nvPr/>
+        </p:nvSpPr>
+        <p:spPr>
+          <a:xfrm>
+            <a:off x="457200" y="1097280"/>
+            <a:ext cx="5303520" cy="365760"/>
+          </a:xfrm>
+          <a:prstGeom prst="rect">
+            <a:avLst/>
+          </a:prstGeom>
+          <a:noFill/>
+        </p:spPr>
+        <p:txBody>
+          <a:bodyPr wrap="square">
+            <a:spAutoFit/>
+          </a:bodyPr>
+          <a:lstStyle/>
+          <a:p>
+            <a:pPr algn="l"/>
+            <a:r>
+              <a:rPr sz="1400" b="1" i="0">
+                <a:solidFill>
+                  <a:srgbClr val="CC0000"/>
+                </a:solidFill>
+                <a:latin typeface="Calibri"/>
+              </a:rPr>
+              <a:t>Official CLI – vague error messages</a:t>
+            </a:r>
+          </a:p>
+        </p:txBody>
+      </p:sp>
+      <p:sp>
+        <p:nvSpPr>
+          <p:cNvPr id="8" name="Rectangle 7"/>
+          <p:cNvSpPr/>
+          <p:nvPr/>
+        </p:nvSpPr>
+        <p:spPr>
+          <a:xfrm>
+            <a:off x="457200" y="1508760"/>
+            <a:ext cx="5303520" cy="1371600"/>
+          </a:xfrm>
+          <a:prstGeom prst="rect">
+            <a:avLst/>
+          </a:prstGeom>
+          <a:solidFill>
+            <a:srgbClr val="1E1E2E"/>
+          </a:solidFill>
+          <a:ln>
+            <a:noFill/>
+          </a:ln>
+        </p:spPr>
+        <p:style>
+          <a:lnRef idx="1">
+            <a:schemeClr val="accent1"/>
+          </a:lnRef>
+          <a:fillRef idx="3">
+            <a:schemeClr val="accent1"/>
+          </a:fillRef>
+          <a:effectRef idx="2">
+            <a:schemeClr val="accent1"/>
+          </a:effectRef>
+          <a:fontRef idx="minor">
+            <a:schemeClr val="lt1"/>
+          </a:fontRef>
+        </p:style>
+        <p:txBody>
+          <a:bodyPr rtlCol="0" anchor="ctr"/>
+          <a:lstStyle/>
+          <a:p>
+            <a:pPr algn="ctr"/>
+          </a:p>
+        </p:txBody>
+      </p:sp>
+      <p:sp>
+        <p:nvSpPr>
+          <p:cNvPr id="9" name="TextBox 8"/>
+          <p:cNvSpPr txBox="1"/>
+          <p:nvPr/>
+        </p:nvSpPr>
+        <p:spPr>
+          <a:xfrm>
+            <a:off x="594360" y="1600200"/>
+            <a:ext cx="5029200" cy="1188720"/>
+          </a:xfrm>
+          <a:prstGeom prst="rect">
+            <a:avLst/>
+          </a:prstGeom>
+          <a:noFill/>
+        </p:spPr>
+        <p:txBody>
+          <a:bodyPr wrap="square">
+            <a:spAutoFit/>
+          </a:bodyPr>
+          <a:lstStyle/>
+          <a:p>
+            <a:pPr algn="l"/>
+            <a:r>
+              <a:rPr sz="1100" b="0" i="0">
+                <a:solidFill>
+                  <a:srgbClr val="A6E3A1"/>
+                </a:solidFill>
+                <a:latin typeface="Courier New"/>
+              </a:rPr>
+              <a:t>$ iics export -u user -p pass -r us \
+  -a "Project/Missing.Process"
+Error occurred.
+exit code: 0</a:t>
+            </a:r>
+          </a:p>
+        </p:txBody>
+      </p:sp>
+      <p:sp>
+        <p:nvSpPr>
+          <p:cNvPr id="10" name="TextBox 9"/>
+          <p:cNvSpPr txBox="1"/>
+          <p:nvPr/>
+        </p:nvSpPr>
+        <p:spPr>
+          <a:xfrm>
+            <a:off x="6400800" y="1097280"/>
+            <a:ext cx="5303520" cy="365760"/>
+          </a:xfrm>
+          <a:prstGeom prst="rect">
+            <a:avLst/>
+          </a:prstGeom>
+          <a:noFill/>
+        </p:spPr>
+        <p:txBody>
+          <a:bodyPr wrap="square">
+            <a:spAutoFit/>
+          </a:bodyPr>
+          <a:lstStyle/>
+          <a:p>
+            <a:pPr algn="l"/>
+            <a:r>
+              <a:rPr sz="1400" b="1" i="0">
+                <a:solidFill>
+                  <a:srgbClr val="009944"/>
+                </a:solidFill>
+                <a:latin typeface="Calibri"/>
+              </a:rPr>
+              <a:t>iics-cli – structured errors to stderr</a:t>
+            </a:r>
+          </a:p>
+        </p:txBody>
+      </p:sp>
+      <p:sp>
+        <p:nvSpPr>
+          <p:cNvPr id="11" name="Rectangle 10"/>
+          <p:cNvSpPr/>
+          <p:nvPr/>
+        </p:nvSpPr>
+        <p:spPr>
+          <a:xfrm>
+            <a:off x="6400800" y="1508760"/>
+            <a:ext cx="5303520" cy="2286000"/>
+          </a:xfrm>
+          <a:prstGeom prst="rect">
+            <a:avLst/>
+          </a:prstGeom>
+          <a:solidFill>
+            <a:srgbClr val="1E1E2E"/>
+          </a:solidFill>
+          <a:ln>
+            <a:noFill/>
+          </a:ln>
+        </p:spPr>
+        <p:style>
+          <a:lnRef idx="1">
+            <a:schemeClr val="accent1"/>
+          </a:lnRef>
+          <a:fillRef idx="3">
+            <a:schemeClr val="accent1"/>
+          </a:fillRef>
+          <a:effectRef idx="2">
+            <a:schemeClr val="accent1"/>
+          </a:effectRef>
+          <a:fontRef idx="minor">
+            <a:schemeClr val="lt1"/>
+          </a:fontRef>
+        </p:style>
+        <p:txBody>
+          <a:bodyPr rtlCol="0" anchor="ctr"/>
+          <a:lstStyle/>
+          <a:p>
+            <a:pPr algn="ctr"/>
+          </a:p>
+        </p:txBody>
+      </p:sp>
+      <p:sp>
+        <p:nvSpPr>
+          <p:cNvPr id="12" name="TextBox 11"/>
+          <p:cNvSpPr txBox="1"/>
+          <p:nvPr/>
+        </p:nvSpPr>
+        <p:spPr>
+          <a:xfrm>
+            <a:off x="6537960" y="1600200"/>
+            <a:ext cx="5029200" cy="2103120"/>
+          </a:xfrm>
+          <a:prstGeom prst="rect">
+            <a:avLst/>
+          </a:prstGeom>
+          <a:noFill/>
+        </p:spPr>
+        <p:txBody>
+          <a:bodyPr wrap="square">
+            <a:spAutoFit/>
+          </a:bodyPr>
+          <a:lstStyle/>
+          <a:p>
+            <a:pPr algn="l"/>
+            <a:r>
+              <a:rPr sz="1100" b="0" i="0">
+                <a:solidFill>
+                  <a:srgbClr val="A6E3A1"/>
+                </a:solidFill>
+                <a:latin typeface="Courier New"/>
+              </a:rPr>
+              <a:t>$ iics export create --name bad --project X
+Error: API error 400: project 'X' not found
+  HTTP 400 Bad Request
+  {
+    "error": {
+      "code": "ICS-012345",
+      "message": "project 'X' not found"
+    }
+  }
+exit code: 1</a:t>
+            </a:r>
+          </a:p>
+        </p:txBody>
+      </p:sp>
+      <p:sp>
+        <p:nvSpPr>
+          <p:cNvPr id="13" name="TextBox 12"/>
+          <p:cNvSpPr txBox="1"/>
+          <p:nvPr/>
+        </p:nvSpPr>
+        <p:spPr>
+          <a:xfrm>
+            <a:off x="457200" y="4023360"/>
+            <a:ext cx="11247120" cy="2286000"/>
+          </a:xfrm>
+          <a:prstGeom prst="rect">
+            <a:avLst/>
+          </a:prstGeom>
+          <a:noFill/>
+        </p:spPr>
+        <p:txBody>
+          <a:bodyPr wrap="square">
+            <a:spAutoFit/>
+          </a:bodyPr>
+          <a:lstStyle/>
+          <a:p>
+            <a:r>
+              <a:rPr sz="1500" b="0">
+                <a:solidFill>
+                  <a:srgbClr val="333333"/>
+                </a:solidFill>
+                <a:latin typeface="Calibri"/>
+              </a:rPr>
+              <a:t>•  Error summary always on stderr – stdout stays clean for piping</a:t>
+            </a:r>
+          </a:p>
+          <a:p>
+            <a:r>
+              <a:rPr sz="1500" b="0">
+                <a:solidFill>
+                  <a:srgbClr val="333333"/>
+                </a:solidFill>
+                <a:latin typeface="Calibri"/>
+              </a:rPr>
+              <a:t>•  --debug flag prints full request body for deep troubleshooting</a:t>
+            </a:r>
+          </a:p>
+          <a:p>
+            <a:r>
+              <a:rPr sz="1500" b="0">
+                <a:solidFill>
+                  <a:srgbClr val="333333"/>
+                </a:solidFill>
+                <a:latin typeface="Calibri"/>
+              </a:rPr>
+              <a:t>•  --verbose flag enables extra HTTP detail</a:t>
+            </a:r>
+          </a:p>
+          <a:p>
+            <a:r>
+              <a:rPr sz="1500" b="0">
+                <a:solidFill>
+                  <a:srgbClr val="333333"/>
+                </a:solidFill>
+                <a:latin typeface="Calibri"/>
+              </a:rPr>
+              <a:t>•  API error code, HTTP status, and response body all included</a:t>
+            </a:r>
+          </a:p>
+          <a:p>
+            <a:r>
+              <a:rPr sz="1500" b="0">
+                <a:solidFill>
+                  <a:srgbClr val="333333"/>
+                </a:solidFill>
+                <a:latin typeface="Calibri"/>
+              </a:rPr>
+              <a:t>•  Usage errors (exit 2) print a hint without cluttering stdout</a:t>
+            </a:r>
+          </a:p>
+        </p:txBody>
+      </p:sp>
+    </p:spTree>
+  </p:cSld>
+  <p:clrMapOvr>
+    <a:masterClrMapping/>
+  </p:clrMapOvr>
+</p:sld>
+</file>
+
+<file path=ppt/slides/slide18.xml><?xml version="1.0" encoding="utf-8"?>
+<p:sld xmlns:a="http://schemas.openxmlformats.org/drawingml/2006/main" xmlns:p="http://schemas.openxmlformats.org/presentationml/2006/main" xmlns:r="http://schemas.openxmlformats.org/officeDocument/2006/relationships">
+  <p:cSld>
+    <p:spTree>
+      <p:nvGrpSpPr>
+        <p:cNvPr id="1" name=""/>
+        <p:cNvGrpSpPr/>
+        <p:nvPr/>
+      </p:nvGrpSpPr>
+      <p:grpSpPr/>
+      <p:sp>
+        <p:nvSpPr>
+          <p:cNvPr id="2" name="Rectangle 1"/>
+          <p:cNvSpPr/>
+          <p:nvPr/>
+        </p:nvSpPr>
+        <p:spPr>
+          <a:xfrm>
+            <a:off x="0" y="0"/>
+            <a:ext cx="12188952" cy="1005840"/>
+          </a:xfrm>
+          <a:prstGeom prst="rect">
+            <a:avLst/>
+          </a:prstGeom>
+          <a:solidFill>
+            <a:srgbClr val="003366"/>
+          </a:solidFill>
+          <a:ln>
+            <a:noFill/>
+          </a:ln>
+        </p:spPr>
+        <p:style>
+          <a:lnRef idx="1">
+            <a:schemeClr val="accent1"/>
+          </a:lnRef>
+          <a:fillRef idx="3">
+            <a:schemeClr val="accent1"/>
+          </a:fillRef>
+          <a:effectRef idx="2">
+            <a:schemeClr val="accent1"/>
+          </a:effectRef>
+          <a:fontRef idx="minor">
+            <a:schemeClr val="lt1"/>
+          </a:fontRef>
+        </p:style>
+        <p:txBody>
+          <a:bodyPr rtlCol="0" anchor="ctr"/>
+          <a:lstStyle/>
+          <a:p>
+            <a:pPr algn="ctr"/>
+          </a:p>
+        </p:txBody>
+      </p:sp>
+      <p:sp>
+        <p:nvSpPr>
+          <p:cNvPr id="3" name="TextBox 2"/>
+          <p:cNvSpPr txBox="1"/>
+          <p:nvPr/>
+        </p:nvSpPr>
+        <p:spPr>
+          <a:xfrm>
+            <a:off x="274320" y="91440"/>
+            <a:ext cx="11430000" cy="640080"/>
+          </a:xfrm>
+          <a:prstGeom prst="rect">
+            <a:avLst/>
+          </a:prstGeom>
+          <a:noFill/>
+        </p:spPr>
+        <p:txBody>
+          <a:bodyPr wrap="square">
+            <a:spAutoFit/>
+          </a:bodyPr>
+          <a:lstStyle/>
+          <a:p>
+            <a:pPr algn="l"/>
+            <a:r>
+              <a:rPr sz="2800" b="1" i="0">
+                <a:solidFill>
+                  <a:srgbClr val="FFFFFF"/>
+                </a:solidFill>
+                <a:latin typeface="Calibri"/>
+              </a:rPr>
+              <a:t>Feature Comparison Summary</a:t>
+            </a:r>
+          </a:p>
+        </p:txBody>
+      </p:sp>
+      <p:sp>
+        <p:nvSpPr>
+          <p:cNvPr id="4" name="Rectangle 3"/>
+          <p:cNvSpPr/>
+          <p:nvPr/>
+        </p:nvSpPr>
+        <p:spPr>
+          <a:xfrm>
+            <a:off x="0" y="6583680"/>
+            <a:ext cx="12188952" cy="274320"/>
+          </a:xfrm>
+          <a:prstGeom prst="rect">
+            <a:avLst/>
+          </a:prstGeom>
+          <a:solidFill>
+            <a:srgbClr val="003366"/>
+          </a:solidFill>
+          <a:ln>
+            <a:noFill/>
+          </a:ln>
+        </p:spPr>
+        <p:style>
+          <a:lnRef idx="1">
+            <a:schemeClr val="accent1"/>
+          </a:lnRef>
+          <a:fillRef idx="3">
+            <a:schemeClr val="accent1"/>
+          </a:fillRef>
+          <a:effectRef idx="2">
+            <a:schemeClr val="accent1"/>
+          </a:effectRef>
+          <a:fontRef idx="minor">
+            <a:schemeClr val="lt1"/>
+          </a:fontRef>
+        </p:style>
+        <p:txBody>
+          <a:bodyPr rtlCol="0" anchor="ctr"/>
+          <a:lstStyle/>
+          <a:p>
+            <a:pPr algn="ctr"/>
+          </a:p>
+        </p:txBody>
+      </p:sp>
+      <p:sp>
+        <p:nvSpPr>
+          <p:cNvPr id="5" name="TextBox 4"/>
+          <p:cNvSpPr txBox="1"/>
+          <p:nvPr/>
+        </p:nvSpPr>
+        <p:spPr>
+          <a:xfrm>
+            <a:off x="274320" y="6565392"/>
+            <a:ext cx="11612880" cy="274320"/>
+          </a:xfrm>
+          <a:prstGeom prst="rect">
+            <a:avLst/>
+          </a:prstGeom>
+          <a:noFill/>
+        </p:spPr>
+        <p:txBody>
+          <a:bodyPr wrap="square">
+            <a:spAutoFit/>
+          </a:bodyPr>
+          <a:lstStyle/>
+          <a:p>
+            <a:pPr algn="l"/>
+            <a:r>
+              <a:rPr sz="900" b="0" i="0">
+                <a:solidFill>
+                  <a:srgbClr val="AABBCC"/>
+                </a:solidFill>
+                <a:latin typeface="Calibri"/>
+              </a:rPr>
+              <a:t>iics-cli  |  Informatica IICS Command Line Interface</a:t>
+            </a:r>
+          </a:p>
+        </p:txBody>
+      </p:sp>
+      <p:graphicFrame>
+        <p:nvGraphicFramePr>
+          <p:cNvPr id="6" name="Table 5"/>
+          <p:cNvGraphicFramePr>
+            <a:graphicFrameLocks noGrp="1"/>
+          </p:cNvGraphicFramePr>
+          <p:nvPr/>
+        </p:nvGraphicFramePr>
+        <p:xfrm>
+          <a:off x="365760" y="1097280"/>
+          <a:ext cx="11430000" cy="5394960"/>
+        </p:xfrm>
+        <a:graphic>
+          <a:graphicData uri="http://schemas.openxmlformats.org/drawingml/2006/table">
+            <a:tbl>
+              <a:tblPr firstRow="1" bandRow="1">
+                <a:tableStyleId>{5C22544A-7EE6-4342-B048-85BDC9FD1C3A}</a:tableStyleId>
+              </a:tblPr>
+              <a:tblGrid>
+                <a:gridCol w="3810000"/>
+                <a:gridCol w="3810000"/>
+                <a:gridCol w="3810000"/>
+              </a:tblGrid>
+              <a:tr h="234563">
+                <a:tc>
+                  <a:txBody>
+                    <a:bodyPr/>
+                    <a:lstStyle/>
+                    <a:p>
+                      <a:pPr algn="ctr"/>
+                      <a:r>
+                        <a:rPr b="1" sz="1300">
+                          <a:solidFill>
+                            <a:srgbClr val="FFFFFF"/>
+                          </a:solidFill>
+                          <a:latin typeface="Calibri"/>
+                        </a:rPr>
+                        <a:t>Capability</a:t>
+                      </a:r>
+                    </a:p>
+                  </a:txBody>
+                  <a:tcPr>
+                    <a:solidFill>
+                      <a:srgbClr val="0066CC"/>
+                    </a:solidFill>
+                  </a:tcPr>
+                </a:tc>
+                <a:tc>
+                  <a:txBody>
+                    <a:bodyPr/>
+                    <a:lstStyle/>
+                    <a:p>
+                      <a:pPr algn="ctr"/>
+                      <a:r>
+                        <a:rPr b="1" sz="1300">
+                          <a:solidFill>
+                            <a:srgbClr val="FFFFFF"/>
+                          </a:solidFill>
+                          <a:latin typeface="Calibri"/>
+                        </a:rPr>
+                        <a:t>Official Informatica CLI</a:t>
+                      </a:r>
+                    </a:p>
+                  </a:txBody>
+                  <a:tcPr>
+                    <a:solidFill>
+                      <a:srgbClr val="0066CC"/>
+                    </a:solidFill>
+                  </a:tcPr>
+                </a:tc>
+                <a:tc>
+                  <a:txBody>
+                    <a:bodyPr/>
+                    <a:lstStyle/>
+                    <a:p>
+                      <a:pPr algn="ctr"/>
+                      <a:r>
+                        <a:rPr b="1" sz="1300">
+                          <a:solidFill>
+                            <a:srgbClr val="FFFFFF"/>
+                          </a:solidFill>
+                          <a:latin typeface="Calibri"/>
+                        </a:rPr>
+                        <a:t>iics-cli</a:t>
+                      </a:r>
+                    </a:p>
+                  </a:txBody>
+                  <a:tcPr>
+                    <a:solidFill>
+                      <a:srgbClr val="0066CC"/>
+                    </a:solidFill>
+                  </a:tcPr>
+                </a:tc>
+              </a:tr>
+              <a:tr h="234563">
+                <a:tc>
+                  <a:txBody>
+                    <a:bodyPr/>
+                    <a:lstStyle/>
+                    <a:p>
+                      <a:pPr algn="l"/>
+                      <a:r>
+                        <a:rPr sz="1200">
+                          <a:solidFill>
+                            <a:srgbClr val="333333"/>
+                          </a:solidFill>
+                          <a:latin typeface="Calibri"/>
+                        </a:rPr>
+                        <a:t>Actively maintained</a:t>
+                      </a:r>
+                    </a:p>
+                  </a:txBody>
+                  <a:tcPr>
+                    <a:solidFill>
+                      <a:srgbClr val="F2F2F2"/>
+                    </a:solidFill>
+                  </a:tcPr>
+                </a:tc>
+                <a:tc>
+                  <a:txBody>
+                    <a:bodyPr/>
+                    <a:lstStyle/>
+                    <a:p>
+                      <a:pPr algn="ctr"/>
+                      <a:r>
+                        <a:rPr sz="1200">
+                          <a:solidFill>
+                            <a:srgbClr val="CC0000"/>
+                          </a:solidFill>
+                          <a:latin typeface="Calibri"/>
+                        </a:rPr>
+                        <a:t>No</a:t>
+                      </a:r>
+                    </a:p>
+                  </a:txBody>
+                  <a:tcPr>
+                    <a:solidFill>
+                      <a:srgbClr val="F2F2F2"/>
+                    </a:solidFill>
+                  </a:tcPr>
+                </a:tc>
+                <a:tc>
+                  <a:txBody>
+                    <a:bodyPr/>
+                    <a:lstStyle/>
+                    <a:p>
+                      <a:pPr algn="ctr"/>
+                      <a:r>
+                        <a:rPr b="1" sz="1200">
+                          <a:solidFill>
+                            <a:srgbClr val="009944"/>
+                          </a:solidFill>
+                          <a:latin typeface="Calibri"/>
+                        </a:rPr>
+                        <a:t>Yes</a:t>
+                      </a:r>
+                    </a:p>
+                  </a:txBody>
+                  <a:tcPr>
+                    <a:solidFill>
+                      <a:srgbClr val="F2F2F2"/>
+                    </a:solidFill>
+                  </a:tcPr>
+                </a:tc>
+              </a:tr>
+              <a:tr h="234563">
+                <a:tc>
+                  <a:txBody>
+                    <a:bodyPr/>
+                    <a:lstStyle/>
+                    <a:p>
+                      <a:pPr algn="l"/>
+                      <a:r>
+                        <a:rPr sz="1200">
+                          <a:solidFill>
+                            <a:srgbClr val="333333"/>
+                          </a:solidFill>
+                          <a:latin typeface="Calibri"/>
+                        </a:rPr>
+                        <a:t>POSIX exit codes</a:t>
+                      </a:r>
+                    </a:p>
+                  </a:txBody>
+                  <a:tcPr>
+                    <a:solidFill>
+                      <a:srgbClr val="FFFFFF"/>
+                    </a:solidFill>
+                  </a:tcPr>
+                </a:tc>
+                <a:tc>
+                  <a:txBody>
+                    <a:bodyPr/>
+                    <a:lstStyle/>
+                    <a:p>
+                      <a:pPr algn="ctr"/>
+                      <a:r>
+                        <a:rPr sz="1200">
+                          <a:solidFill>
+                            <a:srgbClr val="CC0000"/>
+                          </a:solidFill>
+                          <a:latin typeface="Calibri"/>
+                        </a:rPr>
+                        <a:t>No</a:t>
+                      </a:r>
+                    </a:p>
+                  </a:txBody>
+                  <a:tcPr>
+                    <a:solidFill>
+                      <a:srgbClr val="FFFFFF"/>
+                    </a:solidFill>
+                  </a:tcPr>
+                </a:tc>
+                <a:tc>
+                  <a:txBody>
+                    <a:bodyPr/>
+                    <a:lstStyle/>
+                    <a:p>
+                      <a:pPr algn="ctr"/>
+                      <a:r>
+                        <a:rPr b="1" sz="1200">
+                          <a:solidFill>
+                            <a:srgbClr val="009944"/>
+                          </a:solidFill>
+                          <a:latin typeface="Calibri"/>
+                        </a:rPr>
+                        <a:t>Yes</a:t>
+                      </a:r>
+                    </a:p>
+                  </a:txBody>
+                  <a:tcPr>
+                    <a:solidFill>
+                      <a:srgbClr val="FFFFFF"/>
+                    </a:solidFill>
+                  </a:tcPr>
+                </a:tc>
+              </a:tr>
+              <a:tr h="234563">
+                <a:tc>
+                  <a:txBody>
+                    <a:bodyPr/>
+                    <a:lstStyle/>
+                    <a:p>
+                      <a:pPr algn="l"/>
+                      <a:r>
+                        <a:rPr sz="1200">
+                          <a:solidFill>
+                            <a:srgbClr val="333333"/>
+                          </a:solidFill>
+                          <a:latin typeface="Calibri"/>
+                        </a:rPr>
+                        <a:t>JSON / CSV / YAML output</a:t>
+                      </a:r>
+                    </a:p>
+                  </a:txBody>
+                  <a:tcPr>
+                    <a:solidFill>
+                      <a:srgbClr val="F2F2F2"/>
+                    </a:solidFill>
+                  </a:tcPr>
+                </a:tc>
+                <a:tc>
+                  <a:txBody>
+                    <a:bodyPr/>
+                    <a:lstStyle/>
+                    <a:p>
+                      <a:pPr algn="ctr"/>
+                      <a:r>
+                        <a:rPr sz="1200">
+                          <a:solidFill>
+                            <a:srgbClr val="CC0000"/>
+                          </a:solidFill>
+                          <a:latin typeface="Calibri"/>
+                        </a:rPr>
+                        <a:t>No</a:t>
+                      </a:r>
+                    </a:p>
+                  </a:txBody>
+                  <a:tcPr>
+                    <a:solidFill>
+                      <a:srgbClr val="F2F2F2"/>
+                    </a:solidFill>
+                  </a:tcPr>
+                </a:tc>
+                <a:tc>
+                  <a:txBody>
+                    <a:bodyPr/>
+                    <a:lstStyle/>
+                    <a:p>
+                      <a:pPr algn="ctr"/>
+                      <a:r>
+                        <a:rPr b="1" sz="1200">
+                          <a:solidFill>
+                            <a:srgbClr val="009944"/>
+                          </a:solidFill>
+                          <a:latin typeface="Calibri"/>
+                        </a:rPr>
+                        <a:t>Yes</a:t>
+                      </a:r>
+                    </a:p>
+                  </a:txBody>
+                  <a:tcPr>
+                    <a:solidFill>
+                      <a:srgbClr val="F2F2F2"/>
+                    </a:solidFill>
+                  </a:tcPr>
+                </a:tc>
+              </a:tr>
+              <a:tr h="234563">
+                <a:tc>
+                  <a:txBody>
+                    <a:bodyPr/>
+                    <a:lstStyle/>
+                    <a:p>
+                      <a:pPr algn="l"/>
+                      <a:r>
+                        <a:rPr sz="1200">
+                          <a:solidFill>
+                            <a:srgbClr val="333333"/>
+                          </a:solidFill>
+                          <a:latin typeface="Calibri"/>
+                        </a:rPr>
+                        <a:t>Pipe-friendly stdout/stderr split</a:t>
+                      </a:r>
+                    </a:p>
+                  </a:txBody>
+                  <a:tcPr>
+                    <a:solidFill>
+                      <a:srgbClr val="FFFFFF"/>
+                    </a:solidFill>
+                  </a:tcPr>
+                </a:tc>
+                <a:tc>
+                  <a:txBody>
+                    <a:bodyPr/>
+                    <a:lstStyle/>
+                    <a:p>
+                      <a:pPr algn="ctr"/>
+                      <a:r>
+                        <a:rPr sz="1200">
+                          <a:solidFill>
+                            <a:srgbClr val="CC0000"/>
+                          </a:solidFill>
+                          <a:latin typeface="Calibri"/>
+                        </a:rPr>
+                        <a:t>No</a:t>
+                      </a:r>
+                    </a:p>
+                  </a:txBody>
+                  <a:tcPr>
+                    <a:solidFill>
+                      <a:srgbClr val="FFFFFF"/>
+                    </a:solidFill>
+                  </a:tcPr>
+                </a:tc>
+                <a:tc>
+                  <a:txBody>
+                    <a:bodyPr/>
+                    <a:lstStyle/>
+                    <a:p>
+                      <a:pPr algn="ctr"/>
+                      <a:r>
+                        <a:rPr b="1" sz="1200">
+                          <a:solidFill>
+                            <a:srgbClr val="009944"/>
+                          </a:solidFill>
+                          <a:latin typeface="Calibri"/>
+                        </a:rPr>
+                        <a:t>Yes</a:t>
+                      </a:r>
+                    </a:p>
+                  </a:txBody>
+                  <a:tcPr>
+                    <a:solidFill>
+                      <a:srgbClr val="FFFFFF"/>
+                    </a:solidFill>
+                  </a:tcPr>
+                </a:tc>
+              </a:tr>
+              <a:tr h="234563">
+                <a:tc>
+                  <a:txBody>
+                    <a:bodyPr/>
+                    <a:lstStyle/>
+                    <a:p>
+                      <a:pPr algn="l"/>
+                      <a:r>
+                        <a:rPr sz="1200">
+                          <a:solidFill>
+                            <a:srgbClr val="333333"/>
+                          </a:solidFill>
+                          <a:latin typeface="Calibri"/>
+                        </a:rPr>
+                        <a:t>Credentials in config file</a:t>
+                      </a:r>
+                    </a:p>
+                  </a:txBody>
+                  <a:tcPr>
+                    <a:solidFill>
+                      <a:srgbClr val="F2F2F2"/>
+                    </a:solidFill>
+                  </a:tcPr>
+                </a:tc>
+                <a:tc>
+                  <a:txBody>
+                    <a:bodyPr/>
+                    <a:lstStyle/>
+                    <a:p>
+                      <a:pPr algn="ctr"/>
+                      <a:r>
+                        <a:rPr sz="1200">
+                          <a:solidFill>
+                            <a:srgbClr val="CC0000"/>
+                          </a:solidFill>
+                          <a:latin typeface="Calibri"/>
+                        </a:rPr>
+                        <a:t>No</a:t>
+                      </a:r>
+                    </a:p>
+                  </a:txBody>
+                  <a:tcPr>
+                    <a:solidFill>
+                      <a:srgbClr val="F2F2F2"/>
+                    </a:solidFill>
+                  </a:tcPr>
+                </a:tc>
+                <a:tc>
+                  <a:txBody>
+                    <a:bodyPr/>
+                    <a:lstStyle/>
+                    <a:p>
+                      <a:pPr algn="ctr"/>
+                      <a:r>
+                        <a:rPr b="1" sz="1200">
+                          <a:solidFill>
+                            <a:srgbClr val="009944"/>
+                          </a:solidFill>
+                          <a:latin typeface="Calibri"/>
+                        </a:rPr>
+                        <a:t>Yes</a:t>
+                      </a:r>
+                    </a:p>
+                  </a:txBody>
+                  <a:tcPr>
+                    <a:solidFill>
+                      <a:srgbClr val="F2F2F2"/>
+                    </a:solidFill>
+                  </a:tcPr>
+                </a:tc>
+              </a:tr>
+              <a:tr h="234563">
+                <a:tc>
+                  <a:txBody>
+                    <a:bodyPr/>
+                    <a:lstStyle/>
+                    <a:p>
+                      <a:pPr algn="l"/>
+                      <a:r>
+                        <a:rPr sz="1200">
+                          <a:solidFill>
+                            <a:srgbClr val="333333"/>
+                          </a:solidFill>
+                          <a:latin typeface="Calibri"/>
+                        </a:rPr>
+                        <a:t>OS Keychain integration</a:t>
+                      </a:r>
+                    </a:p>
+                  </a:txBody>
+                  <a:tcPr>
+                    <a:solidFill>
+                      <a:srgbClr val="FFFFFF"/>
+                    </a:solidFill>
+                  </a:tcPr>
+                </a:tc>
+                <a:tc>
+                  <a:txBody>
+                    <a:bodyPr/>
+                    <a:lstStyle/>
+                    <a:p>
+                      <a:pPr algn="ctr"/>
+                      <a:r>
+                        <a:rPr sz="1200">
+                          <a:solidFill>
+                            <a:srgbClr val="CC0000"/>
+                          </a:solidFill>
+                          <a:latin typeface="Calibri"/>
+                        </a:rPr>
+                        <a:t>No</a:t>
+                      </a:r>
+                    </a:p>
+                  </a:txBody>
+                  <a:tcPr>
+                    <a:solidFill>
+                      <a:srgbClr val="FFFFFF"/>
+                    </a:solidFill>
+                  </a:tcPr>
+                </a:tc>
+                <a:tc>
+                  <a:txBody>
+                    <a:bodyPr/>
+                    <a:lstStyle/>
+                    <a:p>
+                      <a:pPr algn="ctr"/>
+                      <a:r>
+                        <a:rPr b="1" sz="1200">
+                          <a:solidFill>
+                            <a:srgbClr val="009944"/>
+                          </a:solidFill>
+                          <a:latin typeface="Calibri"/>
+                        </a:rPr>
+                        <a:t>Yes</a:t>
+                      </a:r>
+                    </a:p>
+                  </a:txBody>
+                  <a:tcPr>
+                    <a:solidFill>
+                      <a:srgbClr val="FFFFFF"/>
+                    </a:solidFill>
+                  </a:tcPr>
+                </a:tc>
+              </a:tr>
+              <a:tr h="234563">
+                <a:tc>
+                  <a:txBody>
+                    <a:bodyPr/>
+                    <a:lstStyle/>
+                    <a:p>
+                      <a:pPr algn="l"/>
+                      <a:r>
+                        <a:rPr sz="1200">
+                          <a:solidFill>
+                            <a:srgbClr val="333333"/>
+                          </a:solidFill>
+                          <a:latin typeface="Calibri"/>
+                        </a:rPr>
+                        <a:t>Named environment profiles</a:t>
+                      </a:r>
+                    </a:p>
+                  </a:txBody>
+                  <a:tcPr>
+                    <a:solidFill>
+                      <a:srgbClr val="F2F2F2"/>
+                    </a:solidFill>
+                  </a:tcPr>
+                </a:tc>
+                <a:tc>
+                  <a:txBody>
+                    <a:bodyPr/>
+                    <a:lstStyle/>
+                    <a:p>
+                      <a:pPr algn="ctr"/>
+                      <a:r>
+                        <a:rPr sz="1200">
+                          <a:solidFill>
+                            <a:srgbClr val="CC0000"/>
+                          </a:solidFill>
+                          <a:latin typeface="Calibri"/>
+                        </a:rPr>
+                        <a:t>No</a:t>
+                      </a:r>
+                    </a:p>
+                  </a:txBody>
+                  <a:tcPr>
+                    <a:solidFill>
+                      <a:srgbClr val="F2F2F2"/>
+                    </a:solidFill>
+                  </a:tcPr>
+                </a:tc>
+                <a:tc>
+                  <a:txBody>
+                    <a:bodyPr/>
+                    <a:lstStyle/>
+                    <a:p>
+                      <a:pPr algn="ctr"/>
+                      <a:r>
+                        <a:rPr b="1" sz="1200">
+                          <a:solidFill>
+                            <a:srgbClr val="009944"/>
+                          </a:solidFill>
+                          <a:latin typeface="Calibri"/>
+                        </a:rPr>
+                        <a:t>Yes</a:t>
+                      </a:r>
+                    </a:p>
+                  </a:txBody>
+                  <a:tcPr>
+                    <a:solidFill>
+                      <a:srgbClr val="F2F2F2"/>
+                    </a:solidFill>
+                  </a:tcPr>
+                </a:tc>
+              </a:tr>
+              <a:tr h="234563">
+                <a:tc>
+                  <a:txBody>
+                    <a:bodyPr/>
+                    <a:lstStyle/>
+                    <a:p>
+                      <a:pPr algn="l"/>
+                      <a:r>
+                        <a:rPr sz="1200">
+                          <a:solidFill>
+                            <a:srgbClr val="333333"/>
+                          </a:solidFill>
+                          <a:latin typeface="Calibri"/>
+                        </a:rPr>
+                        <a:t>Interactive profile wizard</a:t>
+                      </a:r>
+                    </a:p>
+                  </a:txBody>
+                  <a:tcPr>
+                    <a:solidFill>
+                      <a:srgbClr val="FFFFFF"/>
+                    </a:solidFill>
+                  </a:tcPr>
+                </a:tc>
+                <a:tc>
+                  <a:txBody>
+                    <a:bodyPr/>
+                    <a:lstStyle/>
+                    <a:p>
+                      <a:pPr algn="ctr"/>
+                      <a:r>
+                        <a:rPr sz="1200">
+                          <a:solidFill>
+                            <a:srgbClr val="CC0000"/>
+                          </a:solidFill>
+                          <a:latin typeface="Calibri"/>
+                        </a:rPr>
+                        <a:t>No</a:t>
+                      </a:r>
+                    </a:p>
+                  </a:txBody>
+                  <a:tcPr>
+                    <a:solidFill>
+                      <a:srgbClr val="FFFFFF"/>
+                    </a:solidFill>
+                  </a:tcPr>
+                </a:tc>
+                <a:tc>
+                  <a:txBody>
+                    <a:bodyPr/>
+                    <a:lstStyle/>
+                    <a:p>
+                      <a:pPr algn="ctr"/>
+                      <a:r>
+                        <a:rPr b="1" sz="1200">
+                          <a:solidFill>
+                            <a:srgbClr val="009944"/>
+                          </a:solidFill>
+                          <a:latin typeface="Calibri"/>
+                        </a:rPr>
+                        <a:t>Yes</a:t>
+                      </a:r>
+                    </a:p>
+                  </a:txBody>
+                  <a:tcPr>
+                    <a:solidFill>
+                      <a:srgbClr val="FFFFFF"/>
+                    </a:solidFill>
+                  </a:tcPr>
+                </a:tc>
+              </a:tr>
+              <a:tr h="234563">
+                <a:tc>
+                  <a:txBody>
+                    <a:bodyPr/>
+                    <a:lstStyle/>
+                    <a:p>
+                      <a:pPr algn="l"/>
+                      <a:r>
+                        <a:rPr sz="1200">
+                          <a:solidFill>
+                            <a:srgbClr val="333333"/>
+                          </a:solidFill>
+                          <a:latin typeface="Calibri"/>
+                        </a:rPr>
+                        <a:t>Session caching</a:t>
+                      </a:r>
+                    </a:p>
+                  </a:txBody>
+                  <a:tcPr>
+                    <a:solidFill>
+                      <a:srgbClr val="F2F2F2"/>
+                    </a:solidFill>
+                  </a:tcPr>
+                </a:tc>
+                <a:tc>
+                  <a:txBody>
+                    <a:bodyPr/>
+                    <a:lstStyle/>
+                    <a:p>
+                      <a:pPr algn="ctr"/>
+                      <a:r>
+                        <a:rPr sz="1200">
+                          <a:solidFill>
+                            <a:srgbClr val="CC0000"/>
+                          </a:solidFill>
+                          <a:latin typeface="Calibri"/>
+                        </a:rPr>
+                        <a:t>No</a:t>
+                      </a:r>
+                    </a:p>
+                  </a:txBody>
+                  <a:tcPr>
+                    <a:solidFill>
+                      <a:srgbClr val="F2F2F2"/>
+                    </a:solidFill>
+                  </a:tcPr>
+                </a:tc>
+                <a:tc>
+                  <a:txBody>
+                    <a:bodyPr/>
+                    <a:lstStyle/>
+                    <a:p>
+                      <a:pPr algn="ctr"/>
+                      <a:r>
+                        <a:rPr b="1" sz="1200">
+                          <a:solidFill>
+                            <a:srgbClr val="009944"/>
+                          </a:solidFill>
+                          <a:latin typeface="Calibri"/>
+                        </a:rPr>
+                        <a:t>Yes</a:t>
+                      </a:r>
+                    </a:p>
+                  </a:txBody>
+                  <a:tcPr>
+                    <a:solidFill>
+                      <a:srgbClr val="F2F2F2"/>
+                    </a:solidFill>
+                  </a:tcPr>
+                </a:tc>
+              </a:tr>
+              <a:tr h="234563">
+                <a:tc>
+                  <a:txBody>
+                    <a:bodyPr/>
+                    <a:lstStyle/>
+                    <a:p>
+                      <a:pPr algn="l"/>
+                      <a:r>
+                        <a:rPr sz="1200">
+                          <a:solidFill>
+                            <a:srgbClr val="333333"/>
+                          </a:solidFill>
+                          <a:latin typeface="Calibri"/>
+                        </a:rPr>
+                        <a:t>Package expand / create</a:t>
+                      </a:r>
+                    </a:p>
+                  </a:txBody>
+                  <a:tcPr>
+                    <a:solidFill>
+                      <a:srgbClr val="FFFFFF"/>
+                    </a:solidFill>
+                  </a:tcPr>
+                </a:tc>
+                <a:tc>
+                  <a:txBody>
+                    <a:bodyPr/>
+                    <a:lstStyle/>
+                    <a:p>
+                      <a:pPr algn="ctr"/>
+                      <a:r>
+                        <a:rPr sz="1200">
+                          <a:solidFill>
+                            <a:srgbClr val="CC0000"/>
+                          </a:solidFill>
+                          <a:latin typeface="Calibri"/>
+                        </a:rPr>
+                        <a:t>No</a:t>
+                      </a:r>
+                    </a:p>
+                  </a:txBody>
+                  <a:tcPr>
+                    <a:solidFill>
+                      <a:srgbClr val="FFFFFF"/>
+                    </a:solidFill>
+                  </a:tcPr>
+                </a:tc>
+                <a:tc>
+                  <a:txBody>
+                    <a:bodyPr/>
+                    <a:lstStyle/>
+                    <a:p>
+                      <a:pPr algn="ctr"/>
+                      <a:r>
+                        <a:rPr b="1" sz="1200">
+                          <a:solidFill>
+                            <a:srgbClr val="009944"/>
+                          </a:solidFill>
+                          <a:latin typeface="Calibri"/>
+                        </a:rPr>
+                        <a:t>Yes</a:t>
+                      </a:r>
+                    </a:p>
+                  </a:txBody>
+                  <a:tcPr>
+                    <a:solidFill>
+                      <a:srgbClr val="FFFFFF"/>
+                    </a:solidFill>
+                  </a:tcPr>
+                </a:tc>
+              </a:tr>
+              <a:tr h="234563">
+                <a:tc>
+                  <a:txBody>
+                    <a:bodyPr/>
+                    <a:lstStyle/>
+                    <a:p>
+                      <a:pPr algn="l"/>
+                      <a:r>
+                        <a:rPr sz="1200">
+                          <a:solidFill>
+                            <a:srgbClr val="333333"/>
+                          </a:solidFill>
+                          <a:latin typeface="Calibri"/>
+                        </a:rPr>
+                        <a:t>Selective packaging via manifest</a:t>
+                      </a:r>
+                    </a:p>
+                  </a:txBody>
+                  <a:tcPr>
+                    <a:solidFill>
+                      <a:srgbClr val="F2F2F2"/>
+                    </a:solidFill>
+                  </a:tcPr>
+                </a:tc>
+                <a:tc>
+                  <a:txBody>
+                    <a:bodyPr/>
+                    <a:lstStyle/>
+                    <a:p>
+                      <a:pPr algn="ctr"/>
+                      <a:r>
+                        <a:rPr sz="1200">
+                          <a:solidFill>
+                            <a:srgbClr val="CC0000"/>
+                          </a:solidFill>
+                          <a:latin typeface="Calibri"/>
+                        </a:rPr>
+                        <a:t>No</a:t>
+                      </a:r>
+                    </a:p>
+                  </a:txBody>
+                  <a:tcPr>
+                    <a:solidFill>
+                      <a:srgbClr val="F2F2F2"/>
+                    </a:solidFill>
+                  </a:tcPr>
+                </a:tc>
+                <a:tc>
+                  <a:txBody>
+                    <a:bodyPr/>
+                    <a:lstStyle/>
+                    <a:p>
+                      <a:pPr algn="ctr"/>
+                      <a:r>
+                        <a:rPr b="1" sz="1200">
+                          <a:solidFill>
+                            <a:srgbClr val="009944"/>
+                          </a:solidFill>
+                          <a:latin typeface="Calibri"/>
+                        </a:rPr>
+                        <a:t>Yes</a:t>
+                      </a:r>
+                    </a:p>
+                  </a:txBody>
+                  <a:tcPr>
+                    <a:solidFill>
+                      <a:srgbClr val="F2F2F2"/>
+                    </a:solidFill>
+                  </a:tcPr>
+                </a:tc>
+              </a:tr>
+              <a:tr h="234563">
+                <a:tc>
+                  <a:txBody>
+                    <a:bodyPr/>
+                    <a:lstStyle/>
+                    <a:p>
+                      <a:pPr algn="l"/>
+                      <a:r>
+                        <a:rPr sz="1200">
+                          <a:solidFill>
+                            <a:srgbClr val="333333"/>
+                          </a:solidFill>
+                          <a:latin typeface="Calibri"/>
+                        </a:rPr>
+                        <a:t>CI/CD release manifest &amp; plan</a:t>
+                      </a:r>
+                    </a:p>
+                  </a:txBody>
+                  <a:tcPr>
+                    <a:solidFill>
+                      <a:srgbClr val="FFFFFF"/>
+                    </a:solidFill>
+                  </a:tcPr>
+                </a:tc>
+                <a:tc>
+                  <a:txBody>
+                    <a:bodyPr/>
+                    <a:lstStyle/>
+                    <a:p>
+                      <a:pPr algn="ctr"/>
+                      <a:r>
+                        <a:rPr sz="1200">
+                          <a:solidFill>
+                            <a:srgbClr val="CC0000"/>
+                          </a:solidFill>
+                          <a:latin typeface="Calibri"/>
+                        </a:rPr>
+                        <a:t>No</a:t>
+                      </a:r>
+                    </a:p>
+                  </a:txBody>
+                  <a:tcPr>
+                    <a:solidFill>
+                      <a:srgbClr val="FFFFFF"/>
+                    </a:solidFill>
+                  </a:tcPr>
+                </a:tc>
+                <a:tc>
+                  <a:txBody>
+                    <a:bodyPr/>
+                    <a:lstStyle/>
+                    <a:p>
+                      <a:pPr algn="ctr"/>
+                      <a:r>
+                        <a:rPr b="1" sz="1200">
+                          <a:solidFill>
+                            <a:srgbClr val="009944"/>
+                          </a:solidFill>
+                          <a:latin typeface="Calibri"/>
+                        </a:rPr>
+                        <a:t>Yes</a:t>
+                      </a:r>
+                    </a:p>
+                  </a:txBody>
+                  <a:tcPr>
+                    <a:solidFill>
+                      <a:srgbClr val="FFFFFF"/>
+                    </a:solidFill>
+                  </a:tcPr>
+                </a:tc>
+              </a:tr>
+              <a:tr h="234563">
+                <a:tc>
+                  <a:txBody>
+                    <a:bodyPr/>
+                    <a:lstStyle/>
+                    <a:p>
+                      <a:pPr algn="l"/>
+                      <a:r>
+                        <a:rPr sz="1200">
+                          <a:solidFill>
+                            <a:srgbClr val="333333"/>
+                          </a:solidFill>
+                          <a:latin typeface="Calibri"/>
+                        </a:rPr>
+                        <a:t>Publish / Unpublish</a:t>
+                      </a:r>
+                    </a:p>
+                  </a:txBody>
+                  <a:tcPr>
+                    <a:solidFill>
+                      <a:srgbClr val="F2F2F2"/>
+                    </a:solidFill>
+                  </a:tcPr>
+                </a:tc>
+                <a:tc>
+                  <a:txBody>
+                    <a:bodyPr/>
+                    <a:lstStyle/>
+                    <a:p>
+                      <a:pPr algn="ctr"/>
+                      <a:r>
+                        <a:rPr sz="1200">
+                          <a:solidFill>
+                            <a:srgbClr val="333333"/>
+                          </a:solidFill>
+                          <a:latin typeface="Calibri"/>
+                        </a:rPr>
+                        <a:t>Partial</a:t>
+                      </a:r>
+                    </a:p>
+                  </a:txBody>
+                  <a:tcPr>
+                    <a:solidFill>
+                      <a:srgbClr val="F2F2F2"/>
+                    </a:solidFill>
+                  </a:tcPr>
+                </a:tc>
+                <a:tc>
+                  <a:txBody>
+                    <a:bodyPr/>
+                    <a:lstStyle/>
+                    <a:p>
+                      <a:pPr algn="ctr"/>
+                      <a:r>
+                        <a:rPr b="1" sz="1200">
+                          <a:solidFill>
+                            <a:srgbClr val="009944"/>
+                          </a:solidFill>
+                          <a:latin typeface="Calibri"/>
+                        </a:rPr>
+                        <a:t>Yes</a:t>
+                      </a:r>
+                    </a:p>
+                  </a:txBody>
+                  <a:tcPr>
+                    <a:solidFill>
+                      <a:srgbClr val="F2F2F2"/>
+                    </a:solidFill>
+                  </a:tcPr>
+                </a:tc>
+              </a:tr>
+              <a:tr h="234563">
+                <a:tc>
+                  <a:txBody>
+                    <a:bodyPr/>
+                    <a:lstStyle/>
+                    <a:p>
+                      <a:pPr algn="l"/>
+                      <a:r>
+                        <a:rPr sz="1200">
+                          <a:solidFill>
+                            <a:srgbClr val="333333"/>
+                          </a:solidFill>
+                          <a:latin typeface="Calibri"/>
+                        </a:rPr>
+                        <a:t>User &amp; group management</a:t>
+                      </a:r>
+                    </a:p>
+                  </a:txBody>
+                  <a:tcPr>
+                    <a:solidFill>
+                      <a:srgbClr val="FFFFFF"/>
+                    </a:solidFill>
+                  </a:tcPr>
+                </a:tc>
+                <a:tc>
+                  <a:txBody>
+                    <a:bodyPr/>
+                    <a:lstStyle/>
+                    <a:p>
+                      <a:pPr algn="ctr"/>
+                      <a:r>
+                        <a:rPr sz="1200">
+                          <a:solidFill>
+                            <a:srgbClr val="CC0000"/>
+                          </a:solidFill>
+                          <a:latin typeface="Calibri"/>
+                        </a:rPr>
+                        <a:t>No</a:t>
+                      </a:r>
+                    </a:p>
+                  </a:txBody>
+                  <a:tcPr>
+                    <a:solidFill>
+                      <a:srgbClr val="FFFFFF"/>
+                    </a:solidFill>
+                  </a:tcPr>
+                </a:tc>
+                <a:tc>
+                  <a:txBody>
+                    <a:bodyPr/>
+                    <a:lstStyle/>
+                    <a:p>
+                      <a:pPr algn="ctr"/>
+                      <a:r>
+                        <a:rPr b="1" sz="1200">
+                          <a:solidFill>
+                            <a:srgbClr val="009944"/>
+                          </a:solidFill>
+                          <a:latin typeface="Calibri"/>
+                        </a:rPr>
+                        <a:t>Yes</a:t>
+                      </a:r>
+                    </a:p>
+                  </a:txBody>
+                  <a:tcPr>
+                    <a:solidFill>
+                      <a:srgbClr val="FFFFFF"/>
+                    </a:solidFill>
+                  </a:tcPr>
+                </a:tc>
+              </a:tr>
+              <a:tr h="234563">
+                <a:tc>
+                  <a:txBody>
+                    <a:bodyPr/>
+                    <a:lstStyle/>
+                    <a:p>
+                      <a:pPr algn="l"/>
+                      <a:r>
+                        <a:rPr sz="1200">
+                          <a:solidFill>
+                            <a:srgbClr val="333333"/>
+                          </a:solidFill>
+                          <a:latin typeface="Calibri"/>
+                        </a:rPr>
+                        <a:t>Connection CRUD</a:t>
+                      </a:r>
+                    </a:p>
+                  </a:txBody>
+                  <a:tcPr>
+                    <a:solidFill>
+                      <a:srgbClr val="F2F2F2"/>
+                    </a:solidFill>
+                  </a:tcPr>
+                </a:tc>
+                <a:tc>
+                  <a:txBody>
+                    <a:bodyPr/>
+                    <a:lstStyle/>
+                    <a:p>
+                      <a:pPr algn="ctr"/>
+                      <a:r>
+                        <a:rPr sz="1200">
+                          <a:solidFill>
+                            <a:srgbClr val="CC0000"/>
+                          </a:solidFill>
+                          <a:latin typeface="Calibri"/>
+                        </a:rPr>
+                        <a:t>No</a:t>
+                      </a:r>
+                    </a:p>
+                  </a:txBody>
+                  <a:tcPr>
+                    <a:solidFill>
+                      <a:srgbClr val="F2F2F2"/>
+                    </a:solidFill>
+                  </a:tcPr>
+                </a:tc>
+                <a:tc>
+                  <a:txBody>
+                    <a:bodyPr/>
+                    <a:lstStyle/>
+                    <a:p>
+                      <a:pPr algn="ctr"/>
+                      <a:r>
+                        <a:rPr b="1" sz="1200">
+                          <a:solidFill>
+                            <a:srgbClr val="009944"/>
+                          </a:solidFill>
+                          <a:latin typeface="Calibri"/>
+                        </a:rPr>
+                        <a:t>Yes</a:t>
+                      </a:r>
+                    </a:p>
+                  </a:txBody>
+                  <a:tcPr>
+                    <a:solidFill>
+                      <a:srgbClr val="F2F2F2"/>
+                    </a:solidFill>
+                  </a:tcPr>
+                </a:tc>
+              </a:tr>
+              <a:tr h="234563">
+                <a:tc>
+                  <a:txBody>
+                    <a:bodyPr/>
+                    <a:lstStyle/>
+                    <a:p>
+                      <a:pPr algn="l"/>
+                      <a:r>
+                        <a:rPr sz="1200">
+                          <a:solidFill>
+                            <a:srgbClr val="333333"/>
+                          </a:solidFill>
+                          <a:latin typeface="Calibri"/>
+                        </a:rPr>
+                        <a:t>Schedule CRUD</a:t>
+                      </a:r>
+                    </a:p>
+                  </a:txBody>
+                  <a:tcPr>
+                    <a:solidFill>
+                      <a:srgbClr val="FFFFFF"/>
+                    </a:solidFill>
+                  </a:tcPr>
+                </a:tc>
+                <a:tc>
+                  <a:txBody>
+                    <a:bodyPr/>
+                    <a:lstStyle/>
+                    <a:p>
+                      <a:pPr algn="ctr"/>
+                      <a:r>
+                        <a:rPr sz="1200">
+                          <a:solidFill>
+                            <a:srgbClr val="CC0000"/>
+                          </a:solidFill>
+                          <a:latin typeface="Calibri"/>
+                        </a:rPr>
+                        <a:t>No</a:t>
+                      </a:r>
+                    </a:p>
+                  </a:txBody>
+                  <a:tcPr>
+                    <a:solidFill>
+                      <a:srgbClr val="FFFFFF"/>
+                    </a:solidFill>
+                  </a:tcPr>
+                </a:tc>
+                <a:tc>
+                  <a:txBody>
+                    <a:bodyPr/>
+                    <a:lstStyle/>
+                    <a:p>
+                      <a:pPr algn="ctr"/>
+                      <a:r>
+                        <a:rPr b="1" sz="1200">
+                          <a:solidFill>
+                            <a:srgbClr val="009944"/>
+                          </a:solidFill>
+                          <a:latin typeface="Calibri"/>
+                        </a:rPr>
+                        <a:t>Yes</a:t>
+                      </a:r>
+                    </a:p>
+                  </a:txBody>
+                  <a:tcPr>
+                    <a:solidFill>
+                      <a:srgbClr val="FFFFFF"/>
+                    </a:solidFill>
+                  </a:tcPr>
+                </a:tc>
+              </a:tr>
+              <a:tr h="234563">
+                <a:tc>
+                  <a:txBody>
+                    <a:bodyPr/>
+                    <a:lstStyle/>
+                    <a:p>
+                      <a:pPr algn="l"/>
+                      <a:r>
+                        <a:rPr sz="1200">
+                          <a:solidFill>
+                            <a:srgbClr val="333333"/>
+                          </a:solidFill>
+                          <a:latin typeface="Calibri"/>
+                        </a:rPr>
+                        <a:t>Agent &amp; runtime management</a:t>
+                      </a:r>
+                    </a:p>
+                  </a:txBody>
+                  <a:tcPr>
+                    <a:solidFill>
+                      <a:srgbClr val="F2F2F2"/>
+                    </a:solidFill>
+                  </a:tcPr>
+                </a:tc>
+                <a:tc>
+                  <a:txBody>
+                    <a:bodyPr/>
+                    <a:lstStyle/>
+                    <a:p>
+                      <a:pPr algn="ctr"/>
+                      <a:r>
+                        <a:rPr sz="1200">
+                          <a:solidFill>
+                            <a:srgbClr val="CC0000"/>
+                          </a:solidFill>
+                          <a:latin typeface="Calibri"/>
+                        </a:rPr>
+                        <a:t>No</a:t>
+                      </a:r>
+                    </a:p>
+                  </a:txBody>
+                  <a:tcPr>
+                    <a:solidFill>
+                      <a:srgbClr val="F2F2F2"/>
+                    </a:solidFill>
+                  </a:tcPr>
+                </a:tc>
+                <a:tc>
+                  <a:txBody>
+                    <a:bodyPr/>
+                    <a:lstStyle/>
+                    <a:p>
+                      <a:pPr algn="ctr"/>
+                      <a:r>
+                        <a:rPr b="1" sz="1200">
+                          <a:solidFill>
+                            <a:srgbClr val="009944"/>
+                          </a:solidFill>
+                          <a:latin typeface="Calibri"/>
+                        </a:rPr>
+                        <a:t>Yes</a:t>
+                      </a:r>
+                    </a:p>
+                  </a:txBody>
+                  <a:tcPr>
+                    <a:solidFill>
+                      <a:srgbClr val="F2F2F2"/>
+                    </a:solidFill>
+                  </a:tcPr>
+                </a:tc>
+              </a:tr>
+              <a:tr h="234563">
+                <a:tc>
+                  <a:txBody>
+                    <a:bodyPr/>
+                    <a:lstStyle/>
+                    <a:p>
+                      <a:pPr algn="l"/>
+                      <a:r>
+                        <a:rPr sz="1200">
+                          <a:solidFill>
+                            <a:srgbClr val="333333"/>
+                          </a:solidFill>
+                          <a:latin typeface="Calibri"/>
+                        </a:rPr>
+                        <a:t>Activity / Audit / Security logs</a:t>
+                      </a:r>
+                    </a:p>
+                  </a:txBody>
+                  <a:tcPr>
+                    <a:solidFill>
+                      <a:srgbClr val="FFFFFF"/>
+                    </a:solidFill>
+                  </a:tcPr>
+                </a:tc>
+                <a:tc>
+                  <a:txBody>
+                    <a:bodyPr/>
+                    <a:lstStyle/>
+                    <a:p>
+                      <a:pPr algn="ctr"/>
+                      <a:r>
+                        <a:rPr sz="1200">
+                          <a:solidFill>
+                            <a:srgbClr val="CC0000"/>
+                          </a:solidFill>
+                          <a:latin typeface="Calibri"/>
+                        </a:rPr>
+                        <a:t>No</a:t>
+                      </a:r>
+                    </a:p>
+                  </a:txBody>
+                  <a:tcPr>
+                    <a:solidFill>
+                      <a:srgbClr val="FFFFFF"/>
+                    </a:solidFill>
+                  </a:tcPr>
+                </a:tc>
+                <a:tc>
+                  <a:txBody>
+                    <a:bodyPr/>
+                    <a:lstStyle/>
+                    <a:p>
+                      <a:pPr algn="ctr"/>
+                      <a:r>
+                        <a:rPr b="1" sz="1200">
+                          <a:solidFill>
+                            <a:srgbClr val="009944"/>
+                          </a:solidFill>
+                          <a:latin typeface="Calibri"/>
+                        </a:rPr>
+                        <a:t>Yes</a:t>
+                      </a:r>
+                    </a:p>
+                  </a:txBody>
+                  <a:tcPr>
+                    <a:solidFill>
+                      <a:srgbClr val="FFFFFF"/>
+                    </a:solidFill>
+                  </a:tcPr>
+                </a:tc>
+              </a:tr>
+              <a:tr h="234563">
+                <a:tc>
+                  <a:txBody>
+                    <a:bodyPr/>
+                    <a:lstStyle/>
+                    <a:p>
+                      <a:pPr algn="l"/>
+                      <a:r>
+                        <a:rPr sz="1200">
+                          <a:solidFill>
+                            <a:srgbClr val="333333"/>
+                          </a:solidFill>
+                          <a:latin typeface="Calibri"/>
+                        </a:rPr>
+                        <a:t>Source control operations</a:t>
+                      </a:r>
+                    </a:p>
+                  </a:txBody>
+                  <a:tcPr>
+                    <a:solidFill>
+                      <a:srgbClr val="F2F2F2"/>
+                    </a:solidFill>
+                  </a:tcPr>
+                </a:tc>
+                <a:tc>
+                  <a:txBody>
+                    <a:bodyPr/>
+                    <a:lstStyle/>
+                    <a:p>
+                      <a:pPr algn="ctr"/>
+                      <a:r>
+                        <a:rPr sz="1200">
+                          <a:solidFill>
+                            <a:srgbClr val="CC0000"/>
+                          </a:solidFill>
+                          <a:latin typeface="Calibri"/>
+                        </a:rPr>
+                        <a:t>No</a:t>
+                      </a:r>
+                    </a:p>
+                  </a:txBody>
+                  <a:tcPr>
+                    <a:solidFill>
+                      <a:srgbClr val="F2F2F2"/>
+                    </a:solidFill>
+                  </a:tcPr>
+                </a:tc>
+                <a:tc>
+                  <a:txBody>
+                    <a:bodyPr/>
+                    <a:lstStyle/>
+                    <a:p>
+                      <a:pPr algn="ctr"/>
+                      <a:r>
+                        <a:rPr b="1" sz="1200">
+                          <a:solidFill>
+                            <a:srgbClr val="009944"/>
+                          </a:solidFill>
+                          <a:latin typeface="Calibri"/>
+                        </a:rPr>
+                        <a:t>Yes</a:t>
+                      </a:r>
+                    </a:p>
+                  </a:txBody>
+                  <a:tcPr>
+                    <a:solidFill>
+                      <a:srgbClr val="F2F2F2"/>
+                    </a:solidFill>
+                  </a:tcPr>
+                </a:tc>
+              </a:tr>
+              <a:tr h="234563">
+                <a:tc>
+                  <a:txBody>
+                    <a:bodyPr/>
+                    <a:lstStyle/>
+                    <a:p>
+                      <a:pPr algn="l"/>
+                      <a:r>
+                        <a:rPr sz="1200">
+                          <a:solidFill>
+                            <a:srgbClr val="333333"/>
+                          </a:solidFill>
+                          <a:latin typeface="Calibri"/>
+                        </a:rPr>
+                        <a:t>All IICS regions</a:t>
+                      </a:r>
+                    </a:p>
+                  </a:txBody>
+                  <a:tcPr>
+                    <a:solidFill>
+                      <a:srgbClr val="FFFFFF"/>
+                    </a:solidFill>
+                  </a:tcPr>
+                </a:tc>
+                <a:tc>
+                  <a:txBody>
+                    <a:bodyPr/>
+                    <a:lstStyle/>
+                    <a:p>
+                      <a:pPr algn="ctr"/>
+                      <a:r>
+                        <a:rPr sz="1200">
+                          <a:solidFill>
+                            <a:srgbClr val="CC0000"/>
+                          </a:solidFill>
+                          <a:latin typeface="Calibri"/>
+                        </a:rPr>
+                        <a:t>No</a:t>
+                      </a:r>
+                    </a:p>
+                  </a:txBody>
+                  <a:tcPr>
+                    <a:solidFill>
+                      <a:srgbClr val="FFFFFF"/>
+                    </a:solidFill>
+                  </a:tcPr>
+                </a:tc>
+                <a:tc>
+                  <a:txBody>
+                    <a:bodyPr/>
+                    <a:lstStyle/>
+                    <a:p>
+                      <a:pPr algn="ctr"/>
+                      <a:r>
+                        <a:rPr b="1" sz="1200">
+                          <a:solidFill>
+                            <a:srgbClr val="009944"/>
+                          </a:solidFill>
+                          <a:latin typeface="Calibri"/>
+                        </a:rPr>
+                        <a:t>Yes</a:t>
+                      </a:r>
+                    </a:p>
+                  </a:txBody>
+                  <a:tcPr>
+                    <a:solidFill>
+                      <a:srgbClr val="FFFFFF"/>
+                    </a:solidFill>
+                  </a:tcPr>
+                </a:tc>
+              </a:tr>
+              <a:tr h="234563">
+                <a:tc>
+                  <a:txBody>
+                    <a:bodyPr/>
+                    <a:lstStyle/>
+                    <a:p>
+                      <a:pPr algn="l"/>
+                      <a:r>
+                        <a:rPr sz="1200">
+                          <a:solidFill>
+                            <a:srgbClr val="333333"/>
+                          </a:solidFill>
+                          <a:latin typeface="Calibri"/>
+                        </a:rPr>
+                        <a:t>Table themes &amp; styles</a:t>
+                      </a:r>
+                    </a:p>
+                  </a:txBody>
+                  <a:tcPr>
+                    <a:solidFill>
+                      <a:srgbClr val="F2F2F2"/>
+                    </a:solidFill>
+                  </a:tcPr>
+                </a:tc>
+                <a:tc>
+                  <a:txBody>
+                    <a:bodyPr/>
+                    <a:lstStyle/>
+                    <a:p>
+                      <a:pPr algn="ctr"/>
+                      <a:r>
+                        <a:rPr sz="1200">
+                          <a:solidFill>
+                            <a:srgbClr val="CC0000"/>
+                          </a:solidFill>
+                          <a:latin typeface="Calibri"/>
+                        </a:rPr>
+                        <a:t>No</a:t>
+                      </a:r>
+                    </a:p>
+                  </a:txBody>
+                  <a:tcPr>
+                    <a:solidFill>
+                      <a:srgbClr val="F2F2F2"/>
+                    </a:solidFill>
+                  </a:tcPr>
+                </a:tc>
+                <a:tc>
+                  <a:txBody>
+                    <a:bodyPr/>
+                    <a:lstStyle/>
+                    <a:p>
+                      <a:pPr algn="ctr"/>
+                      <a:r>
+                        <a:rPr b="1" sz="1200">
+                          <a:solidFill>
+                            <a:srgbClr val="009944"/>
+                          </a:solidFill>
+                          <a:latin typeface="Calibri"/>
+                        </a:rPr>
+                        <a:t>Yes</a:t>
+                      </a:r>
+                    </a:p>
+                  </a:txBody>
+                  <a:tcPr>
+                    <a:solidFill>
+                      <a:srgbClr val="F2F2F2"/>
+                    </a:solidFill>
+                  </a:tcPr>
+                </a:tc>
+              </a:tr>
+              <a:tr h="234574">
+                <a:tc>
+                  <a:txBody>
+                    <a:bodyPr/>
+                    <a:lstStyle/>
+                    <a:p>
+                      <a:pPr algn="l"/>
+                      <a:r>
+                        <a:rPr sz="1200">
+                          <a:solidFill>
+                            <a:srgbClr val="333333"/>
+                          </a:solidFill>
+                          <a:latin typeface="Calibri"/>
+                        </a:rPr>
+                        <a:t>Built-in contextual help</a:t>
+                      </a:r>
+                    </a:p>
+                  </a:txBody>
+                  <a:tcPr>
+                    <a:solidFill>
+                      <a:srgbClr val="FFFFFF"/>
+                    </a:solidFill>
+                  </a:tcPr>
+                </a:tc>
+                <a:tc>
+                  <a:txBody>
+                    <a:bodyPr/>
+                    <a:lstStyle/>
+                    <a:p>
+                      <a:pPr algn="ctr"/>
+                      <a:r>
+                        <a:rPr sz="1200">
+                          <a:solidFill>
+                            <a:srgbClr val="333333"/>
+                          </a:solidFill>
+                          <a:latin typeface="Calibri"/>
+                        </a:rPr>
+                        <a:t>Minimal</a:t>
+                      </a:r>
+                    </a:p>
+                  </a:txBody>
+                  <a:tcPr>
+                    <a:solidFill>
+                      <a:srgbClr val="FFFFFF"/>
+                    </a:solidFill>
+                  </a:tcPr>
+                </a:tc>
+                <a:tc>
+                  <a:txBody>
+                    <a:bodyPr/>
+                    <a:lstStyle/>
+                    <a:p>
+                      <a:pPr algn="ctr"/>
+                      <a:r>
+                        <a:rPr b="1" sz="1200">
+                          <a:solidFill>
+                            <a:srgbClr val="009944"/>
+                          </a:solidFill>
+                          <a:latin typeface="Calibri"/>
+                        </a:rPr>
+                        <a:t>Yes</a:t>
+                      </a:r>
+                    </a:p>
+                  </a:txBody>
+                  <a:tcPr>
+                    <a:solidFill>
+                      <a:srgbClr val="FFFFFF"/>
+                    </a:solidFill>
+                  </a:tcPr>
+                </a:tc>
+              </a:tr>
+            </a:tbl>
+          </a:graphicData>
+        </a:graphic>
+      </p:graphicFrame>
+    </p:spTree>
+  </p:cSld>
+  <p:clrMapOvr>
+    <a:masterClrMapping/>
+  </p:clrMapOvr>
+</p:sld>
+</file>
+
+<file path=ppt/slides/slide19.xml><?xml version="1.0" encoding="utf-8"?>
+<p:sld xmlns:a="http://schemas.openxmlformats.org/drawingml/2006/main" xmlns:p="http://schemas.openxmlformats.org/presentationml/2006/main" xmlns:r="http://schemas.openxmlformats.org/officeDocument/2006/relationships">
+  <p:cSld>
+    <p:spTree>
+      <p:nvGrpSpPr>
+        <p:cNvPr id="1" name=""/>
+        <p:cNvGrpSpPr/>
+        <p:nvPr/>
+      </p:nvGrpSpPr>
+      <p:grpSpPr/>
+      <p:sp>
+        <p:nvSpPr>
+          <p:cNvPr id="2" name="Rectangle 1"/>
+          <p:cNvSpPr/>
+          <p:nvPr/>
+        </p:nvSpPr>
+        <p:spPr>
+          <a:xfrm>
+            <a:off x="0" y="0"/>
+            <a:ext cx="12188952" cy="1005840"/>
+          </a:xfrm>
+          <a:prstGeom prst="rect">
+            <a:avLst/>
+          </a:prstGeom>
+          <a:solidFill>
+            <a:srgbClr val="003366"/>
+          </a:solidFill>
+          <a:ln>
+            <a:noFill/>
+          </a:ln>
+        </p:spPr>
+        <p:style>
+          <a:lnRef idx="1">
+            <a:schemeClr val="accent1"/>
+          </a:lnRef>
+          <a:fillRef idx="3">
+            <a:schemeClr val="accent1"/>
+          </a:fillRef>
+          <a:effectRef idx="2">
+            <a:schemeClr val="accent1"/>
+          </a:effectRef>
+          <a:fontRef idx="minor">
+            <a:schemeClr val="lt1"/>
+          </a:fontRef>
+        </p:style>
+        <p:txBody>
+          <a:bodyPr rtlCol="0" anchor="ctr"/>
+          <a:lstStyle/>
+          <a:p>
+            <a:pPr algn="ctr"/>
+          </a:p>
+        </p:txBody>
+      </p:sp>
+      <p:sp>
+        <p:nvSpPr>
+          <p:cNvPr id="3" name="TextBox 2"/>
+          <p:cNvSpPr txBox="1"/>
+          <p:nvPr/>
+        </p:nvSpPr>
+        <p:spPr>
+          <a:xfrm>
+            <a:off x="274320" y="91440"/>
+            <a:ext cx="11430000" cy="640080"/>
+          </a:xfrm>
+          <a:prstGeom prst="rect">
+            <a:avLst/>
+          </a:prstGeom>
+          <a:noFill/>
+        </p:spPr>
+        <p:txBody>
+          <a:bodyPr wrap="square">
+            <a:spAutoFit/>
+          </a:bodyPr>
+          <a:lstStyle/>
+          <a:p>
+            <a:pPr algn="l"/>
+            <a:r>
+              <a:rPr sz="2800" b="1" i="0">
+                <a:solidFill>
+                  <a:srgbClr val="FFFFFF"/>
+                </a:solidFill>
+                <a:latin typeface="Calibri"/>
+              </a:rPr>
+              <a:t>Getting Started</a:t>
+            </a:r>
+          </a:p>
+        </p:txBody>
+      </p:sp>
+      <p:sp>
+        <p:nvSpPr>
+          <p:cNvPr id="4" name="TextBox 3"/>
+          <p:cNvSpPr txBox="1"/>
+          <p:nvPr/>
+        </p:nvSpPr>
+        <p:spPr>
+          <a:xfrm>
+            <a:off x="274320" y="685800"/>
+            <a:ext cx="11430000" cy="365760"/>
+          </a:xfrm>
+          <a:prstGeom prst="rect">
+            <a:avLst/>
+          </a:prstGeom>
+          <a:noFill/>
+        </p:spPr>
+        <p:txBody>
+          <a:bodyPr wrap="square">
+            <a:spAutoFit/>
+          </a:bodyPr>
+          <a:lstStyle/>
+          <a:p>
+            <a:pPr algn="l"/>
+            <a:r>
+              <a:rPr sz="1400" b="0" i="0">
+                <a:solidFill>
+                  <a:srgbClr val="BBCCFF"/>
+                </a:solidFill>
+                <a:latin typeface="Calibri"/>
+              </a:rPr>
+              <a:t>Install, configure, and run your first command in minutes</a:t>
+            </a:r>
+          </a:p>
+        </p:txBody>
+      </p:sp>
+      <p:sp>
+        <p:nvSpPr>
+          <p:cNvPr id="5" name="Rectangle 4"/>
+          <p:cNvSpPr/>
+          <p:nvPr/>
+        </p:nvSpPr>
+        <p:spPr>
+          <a:xfrm>
+            <a:off x="0" y="6583680"/>
+            <a:ext cx="12188952" cy="274320"/>
+          </a:xfrm>
+          <a:prstGeom prst="rect">
+            <a:avLst/>
+          </a:prstGeom>
+          <a:solidFill>
+            <a:srgbClr val="003366"/>
+          </a:solidFill>
+          <a:ln>
+            <a:noFill/>
+          </a:ln>
+        </p:spPr>
+        <p:style>
+          <a:lnRef idx="1">
+            <a:schemeClr val="accent1"/>
+          </a:lnRef>
+          <a:fillRef idx="3">
+            <a:schemeClr val="accent1"/>
+          </a:fillRef>
+          <a:effectRef idx="2">
+            <a:schemeClr val="accent1"/>
+          </a:effectRef>
+          <a:fontRef idx="minor">
+            <a:schemeClr val="lt1"/>
+          </a:fontRef>
+        </p:style>
+        <p:txBody>
+          <a:bodyPr rtlCol="0" anchor="ctr"/>
+          <a:lstStyle/>
+          <a:p>
+            <a:pPr algn="ctr"/>
+          </a:p>
+        </p:txBody>
+      </p:sp>
+      <p:sp>
+        <p:nvSpPr>
+          <p:cNvPr id="6" name="TextBox 5"/>
+          <p:cNvSpPr txBox="1"/>
+          <p:nvPr/>
+        </p:nvSpPr>
+        <p:spPr>
+          <a:xfrm>
+            <a:off x="274320" y="6565392"/>
+            <a:ext cx="11612880" cy="274320"/>
+          </a:xfrm>
+          <a:prstGeom prst="rect">
+            <a:avLst/>
+          </a:prstGeom>
+          <a:noFill/>
+        </p:spPr>
+        <p:txBody>
+          <a:bodyPr wrap="square">
+            <a:spAutoFit/>
+          </a:bodyPr>
+          <a:lstStyle/>
+          <a:p>
+            <a:pPr algn="l"/>
+            <a:r>
+              <a:rPr sz="900" b="0" i="0">
+                <a:solidFill>
+                  <a:srgbClr val="AABBCC"/>
+                </a:solidFill>
+                <a:latin typeface="Calibri"/>
+              </a:rPr>
+              <a:t>iics-cli  |  Informatica IICS Command Line Interface</a:t>
+            </a:r>
+          </a:p>
+        </p:txBody>
+      </p:sp>
+      <p:sp>
+        <p:nvSpPr>
+          <p:cNvPr id="7" name="Rectangle 6"/>
+          <p:cNvSpPr/>
+          <p:nvPr/>
+        </p:nvSpPr>
+        <p:spPr>
+          <a:xfrm>
+            <a:off x="457200" y="1188720"/>
+            <a:ext cx="11247120" cy="5303520"/>
+          </a:xfrm>
+          <a:prstGeom prst="rect">
+            <a:avLst/>
+          </a:prstGeom>
+          <a:solidFill>
+            <a:srgbClr val="1E1E2E"/>
+          </a:solidFill>
+          <a:ln>
+            <a:noFill/>
+          </a:ln>
+        </p:spPr>
+        <p:style>
+          <a:lnRef idx="1">
+            <a:schemeClr val="accent1"/>
+          </a:lnRef>
+          <a:fillRef idx="3">
+            <a:schemeClr val="accent1"/>
+          </a:fillRef>
+          <a:effectRef idx="2">
+            <a:schemeClr val="accent1"/>
+          </a:effectRef>
+          <a:fontRef idx="minor">
+            <a:schemeClr val="lt1"/>
+          </a:fontRef>
+        </p:style>
+        <p:txBody>
+          <a:bodyPr rtlCol="0" anchor="ctr"/>
+          <a:lstStyle/>
+          <a:p>
+            <a:pPr algn="ctr"/>
+          </a:p>
+        </p:txBody>
+      </p:sp>
+      <p:sp>
+        <p:nvSpPr>
+          <p:cNvPr id="8" name="TextBox 7"/>
+          <p:cNvSpPr txBox="1"/>
+          <p:nvPr/>
+        </p:nvSpPr>
+        <p:spPr>
+          <a:xfrm>
+            <a:off x="594360" y="1280160"/>
+            <a:ext cx="10972800" cy="5120640"/>
+          </a:xfrm>
+          <a:prstGeom prst="rect">
+            <a:avLst/>
+          </a:prstGeom>
+          <a:noFill/>
+        </p:spPr>
+        <p:txBody>
+          <a:bodyPr wrap="square">
+            <a:spAutoFit/>
+          </a:bodyPr>
+          <a:lstStyle/>
+          <a:p>
+            <a:pPr algn="l"/>
+            <a:r>
+              <a:rPr sz="1100" b="0" i="0">
+                <a:solidFill>
+                  <a:srgbClr val="A6E3A1"/>
+                </a:solidFill>
+                <a:latin typeface="Courier New"/>
+              </a:rPr>
+              <a:t># 1. Download the binary for your platform
+curl -L https://github.com/jbrazda/iics-cli/releases/latest/download/iics_linux_amd64 \
+  -o /usr/local/bin/iics &amp;&amp; chmod +x /usr/local/bin/iics
+# 2. Create a profile interactively (guided wizard)
+iics profile add
+#    -- OR create ~/.iics/config.yaml manually --
+mkdir -p ~/.iics &amp;&amp; chmod 700 ~/.iics
+cat &gt; ~/.iics/config.yaml &lt;&lt; 'EOF'
+defaultProfile: default
+profiles:
+  default:
+    region: USE4
+    username: your-email@company.com
+EOF
+chmod 600 ~/.iics/config.yaml
+# 3. Set your password in the environment (or use the keychain via wizard)
+export IICS_PASSWORD='your-password'
+# 4. Login (optional – cached for 30 min)
+iics login
+# 5. Start exploring
+iics user list
+iics connection list -o json | jq '.[].name'
+iics objects list --type MTT --output json
+iics export create --name my-first-export --project MyProject</a:t>
             </a:r>
           </a:p>
         </p:txBody>
@@ -7755,7 +11142,7 @@
                 </a:solidFill>
                 <a:latin typeface="Calibri"/>
               </a:rPr>
-              <a:t>  1.  The Problem – Limitations of the Official Informatica CLI</a:t>
+              <a:t>  1.   The Problem – Limitations of the Official Informatica CLI</a:t>
             </a:r>
           </a:p>
           <a:p>
@@ -7766,7 +11153,7 @@
                 </a:solidFill>
                 <a:latin typeface="Calibri"/>
               </a:rPr>
-              <a:t>  2.  POSIX Exit Codes – Reliable CI/CD Integration</a:t>
+              <a:t>  2.   POSIX Exit Codes – Reliable CI/CD Integration</a:t>
             </a:r>
           </a:p>
           <a:p>
@@ -7777,7 +11164,7 @@
                 </a:solidFill>
                 <a:latin typeface="Calibri"/>
               </a:rPr>
-              <a:t>  3.  Machine-Readable Output – JSON, CSV, Tables</a:t>
+              <a:t>  3.   Machine-Readable Output – JSON, CSV, YAML, Tables &amp; Themes</a:t>
             </a:r>
           </a:p>
           <a:p>
@@ -7788,7 +11175,7 @@
                 </a:solidFill>
                 <a:latin typeface="Calibri"/>
               </a:rPr>
-              <a:t>  4.  Secure Credential Management</a:t>
+              <a:t>  4.   Secure Credential Management + OS Keychain</a:t>
             </a:r>
           </a:p>
           <a:p>
@@ -7799,7 +11186,18 @@
                 </a:solidFill>
                 <a:latin typeface="Calibri"/>
               </a:rPr>
-              <a:t>  5.  Named Environment Profiles</a:t>
+              <a:t>  5.   Named Environment Profiles + Interactive Wizard</a:t>
+            </a:r>
+          </a:p>
+          <a:p>
+            <a:r>
+              <a:rPr sz="1700" b="0">
+                <a:solidFill>
+                  <a:srgbClr val="333333"/>
+                </a:solidFill>
+                <a:latin typeface="Calibri"/>
+              </a:rPr>
+              <a:t>  6.   Session Caching</a:t>
             </a:r>
           </a:p>
         </p:txBody>
@@ -7833,7 +11231,7 @@
                 </a:solidFill>
                 <a:latin typeface="Calibri"/>
               </a:rPr>
-              <a:t>  6.  Session Caching</a:t>
+              <a:t>  7.   Broad API Coverage – 27+ Resources</a:t>
             </a:r>
           </a:p>
           <a:p>
@@ -7844,7 +11242,7 @@
                 </a:solidFill>
                 <a:latin typeface="Calibri"/>
               </a:rPr>
-              <a:t>  7.  Broad API Coverage – 20+ Resources</a:t>
+              <a:t>  8.   Package Command – Expand, Create, Inspect</a:t>
             </a:r>
           </a:p>
           <a:p>
@@ -7855,7 +11253,7 @@
                 </a:solidFill>
                 <a:latin typeface="Calibri"/>
               </a:rPr>
-              <a:t>  8.  Full Region Support</a:t>
+              <a:t>  9.   Release Workflow – CI/CD Manifests &amp; Plans</a:t>
             </a:r>
           </a:p>
           <a:p>
@@ -7866,7 +11264,7 @@
                 </a:solidFill>
                 <a:latin typeface="Calibri"/>
               </a:rPr>
-              <a:t>  9.  Single Binary – No JVM Required</a:t>
+              <a:t>  10.  Publish &amp; Unpublish CAI Assets</a:t>
             </a:r>
           </a:p>
           <a:p>
@@ -7877,7 +11275,262 @@
                 </a:solidFill>
                 <a:latin typeface="Calibri"/>
               </a:rPr>
-              <a:t>  10. Feature Comparison Summary</a:t>
+              <a:t>  11.  Full Region Support</a:t>
+            </a:r>
+          </a:p>
+          <a:p>
+            <a:r>
+              <a:rPr sz="1700" b="0">
+                <a:solidFill>
+                  <a:srgbClr val="333333"/>
+                </a:solidFill>
+                <a:latin typeface="Calibri"/>
+              </a:rPr>
+              <a:t>  12.  Feature Comparison Summary</a:t>
+            </a:r>
+          </a:p>
+        </p:txBody>
+      </p:sp>
+    </p:spTree>
+  </p:cSld>
+  <p:clrMapOvr>
+    <a:masterClrMapping/>
+  </p:clrMapOvr>
+</p:sld>
+</file>
+
+<file path=ppt/slides/slide20.xml><?xml version="1.0" encoding="utf-8"?>
+<p:sld xmlns:a="http://schemas.openxmlformats.org/drawingml/2006/main" xmlns:p="http://schemas.openxmlformats.org/presentationml/2006/main" xmlns:r="http://schemas.openxmlformats.org/officeDocument/2006/relationships">
+  <p:cSld>
+    <p:spTree>
+      <p:nvGrpSpPr>
+        <p:cNvPr id="1" name=""/>
+        <p:cNvGrpSpPr/>
+        <p:nvPr/>
+      </p:nvGrpSpPr>
+      <p:grpSpPr/>
+      <p:sp>
+        <p:nvSpPr>
+          <p:cNvPr id="2" name="Rectangle 1"/>
+          <p:cNvSpPr/>
+          <p:nvPr/>
+        </p:nvSpPr>
+        <p:spPr>
+          <a:xfrm>
+            <a:off x="0" y="0"/>
+            <a:ext cx="12188952" cy="6858000"/>
+          </a:xfrm>
+          <a:prstGeom prst="rect">
+            <a:avLst/>
+          </a:prstGeom>
+          <a:solidFill>
+            <a:srgbClr val="003366"/>
+          </a:solidFill>
+          <a:ln>
+            <a:noFill/>
+          </a:ln>
+        </p:spPr>
+        <p:style>
+          <a:lnRef idx="1">
+            <a:schemeClr val="accent1"/>
+          </a:lnRef>
+          <a:fillRef idx="3">
+            <a:schemeClr val="accent1"/>
+          </a:fillRef>
+          <a:effectRef idx="2">
+            <a:schemeClr val="accent1"/>
+          </a:effectRef>
+          <a:fontRef idx="minor">
+            <a:schemeClr val="lt1"/>
+          </a:fontRef>
+        </p:style>
+        <p:txBody>
+          <a:bodyPr rtlCol="0" anchor="ctr"/>
+          <a:lstStyle/>
+          <a:p>
+            <a:pPr algn="ctr"/>
+          </a:p>
+        </p:txBody>
+      </p:sp>
+      <p:sp>
+        <p:nvSpPr>
+          <p:cNvPr id="3" name="Rectangle 2"/>
+          <p:cNvSpPr/>
+          <p:nvPr/>
+        </p:nvSpPr>
+        <p:spPr>
+          <a:xfrm>
+            <a:off x="0" y="3200400"/>
+            <a:ext cx="12188952" cy="54864"/>
+          </a:xfrm>
+          <a:prstGeom prst="rect">
+            <a:avLst/>
+          </a:prstGeom>
+          <a:solidFill>
+            <a:srgbClr val="FF6600"/>
+          </a:solidFill>
+          <a:ln>
+            <a:noFill/>
+          </a:ln>
+        </p:spPr>
+        <p:style>
+          <a:lnRef idx="1">
+            <a:schemeClr val="accent1"/>
+          </a:lnRef>
+          <a:fillRef idx="3">
+            <a:schemeClr val="accent1"/>
+          </a:fillRef>
+          <a:effectRef idx="2">
+            <a:schemeClr val="accent1"/>
+          </a:effectRef>
+          <a:fontRef idx="minor">
+            <a:schemeClr val="lt1"/>
+          </a:fontRef>
+        </p:style>
+        <p:txBody>
+          <a:bodyPr rtlCol="0" anchor="ctr"/>
+          <a:lstStyle/>
+          <a:p>
+            <a:pPr algn="ctr"/>
+          </a:p>
+        </p:txBody>
+      </p:sp>
+      <p:sp>
+        <p:nvSpPr>
+          <p:cNvPr id="4" name="TextBox 3"/>
+          <p:cNvSpPr txBox="1"/>
+          <p:nvPr/>
+        </p:nvSpPr>
+        <p:spPr>
+          <a:xfrm>
+            <a:off x="914400" y="1371600"/>
+            <a:ext cx="10058400" cy="914400"/>
+          </a:xfrm>
+          <a:prstGeom prst="rect">
+            <a:avLst/>
+          </a:prstGeom>
+          <a:noFill/>
+        </p:spPr>
+        <p:txBody>
+          <a:bodyPr wrap="square">
+            <a:spAutoFit/>
+          </a:bodyPr>
+          <a:lstStyle/>
+          <a:p>
+            <a:pPr algn="ctr"/>
+            <a:r>
+              <a:rPr sz="5400" b="1" i="0">
+                <a:solidFill>
+                  <a:srgbClr val="FFFFFF"/>
+                </a:solidFill>
+                <a:latin typeface="Calibri"/>
+              </a:rPr>
+              <a:t>Questions?</a:t>
+            </a:r>
+          </a:p>
+        </p:txBody>
+      </p:sp>
+      <p:sp>
+        <p:nvSpPr>
+          <p:cNvPr id="5" name="TextBox 4"/>
+          <p:cNvSpPr txBox="1"/>
+          <p:nvPr/>
+        </p:nvSpPr>
+        <p:spPr>
+          <a:xfrm>
+            <a:off x="914400" y="2560320"/>
+            <a:ext cx="10058400" cy="548640"/>
+          </a:xfrm>
+          <a:prstGeom prst="rect">
+            <a:avLst/>
+          </a:prstGeom>
+          <a:noFill/>
+        </p:spPr>
+        <p:txBody>
+          <a:bodyPr wrap="square">
+            <a:spAutoFit/>
+          </a:bodyPr>
+          <a:lstStyle/>
+          <a:p>
+            <a:pPr algn="ctr"/>
+            <a:r>
+              <a:rPr sz="2200" b="0" i="0">
+                <a:solidFill>
+                  <a:srgbClr val="FFAA44"/>
+                </a:solidFill>
+                <a:latin typeface="Calibri"/>
+              </a:rPr>
+              <a:t>github.com/jbrazda/iics-cli</a:t>
+            </a:r>
+          </a:p>
+        </p:txBody>
+      </p:sp>
+      <p:sp>
+        <p:nvSpPr>
+          <p:cNvPr id="6" name="TextBox 5"/>
+          <p:cNvSpPr txBox="1"/>
+          <p:nvPr/>
+        </p:nvSpPr>
+        <p:spPr>
+          <a:xfrm>
+            <a:off x="914400" y="3291840"/>
+            <a:ext cx="10058400" cy="457200"/>
+          </a:xfrm>
+          <a:prstGeom prst="rect">
+            <a:avLst/>
+          </a:prstGeom>
+          <a:noFill/>
+        </p:spPr>
+        <p:txBody>
+          <a:bodyPr wrap="square">
+            <a:spAutoFit/>
+          </a:bodyPr>
+          <a:lstStyle/>
+          <a:p>
+            <a:pPr algn="ctr"/>
+            <a:r>
+              <a:rPr sz="1600" b="0" i="0">
+                <a:solidFill>
+                  <a:srgbClr val="BBCCFF"/>
+                </a:solidFill>
+                <a:latin typeface="Calibri"/>
+              </a:rPr>
+              <a:t>Source code  |  Releases  |  Issues  |  Documentation</a:t>
+            </a:r>
+          </a:p>
+        </p:txBody>
+      </p:sp>
+      <p:sp>
+        <p:nvSpPr>
+          <p:cNvPr id="7" name="TextBox 6"/>
+          <p:cNvSpPr txBox="1"/>
+          <p:nvPr/>
+        </p:nvSpPr>
+        <p:spPr>
+          <a:xfrm>
+            <a:off x="914400" y="3931920"/>
+            <a:ext cx="10058400" cy="457200"/>
+          </a:xfrm>
+          <a:prstGeom prst="rect">
+            <a:avLst/>
+          </a:prstGeom>
+          <a:noFill/>
+        </p:spPr>
+        <p:txBody>
+          <a:bodyPr wrap="square">
+            <a:spAutoFit/>
+          </a:bodyPr>
+          <a:lstStyle/>
+          <a:p>
+            <a:pPr algn="ctr"/>
+            <a:r>
+              <a:rPr sz="1400" b="0" i="1">
+                <a:solidFill>
+                  <a:srgbClr val="888888"/>
+                </a:solidFill>
+                <a:latin typeface="Calibri"/>
+              </a:rPr>
+              <a:t>docs/documentation/  in the repository for full per-command reference</a:t>
             </a:r>
           </a:p>
         </p:txBody>
@@ -8008,7 +11661,7 @@
                 </a:solidFill>
                 <a:latin typeface="Calibri"/>
               </a:rPr>
-              <a:t>Informatica Asset Management CLI V2 – what it cannot do</a:t>
+              <a:t>The Official Informatica CLI – what it cannot do</a:t>
             </a:r>
           </a:p>
         </p:txBody>
@@ -8544,7 +12197,7 @@
               <a:t># Export fails – but exit code is still 0
 iics export -u user@co.com -p secret -r us \
   -a "MyProject/BadAsset.Process"
-echo $?   # → 0  (pipeline keeps running!)</a:t>
+echo $?   # -&gt; 0  (pipeline keeps running!)</a:t>
             </a:r>
           </a:p>
         </p:txBody>
@@ -8658,9 +12311,9 @@
                 <a:latin typeface="Courier New"/>
               </a:rPr>
               <a:t>iics export create --name nightly --project Prod
-echo $?   # → 1  (API / runtime error)
+echo $?   # -&gt; 1  (API / runtime error)
 iics export create --bad-flag
-echo $?   # → 2  (usage / flag error)</a:t>
+echo $?   # -&gt; 2  (usage / flag error)</a:t>
             </a:r>
           </a:p>
         </p:txBody>
@@ -9137,7 +12790,7 @@
                 </a:solidFill>
                 <a:latin typeface="Calibri"/>
               </a:rPr>
-              <a:t>JSON, CSV, and Table formats – pipe into any UNIX tool</a:t>
+              <a:t>JSON, CSV, YAML, and Table formats – pipe into any UNIX tool</a:t>
             </a:r>
           </a:p>
         </p:txBody>
@@ -9250,7 +12903,7 @@
                 </a:solidFill>
                 <a:latin typeface="Calibri"/>
               </a:rPr>
-              <a:t>Every command supports --output / -o  table | json | csv</a:t>
+              <a:t>Every command supports --output / -o  table | json | csv | yaml</a:t>
             </a:r>
           </a:p>
         </p:txBody>
@@ -9264,7 +12917,7 @@
         <p:spPr>
           <a:xfrm>
             <a:off x="457200" y="1554480"/>
-            <a:ext cx="11247120" cy="3566160"/>
+            <a:ext cx="11247120" cy="3749039"/>
           </a:xfrm>
           <a:prstGeom prst="rect">
             <a:avLst/>
@@ -9307,7 +12960,7 @@
         <p:spPr>
           <a:xfrm>
             <a:off x="594360" y="1645920"/>
-            <a:ext cx="10972800" cy="3383280"/>
+            <a:ext cx="10972800" cy="3566159"/>
           </a:xfrm>
           <a:prstGeom prst="rect">
             <a:avLst/>
@@ -9334,6 +12987,8 @@
 iics user list -o json | jq -r '.[].userName'
 # CSV – import into Excel / Google Sheets
 iics connection list -o csv &gt; connections.csv
+# YAML – human-friendly structured output
+iics schedule list -o yaml
 # Find enabled schedules and extract names
 iics schedule list -o json \
   | jq -r '.[] | select(.status=="ENABLED") | .name'
@@ -9351,7 +13006,7 @@
         </p:nvSpPr>
         <p:spPr>
           <a:xfrm>
-            <a:off x="457200" y="5257800"/>
+            <a:off x="457200" y="5440680"/>
             <a:ext cx="11247120" cy="365760"/>
           </a:xfrm>
           <a:prstGeom prst="rect">
@@ -9631,7 +13286,7 @@
         <p:spPr>
           <a:xfrm>
             <a:off x="457200" y="1508760"/>
-            <a:ext cx="5303520" cy="1828800"/>
+            <a:ext cx="5303520" cy="1645920"/>
           </a:xfrm>
           <a:prstGeom prst="rect">
             <a:avLst/>
@@ -9674,7 +13329,7 @@
         <p:spPr>
           <a:xfrm>
             <a:off x="594360" y="1600200"/>
-            <a:ext cx="5029200" cy="1645920"/>
+            <a:ext cx="5029200" cy="1463040"/>
           </a:xfrm>
           <a:prstGeom prst="rect">
             <a:avLst/>
@@ -9735,7 +13390,7 @@
                 </a:solidFill>
                 <a:latin typeface="Calibri"/>
               </a:rPr>
-              <a:t>iics-cli – credentials in config file + env var</a:t>
+              <a:t>iics-cli – config file + env var + OS keychain</a:t>
             </a:r>
           </a:p>
         </p:txBody>
@@ -9749,7 +13404,7 @@
         <p:spPr>
           <a:xfrm>
             <a:off x="6400800" y="1508760"/>
-            <a:ext cx="5303520" cy="1828800"/>
+            <a:ext cx="5303520" cy="2011680"/>
           </a:xfrm>
           <a:prstGeom prst="rect">
             <a:avLst/>
@@ -9792,7 +13447,7 @@
         <p:spPr>
           <a:xfrm>
             <a:off x="6537960" y="1600200"/>
-            <a:ext cx="5029200" cy="1645920"/>
+            <a:ext cx="5029200" cy="1828800"/>
           </a:xfrm>
           <a:prstGeom prst="rect">
             <a:avLst/>
@@ -9817,8 +13472,9 @@
 defaultProfile: prod
 profiles:
   prod:
-    region: US
+    region: USE4
     username: admin@company.com
+    password: "@keyring"  # stored in OS keychain
 # Password via env var – never in a file
 export IICS_PASSWORD='MyP@ssword123'
 iics export create --name nightly</a:t>
@@ -9834,8 +13490,8 @@
         </p:nvSpPr>
         <p:spPr>
           <a:xfrm>
-            <a:off x="457200" y="3566160"/>
-            <a:ext cx="11247120" cy="2194560"/>
+            <a:off x="457200" y="3749039"/>
+            <a:ext cx="11247120" cy="2377440"/>
           </a:xfrm>
           <a:prstGeom prst="rect">
             <a:avLst/>
@@ -9849,7 +13505,7 @@
           <a:lstStyle/>
           <a:p>
             <a:r>
-              <a:rPr sz="1500" b="0">
+              <a:rPr sz="1400" b="0">
                 <a:solidFill>
                   <a:srgbClr val="333333"/>
                 </a:solidFill>
@@ -9860,29 +13516,40 @@
           </a:p>
           <a:p>
             <a:r>
-              <a:rPr sz="1500" b="0">
+              <a:rPr sz="1400" b="0">
                 <a:solidFill>
                   <a:srgbClr val="333333"/>
                 </a:solidFill>
                 <a:latin typeface="Calibri"/>
               </a:rPr>
-              <a:t>•  Password sourced from IICS_PASSWORD env var or secret manager</a:t>
-            </a:r>
-          </a:p>
-          <a:p>
-            <a:r>
-              <a:rPr sz="1500" b="0">
+              <a:t>•  Password stored in macOS Keychain or Linux Secret Service (GNOME Keyring / KWallet)</a:t>
+            </a:r>
+          </a:p>
+          <a:p>
+            <a:r>
+              <a:rPr sz="1400" b="0">
                 <a:solidFill>
                   <a:srgbClr val="333333"/>
                 </a:solidFill>
                 <a:latin typeface="Calibri"/>
               </a:rPr>
-              <a:t>•  No credentials in process list, shell history, or build logs</a:t>
-            </a:r>
-          </a:p>
-          <a:p>
-            <a:r>
-              <a:rPr sz="1500" b="0">
+              <a:t>•  Password sourced from IICS_PASSWORD env var (highest precedence)</a:t>
+            </a:r>
+          </a:p>
+          <a:p>
+            <a:r>
+              <a:rPr sz="1400" b="0">
+                <a:solidFill>
+                  <a:srgbClr val="333333"/>
+                </a:solidFill>
+                <a:latin typeface="Calibri"/>
+              </a:rPr>
+              <a:t>•  Sentinel value @keyring in config – real secret never written to disk</a:t>
+            </a:r>
+          </a:p>
+          <a:p>
+            <a:r>
+              <a:rPr sz="1400" b="0">
                 <a:solidFill>
                   <a:srgbClr val="333333"/>
                 </a:solidFill>
@@ -10019,7 +13686,7 @@
                 </a:solidFill>
                 <a:latin typeface="Calibri"/>
               </a:rPr>
-              <a:t>Switch between orgs and environments with a single flag</a:t>
+              <a:t>Interactive wizard or manual config – switch with a single flag</a:t>
             </a:r>
           </a:p>
         </p:txBody>
@@ -10104,14 +13771,49 @@
       </p:sp>
       <p:sp>
         <p:nvSpPr>
-          <p:cNvPr id="7" name="Rectangle 6"/>
+          <p:cNvPr id="7" name="TextBox 6"/>
+          <p:cNvSpPr txBox="1"/>
+          <p:nvPr/>
+        </p:nvSpPr>
+        <p:spPr>
+          <a:xfrm>
+            <a:off x="457200" y="1097280"/>
+            <a:ext cx="5303520" cy="320040"/>
+          </a:xfrm>
+          <a:prstGeom prst="rect">
+            <a:avLst/>
+          </a:prstGeom>
+          <a:noFill/>
+        </p:spPr>
+        <p:txBody>
+          <a:bodyPr wrap="square">
+            <a:spAutoFit/>
+          </a:bodyPr>
+          <a:lstStyle/>
+          <a:p>
+            <a:pPr algn="l"/>
+            <a:r>
+              <a:rPr sz="1400" b="1" i="0">
+                <a:solidFill>
+                  <a:srgbClr val="003366"/>
+                </a:solidFill>
+                <a:latin typeface="Calibri"/>
+              </a:rPr>
+              <a:t>Interactive profile setup</a:t>
+            </a:r>
+          </a:p>
+        </p:txBody>
+      </p:sp>
+      <p:sp>
+        <p:nvSpPr>
+          <p:cNvPr id="8" name="Rectangle 7"/>
           <p:cNvSpPr/>
           <p:nvPr/>
         </p:nvSpPr>
         <p:spPr>
           <a:xfrm>
-            <a:off x="457200" y="1188720"/>
-            <a:ext cx="5303520" cy="4114800"/>
+            <a:off x="457200" y="1463040"/>
+            <a:ext cx="5303520" cy="2103120"/>
           </a:xfrm>
           <a:prstGeom prst="rect">
             <a:avLst/>
@@ -10147,14 +13849,14 @@
       </p:sp>
       <p:sp>
         <p:nvSpPr>
-          <p:cNvPr id="8" name="TextBox 7"/>
+          <p:cNvPr id="9" name="TextBox 8"/>
           <p:cNvSpPr txBox="1"/>
           <p:nvPr/>
         </p:nvSpPr>
         <p:spPr>
           <a:xfrm>
-            <a:off x="594360" y="1280160"/>
-            <a:ext cx="5029200" cy="3931920"/>
+            <a:off x="594360" y="1554480"/>
+            <a:ext cx="5029200" cy="1920240"/>
           </a:xfrm>
           <a:prstGeom prst="rect">
             <a:avLst/>
@@ -10175,35 +13877,28 @@
                 </a:solidFill>
                 <a:latin typeface="Courier New"/>
               </a:rPr>
-              <a:t># ~/.iics/config.yaml
-defaultProfile: dev
-profiles:
-  dev:
-    region: US
-    username: dev-user@company.com
-  staging:
-    region: US
-    username: staging-admin@company.com
-  prod:
-    region: US
-    username: prod-admin@company.com
-  emea:
-    region: EMEA
-    username: emea-admin@company.com</a:t>
-            </a:r>
-          </a:p>
-        </p:txBody>
-      </p:sp>
-      <p:sp>
-        <p:nvSpPr>
-          <p:cNvPr id="9" name="TextBox 8"/>
+              <a:t># First-run wizard – guided setup
+iics profile add
+# Or add a named profile
+iics profile add prod
+# List / edit / delete profiles
+iics profile list
+iics profile edit dev
+iics profile set-default prod</a:t>
+            </a:r>
+          </a:p>
+        </p:txBody>
+      </p:sp>
+      <p:sp>
+        <p:nvSpPr>
+          <p:cNvPr id="10" name="TextBox 9"/>
           <p:cNvSpPr txBox="1"/>
           <p:nvPr/>
         </p:nvSpPr>
         <p:spPr>
           <a:xfrm>
-            <a:off x="6400800" y="1188720"/>
-            <a:ext cx="5303520" cy="365760"/>
+            <a:off x="457200" y="3703320"/>
+            <a:ext cx="5303520" cy="320040"/>
           </a:xfrm>
           <a:prstGeom prst="rect">
             <a:avLst/>
@@ -10224,21 +13919,21 @@
                 </a:solidFill>
                 <a:latin typeface="Calibri"/>
               </a:rPr>
-              <a:t>Switching environments</a:t>
-            </a:r>
-          </a:p>
-        </p:txBody>
-      </p:sp>
-      <p:sp>
-        <p:nvSpPr>
-          <p:cNvPr id="10" name="Rectangle 9"/>
+              <a:t>~/.iics/config.yaml</a:t>
+            </a:r>
+          </a:p>
+        </p:txBody>
+      </p:sp>
+      <p:sp>
+        <p:nvSpPr>
+          <p:cNvPr id="11" name="Rectangle 10"/>
           <p:cNvSpPr/>
           <p:nvPr/>
         </p:nvSpPr>
         <p:spPr>
           <a:xfrm>
-            <a:off x="6400800" y="1600200"/>
-            <a:ext cx="5303520" cy="2743200"/>
+            <a:off x="457200" y="4069080"/>
+            <a:ext cx="5303520" cy="2286000"/>
           </a:xfrm>
           <a:prstGeom prst="rect">
             <a:avLst/>
@@ -10274,13 +13969,137 @@
       </p:sp>
       <p:sp>
         <p:nvSpPr>
-          <p:cNvPr id="11" name="TextBox 10"/>
+          <p:cNvPr id="12" name="TextBox 11"/>
           <p:cNvSpPr txBox="1"/>
           <p:nvPr/>
         </p:nvSpPr>
         <p:spPr>
           <a:xfrm>
-            <a:off x="6537960" y="1691640"/>
+            <a:off x="594360" y="4160520"/>
+            <a:ext cx="5029200" cy="2103120"/>
+          </a:xfrm>
+          <a:prstGeom prst="rect">
+            <a:avLst/>
+          </a:prstGeom>
+          <a:noFill/>
+        </p:spPr>
+        <p:txBody>
+          <a:bodyPr wrap="square">
+            <a:spAutoFit/>
+          </a:bodyPr>
+          <a:lstStyle/>
+          <a:p>
+            <a:pPr algn="l"/>
+            <a:r>
+              <a:rPr sz="1100" b="0" i="0">
+                <a:solidFill>
+                  <a:srgbClr val="A6E3A1"/>
+                </a:solidFill>
+                <a:latin typeface="Courier New"/>
+              </a:rPr>
+              <a:t>defaultProfile: dev
+profiles:
+  dev:
+    region: USE4
+    username: dev-user@company.com
+  prod:
+    region: USE4
+    username: prod-admin@company.com
+    password: "@keyring"
+  emea:
+    region: EMEA
+    username: emea-admin@company.com</a:t>
+            </a:r>
+          </a:p>
+        </p:txBody>
+      </p:sp>
+      <p:sp>
+        <p:nvSpPr>
+          <p:cNvPr id="13" name="TextBox 12"/>
+          <p:cNvSpPr txBox="1"/>
+          <p:nvPr/>
+        </p:nvSpPr>
+        <p:spPr>
+          <a:xfrm>
+            <a:off x="6400800" y="1097280"/>
+            <a:ext cx="5303520" cy="320040"/>
+          </a:xfrm>
+          <a:prstGeom prst="rect">
+            <a:avLst/>
+          </a:prstGeom>
+          <a:noFill/>
+        </p:spPr>
+        <p:txBody>
+          <a:bodyPr wrap="square">
+            <a:spAutoFit/>
+          </a:bodyPr>
+          <a:lstStyle/>
+          <a:p>
+            <a:pPr algn="l"/>
+            <a:r>
+              <a:rPr sz="1400" b="1" i="0">
+                <a:solidFill>
+                  <a:srgbClr val="003366"/>
+                </a:solidFill>
+                <a:latin typeface="Calibri"/>
+              </a:rPr>
+              <a:t>Switching environments</a:t>
+            </a:r>
+          </a:p>
+        </p:txBody>
+      </p:sp>
+      <p:sp>
+        <p:nvSpPr>
+          <p:cNvPr id="14" name="Rectangle 13"/>
+          <p:cNvSpPr/>
+          <p:nvPr/>
+        </p:nvSpPr>
+        <p:spPr>
+          <a:xfrm>
+            <a:off x="6400800" y="1463040"/>
+            <a:ext cx="5303520" cy="2743200"/>
+          </a:xfrm>
+          <a:prstGeom prst="rect">
+            <a:avLst/>
+          </a:prstGeom>
+          <a:solidFill>
+            <a:srgbClr val="1E1E2E"/>
+          </a:solidFill>
+          <a:ln>
+            <a:noFill/>
+          </a:ln>
+        </p:spPr>
+        <p:style>
+          <a:lnRef idx="1">
+            <a:schemeClr val="accent1"/>
+          </a:lnRef>
+          <a:fillRef idx="3">
+            <a:schemeClr val="accent1"/>
+          </a:fillRef>
+          <a:effectRef idx="2">
+            <a:schemeClr val="accent1"/>
+          </a:effectRef>
+          <a:fontRef idx="minor">
+            <a:schemeClr val="lt1"/>
+          </a:fontRef>
+        </p:style>
+        <p:txBody>
+          <a:bodyPr rtlCol="0" anchor="ctr"/>
+          <a:lstStyle/>
+          <a:p>
+            <a:pPr algn="ctr"/>
+          </a:p>
+        </p:txBody>
+      </p:sp>
+      <p:sp>
+        <p:nvSpPr>
+          <p:cNvPr id="15" name="TextBox 14"/>
+          <p:cNvSpPr txBox="1"/>
+          <p:nvPr/>
+        </p:nvSpPr>
+        <p:spPr>
+          <a:xfrm>
+            <a:off x="6537960" y="1554480"/>
             <a:ext cx="5029200" cy="2560320"/>
           </a:xfrm>
           <a:prstGeom prst="rect">
@@ -10319,14 +14138,14 @@
       </p:sp>
       <p:sp>
         <p:nvSpPr>
-          <p:cNvPr id="12" name="TextBox 11"/>
+          <p:cNvPr id="16" name="TextBox 15"/>
           <p:cNvSpPr txBox="1"/>
           <p:nvPr/>
         </p:nvSpPr>
         <p:spPr>
           <a:xfrm>
-            <a:off x="457200" y="5486400"/>
-            <a:ext cx="11247120" cy="1188720"/>
+            <a:off x="6400800" y="4343400"/>
+            <a:ext cx="5303520" cy="1828800"/>
           </a:xfrm>
           <a:prstGeom prst="rect">
             <a:avLst/>
@@ -10340,7 +14159,7 @@
           <a:lstStyle/>
           <a:p>
             <a:r>
-              <a:rPr sz="1400" b="0">
+              <a:rPr sz="1300" b="0">
                 <a:solidFill>
                   <a:srgbClr val="333333"/>
                 </a:solidFill>
@@ -10351,24 +14170,35 @@
           </a:p>
           <a:p>
             <a:r>
-              <a:rPr sz="1400" b="0">
+              <a:rPr sz="1300" b="0">
                 <a:solidFill>
                   <a:srgbClr val="333333"/>
                 </a:solidFill>
                 <a:latin typeface="Calibri"/>
               </a:rPr>
-              <a:t>•  Profile name can be overridden by IICS_PROFILE env var for CI/CD</a:t>
-            </a:r>
-          </a:p>
-          <a:p>
-            <a:r>
-              <a:rPr sz="1400" b="0">
+              <a:t>•  Profile overridden by IICS_PROFILE env var for CI/CD</a:t>
+            </a:r>
+          </a:p>
+          <a:p>
+            <a:r>
+              <a:rPr sz="1300" b="0">
                 <a:solidFill>
                   <a:srgbClr val="333333"/>
                 </a:solidFill>
                 <a:latin typeface="Calibri"/>
               </a:rPr>
               <a:t>•  defaultProfile used when no --profile flag is given</a:t>
+            </a:r>
+          </a:p>
+          <a:p>
+            <a:r>
+              <a:rPr sz="1300" b="0">
+                <a:solidFill>
+                  <a:srgbClr val="333333"/>
+                </a:solidFill>
+                <a:latin typeface="Calibri"/>
+              </a:rPr>
+              <a:t>•  iics profile add wizard prompts for region, username, and keychain storage</a:t>
             </a:r>
           </a:p>
         </p:txBody>
@@ -10985,7 +14815,7 @@
                 </a:solidFill>
                 <a:latin typeface="Calibri"/>
               </a:rPr>
-              <a:t>20+ resource types vs. 5 operations in the official tool</a:t>
+              <a:t>27+ resource types vs. 5 operations in the official tool</a:t>
             </a:r>
           </a:p>
         </p:txBody>
@@ -11090,7 +14920,7 @@
                 <a:gridCol w="2743200"/>
                 <a:gridCol w="2743200"/>
               </a:tblGrid>
-              <a:tr h="473825">
+              <a:tr h="372291">
                 <a:tc>
                   <a:txBody>
                     <a:bodyPr/>
@@ -11138,7 +14968,7 @@
                   </a:tcPr>
                 </a:tc>
               </a:tr>
-              <a:tr h="473825">
+              <a:tr h="372291">
                 <a:tc>
                   <a:txBody>
                     <a:bodyPr/>
@@ -11186,7 +15016,7 @@
                   </a:tcPr>
                 </a:tc>
               </a:tr>
-              <a:tr h="473825">
+              <a:tr h="372291">
                 <a:tc>
                   <a:txBody>
                     <a:bodyPr/>
@@ -11234,7 +15064,7 @@
                   </a:tcPr>
                 </a:tc>
               </a:tr>
-              <a:tr h="473825">
+              <a:tr h="372291">
                 <a:tc>
                   <a:txBody>
                     <a:bodyPr/>
@@ -11282,7 +15112,7 @@
                   </a:tcPr>
                 </a:tc>
               </a:tr>
-              <a:tr h="473825">
+              <a:tr h="372291">
                 <a:tc>
                   <a:txBody>
                     <a:bodyPr/>
@@ -11319,7 +15149,7 @@
                           </a:solidFill>
                           <a:latin typeface="Calibri"/>
                         </a:rPr>
-                        <a:t>create, status, download</a:t>
+                        <a:t>run, create, start, status, download</a:t>
                       </a:r>
                     </a:p>
                   </a:txBody>
@@ -11330,7 +15160,7 @@
                   </a:tcPr>
                 </a:tc>
               </a:tr>
-              <a:tr h="473825">
+              <a:tr h="372291">
                 <a:tc>
                   <a:txBody>
                     <a:bodyPr/>
@@ -11367,7 +15197,7 @@
                           </a:solidFill>
                           <a:latin typeface="Calibri"/>
                         </a:rPr>
-                        <a:t>upload, start, status, log</a:t>
+                        <a:t>run, upload, start, status, download-log</a:t>
                       </a:r>
                     </a:p>
                   </a:txBody>
@@ -11378,7 +15208,7 @@
                   </a:tcPr>
                 </a:tc>
               </a:tr>
-              <a:tr h="473825">
+              <a:tr h="372291">
                 <a:tc>
                   <a:txBody>
                     <a:bodyPr/>
@@ -11392,6 +15222,198 @@
                           </a:solidFill>
                           <a:latin typeface="Calibri"/>
                         </a:rPr>
+                        <a:t>publish</a:t>
+                      </a:r>
+                    </a:p>
+                  </a:txBody>
+                  <a:tcPr>
+                    <a:solidFill>
+                      <a:srgbClr val="FFFFFF"/>
+                    </a:solidFill>
+                  </a:tcPr>
+                </a:tc>
+                <a:tc>
+                  <a:txBody>
+                    <a:bodyPr/>
+                    <a:lstStyle/>
+                    <a:p>
+                      <a:pPr algn="ctr"/>
+                      <a:r>
+                        <a:rPr sz="1200">
+                          <a:solidFill>
+                            <a:srgbClr val="333333"/>
+                          </a:solidFill>
+                          <a:latin typeface="Calibri"/>
+                        </a:rPr>
+                        <a:t>run, start, status</a:t>
+                      </a:r>
+                    </a:p>
+                  </a:txBody>
+                  <a:tcPr>
+                    <a:solidFill>
+                      <a:srgbClr val="FFFFFF"/>
+                    </a:solidFill>
+                  </a:tcPr>
+                </a:tc>
+              </a:tr>
+              <a:tr h="372291">
+                <a:tc>
+                  <a:txBody>
+                    <a:bodyPr/>
+                    <a:lstStyle/>
+                    <a:p>
+                      <a:pPr algn="l"/>
+                      <a:r>
+                        <a:rPr sz="1200">
+                          <a:solidFill>
+                            <a:srgbClr val="333333"/>
+                          </a:solidFill>
+                          <a:latin typeface="Calibri"/>
+                        </a:rPr>
+                        <a:t>unpublish</a:t>
+                      </a:r>
+                    </a:p>
+                  </a:txBody>
+                  <a:tcPr>
+                    <a:solidFill>
+                      <a:srgbClr val="F2F2F2"/>
+                    </a:solidFill>
+                  </a:tcPr>
+                </a:tc>
+                <a:tc>
+                  <a:txBody>
+                    <a:bodyPr/>
+                    <a:lstStyle/>
+                    <a:p>
+                      <a:pPr algn="ctr"/>
+                      <a:r>
+                        <a:rPr sz="1200">
+                          <a:solidFill>
+                            <a:srgbClr val="333333"/>
+                          </a:solidFill>
+                          <a:latin typeface="Calibri"/>
+                        </a:rPr>
+                        <a:t>run, start, status</a:t>
+                      </a:r>
+                    </a:p>
+                  </a:txBody>
+                  <a:tcPr>
+                    <a:solidFill>
+                      <a:srgbClr val="F2F2F2"/>
+                    </a:solidFill>
+                  </a:tcPr>
+                </a:tc>
+              </a:tr>
+              <a:tr h="372291">
+                <a:tc>
+                  <a:txBody>
+                    <a:bodyPr/>
+                    <a:lstStyle/>
+                    <a:p>
+                      <a:pPr algn="l"/>
+                      <a:r>
+                        <a:rPr sz="1200">
+                          <a:solidFill>
+                            <a:srgbClr val="333333"/>
+                          </a:solidFill>
+                          <a:latin typeface="Calibri"/>
+                        </a:rPr>
+                        <a:t>package</a:t>
+                      </a:r>
+                    </a:p>
+                  </a:txBody>
+                  <a:tcPr>
+                    <a:solidFill>
+                      <a:srgbClr val="FFFFFF"/>
+                    </a:solidFill>
+                  </a:tcPr>
+                </a:tc>
+                <a:tc>
+                  <a:txBody>
+                    <a:bodyPr/>
+                    <a:lstStyle/>
+                    <a:p>
+                      <a:pPr algn="ctr"/>
+                      <a:r>
+                        <a:rPr sz="1200">
+                          <a:solidFill>
+                            <a:srgbClr val="333333"/>
+                          </a:solidFill>
+                          <a:latin typeface="Calibri"/>
+                        </a:rPr>
+                        <a:t>expand, create, dependencies</a:t>
+                      </a:r>
+                    </a:p>
+                  </a:txBody>
+                  <a:tcPr>
+                    <a:solidFill>
+                      <a:srgbClr val="FFFFFF"/>
+                    </a:solidFill>
+                  </a:tcPr>
+                </a:tc>
+              </a:tr>
+              <a:tr h="372291">
+                <a:tc>
+                  <a:txBody>
+                    <a:bodyPr/>
+                    <a:lstStyle/>
+                    <a:p>
+                      <a:pPr algn="l"/>
+                      <a:r>
+                        <a:rPr sz="1200">
+                          <a:solidFill>
+                            <a:srgbClr val="333333"/>
+                          </a:solidFill>
+                          <a:latin typeface="Calibri"/>
+                        </a:rPr>
+                        <a:t>release</a:t>
+                      </a:r>
+                    </a:p>
+                  </a:txBody>
+                  <a:tcPr>
+                    <a:solidFill>
+                      <a:srgbClr val="F2F2F2"/>
+                    </a:solidFill>
+                  </a:tcPr>
+                </a:tc>
+                <a:tc>
+                  <a:txBody>
+                    <a:bodyPr/>
+                    <a:lstStyle/>
+                    <a:p>
+                      <a:pPr algn="ctr"/>
+                      <a:r>
+                        <a:rPr sz="1200">
+                          <a:solidFill>
+                            <a:srgbClr val="333333"/>
+                          </a:solidFill>
+                          <a:latin typeface="Calibri"/>
+                        </a:rPr>
+                        <a:t>manifest, validate, plan</a:t>
+                      </a:r>
+                    </a:p>
+                  </a:txBody>
+                  <a:tcPr>
+                    <a:solidFill>
+                      <a:srgbClr val="F2F2F2"/>
+                    </a:solidFill>
+                  </a:tcPr>
+                </a:tc>
+              </a:tr>
+              <a:tr h="372291">
+                <a:tc>
+                  <a:txBody>
+                    <a:bodyPr/>
+                    <a:lstStyle/>
+                    <a:p>
+                      <a:pPr algn="l"/>
+                      <a:r>
+                        <a:rPr sz="1200">
+                          <a:solidFill>
+                            <a:srgbClr val="333333"/>
+                          </a:solidFill>
+                          <a:latin typeface="Calibri"/>
+                        </a:rPr>
                         <a:t>schedule</a:t>
                       </a:r>
                     </a:p>
@@ -11426,7 +15448,7 @@
                   </a:tcPr>
                 </a:tc>
               </a:tr>
-              <a:tr h="473825">
+              <a:tr h="372291">
                 <a:tc>
                   <a:txBody>
                     <a:bodyPr/>
@@ -11474,7 +15496,7 @@
                   </a:tcPr>
                 </a:tc>
               </a:tr>
-              <a:tr h="473825">
+              <a:tr h="372291">
                 <a:tc>
                   <a:txBody>
                     <a:bodyPr/>
@@ -11522,7 +15544,7 @@
                   </a:tcPr>
                 </a:tc>
               </a:tr>
-              <a:tr h="473825">
+              <a:tr h="372297">
                 <a:tc>
                   <a:txBody>
                     <a:bodyPr/>
@@ -11536,7 +15558,7 @@
                           </a:solidFill>
                           <a:latin typeface="Calibri"/>
                         </a:rPr>
-                        <a:t>user</a:t>
+                        <a:t>profile</a:t>
                       </a:r>
                     </a:p>
                   </a:txBody>
@@ -11559,61 +15581,13 @@
                           </a:solidFill>
                           <a:latin typeface="Calibri"/>
                         </a:rPr>
-                        <a:t>list, get, create, update, delete</a:t>
+                        <a:t>add, edit, list, delete, set-default, show</a:t>
                       </a:r>
                     </a:p>
                   </a:txBody>
                   <a:tcPr>
                     <a:solidFill>
                       <a:srgbClr val="F2F2F2"/>
-                    </a:solidFill>
-                  </a:tcPr>
-                </a:tc>
-              </a:tr>
-              <a:tr h="473830">
-                <a:tc>
-                  <a:txBody>
-                    <a:bodyPr/>
-                    <a:lstStyle/>
-                    <a:p>
-                      <a:pPr algn="l"/>
-                      <a:r>
-                        <a:rPr sz="1200">
-                          <a:solidFill>
-                            <a:srgbClr val="333333"/>
-                          </a:solidFill>
-                          <a:latin typeface="Calibri"/>
-                        </a:rPr>
-                        <a:t>usergroup</a:t>
-                      </a:r>
-                    </a:p>
-                  </a:txBody>
-                  <a:tcPr>
-                    <a:solidFill>
-                      <a:srgbClr val="FFFFFF"/>
-                    </a:solidFill>
-                  </a:tcPr>
-                </a:tc>
-                <a:tc>
-                  <a:txBody>
-                    <a:bodyPr/>
-                    <a:lstStyle/>
-                    <a:p>
-                      <a:pPr algn="ctr"/>
-                      <a:r>
-                        <a:rPr sz="1200">
-                          <a:solidFill>
-                            <a:srgbClr val="333333"/>
-                          </a:solidFill>
-                          <a:latin typeface="Calibri"/>
-                        </a:rPr>
-                        <a:t>list, get, create, update, delete</a:t>
-                      </a:r>
-                    </a:p>
-                  </a:txBody>
-                  <a:tcPr>
-                    <a:solidFill>
-                      <a:srgbClr val="FFFFFF"/>
                     </a:solidFill>
                   </a:tcPr>
                 </a:tc>
@@ -11644,7 +15618,7 @@
                 <a:gridCol w="2743200"/>
                 <a:gridCol w="2743200"/>
               </a:tblGrid>
-              <a:tr h="473825">
+              <a:tr h="347472">
                 <a:tc>
                   <a:txBody>
                     <a:bodyPr/>
@@ -11692,7 +15666,7 @@
                   </a:tcPr>
                 </a:tc>
               </a:tr>
-              <a:tr h="473825">
+              <a:tr h="347472">
                 <a:tc>
                   <a:txBody>
                     <a:bodyPr/>
@@ -11706,6 +15680,102 @@
                           </a:solidFill>
                           <a:latin typeface="Calibri"/>
                         </a:rPr>
+                        <a:t>user</a:t>
+                      </a:r>
+                    </a:p>
+                  </a:txBody>
+                  <a:tcPr>
+                    <a:solidFill>
+                      <a:srgbClr val="F2F2F2"/>
+                    </a:solidFill>
+                  </a:tcPr>
+                </a:tc>
+                <a:tc>
+                  <a:txBody>
+                    <a:bodyPr/>
+                    <a:lstStyle/>
+                    <a:p>
+                      <a:pPr algn="ctr"/>
+                      <a:r>
+                        <a:rPr sz="1200">
+                          <a:solidFill>
+                            <a:srgbClr val="333333"/>
+                          </a:solidFill>
+                          <a:latin typeface="Calibri"/>
+                        </a:rPr>
+                        <a:t>list, get, create, update, delete</a:t>
+                      </a:r>
+                    </a:p>
+                  </a:txBody>
+                  <a:tcPr>
+                    <a:solidFill>
+                      <a:srgbClr val="F2F2F2"/>
+                    </a:solidFill>
+                  </a:tcPr>
+                </a:tc>
+              </a:tr>
+              <a:tr h="347472">
+                <a:tc>
+                  <a:txBody>
+                    <a:bodyPr/>
+                    <a:lstStyle/>
+                    <a:p>
+                      <a:pPr algn="l"/>
+                      <a:r>
+                        <a:rPr sz="1200">
+                          <a:solidFill>
+                            <a:srgbClr val="333333"/>
+                          </a:solidFill>
+                          <a:latin typeface="Calibri"/>
+                        </a:rPr>
+                        <a:t>usergroup</a:t>
+                      </a:r>
+                    </a:p>
+                  </a:txBody>
+                  <a:tcPr>
+                    <a:solidFill>
+                      <a:srgbClr val="FFFFFF"/>
+                    </a:solidFill>
+                  </a:tcPr>
+                </a:tc>
+                <a:tc>
+                  <a:txBody>
+                    <a:bodyPr/>
+                    <a:lstStyle/>
+                    <a:p>
+                      <a:pPr algn="ctr"/>
+                      <a:r>
+                        <a:rPr sz="1200">
+                          <a:solidFill>
+                            <a:srgbClr val="333333"/>
+                          </a:solidFill>
+                          <a:latin typeface="Calibri"/>
+                        </a:rPr>
+                        <a:t>list, get, create, update, delete</a:t>
+                      </a:r>
+                    </a:p>
+                  </a:txBody>
+                  <a:tcPr>
+                    <a:solidFill>
+                      <a:srgbClr val="FFFFFF"/>
+                    </a:solidFill>
+                  </a:tcPr>
+                </a:tc>
+              </a:tr>
+              <a:tr h="347472">
+                <a:tc>
+                  <a:txBody>
+                    <a:bodyPr/>
+                    <a:lstStyle/>
+                    <a:p>
+                      <a:pPr algn="l"/>
+                      <a:r>
+                        <a:rPr sz="1200">
+                          <a:solidFill>
+                            <a:srgbClr val="333333"/>
+                          </a:solidFill>
+                          <a:latin typeface="Calibri"/>
+                        </a:rPr>
                         <a:t>role</a:t>
                       </a:r>
                     </a:p>
@@ -11740,7 +15810,7 @@
                   </a:tcPr>
                 </a:tc>
               </a:tr>
-              <a:tr h="473825">
+              <a:tr h="347472">
                 <a:tc>
                   <a:txBody>
                     <a:bodyPr/>
@@ -11788,7 +15858,7 @@
                   </a:tcPr>
                 </a:tc>
               </a:tr>
-              <a:tr h="473825">
+              <a:tr h="347472">
                 <a:tc>
                   <a:txBody>
                     <a:bodyPr/>
@@ -11836,7 +15906,7 @@
                   </a:tcPr>
                 </a:tc>
               </a:tr>
-              <a:tr h="473825">
+              <a:tr h="347472">
                 <a:tc>
                   <a:txBody>
                     <a:bodyPr/>
@@ -11873,7 +15943,7 @@
                           </a:solidFill>
                           <a:latin typeface="Calibri"/>
                         </a:rPr>
-                        <a:t>list, start, stop</a:t>
+                        <a:t>list, get, details, start, stop</a:t>
                       </a:r>
                     </a:p>
                   </a:txBody>
@@ -11884,7 +15954,7 @@
                   </a:tcPr>
                 </a:tc>
               </a:tr>
-              <a:tr h="473825">
+              <a:tr h="347472">
                 <a:tc>
                   <a:txBody>
                     <a:bodyPr/>
@@ -11932,7 +16002,7 @@
                   </a:tcPr>
                 </a:tc>
               </a:tr>
-              <a:tr h="473825">
+              <a:tr h="347472">
                 <a:tc>
                   <a:txBody>
                     <a:bodyPr/>
@@ -11980,7 +16050,7 @@
                   </a:tcPr>
                 </a:tc>
               </a:tr>
-              <a:tr h="473825">
+              <a:tr h="347472">
                 <a:tc>
                   <a:txBody>
                     <a:bodyPr/>
@@ -11994,6 +16064,102 @@
                           </a:solidFill>
                           <a:latin typeface="Calibri"/>
                         </a:rPr>
+                        <a:t>activitylog</a:t>
+                      </a:r>
+                    </a:p>
+                  </a:txBody>
+                  <a:tcPr>
+                    <a:solidFill>
+                      <a:srgbClr val="F2F2F2"/>
+                    </a:solidFill>
+                  </a:tcPr>
+                </a:tc>
+                <a:tc>
+                  <a:txBody>
+                    <a:bodyPr/>
+                    <a:lstStyle/>
+                    <a:p>
+                      <a:pPr algn="ctr"/>
+                      <a:r>
+                        <a:rPr sz="1200">
+                          <a:solidFill>
+                            <a:srgbClr val="333333"/>
+                          </a:solidFill>
+                          <a:latin typeface="Calibri"/>
+                        </a:rPr>
+                        <a:t>list, get</a:t>
+                      </a:r>
+                    </a:p>
+                  </a:txBody>
+                  <a:tcPr>
+                    <a:solidFill>
+                      <a:srgbClr val="F2F2F2"/>
+                    </a:solidFill>
+                  </a:tcPr>
+                </a:tc>
+              </a:tr>
+              <a:tr h="347472">
+                <a:tc>
+                  <a:txBody>
+                    <a:bodyPr/>
+                    <a:lstStyle/>
+                    <a:p>
+                      <a:pPr algn="l"/>
+                      <a:r>
+                        <a:rPr sz="1200">
+                          <a:solidFill>
+                            <a:srgbClr val="333333"/>
+                          </a:solidFill>
+                          <a:latin typeface="Calibri"/>
+                        </a:rPr>
+                        <a:t>auditlog</a:t>
+                      </a:r>
+                    </a:p>
+                  </a:txBody>
+                  <a:tcPr>
+                    <a:solidFill>
+                      <a:srgbClr val="FFFFFF"/>
+                    </a:solidFill>
+                  </a:tcPr>
+                </a:tc>
+                <a:tc>
+                  <a:txBody>
+                    <a:bodyPr/>
+                    <a:lstStyle/>
+                    <a:p>
+                      <a:pPr algn="ctr"/>
+                      <a:r>
+                        <a:rPr sz="1200">
+                          <a:solidFill>
+                            <a:srgbClr val="333333"/>
+                          </a:solidFill>
+                          <a:latin typeface="Calibri"/>
+                        </a:rPr>
+                        <a:t>list</a:t>
+                      </a:r>
+                    </a:p>
+                  </a:txBody>
+                  <a:tcPr>
+                    <a:solidFill>
+                      <a:srgbClr val="FFFFFF"/>
+                    </a:solidFill>
+                  </a:tcPr>
+                </a:tc>
+              </a:tr>
+              <a:tr h="347472">
+                <a:tc>
+                  <a:txBody>
+                    <a:bodyPr/>
+                    <a:lstStyle/>
+                    <a:p>
+                      <a:pPr algn="l"/>
+                      <a:r>
+                        <a:rPr sz="1200">
+                          <a:solidFill>
+                            <a:srgbClr val="333333"/>
+                          </a:solidFill>
+                          <a:latin typeface="Calibri"/>
+                        </a:rPr>
                         <a:t>securitylog</a:t>
                       </a:r>
                     </a:p>
@@ -12028,7 +16194,7 @@
                   </a:tcPr>
                 </a:tc>
               </a:tr>
-              <a:tr h="473825">
+              <a:tr h="347472">
                 <a:tc>
                   <a:txBody>
                     <a:bodyPr/>
@@ -12076,7 +16242,7 @@
                   </a:tcPr>
                 </a:tc>
               </a:tr>
-              <a:tr h="473825">
+              <a:tr h="347472">
                 <a:tc>
                   <a:txBody>
                     <a:bodyPr/>
@@ -12124,7 +16290,7 @@
                   </a:tcPr>
                 </a:tc>
               </a:tr>
-              <a:tr h="473830">
+              <a:tr h="347472">
                 <a:tc>
                   <a:txBody>
                     <a:bodyPr/>
